--- a/presentations/INIPresentation_JL.pptx
+++ b/presentations/INIPresentation_JL.pptx
@@ -5,32 +5,46 @@
     <p:sldMasterId id="2147483648" r:id="rId1"/>
   </p:sldMasterIdLst>
   <p:notesMasterIdLst>
-    <p:notesMasterId r:id="rId25"/>
+    <p:notesMasterId r:id="rId39"/>
   </p:notesMasterIdLst>
   <p:sldIdLst>
-    <p:sldId id="256" r:id="rId2"/>
-    <p:sldId id="275" r:id="rId3"/>
-    <p:sldId id="2283" r:id="rId4"/>
-    <p:sldId id="277" r:id="rId5"/>
-    <p:sldId id="2334" r:id="rId6"/>
-    <p:sldId id="2342" r:id="rId7"/>
-    <p:sldId id="2335" r:id="rId8"/>
-    <p:sldId id="274" r:id="rId9"/>
-    <p:sldId id="280" r:id="rId10"/>
-    <p:sldId id="2301" r:id="rId11"/>
-    <p:sldId id="2281" r:id="rId12"/>
-    <p:sldId id="2273" r:id="rId13"/>
-    <p:sldId id="2272" r:id="rId14"/>
-    <p:sldId id="2313" r:id="rId15"/>
-    <p:sldId id="2315" r:id="rId16"/>
-    <p:sldId id="2316" r:id="rId17"/>
-    <p:sldId id="2317" r:id="rId18"/>
-    <p:sldId id="2318" r:id="rId19"/>
-    <p:sldId id="2338" r:id="rId20"/>
-    <p:sldId id="2353" r:id="rId21"/>
-    <p:sldId id="2356" r:id="rId22"/>
-    <p:sldId id="2355" r:id="rId23"/>
-    <p:sldId id="2354" r:id="rId24"/>
+    <p:sldId id="2188" r:id="rId2"/>
+    <p:sldId id="2361" r:id="rId3"/>
+    <p:sldId id="275" r:id="rId4"/>
+    <p:sldId id="2283" r:id="rId5"/>
+    <p:sldId id="277" r:id="rId6"/>
+    <p:sldId id="2364" r:id="rId7"/>
+    <p:sldId id="2363" r:id="rId8"/>
+    <p:sldId id="2342" r:id="rId9"/>
+    <p:sldId id="2334" r:id="rId10"/>
+    <p:sldId id="2335" r:id="rId11"/>
+    <p:sldId id="274" r:id="rId12"/>
+    <p:sldId id="280" r:id="rId13"/>
+    <p:sldId id="2301" r:id="rId14"/>
+    <p:sldId id="2281" r:id="rId15"/>
+    <p:sldId id="2313" r:id="rId16"/>
+    <p:sldId id="2365" r:id="rId17"/>
+    <p:sldId id="2367" r:id="rId18"/>
+    <p:sldId id="2356" r:id="rId19"/>
+    <p:sldId id="2369" r:id="rId20"/>
+    <p:sldId id="2368" r:id="rId21"/>
+    <p:sldId id="2357" r:id="rId22"/>
+    <p:sldId id="2358" r:id="rId23"/>
+    <p:sldId id="2359" r:id="rId24"/>
+    <p:sldId id="2360" r:id="rId25"/>
+    <p:sldId id="2366" r:id="rId26"/>
+    <p:sldId id="2315" r:id="rId27"/>
+    <p:sldId id="2316" r:id="rId28"/>
+    <p:sldId id="2317" r:id="rId29"/>
+    <p:sldId id="2318" r:id="rId30"/>
+    <p:sldId id="2338" r:id="rId31"/>
+    <p:sldId id="2370" r:id="rId32"/>
+    <p:sldId id="2362" r:id="rId33"/>
+    <p:sldId id="2355" r:id="rId34"/>
+    <p:sldId id="2273" r:id="rId35"/>
+    <p:sldId id="2272" r:id="rId36"/>
+    <p:sldId id="2353" r:id="rId37"/>
+    <p:sldId id="2354" r:id="rId38"/>
   </p:sldIdLst>
   <p:sldSz cx="12192000" cy="6858000"/>
   <p:notesSz cx="6858000" cy="9144000"/>
@@ -814,7 +828,16 @@
           <a:bodyPr/>
           <a:lstStyle/>
           <a:p>
-            <a:endParaRPr lang="en-US" dirty="0"/>
+            <a:r>
+              <a:rPr lang="en-US" dirty="0"/>
+              <a:t>10-12 min presentation, 3-5 for questions</a:t>
+            </a:r>
+          </a:p>
+          <a:p>
+            <a:r>
+              <a:rPr lang="en-US" dirty="0"/>
+              <a:t>Welcome, SMH large collaborative effort</a:t>
+            </a:r>
           </a:p>
         </p:txBody>
       </p:sp>
@@ -833,9 +856,9 @@
           <a:bodyPr/>
           <a:lstStyle/>
           <a:p>
-            <a:fld id="{E9958A4D-8FF3-450F-970B-2BB1244E94FF}" type="slidenum">
+            <a:fld id="{840FE9E3-8569-2441-A20B-22C2144BC397}" type="slidenum">
               <a:rPr lang="en-US" smtClean="0"/>
-              <a:t>2</a:t>
+              <a:t>1</a:t>
             </a:fld>
             <a:endParaRPr lang="en-US"/>
           </a:p>
@@ -844,7 +867,7 @@
     </p:spTree>
     <p:extLst>
       <p:ext uri="{BB962C8B-B14F-4D97-AF65-F5344CB8AC3E}">
-        <p14:creationId xmlns:p14="http://schemas.microsoft.com/office/powerpoint/2010/main" val="888847710"/>
+        <p14:creationId xmlns:p14="http://schemas.microsoft.com/office/powerpoint/2010/main" val="2807141947"/>
       </p:ext>
     </p:extLst>
   </p:cSld>
@@ -898,10 +921,7 @@
           <a:bodyPr/>
           <a:lstStyle/>
           <a:p>
-            <a:r>
-              <a:rPr lang="en-US" dirty="0"/>
-              <a:t>Does this capture different goals and trying to do most of these simultaneously leads to tensions and challenges. </a:t>
-            </a:r>
+            <a:endParaRPr lang="en-US" dirty="0"/>
           </a:p>
         </p:txBody>
       </p:sp>
@@ -922,7 +942,7 @@
           <a:p>
             <a:fld id="{E9958A4D-8FF3-450F-970B-2BB1244E94FF}" type="slidenum">
               <a:rPr lang="en-US" smtClean="0"/>
-              <a:t>8</a:t>
+              <a:t>3</a:t>
             </a:fld>
             <a:endParaRPr lang="en-US"/>
           </a:p>
@@ -931,7 +951,7 @@
     </p:spTree>
     <p:extLst>
       <p:ext uri="{BB962C8B-B14F-4D97-AF65-F5344CB8AC3E}">
-        <p14:creationId xmlns:p14="http://schemas.microsoft.com/office/powerpoint/2010/main" val="2392104161"/>
+        <p14:creationId xmlns:p14="http://schemas.microsoft.com/office/powerpoint/2010/main" val="888847710"/>
       </p:ext>
     </p:extLst>
   </p:cSld>
@@ -1009,7 +1029,7 @@
           <a:p>
             <a:fld id="{E9958A4D-8FF3-450F-970B-2BB1244E94FF}" type="slidenum">
               <a:rPr lang="en-US" smtClean="0"/>
-              <a:t>9</a:t>
+              <a:t>11</a:t>
             </a:fld>
             <a:endParaRPr lang="en-US"/>
           </a:p>
@@ -1018,7 +1038,7 @@
     </p:spTree>
     <p:extLst>
       <p:ext uri="{BB962C8B-B14F-4D97-AF65-F5344CB8AC3E}">
-        <p14:creationId xmlns:p14="http://schemas.microsoft.com/office/powerpoint/2010/main" val="2502304666"/>
+        <p14:creationId xmlns:p14="http://schemas.microsoft.com/office/powerpoint/2010/main" val="2392104161"/>
       </p:ext>
     </p:extLst>
   </p:cSld>
@@ -1105,7 +1125,7 @@
     </p:spTree>
     <p:extLst>
       <p:ext uri="{BB962C8B-B14F-4D97-AF65-F5344CB8AC3E}">
-        <p14:creationId xmlns:p14="http://schemas.microsoft.com/office/powerpoint/2010/main" val="1750291804"/>
+        <p14:creationId xmlns:p14="http://schemas.microsoft.com/office/powerpoint/2010/main" val="2502304666"/>
       </p:ext>
     </p:extLst>
   </p:cSld>
@@ -1180,7 +1200,7 @@
           <a:p>
             <a:fld id="{E9958A4D-8FF3-450F-970B-2BB1244E94FF}" type="slidenum">
               <a:rPr lang="en-US" smtClean="0"/>
-              <a:t>14</a:t>
+              <a:t>15</a:t>
             </a:fld>
             <a:endParaRPr lang="en-US"/>
           </a:p>
@@ -1190,6 +1210,345 @@
     <p:extLst>
       <p:ext uri="{BB962C8B-B14F-4D97-AF65-F5344CB8AC3E}">
         <p14:creationId xmlns:p14="http://schemas.microsoft.com/office/powerpoint/2010/main" val="3925027116"/>
+      </p:ext>
+    </p:extLst>
+  </p:cSld>
+  <p:clrMapOvr>
+    <a:masterClrMapping/>
+  </p:clrMapOvr>
+</p:notes>
+</file>
+
+<file path=ppt/notesSlides/notesSlide6.xml><?xml version="1.0" encoding="utf-8"?>
+<p:notes xmlns:a="http://schemas.openxmlformats.org/drawingml/2006/main" xmlns:r="http://schemas.openxmlformats.org/officeDocument/2006/relationships" xmlns:p="http://schemas.openxmlformats.org/presentationml/2006/main">
+  <p:cSld>
+    <p:spTree>
+      <p:nvGrpSpPr>
+        <p:cNvPr id="1" name=""/>
+        <p:cNvGrpSpPr/>
+        <p:nvPr/>
+      </p:nvGrpSpPr>
+      <p:grpSpPr>
+        <a:xfrm>
+          <a:off x="0" y="0"/>
+          <a:ext cx="0" cy="0"/>
+          <a:chOff x="0" y="0"/>
+          <a:chExt cx="0" cy="0"/>
+        </a:xfrm>
+      </p:grpSpPr>
+      <p:sp>
+        <p:nvSpPr>
+          <p:cNvPr id="2" name="Slide Image Placeholder 1"/>
+          <p:cNvSpPr>
+            <a:spLocks noGrp="1" noRot="1" noChangeAspect="1"/>
+          </p:cNvSpPr>
+          <p:nvPr>
+            <p:ph type="sldImg"/>
+          </p:nvPr>
+        </p:nvSpPr>
+        <p:spPr/>
+      </p:sp>
+      <p:sp>
+        <p:nvSpPr>
+          <p:cNvPr id="3" name="Notes Placeholder 2"/>
+          <p:cNvSpPr>
+            <a:spLocks noGrp="1"/>
+          </p:cNvSpPr>
+          <p:nvPr>
+            <p:ph type="body" idx="1"/>
+          </p:nvPr>
+        </p:nvSpPr>
+        <p:spPr/>
+        <p:txBody>
+          <a:bodyPr/>
+          <a:lstStyle/>
+          <a:p>
+            <a:endParaRPr lang="en-US" dirty="0"/>
+          </a:p>
+        </p:txBody>
+      </p:sp>
+      <p:sp>
+        <p:nvSpPr>
+          <p:cNvPr id="4" name="Slide Number Placeholder 3"/>
+          <p:cNvSpPr>
+            <a:spLocks noGrp="1"/>
+          </p:cNvSpPr>
+          <p:nvPr>
+            <p:ph type="sldNum" sz="quarter" idx="5"/>
+          </p:nvPr>
+        </p:nvSpPr>
+        <p:spPr/>
+        <p:txBody>
+          <a:bodyPr/>
+          <a:lstStyle/>
+          <a:p>
+            <a:fld id="{A5D62AB8-627D-4E3A-9613-13AD3F119361}" type="slidenum">
+              <a:rPr lang="en-US" smtClean="0"/>
+              <a:t>16</a:t>
+            </a:fld>
+            <a:endParaRPr lang="en-US"/>
+          </a:p>
+        </p:txBody>
+      </p:sp>
+    </p:spTree>
+    <p:extLst>
+      <p:ext uri="{BB962C8B-B14F-4D97-AF65-F5344CB8AC3E}">
+        <p14:creationId xmlns:p14="http://schemas.microsoft.com/office/powerpoint/2010/main" val="2524705760"/>
+      </p:ext>
+    </p:extLst>
+  </p:cSld>
+  <p:clrMapOvr>
+    <a:masterClrMapping/>
+  </p:clrMapOvr>
+</p:notes>
+</file>
+
+<file path=ppt/notesSlides/notesSlide7.xml><?xml version="1.0" encoding="utf-8"?>
+<p:notes xmlns:a="http://schemas.openxmlformats.org/drawingml/2006/main" xmlns:r="http://schemas.openxmlformats.org/officeDocument/2006/relationships" xmlns:p="http://schemas.openxmlformats.org/presentationml/2006/main">
+  <p:cSld>
+    <p:spTree>
+      <p:nvGrpSpPr>
+        <p:cNvPr id="1" name=""/>
+        <p:cNvGrpSpPr/>
+        <p:nvPr/>
+      </p:nvGrpSpPr>
+      <p:grpSpPr>
+        <a:xfrm>
+          <a:off x="0" y="0"/>
+          <a:ext cx="0" cy="0"/>
+          <a:chOff x="0" y="0"/>
+          <a:chExt cx="0" cy="0"/>
+        </a:xfrm>
+      </p:grpSpPr>
+      <p:sp>
+        <p:nvSpPr>
+          <p:cNvPr id="2" name="Slide Image Placeholder 1"/>
+          <p:cNvSpPr>
+            <a:spLocks noGrp="1" noRot="1" noChangeAspect="1"/>
+          </p:cNvSpPr>
+          <p:nvPr>
+            <p:ph type="sldImg"/>
+          </p:nvPr>
+        </p:nvSpPr>
+        <p:spPr/>
+      </p:sp>
+      <p:sp>
+        <p:nvSpPr>
+          <p:cNvPr id="3" name="Notes Placeholder 2"/>
+          <p:cNvSpPr>
+            <a:spLocks noGrp="1"/>
+          </p:cNvSpPr>
+          <p:nvPr>
+            <p:ph type="body" idx="1"/>
+          </p:nvPr>
+        </p:nvSpPr>
+        <p:spPr/>
+        <p:txBody>
+          <a:bodyPr/>
+          <a:lstStyle/>
+          <a:p>
+            <a:endParaRPr lang="en-US" dirty="0"/>
+          </a:p>
+        </p:txBody>
+      </p:sp>
+      <p:sp>
+        <p:nvSpPr>
+          <p:cNvPr id="4" name="Slide Number Placeholder 3"/>
+          <p:cNvSpPr>
+            <a:spLocks noGrp="1"/>
+          </p:cNvSpPr>
+          <p:nvPr>
+            <p:ph type="sldNum" sz="quarter" idx="5"/>
+          </p:nvPr>
+        </p:nvSpPr>
+        <p:spPr/>
+        <p:txBody>
+          <a:bodyPr/>
+          <a:lstStyle/>
+          <a:p>
+            <a:fld id="{A5D62AB8-627D-4E3A-9613-13AD3F119361}" type="slidenum">
+              <a:rPr lang="en-US" smtClean="0"/>
+              <a:t>25</a:t>
+            </a:fld>
+            <a:endParaRPr lang="en-US"/>
+          </a:p>
+        </p:txBody>
+      </p:sp>
+    </p:spTree>
+    <p:extLst>
+      <p:ext uri="{BB962C8B-B14F-4D97-AF65-F5344CB8AC3E}">
+        <p14:creationId xmlns:p14="http://schemas.microsoft.com/office/powerpoint/2010/main" val="1065401849"/>
+      </p:ext>
+    </p:extLst>
+  </p:cSld>
+  <p:clrMapOvr>
+    <a:masterClrMapping/>
+  </p:clrMapOvr>
+</p:notes>
+</file>
+
+<file path=ppt/notesSlides/notesSlide8.xml><?xml version="1.0" encoding="utf-8"?>
+<p:notes xmlns:a="http://schemas.openxmlformats.org/drawingml/2006/main" xmlns:r="http://schemas.openxmlformats.org/officeDocument/2006/relationships" xmlns:p="http://schemas.openxmlformats.org/presentationml/2006/main">
+  <p:cSld>
+    <p:spTree>
+      <p:nvGrpSpPr>
+        <p:cNvPr id="1" name=""/>
+        <p:cNvGrpSpPr/>
+        <p:nvPr/>
+      </p:nvGrpSpPr>
+      <p:grpSpPr>
+        <a:xfrm>
+          <a:off x="0" y="0"/>
+          <a:ext cx="0" cy="0"/>
+          <a:chOff x="0" y="0"/>
+          <a:chExt cx="0" cy="0"/>
+        </a:xfrm>
+      </p:grpSpPr>
+      <p:sp>
+        <p:nvSpPr>
+          <p:cNvPr id="2" name="Slide Image Placeholder 1"/>
+          <p:cNvSpPr>
+            <a:spLocks noGrp="1" noRot="1" noChangeAspect="1"/>
+          </p:cNvSpPr>
+          <p:nvPr>
+            <p:ph type="sldImg"/>
+          </p:nvPr>
+        </p:nvSpPr>
+        <p:spPr/>
+      </p:sp>
+      <p:sp>
+        <p:nvSpPr>
+          <p:cNvPr id="3" name="Notes Placeholder 2"/>
+          <p:cNvSpPr>
+            <a:spLocks noGrp="1"/>
+          </p:cNvSpPr>
+          <p:nvPr>
+            <p:ph type="body" idx="1"/>
+          </p:nvPr>
+        </p:nvSpPr>
+        <p:spPr/>
+        <p:txBody>
+          <a:bodyPr/>
+          <a:lstStyle/>
+          <a:p>
+            <a:endParaRPr lang="en-US" dirty="0"/>
+          </a:p>
+        </p:txBody>
+      </p:sp>
+      <p:sp>
+        <p:nvSpPr>
+          <p:cNvPr id="4" name="Slide Number Placeholder 3"/>
+          <p:cNvSpPr>
+            <a:spLocks noGrp="1"/>
+          </p:cNvSpPr>
+          <p:nvPr>
+            <p:ph type="sldNum" sz="quarter" idx="5"/>
+          </p:nvPr>
+        </p:nvSpPr>
+        <p:spPr/>
+        <p:txBody>
+          <a:bodyPr/>
+          <a:lstStyle/>
+          <a:p>
+            <a:fld id="{A5D62AB8-627D-4E3A-9613-13AD3F119361}" type="slidenum">
+              <a:rPr lang="en-US" smtClean="0"/>
+              <a:t>30</a:t>
+            </a:fld>
+            <a:endParaRPr lang="en-US"/>
+          </a:p>
+        </p:txBody>
+      </p:sp>
+    </p:spTree>
+    <p:extLst>
+      <p:ext uri="{BB962C8B-B14F-4D97-AF65-F5344CB8AC3E}">
+        <p14:creationId xmlns:p14="http://schemas.microsoft.com/office/powerpoint/2010/main" val="3160002274"/>
+      </p:ext>
+    </p:extLst>
+  </p:cSld>
+  <p:clrMapOvr>
+    <a:masterClrMapping/>
+  </p:clrMapOvr>
+</p:notes>
+</file>
+
+<file path=ppt/notesSlides/notesSlide9.xml><?xml version="1.0" encoding="utf-8"?>
+<p:notes xmlns:a="http://schemas.openxmlformats.org/drawingml/2006/main" xmlns:r="http://schemas.openxmlformats.org/officeDocument/2006/relationships" xmlns:p="http://schemas.openxmlformats.org/presentationml/2006/main">
+  <p:cSld>
+    <p:spTree>
+      <p:nvGrpSpPr>
+        <p:cNvPr id="1" name=""/>
+        <p:cNvGrpSpPr/>
+        <p:nvPr/>
+      </p:nvGrpSpPr>
+      <p:grpSpPr>
+        <a:xfrm>
+          <a:off x="0" y="0"/>
+          <a:ext cx="0" cy="0"/>
+          <a:chOff x="0" y="0"/>
+          <a:chExt cx="0" cy="0"/>
+        </a:xfrm>
+      </p:grpSpPr>
+      <p:sp>
+        <p:nvSpPr>
+          <p:cNvPr id="2" name="Slide Image Placeholder 1"/>
+          <p:cNvSpPr>
+            <a:spLocks noGrp="1" noRot="1" noChangeAspect="1"/>
+          </p:cNvSpPr>
+          <p:nvPr>
+            <p:ph type="sldImg"/>
+          </p:nvPr>
+        </p:nvSpPr>
+        <p:spPr/>
+      </p:sp>
+      <p:sp>
+        <p:nvSpPr>
+          <p:cNvPr id="3" name="Notes Placeholder 2"/>
+          <p:cNvSpPr>
+            <a:spLocks noGrp="1"/>
+          </p:cNvSpPr>
+          <p:nvPr>
+            <p:ph type="body" idx="1"/>
+          </p:nvPr>
+        </p:nvSpPr>
+        <p:spPr/>
+        <p:txBody>
+          <a:bodyPr/>
+          <a:lstStyle/>
+          <a:p>
+            <a:r>
+              <a:rPr lang="en-US" dirty="0"/>
+              <a:t>Does this capture different goals and trying to do most of these simultaneously leads to tensions and challenges. </a:t>
+            </a:r>
+          </a:p>
+        </p:txBody>
+      </p:sp>
+      <p:sp>
+        <p:nvSpPr>
+          <p:cNvPr id="4" name="Slide Number Placeholder 3"/>
+          <p:cNvSpPr>
+            <a:spLocks noGrp="1"/>
+          </p:cNvSpPr>
+          <p:nvPr>
+            <p:ph type="sldNum" sz="quarter" idx="5"/>
+          </p:nvPr>
+        </p:nvSpPr>
+        <p:spPr/>
+        <p:txBody>
+          <a:bodyPr/>
+          <a:lstStyle/>
+          <a:p>
+            <a:fld id="{E9958A4D-8FF3-450F-970B-2BB1244E94FF}" type="slidenum">
+              <a:rPr lang="en-US" smtClean="0"/>
+              <a:t>34</a:t>
+            </a:fld>
+            <a:endParaRPr lang="en-US"/>
+          </a:p>
+        </p:txBody>
+      </p:sp>
+    </p:spTree>
+    <p:extLst>
+      <p:ext uri="{BB962C8B-B14F-4D97-AF65-F5344CB8AC3E}">
+        <p14:creationId xmlns:p14="http://schemas.microsoft.com/office/powerpoint/2010/main" val="4196810274"/>
       </p:ext>
     </p:extLst>
   </p:cSld>
@@ -4927,58 +5286,518 @@
       </p:grpSpPr>
       <p:sp>
         <p:nvSpPr>
-          <p:cNvPr id="2" name="Title 1">
+          <p:cNvPr id="11" name="TextBox 10">
             <a:extLst>
               <a:ext uri="{FF2B5EF4-FFF2-40B4-BE49-F238E27FC236}">
-                <a16:creationId xmlns:a16="http://schemas.microsoft.com/office/drawing/2014/main" id="{1732B371-8764-42CD-6D6F-323C546FDE84}"/>
+                <a16:creationId xmlns:a16="http://schemas.microsoft.com/office/drawing/2014/main" id="{1D78DAF4-64A5-E12B-4EF3-B06D82DA9004}"/>
               </a:ext>
             </a:extLst>
           </p:cNvPr>
-          <p:cNvSpPr>
-            <a:spLocks noGrp="1"/>
-          </p:cNvSpPr>
-          <p:nvPr>
-            <p:ph type="ctrTitle"/>
-          </p:nvPr>
+          <p:cNvSpPr txBox="1"/>
+          <p:nvPr/>
         </p:nvSpPr>
-        <p:spPr/>
+        <p:spPr>
+          <a:xfrm>
+            <a:off x="352779" y="1053205"/>
+            <a:ext cx="11702738" cy="1631216"/>
+          </a:xfrm>
+          <a:prstGeom prst="rect">
+            <a:avLst/>
+          </a:prstGeom>
+          <a:noFill/>
+        </p:spPr>
         <p:txBody>
-          <a:bodyPr/>
+          <a:bodyPr wrap="square" rtlCol="0">
+            <a:spAutoFit/>
+          </a:bodyPr>
           <a:lstStyle/>
           <a:p>
-            <a:endParaRPr lang="en-US"/>
+            <a:pPr algn="ctr"/>
+            <a:r>
+              <a:rPr lang="en-US" sz="4800" b="1" dirty="0">
+                <a:solidFill>
+                  <a:srgbClr val="094E80"/>
+                </a:solidFill>
+                <a:latin typeface="Helvetica" pitchFamily="2" charset="0"/>
+                <a:ea typeface="Source Sans Pro" panose="020B0503030403020204" pitchFamily="34" charset="0"/>
+              </a:rPr>
+              <a:t>How do we evaluate scenarios in the context of public health action?</a:t>
+            </a:r>
+          </a:p>
+        </p:txBody>
+      </p:sp>
+      <p:pic>
+        <p:nvPicPr>
+          <p:cNvPr id="3" name="Picture 2" descr="A picture containing logo&#10;&#10;Description automatically generated">
+            <a:extLst>
+              <a:ext uri="{FF2B5EF4-FFF2-40B4-BE49-F238E27FC236}">
+                <a16:creationId xmlns:a16="http://schemas.microsoft.com/office/drawing/2014/main" id="{A099B6C8-E86A-3F76-FACB-F137CDE64F85}"/>
+              </a:ext>
+            </a:extLst>
+          </p:cNvPr>
+          <p:cNvPicPr>
+            <a:picLocks noChangeAspect="1"/>
+          </p:cNvPicPr>
+          <p:nvPr/>
+        </p:nvPicPr>
+        <p:blipFill rotWithShape="1">
+          <a:blip r:embed="rId3">
+            <a:biLevel thresh="75000"/>
+            <a:alphaModFix amt="61000"/>
+            <a:extLst>
+              <a:ext uri="{28A0092B-C50C-407E-A947-70E740481C1C}">
+                <a14:useLocalDpi xmlns:a14="http://schemas.microsoft.com/office/drawing/2010/main" val="0"/>
+              </a:ext>
+            </a:extLst>
+          </a:blip>
+          <a:srcRect b="25220"/>
+          <a:stretch/>
+        </p:blipFill>
+        <p:spPr>
+          <a:xfrm>
+            <a:off x="10019333" y="4862581"/>
+            <a:ext cx="1143920" cy="480749"/>
+          </a:xfrm>
+          <a:prstGeom prst="rect">
+            <a:avLst/>
+          </a:prstGeom>
+        </p:spPr>
+      </p:pic>
+      <p:pic>
+        <p:nvPicPr>
+          <p:cNvPr id="4" name="Picture 3" descr="Text&#10;&#10;Description automatically generated with medium confidence">
+            <a:extLst>
+              <a:ext uri="{FF2B5EF4-FFF2-40B4-BE49-F238E27FC236}">
+                <a16:creationId xmlns:a16="http://schemas.microsoft.com/office/drawing/2014/main" id="{F3015C70-1525-860A-84C6-655AFC999C42}"/>
+              </a:ext>
+            </a:extLst>
+          </p:cNvPr>
+          <p:cNvPicPr>
+            <a:picLocks noChangeAspect="1"/>
+          </p:cNvPicPr>
+          <p:nvPr/>
+        </p:nvPicPr>
+        <p:blipFill>
+          <a:blip r:embed="rId4">
+            <a:grayscl/>
+            <a:extLst>
+              <a:ext uri="{28A0092B-C50C-407E-A947-70E740481C1C}">
+                <a14:useLocalDpi xmlns:a14="http://schemas.microsoft.com/office/drawing/2010/main" val="0"/>
+              </a:ext>
+            </a:extLst>
+          </a:blip>
+          <a:stretch>
+            <a:fillRect/>
+          </a:stretch>
+        </p:blipFill>
+        <p:spPr>
+          <a:xfrm>
+            <a:off x="9814400" y="5580029"/>
+            <a:ext cx="1582364" cy="436258"/>
+          </a:xfrm>
+          <a:prstGeom prst="rect">
+            <a:avLst/>
+          </a:prstGeom>
+        </p:spPr>
+      </p:pic>
+      <p:pic>
+        <p:nvPicPr>
+          <p:cNvPr id="5" name="Picture 2" descr="https://covid19scenariomodelinghub.org/images/institutions.png">
+            <a:extLst>
+              <a:ext uri="{FF2B5EF4-FFF2-40B4-BE49-F238E27FC236}">
+                <a16:creationId xmlns:a16="http://schemas.microsoft.com/office/drawing/2014/main" id="{BEB401D7-DF71-7093-BB61-66FC8BCBE0AA}"/>
+              </a:ext>
+            </a:extLst>
+          </p:cNvPr>
+          <p:cNvPicPr>
+            <a:picLocks noChangeAspect="1" noChangeArrowheads="1"/>
+          </p:cNvPicPr>
+          <p:nvPr/>
+        </p:nvPicPr>
+        <p:blipFill rotWithShape="1">
+          <a:blip r:embed="rId5">
+            <a:extLst>
+              <a:ext uri="{28A0092B-C50C-407E-A947-70E740481C1C}">
+                <a14:useLocalDpi xmlns:a14="http://schemas.microsoft.com/office/drawing/2010/main" val="0"/>
+              </a:ext>
+            </a:extLst>
+          </a:blip>
+          <a:srcRect l="54621" t="69488" r="27339" b="-2228"/>
+          <a:stretch/>
+        </p:blipFill>
+        <p:spPr bwMode="auto">
+          <a:xfrm>
+            <a:off x="9419740" y="6185016"/>
+            <a:ext cx="1783440" cy="727849"/>
+          </a:xfrm>
+          <a:prstGeom prst="rect">
+            <a:avLst/>
+          </a:prstGeom>
+          <a:noFill/>
+          <a:extLst>
+            <a:ext uri="{909E8E84-426E-40DD-AFC4-6F175D3DCCD1}">
+              <a14:hiddenFill xmlns:a14="http://schemas.microsoft.com/office/drawing/2010/main">
+                <a:solidFill>
+                  <a:srgbClr val="FFFFFF"/>
+                </a:solidFill>
+              </a14:hiddenFill>
+            </a:ext>
+          </a:extLst>
+        </p:spPr>
+      </p:pic>
+      <p:pic>
+        <p:nvPicPr>
+          <p:cNvPr id="6" name="Picture 5" descr="Graphical user interface, text&#10;&#10;Description automatically generated">
+            <a:extLst>
+              <a:ext uri="{FF2B5EF4-FFF2-40B4-BE49-F238E27FC236}">
+                <a16:creationId xmlns:a16="http://schemas.microsoft.com/office/drawing/2014/main" id="{06FB0D73-991F-D77E-5285-0EF3DCD4A573}"/>
+              </a:ext>
+            </a:extLst>
+          </p:cNvPr>
+          <p:cNvPicPr>
+            <a:picLocks noChangeAspect="1"/>
+          </p:cNvPicPr>
+          <p:nvPr/>
+        </p:nvPicPr>
+        <p:blipFill rotWithShape="1">
+          <a:blip r:embed="rId6">
+            <a:extLst>
+              <a:ext uri="{28A0092B-C50C-407E-A947-70E740481C1C}">
+                <a14:useLocalDpi xmlns:a14="http://schemas.microsoft.com/office/drawing/2010/main" val="0"/>
+              </a:ext>
+            </a:extLst>
+          </a:blip>
+          <a:srcRect b="27735"/>
+          <a:stretch/>
+        </p:blipFill>
+        <p:spPr>
+          <a:xfrm>
+            <a:off x="303625" y="4919235"/>
+            <a:ext cx="9559053" cy="1847323"/>
+          </a:xfrm>
+          <a:prstGeom prst="rect">
+            <a:avLst/>
+          </a:prstGeom>
+        </p:spPr>
+      </p:pic>
+      <p:cxnSp>
+        <p:nvCxnSpPr>
+          <p:cNvPr id="9" name="Straight Connector 8">
+            <a:extLst>
+              <a:ext uri="{FF2B5EF4-FFF2-40B4-BE49-F238E27FC236}">
+                <a16:creationId xmlns:a16="http://schemas.microsoft.com/office/drawing/2014/main" id="{EB9E8884-6544-214D-F1FA-6C5E1F9F5D33}"/>
+              </a:ext>
+            </a:extLst>
+          </p:cNvPr>
+          <p:cNvCxnSpPr>
+            <a:cxnSpLocks/>
+          </p:cNvCxnSpPr>
+          <p:nvPr/>
+        </p:nvCxnSpPr>
+        <p:spPr>
+          <a:xfrm>
+            <a:off x="303625" y="4844231"/>
+            <a:ext cx="11584750" cy="0"/>
+          </a:xfrm>
+          <a:prstGeom prst="line">
+            <a:avLst/>
+          </a:prstGeom>
+          <a:ln w="9525"/>
+        </p:spPr>
+        <p:style>
+          <a:lnRef idx="1">
+            <a:schemeClr val="accent3"/>
+          </a:lnRef>
+          <a:fillRef idx="0">
+            <a:schemeClr val="accent3"/>
+          </a:fillRef>
+          <a:effectRef idx="0">
+            <a:schemeClr val="accent3"/>
+          </a:effectRef>
+          <a:fontRef idx="minor">
+            <a:schemeClr val="tx1"/>
+          </a:fontRef>
+        </p:style>
+      </p:cxnSp>
+      <p:sp>
+        <p:nvSpPr>
+          <p:cNvPr id="12" name="TextBox 11">
+            <a:extLst>
+              <a:ext uri="{FF2B5EF4-FFF2-40B4-BE49-F238E27FC236}">
+                <a16:creationId xmlns:a16="http://schemas.microsoft.com/office/drawing/2014/main" id="{21338528-1F21-2661-6209-60B7DAAB934E}"/>
+              </a:ext>
+            </a:extLst>
+          </p:cNvPr>
+          <p:cNvSpPr txBox="1"/>
+          <p:nvPr/>
+        </p:nvSpPr>
+        <p:spPr>
+          <a:xfrm>
+            <a:off x="2402325" y="3658186"/>
+            <a:ext cx="7257884" cy="1092607"/>
+          </a:xfrm>
+          <a:prstGeom prst="rect">
+            <a:avLst/>
+          </a:prstGeom>
+          <a:noFill/>
+        </p:spPr>
+        <p:txBody>
+          <a:bodyPr wrap="none" rtlCol="0">
+            <a:spAutoFit/>
+          </a:bodyPr>
+          <a:lstStyle/>
+          <a:p>
+            <a:pPr algn="ctr"/>
+            <a:r>
+              <a:rPr lang="en-US" b="1" dirty="0">
+                <a:solidFill>
+                  <a:srgbClr val="094E80"/>
+                </a:solidFill>
+                <a:latin typeface="Helvetica Light" panose="020B0403020202020204" pitchFamily="34" charset="0"/>
+                <a:ea typeface="Source Sans Pro" panose="020B0503030403020204" pitchFamily="34" charset="0"/>
+              </a:rPr>
+              <a:t>Justin Lessler and Emily Howerton</a:t>
+            </a:r>
+          </a:p>
+          <a:p>
+            <a:pPr algn="ctr"/>
+            <a:r>
+              <a:rPr lang="en-US" dirty="0">
+                <a:solidFill>
+                  <a:srgbClr val="094E80"/>
+                </a:solidFill>
+                <a:latin typeface="Helvetica Light" panose="020B0403020202020204" pitchFamily="34" charset="0"/>
+                <a:ea typeface="Source Sans Pro" panose="020B0503030403020204" pitchFamily="34" charset="0"/>
+              </a:rPr>
+              <a:t>with thanks to Cecile </a:t>
+            </a:r>
+            <a:r>
+              <a:rPr lang="en-US" dirty="0" err="1">
+                <a:solidFill>
+                  <a:srgbClr val="094E80"/>
+                </a:solidFill>
+                <a:latin typeface="Helvetica Light" panose="020B0403020202020204" pitchFamily="34" charset="0"/>
+                <a:ea typeface="Source Sans Pro" panose="020B0503030403020204" pitchFamily="34" charset="0"/>
+              </a:rPr>
+              <a:t>Viboud</a:t>
+            </a:r>
+            <a:r>
+              <a:rPr lang="en-US" dirty="0">
+                <a:solidFill>
+                  <a:srgbClr val="094E80"/>
+                </a:solidFill>
+                <a:latin typeface="Helvetica Light" panose="020B0403020202020204" pitchFamily="34" charset="0"/>
+                <a:ea typeface="Source Sans Pro" panose="020B0503030403020204" pitchFamily="34" charset="0"/>
+              </a:rPr>
+              <a:t> and the SMH Teams</a:t>
+            </a:r>
+            <a:br>
+              <a:rPr lang="en-US" dirty="0">
+                <a:solidFill>
+                  <a:srgbClr val="094E80"/>
+                </a:solidFill>
+                <a:latin typeface="Helvetica Light" panose="020B0403020202020204" pitchFamily="34" charset="0"/>
+                <a:ea typeface="Source Sans Pro" panose="020B0503030403020204" pitchFamily="34" charset="0"/>
+              </a:rPr>
+            </a:br>
+            <a:r>
+              <a:rPr lang="en-US" sz="1100" dirty="0">
+                <a:solidFill>
+                  <a:schemeClr val="bg1"/>
+                </a:solidFill>
+                <a:latin typeface="Helvetica Light" panose="020B0403020202020204" pitchFamily="34" charset="0"/>
+                <a:ea typeface="Source Sans Pro" panose="020B0503030403020204" pitchFamily="34" charset="0"/>
+              </a:rPr>
+              <a:t>.</a:t>
+            </a:r>
+            <a:br>
+              <a:rPr lang="en-US" dirty="0">
+                <a:solidFill>
+                  <a:srgbClr val="094E80"/>
+                </a:solidFill>
+                <a:latin typeface="Helvetica Light" panose="020B0403020202020204" pitchFamily="34" charset="0"/>
+                <a:ea typeface="Source Sans Pro" panose="020B0503030403020204" pitchFamily="34" charset="0"/>
+              </a:rPr>
+            </a:br>
+            <a:r>
+              <a:rPr lang="en-US" i="1" dirty="0">
+                <a:solidFill>
+                  <a:srgbClr val="094E80"/>
+                </a:solidFill>
+                <a:latin typeface="Helvetica Light" panose="020B0403020202020204" pitchFamily="34" charset="0"/>
+                <a:ea typeface="Source Sans Pro" panose="020B0503030403020204" pitchFamily="34" charset="0"/>
+              </a:rPr>
+              <a:t>Modelling and inference for pandemic preparedness, Isaac Newton Institute</a:t>
+            </a:r>
           </a:p>
         </p:txBody>
       </p:sp>
       <p:sp>
         <p:nvSpPr>
-          <p:cNvPr id="3" name="Subtitle 2">
+          <p:cNvPr id="10" name="TextBox 9">
             <a:extLst>
               <a:ext uri="{FF2B5EF4-FFF2-40B4-BE49-F238E27FC236}">
-                <a16:creationId xmlns:a16="http://schemas.microsoft.com/office/drawing/2014/main" id="{7193E7AF-D8E7-C5D4-6DF9-0B730B101D4E}"/>
+                <a16:creationId xmlns:a16="http://schemas.microsoft.com/office/drawing/2014/main" id="{8DDCB2CB-E31F-B5F4-01E4-0BDAD6D9E0ED}"/>
               </a:ext>
             </a:extLst>
           </p:cNvPr>
-          <p:cNvSpPr>
-            <a:spLocks noGrp="1"/>
-          </p:cNvSpPr>
-          <p:nvPr>
-            <p:ph type="subTitle" idx="1"/>
-          </p:nvPr>
+          <p:cNvSpPr txBox="1"/>
+          <p:nvPr/>
         </p:nvSpPr>
-        <p:spPr/>
+        <p:spPr>
+          <a:xfrm>
+            <a:off x="412247" y="2509112"/>
+            <a:ext cx="11296229" cy="1077218"/>
+          </a:xfrm>
+          <a:prstGeom prst="rect">
+            <a:avLst/>
+          </a:prstGeom>
+          <a:noFill/>
+        </p:spPr>
         <p:txBody>
-          <a:bodyPr/>
+          <a:bodyPr wrap="square">
+            <a:spAutoFit/>
+          </a:bodyPr>
           <a:lstStyle/>
           <a:p>
-            <a:endParaRPr lang="en-US"/>
+            <a:pPr algn="ctr"/>
+            <a:r>
+              <a:rPr lang="en-US" sz="3200" dirty="0">
+                <a:solidFill>
+                  <a:srgbClr val="094E80"/>
+                </a:solidFill>
+                <a:latin typeface="Helvetica Light" panose="020B0403020202020204" pitchFamily="34" charset="0"/>
+                <a:ea typeface="Source Sans Pro" panose="020B0503030403020204" pitchFamily="34" charset="0"/>
+              </a:rPr>
+              <a:t>or “What can we learn from evaluating</a:t>
+            </a:r>
+          </a:p>
+          <a:p>
+            <a:pPr algn="ctr"/>
+            <a:r>
+              <a:rPr lang="en-US" sz="3200" dirty="0">
+                <a:solidFill>
+                  <a:srgbClr val="094E80"/>
+                </a:solidFill>
+                <a:latin typeface="Helvetica Light" panose="020B0403020202020204" pitchFamily="34" charset="0"/>
+                <a:ea typeface="Source Sans Pro" panose="020B0503030403020204" pitchFamily="34" charset="0"/>
+              </a:rPr>
+              <a:t>scenario projections”  continued</a:t>
+            </a:r>
           </a:p>
         </p:txBody>
       </p:sp>
+      <p:pic>
+        <p:nvPicPr>
+          <p:cNvPr id="1026" name="Picture 2" descr="SMH logo">
+            <a:extLst>
+              <a:ext uri="{FF2B5EF4-FFF2-40B4-BE49-F238E27FC236}">
+                <a16:creationId xmlns:a16="http://schemas.microsoft.com/office/drawing/2014/main" id="{0A85243B-009C-C30F-540B-8DFB455EF4C2}"/>
+              </a:ext>
+            </a:extLst>
+          </p:cNvPr>
+          <p:cNvPicPr>
+            <a:picLocks noChangeAspect="1" noChangeArrowheads="1"/>
+          </p:cNvPicPr>
+          <p:nvPr/>
+        </p:nvPicPr>
+        <p:blipFill>
+          <a:blip r:embed="rId7">
+            <a:extLst>
+              <a:ext uri="{28A0092B-C50C-407E-A947-70E740481C1C}">
+                <a14:useLocalDpi xmlns:a14="http://schemas.microsoft.com/office/drawing/2010/main" val="0"/>
+              </a:ext>
+            </a:extLst>
+          </a:blip>
+          <a:srcRect/>
+          <a:stretch>
+            <a:fillRect/>
+          </a:stretch>
+        </p:blipFill>
+        <p:spPr bwMode="auto">
+          <a:xfrm>
+            <a:off x="3526304" y="91442"/>
+            <a:ext cx="5068116" cy="906717"/>
+          </a:xfrm>
+          <a:prstGeom prst="rect">
+            <a:avLst/>
+          </a:prstGeom>
+          <a:noFill/>
+          <a:extLst>
+            <a:ext uri="{909E8E84-426E-40DD-AFC4-6F175D3DCCD1}">
+              <a14:hiddenFill xmlns:a14="http://schemas.microsoft.com/office/drawing/2010/main">
+                <a:solidFill>
+                  <a:srgbClr val="FFFFFF"/>
+                </a:solidFill>
+              </a14:hiddenFill>
+            </a:ext>
+          </a:extLst>
+        </p:spPr>
+      </p:pic>
+      <p:pic>
+        <p:nvPicPr>
+          <p:cNvPr id="19" name="Picture 18">
+            <a:extLst>
+              <a:ext uri="{FF2B5EF4-FFF2-40B4-BE49-F238E27FC236}">
+                <a16:creationId xmlns:a16="http://schemas.microsoft.com/office/drawing/2014/main" id="{DBA20745-155B-2F64-8888-4D6400568673}"/>
+              </a:ext>
+            </a:extLst>
+          </p:cNvPr>
+          <p:cNvPicPr>
+            <a:picLocks noChangeAspect="1"/>
+          </p:cNvPicPr>
+          <p:nvPr/>
+        </p:nvPicPr>
+        <p:blipFill>
+          <a:blip r:embed="rId8"/>
+          <a:stretch>
+            <a:fillRect/>
+          </a:stretch>
+        </p:blipFill>
+        <p:spPr>
+          <a:xfrm>
+            <a:off x="9862678" y="91442"/>
+            <a:ext cx="2192839" cy="850763"/>
+          </a:xfrm>
+          <a:prstGeom prst="rect">
+            <a:avLst/>
+          </a:prstGeom>
+        </p:spPr>
+      </p:pic>
+      <p:pic>
+        <p:nvPicPr>
+          <p:cNvPr id="21" name="Picture 20">
+            <a:extLst>
+              <a:ext uri="{FF2B5EF4-FFF2-40B4-BE49-F238E27FC236}">
+                <a16:creationId xmlns:a16="http://schemas.microsoft.com/office/drawing/2014/main" id="{4658885A-A3FE-CD3A-FCBC-9E9C16C245DA}"/>
+              </a:ext>
+            </a:extLst>
+          </p:cNvPr>
+          <p:cNvPicPr>
+            <a:picLocks noChangeAspect="1"/>
+          </p:cNvPicPr>
+          <p:nvPr/>
+        </p:nvPicPr>
+        <p:blipFill>
+          <a:blip r:embed="rId9"/>
+          <a:stretch>
+            <a:fillRect/>
+          </a:stretch>
+        </p:blipFill>
+        <p:spPr>
+          <a:xfrm>
+            <a:off x="43999" y="91442"/>
+            <a:ext cx="2653335" cy="773219"/>
+          </a:xfrm>
+          <a:prstGeom prst="rect">
+            <a:avLst/>
+          </a:prstGeom>
+        </p:spPr>
+      </p:pic>
     </p:spTree>
     <p:extLst>
       <p:ext uri="{BB962C8B-B14F-4D97-AF65-F5344CB8AC3E}">
-        <p14:creationId xmlns:p14="http://schemas.microsoft.com/office/powerpoint/2010/main" val="2966715295"/>
+        <p14:creationId xmlns:p14="http://schemas.microsoft.com/office/powerpoint/2010/main" val="1998328963"/>
       </p:ext>
     </p:extLst>
   </p:cSld>
@@ -4989,6 +5808,1116 @@
 </file>
 
 <file path=ppt/slides/slide10.xml><?xml version="1.0" encoding="utf-8"?>
+<p:sld xmlns:a="http://schemas.openxmlformats.org/drawingml/2006/main" xmlns:r="http://schemas.openxmlformats.org/officeDocument/2006/relationships" xmlns:p="http://schemas.openxmlformats.org/presentationml/2006/main">
+  <p:cSld>
+    <p:spTree>
+      <p:nvGrpSpPr>
+        <p:cNvPr id="1" name=""/>
+        <p:cNvGrpSpPr/>
+        <p:nvPr/>
+      </p:nvGrpSpPr>
+      <p:grpSpPr>
+        <a:xfrm>
+          <a:off x="0" y="0"/>
+          <a:ext cx="0" cy="0"/>
+          <a:chOff x="0" y="0"/>
+          <a:chExt cx="0" cy="0"/>
+        </a:xfrm>
+      </p:grpSpPr>
+      <p:sp>
+        <p:nvSpPr>
+          <p:cNvPr id="2" name="Title 1">
+            <a:extLst>
+              <a:ext uri="{FF2B5EF4-FFF2-40B4-BE49-F238E27FC236}">
+                <a16:creationId xmlns:a16="http://schemas.microsoft.com/office/drawing/2014/main" id="{074F691B-EFA4-437F-B14F-D6015C14A46C}"/>
+              </a:ext>
+            </a:extLst>
+          </p:cNvPr>
+          <p:cNvSpPr>
+            <a:spLocks noGrp="1"/>
+          </p:cNvSpPr>
+          <p:nvPr>
+            <p:ph type="title"/>
+          </p:nvPr>
+        </p:nvSpPr>
+        <p:spPr>
+          <a:xfrm>
+            <a:off x="838200" y="2448047"/>
+            <a:ext cx="10515600" cy="1868486"/>
+          </a:xfrm>
+        </p:spPr>
+        <p:txBody>
+          <a:bodyPr>
+            <a:normAutofit fontScale="90000"/>
+          </a:bodyPr>
+          <a:lstStyle/>
+          <a:p>
+            <a:pPr algn="ctr"/>
+            <a:r>
+              <a:rPr lang="en-US" b="1" dirty="0">
+                <a:solidFill>
+                  <a:srgbClr val="8D372D"/>
+                </a:solidFill>
+                <a:latin typeface="+mn-lt"/>
+              </a:rPr>
+              <a:t>Conjecture: </a:t>
+            </a:r>
+            <a:r>
+              <a:rPr lang="en-US" b="1" dirty="0">
+                <a:solidFill>
+                  <a:srgbClr val="1B284F"/>
+                </a:solidFill>
+              </a:rPr>
+              <a:t>A predictive model is only useful if it helps use respond to future events.</a:t>
+            </a:r>
+            <a:endParaRPr lang="en-US" b="1" dirty="0">
+              <a:solidFill>
+                <a:srgbClr val="1B284F"/>
+              </a:solidFill>
+              <a:latin typeface="+mn-lt"/>
+            </a:endParaRPr>
+          </a:p>
+        </p:txBody>
+      </p:sp>
+      <p:sp>
+        <p:nvSpPr>
+          <p:cNvPr id="4" name="Title 1">
+            <a:extLst>
+              <a:ext uri="{FF2B5EF4-FFF2-40B4-BE49-F238E27FC236}">
+                <a16:creationId xmlns:a16="http://schemas.microsoft.com/office/drawing/2014/main" id="{0A6415E4-D1E5-DA3D-A969-A23F8FFDA9B5}"/>
+              </a:ext>
+            </a:extLst>
+          </p:cNvPr>
+          <p:cNvSpPr txBox="1">
+            <a:spLocks/>
+          </p:cNvSpPr>
+          <p:nvPr/>
+        </p:nvSpPr>
+        <p:spPr>
+          <a:xfrm>
+            <a:off x="891988" y="3586058"/>
+            <a:ext cx="10515600" cy="2145650"/>
+          </a:xfrm>
+          <a:prstGeom prst="rect">
+            <a:avLst/>
+          </a:prstGeom>
+        </p:spPr>
+        <p:txBody>
+          <a:bodyPr vert="horz" lIns="91440" tIns="45720" rIns="91440" bIns="45720" rtlCol="0" anchor="ctr">
+            <a:normAutofit/>
+          </a:bodyPr>
+          <a:lstStyle>
+            <a:lvl1pPr algn="l" defTabSz="914400" rtl="0" eaLnBrk="1" latinLnBrk="0" hangingPunct="1">
+              <a:lnSpc>
+                <a:spcPct val="90000"/>
+              </a:lnSpc>
+              <a:spcBef>
+                <a:spcPct val="0"/>
+              </a:spcBef>
+              <a:buNone/>
+              <a:defRPr sz="4400" kern="1200">
+                <a:solidFill>
+                  <a:schemeClr val="tx1"/>
+                </a:solidFill>
+                <a:latin typeface="+mj-lt"/>
+                <a:ea typeface="+mj-ea"/>
+                <a:cs typeface="+mj-cs"/>
+              </a:defRPr>
+            </a:lvl1pPr>
+          </a:lstStyle>
+          <a:p>
+            <a:pPr algn="ctr"/>
+            <a:r>
+              <a:rPr lang="en-US" sz="3200" b="1" i="1" dirty="0">
+                <a:latin typeface="+mn-lt"/>
+              </a:rPr>
+              <a:t>So what does it mean to respond?</a:t>
+            </a:r>
+          </a:p>
+        </p:txBody>
+      </p:sp>
+    </p:spTree>
+    <p:extLst>
+      <p:ext uri="{BB962C8B-B14F-4D97-AF65-F5344CB8AC3E}">
+        <p14:creationId xmlns:p14="http://schemas.microsoft.com/office/powerpoint/2010/main" val="1778234901"/>
+      </p:ext>
+    </p:extLst>
+  </p:cSld>
+  <p:clrMapOvr>
+    <a:masterClrMapping/>
+  </p:clrMapOvr>
+  <mc:AlternateContent xmlns:mc="http://schemas.openxmlformats.org/markup-compatibility/2006" xmlns:p14="http://schemas.microsoft.com/office/powerpoint/2010/main">
+    <mc:Choice Requires="p14">
+      <p:transition spd="med" p14:dur="700">
+        <p:fade/>
+      </p:transition>
+    </mc:Choice>
+    <mc:Fallback xmlns="">
+      <p:transition spd="med">
+        <p:fade/>
+      </p:transition>
+    </mc:Fallback>
+  </mc:AlternateContent>
+  <p:timing>
+    <p:tnLst>
+      <p:par>
+        <p:cTn id="1" dur="indefinite" restart="never" nodeType="tmRoot">
+          <p:childTnLst>
+            <p:seq concurrent="1" nextAc="seek">
+              <p:cTn id="2" dur="indefinite" nodeType="mainSeq">
+                <p:childTnLst>
+                  <p:par>
+                    <p:cTn id="3" fill="hold">
+                      <p:stCondLst>
+                        <p:cond delay="indefinite"/>
+                      </p:stCondLst>
+                      <p:childTnLst>
+                        <p:par>
+                          <p:cTn id="4" fill="hold">
+                            <p:stCondLst>
+                              <p:cond delay="0"/>
+                            </p:stCondLst>
+                            <p:childTnLst>
+                              <p:par>
+                                <p:cTn id="5" presetID="10" presetClass="entr" presetSubtype="0" fill="hold" grpId="0" nodeType="clickEffect">
+                                  <p:stCondLst>
+                                    <p:cond delay="0"/>
+                                  </p:stCondLst>
+                                  <p:childTnLst>
+                                    <p:set>
+                                      <p:cBhvr>
+                                        <p:cTn id="6" dur="1" fill="hold">
+                                          <p:stCondLst>
+                                            <p:cond delay="0"/>
+                                          </p:stCondLst>
+                                        </p:cTn>
+                                        <p:tgtEl>
+                                          <p:spTgt spid="4"/>
+                                        </p:tgtEl>
+                                        <p:attrNameLst>
+                                          <p:attrName>style.visibility</p:attrName>
+                                        </p:attrNameLst>
+                                      </p:cBhvr>
+                                      <p:to>
+                                        <p:strVal val="visible"/>
+                                      </p:to>
+                                    </p:set>
+                                    <p:animEffect transition="in" filter="fade">
+                                      <p:cBhvr>
+                                        <p:cTn id="7" dur="500"/>
+                                        <p:tgtEl>
+                                          <p:spTgt spid="4"/>
+                                        </p:tgtEl>
+                                      </p:cBhvr>
+                                    </p:animEffect>
+                                  </p:childTnLst>
+                                </p:cTn>
+                              </p:par>
+                            </p:childTnLst>
+                          </p:cTn>
+                        </p:par>
+                      </p:childTnLst>
+                    </p:cTn>
+                  </p:par>
+                </p:childTnLst>
+              </p:cTn>
+              <p:prevCondLst>
+                <p:cond evt="onPrev" delay="0">
+                  <p:tgtEl>
+                    <p:sldTgt/>
+                  </p:tgtEl>
+                </p:cond>
+              </p:prevCondLst>
+              <p:nextCondLst>
+                <p:cond evt="onNext" delay="0">
+                  <p:tgtEl>
+                    <p:sldTgt/>
+                  </p:tgtEl>
+                </p:cond>
+              </p:nextCondLst>
+            </p:seq>
+          </p:childTnLst>
+        </p:cTn>
+      </p:par>
+    </p:tnLst>
+    <p:bldLst>
+      <p:bldP spid="4" grpId="0"/>
+    </p:bldLst>
+  </p:timing>
+</p:sld>
+</file>
+
+<file path=ppt/slides/slide11.xml><?xml version="1.0" encoding="utf-8"?>
+<p:sld xmlns:a="http://schemas.openxmlformats.org/drawingml/2006/main" xmlns:r="http://schemas.openxmlformats.org/officeDocument/2006/relationships" xmlns:p="http://schemas.openxmlformats.org/presentationml/2006/main">
+  <p:cSld>
+    <p:spTree>
+      <p:nvGrpSpPr>
+        <p:cNvPr id="1" name=""/>
+        <p:cNvGrpSpPr/>
+        <p:nvPr/>
+      </p:nvGrpSpPr>
+      <p:grpSpPr>
+        <a:xfrm>
+          <a:off x="0" y="0"/>
+          <a:ext cx="0" cy="0"/>
+          <a:chOff x="0" y="0"/>
+          <a:chExt cx="0" cy="0"/>
+        </a:xfrm>
+      </p:grpSpPr>
+      <p:sp>
+        <p:nvSpPr>
+          <p:cNvPr id="2" name="Title 1">
+            <a:extLst>
+              <a:ext uri="{FF2B5EF4-FFF2-40B4-BE49-F238E27FC236}">
+                <a16:creationId xmlns:a16="http://schemas.microsoft.com/office/drawing/2014/main" id="{A93B1189-FD8F-4542-B7A9-90983E22582B}"/>
+              </a:ext>
+            </a:extLst>
+          </p:cNvPr>
+          <p:cNvSpPr>
+            <a:spLocks noGrp="1"/>
+          </p:cNvSpPr>
+          <p:nvPr>
+            <p:ph type="title"/>
+          </p:nvPr>
+        </p:nvSpPr>
+        <p:spPr/>
+        <p:txBody>
+          <a:bodyPr/>
+          <a:lstStyle/>
+          <a:p>
+            <a:pPr algn="ctr"/>
+            <a:r>
+              <a:rPr lang="en-US" dirty="0"/>
+              <a:t>Response is about modifying a utility function.</a:t>
+            </a:r>
+          </a:p>
+        </p:txBody>
+      </p:sp>
+      <mc:AlternateContent xmlns:mc="http://schemas.openxmlformats.org/markup-compatibility/2006">
+        <mc:Choice xmlns:a14="http://schemas.microsoft.com/office/drawing/2010/main" Requires="a14">
+          <p:sp>
+            <p:nvSpPr>
+              <p:cNvPr id="6" name="TextBox 5">
+                <a:extLst>
+                  <a:ext uri="{FF2B5EF4-FFF2-40B4-BE49-F238E27FC236}">
+                    <a16:creationId xmlns:a16="http://schemas.microsoft.com/office/drawing/2014/main" id="{1FB5A588-908E-485A-8CD0-A382E1CEE96A}"/>
+                  </a:ext>
+                </a:extLst>
+              </p:cNvPr>
+              <p:cNvSpPr txBox="1"/>
+              <p:nvPr/>
+            </p:nvSpPr>
+            <p:spPr>
+              <a:xfrm>
+                <a:off x="3181679" y="2922225"/>
+                <a:ext cx="5456494" cy="830997"/>
+              </a:xfrm>
+              <a:prstGeom prst="rect">
+                <a:avLst/>
+              </a:prstGeom>
+              <a:noFill/>
+            </p:spPr>
+            <p:txBody>
+              <a:bodyPr wrap="none" lIns="0" tIns="0" rIns="0" bIns="0" rtlCol="0">
+                <a:spAutoFit/>
+              </a:bodyPr>
+              <a:lstStyle/>
+              <a:p>
+                <a:pPr/>
+                <a14:m>
+                  <m:oMathPara xmlns:m="http://schemas.openxmlformats.org/officeDocument/2006/math">
+                    <m:oMathParaPr>
+                      <m:jc m:val="centerGroup"/>
+                    </m:oMathParaPr>
+                    <m:oMath xmlns:m="http://schemas.openxmlformats.org/officeDocument/2006/math">
+                      <m:r>
+                        <a:rPr lang="en-US" sz="5400" b="0" i="1" smtClean="0">
+                          <a:latin typeface="Cambria Math" panose="02040503050406030204" pitchFamily="18" charset="0"/>
+                        </a:rPr>
+                        <m:t>𝑈</m:t>
+                      </m:r>
+                      <m:r>
+                        <a:rPr lang="en-US" sz="5400" b="0" i="1" smtClean="0">
+                          <a:latin typeface="Cambria Math" panose="02040503050406030204" pitchFamily="18" charset="0"/>
+                        </a:rPr>
+                        <m:t>=∑</m:t>
+                      </m:r>
+                      <m:r>
+                        <a:rPr lang="en-US" sz="5400" b="0" i="1" smtClean="0">
+                          <a:latin typeface="Cambria Math" panose="02040503050406030204" pitchFamily="18" charset="0"/>
+                        </a:rPr>
+                        <m:t>𝑢</m:t>
+                      </m:r>
+                      <m:d>
+                        <m:dPr>
+                          <m:ctrlPr>
+                            <a:rPr lang="en-US" sz="5400" b="0" i="1" smtClean="0">
+                              <a:latin typeface="Cambria Math" panose="02040503050406030204" pitchFamily="18" charset="0"/>
+                            </a:rPr>
+                          </m:ctrlPr>
+                        </m:dPr>
+                        <m:e>
+                          <m:sSub>
+                            <m:sSubPr>
+                              <m:ctrlPr>
+                                <a:rPr lang="en-US" sz="5400" b="0" i="1" smtClean="0">
+                                  <a:latin typeface="Cambria Math" panose="02040503050406030204" pitchFamily="18" charset="0"/>
+                                </a:rPr>
+                              </m:ctrlPr>
+                            </m:sSubPr>
+                            <m:e>
+                              <m:r>
+                                <a:rPr lang="en-US" sz="5400" b="0" i="1" smtClean="0">
+                                  <a:latin typeface="Cambria Math" panose="02040503050406030204" pitchFamily="18" charset="0"/>
+                                </a:rPr>
+                                <m:t>𝑦</m:t>
+                              </m:r>
+                            </m:e>
+                            <m:sub>
+                              <m:r>
+                                <a:rPr lang="en-US" sz="5400" b="0" i="1" smtClean="0">
+                                  <a:latin typeface="Cambria Math" panose="02040503050406030204" pitchFamily="18" charset="0"/>
+                                </a:rPr>
+                                <m:t>𝑖</m:t>
+                              </m:r>
+                            </m:sub>
+                          </m:sSub>
+                        </m:e>
+                      </m:d>
+                      <m:r>
+                        <m:rPr>
+                          <m:sty m:val="p"/>
+                        </m:rPr>
+                        <a:rPr lang="en-US" sz="5400" b="0" i="0" smtClean="0">
+                          <a:latin typeface="Cambria Math" panose="02040503050406030204" pitchFamily="18" charset="0"/>
+                        </a:rPr>
+                        <m:t>Pr</m:t>
+                      </m:r>
+                      <m:r>
+                        <a:rPr lang="en-US" sz="5400" b="0" i="1" smtClean="0">
+                          <a:latin typeface="Cambria Math" panose="02040503050406030204" pitchFamily="18" charset="0"/>
+                        </a:rPr>
+                        <m:t>⁡(</m:t>
+                      </m:r>
+                      <m:sSub>
+                        <m:sSubPr>
+                          <m:ctrlPr>
+                            <a:rPr lang="en-US" sz="5400" b="0" i="1" smtClean="0">
+                              <a:latin typeface="Cambria Math" panose="02040503050406030204" pitchFamily="18" charset="0"/>
+                            </a:rPr>
+                          </m:ctrlPr>
+                        </m:sSubPr>
+                        <m:e>
+                          <m:r>
+                            <a:rPr lang="en-US" sz="5400" b="0" i="1" smtClean="0">
+                              <a:latin typeface="Cambria Math" panose="02040503050406030204" pitchFamily="18" charset="0"/>
+                            </a:rPr>
+                            <m:t>𝑦</m:t>
+                          </m:r>
+                        </m:e>
+                        <m:sub>
+                          <m:r>
+                            <a:rPr lang="en-US" sz="5400" b="0" i="1" smtClean="0">
+                              <a:latin typeface="Cambria Math" panose="02040503050406030204" pitchFamily="18" charset="0"/>
+                            </a:rPr>
+                            <m:t>𝑖</m:t>
+                          </m:r>
+                        </m:sub>
+                      </m:sSub>
+                      <m:r>
+                        <a:rPr lang="en-US" sz="5400" b="0" i="1" smtClean="0">
+                          <a:latin typeface="Cambria Math" panose="02040503050406030204" pitchFamily="18" charset="0"/>
+                        </a:rPr>
+                        <m:t>)</m:t>
+                      </m:r>
+                    </m:oMath>
+                  </m:oMathPara>
+                </a14:m>
+                <a:endParaRPr lang="en-US" sz="5400" dirty="0"/>
+              </a:p>
+            </p:txBody>
+          </p:sp>
+        </mc:Choice>
+        <mc:Fallback>
+          <p:sp>
+            <p:nvSpPr>
+              <p:cNvPr id="6" name="TextBox 5">
+                <a:extLst>
+                  <a:ext uri="{FF2B5EF4-FFF2-40B4-BE49-F238E27FC236}">
+                    <a16:creationId xmlns:a16="http://schemas.microsoft.com/office/drawing/2014/main" id="{1FB5A588-908E-485A-8CD0-A382E1CEE96A}"/>
+                  </a:ext>
+                </a:extLst>
+              </p:cNvPr>
+              <p:cNvSpPr txBox="1">
+                <a:spLocks noRot="1" noChangeAspect="1" noMove="1" noResize="1" noEditPoints="1" noAdjustHandles="1" noChangeArrowheads="1" noChangeShapeType="1" noTextEdit="1"/>
+              </p:cNvSpPr>
+              <p:nvPr/>
+            </p:nvSpPr>
+            <p:spPr>
+              <a:xfrm>
+                <a:off x="3181679" y="2922225"/>
+                <a:ext cx="5456494" cy="830997"/>
+              </a:xfrm>
+              <a:prstGeom prst="rect">
+                <a:avLst/>
+              </a:prstGeom>
+              <a:blipFill>
+                <a:blip r:embed="rId3"/>
+                <a:stretch>
+                  <a:fillRect/>
+                </a:stretch>
+              </a:blipFill>
+            </p:spPr>
+            <p:txBody>
+              <a:bodyPr/>
+              <a:lstStyle/>
+              <a:p>
+                <a:r>
+                  <a:rPr lang="en-US">
+                    <a:noFill/>
+                  </a:rPr>
+                  <a:t> </a:t>
+                </a:r>
+              </a:p>
+            </p:txBody>
+          </p:sp>
+        </mc:Fallback>
+      </mc:AlternateContent>
+    </p:spTree>
+    <p:extLst>
+      <p:ext uri="{BB962C8B-B14F-4D97-AF65-F5344CB8AC3E}">
+        <p14:creationId xmlns:p14="http://schemas.microsoft.com/office/powerpoint/2010/main" val="2566997130"/>
+      </p:ext>
+    </p:extLst>
+  </p:cSld>
+  <p:clrMapOvr>
+    <a:masterClrMapping/>
+  </p:clrMapOvr>
+  <mc:AlternateContent xmlns:mc="http://schemas.openxmlformats.org/markup-compatibility/2006" xmlns:p14="http://schemas.microsoft.com/office/powerpoint/2010/main">
+    <mc:Choice Requires="p14">
+      <p:transition spd="med" p14:dur="700">
+        <p:fade/>
+      </p:transition>
+    </mc:Choice>
+    <mc:Fallback xmlns="">
+      <p:transition spd="med">
+        <p:fade/>
+      </p:transition>
+    </mc:Fallback>
+  </mc:AlternateContent>
+</p:sld>
+</file>
+
+<file path=ppt/slides/slide12.xml><?xml version="1.0" encoding="utf-8"?>
+<p:sld xmlns:a="http://schemas.openxmlformats.org/drawingml/2006/main" xmlns:r="http://schemas.openxmlformats.org/officeDocument/2006/relationships" xmlns:p="http://schemas.openxmlformats.org/presentationml/2006/main">
+  <p:cSld>
+    <p:spTree>
+      <p:nvGrpSpPr>
+        <p:cNvPr id="1" name=""/>
+        <p:cNvGrpSpPr/>
+        <p:nvPr/>
+      </p:nvGrpSpPr>
+      <p:grpSpPr>
+        <a:xfrm>
+          <a:off x="0" y="0"/>
+          <a:ext cx="0" cy="0"/>
+          <a:chOff x="0" y="0"/>
+          <a:chExt cx="0" cy="0"/>
+        </a:xfrm>
+      </p:grpSpPr>
+      <p:sp>
+        <p:nvSpPr>
+          <p:cNvPr id="2" name="Title 1">
+            <a:extLst>
+              <a:ext uri="{FF2B5EF4-FFF2-40B4-BE49-F238E27FC236}">
+                <a16:creationId xmlns:a16="http://schemas.microsoft.com/office/drawing/2014/main" id="{A93B1189-FD8F-4542-B7A9-90983E22582B}"/>
+              </a:ext>
+            </a:extLst>
+          </p:cNvPr>
+          <p:cNvSpPr>
+            <a:spLocks noGrp="1"/>
+          </p:cNvSpPr>
+          <p:nvPr>
+            <p:ph type="title"/>
+          </p:nvPr>
+        </p:nvSpPr>
+        <p:spPr/>
+        <p:txBody>
+          <a:bodyPr/>
+          <a:lstStyle/>
+          <a:p>
+            <a:pPr algn="ctr"/>
+            <a:r>
+              <a:rPr lang="en-US" dirty="0"/>
+              <a:t>Two types of response</a:t>
+            </a:r>
+          </a:p>
+        </p:txBody>
+      </p:sp>
+      <mc:AlternateContent xmlns:mc="http://schemas.openxmlformats.org/markup-compatibility/2006">
+        <mc:Choice xmlns:a14="http://schemas.microsoft.com/office/drawing/2010/main" Requires="a14">
+          <p:sp>
+            <p:nvSpPr>
+              <p:cNvPr id="6" name="TextBox 5">
+                <a:extLst>
+                  <a:ext uri="{FF2B5EF4-FFF2-40B4-BE49-F238E27FC236}">
+                    <a16:creationId xmlns:a16="http://schemas.microsoft.com/office/drawing/2014/main" id="{1FB5A588-908E-485A-8CD0-A382E1CEE96A}"/>
+                  </a:ext>
+                </a:extLst>
+              </p:cNvPr>
+              <p:cNvSpPr txBox="1"/>
+              <p:nvPr/>
+            </p:nvSpPr>
+            <p:spPr>
+              <a:xfrm>
+                <a:off x="3081293" y="1690688"/>
+                <a:ext cx="5450466" cy="830997"/>
+              </a:xfrm>
+              <a:prstGeom prst="rect">
+                <a:avLst/>
+              </a:prstGeom>
+              <a:noFill/>
+            </p:spPr>
+            <p:txBody>
+              <a:bodyPr wrap="none" lIns="0" tIns="0" rIns="0" bIns="0" rtlCol="0">
+                <a:spAutoFit/>
+              </a:bodyPr>
+              <a:lstStyle/>
+              <a:p>
+                <a:pPr/>
+                <a14:m>
+                  <m:oMathPara xmlns:m="http://schemas.openxmlformats.org/officeDocument/2006/math">
+                    <m:oMathParaPr>
+                      <m:jc m:val="centerGroup"/>
+                    </m:oMathParaPr>
+                    <m:oMath xmlns:m="http://schemas.openxmlformats.org/officeDocument/2006/math">
+                      <m:r>
+                        <a:rPr lang="en-US" sz="5400" b="0" i="1" smtClean="0">
+                          <a:latin typeface="Cambria Math" panose="02040503050406030204" pitchFamily="18" charset="0"/>
+                        </a:rPr>
+                        <m:t>𝑈</m:t>
+                      </m:r>
+                      <m:r>
+                        <a:rPr lang="en-US" sz="5400" b="0" i="1" smtClean="0">
+                          <a:latin typeface="Cambria Math" panose="02040503050406030204" pitchFamily="18" charset="0"/>
+                        </a:rPr>
+                        <m:t>=∑</m:t>
+                      </m:r>
+                      <m:r>
+                        <a:rPr lang="en-US" sz="5400" b="0" i="1" smtClean="0">
+                          <a:latin typeface="Cambria Math" panose="02040503050406030204" pitchFamily="18" charset="0"/>
+                        </a:rPr>
+                        <m:t>𝑢</m:t>
+                      </m:r>
+                      <m:d>
+                        <m:dPr>
+                          <m:ctrlPr>
+                            <a:rPr lang="en-US" sz="5400" b="0" i="1" smtClean="0">
+                              <a:latin typeface="Cambria Math" panose="02040503050406030204" pitchFamily="18" charset="0"/>
+                            </a:rPr>
+                          </m:ctrlPr>
+                        </m:dPr>
+                        <m:e>
+                          <m:sSub>
+                            <m:sSubPr>
+                              <m:ctrlPr>
+                                <a:rPr lang="en-US" sz="5400" b="0" i="1" smtClean="0">
+                                  <a:latin typeface="Cambria Math" panose="02040503050406030204" pitchFamily="18" charset="0"/>
+                                </a:rPr>
+                              </m:ctrlPr>
+                            </m:sSubPr>
+                            <m:e>
+                              <m:r>
+                                <a:rPr lang="en-US" sz="5400" b="0" i="1" smtClean="0">
+                                  <a:latin typeface="Cambria Math" panose="02040503050406030204" pitchFamily="18" charset="0"/>
+                                </a:rPr>
+                                <m:t>𝑦</m:t>
+                              </m:r>
+                            </m:e>
+                            <m:sub>
+                              <m:r>
+                                <a:rPr lang="en-US" sz="5400" b="0" i="1" smtClean="0">
+                                  <a:latin typeface="Cambria Math" panose="02040503050406030204" pitchFamily="18" charset="0"/>
+                                </a:rPr>
+                                <m:t>𝑖</m:t>
+                              </m:r>
+                            </m:sub>
+                          </m:sSub>
+                        </m:e>
+                      </m:d>
+                      <m:r>
+                        <m:rPr>
+                          <m:sty m:val="p"/>
+                        </m:rPr>
+                        <a:rPr lang="en-US" sz="5400" b="0" i="0" smtClean="0">
+                          <a:latin typeface="Cambria Math" panose="02040503050406030204" pitchFamily="18" charset="0"/>
+                        </a:rPr>
+                        <m:t>Pr</m:t>
+                      </m:r>
+                      <m:r>
+                        <a:rPr lang="en-US" sz="5400" b="0" i="1" smtClean="0">
+                          <a:latin typeface="Cambria Math" panose="02040503050406030204" pitchFamily="18" charset="0"/>
+                        </a:rPr>
+                        <m:t>⁡(</m:t>
+                      </m:r>
+                      <m:sSub>
+                        <m:sSubPr>
+                          <m:ctrlPr>
+                            <a:rPr lang="en-US" sz="5400" b="0" i="1" smtClean="0">
+                              <a:latin typeface="Cambria Math" panose="02040503050406030204" pitchFamily="18" charset="0"/>
+                            </a:rPr>
+                          </m:ctrlPr>
+                        </m:sSubPr>
+                        <m:e>
+                          <m:r>
+                            <a:rPr lang="en-US" sz="5400" b="0" i="1" smtClean="0">
+                              <a:latin typeface="Cambria Math" panose="02040503050406030204" pitchFamily="18" charset="0"/>
+                            </a:rPr>
+                            <m:t>𝑦</m:t>
+                          </m:r>
+                        </m:e>
+                        <m:sub>
+                          <m:r>
+                            <a:rPr lang="en-US" sz="5400" b="0" i="1" smtClean="0">
+                              <a:latin typeface="Cambria Math" panose="02040503050406030204" pitchFamily="18" charset="0"/>
+                            </a:rPr>
+                            <m:t>𝑖</m:t>
+                          </m:r>
+                        </m:sub>
+                      </m:sSub>
+                      <m:r>
+                        <a:rPr lang="en-US" sz="5400" b="0" i="1" smtClean="0">
+                          <a:latin typeface="Cambria Math" panose="02040503050406030204" pitchFamily="18" charset="0"/>
+                        </a:rPr>
+                        <m:t>)</m:t>
+                      </m:r>
+                    </m:oMath>
+                  </m:oMathPara>
+                </a14:m>
+                <a:endParaRPr lang="en-US" sz="5400" dirty="0"/>
+              </a:p>
+            </p:txBody>
+          </p:sp>
+        </mc:Choice>
+        <mc:Fallback>
+          <p:sp>
+            <p:nvSpPr>
+              <p:cNvPr id="6" name="TextBox 5">
+                <a:extLst>
+                  <a:ext uri="{FF2B5EF4-FFF2-40B4-BE49-F238E27FC236}">
+                    <a16:creationId xmlns:a16="http://schemas.microsoft.com/office/drawing/2014/main" id="{1FB5A588-908E-485A-8CD0-A382E1CEE96A}"/>
+                  </a:ext>
+                </a:extLst>
+              </p:cNvPr>
+              <p:cNvSpPr txBox="1">
+                <a:spLocks noRot="1" noChangeAspect="1" noMove="1" noResize="1" noEditPoints="1" noAdjustHandles="1" noChangeArrowheads="1" noChangeShapeType="1" noTextEdit="1"/>
+              </p:cNvSpPr>
+              <p:nvPr/>
+            </p:nvSpPr>
+            <p:spPr>
+              <a:xfrm>
+                <a:off x="3081293" y="1690688"/>
+                <a:ext cx="5450466" cy="830997"/>
+              </a:xfrm>
+              <a:prstGeom prst="rect">
+                <a:avLst/>
+              </a:prstGeom>
+              <a:blipFill>
+                <a:blip r:embed="rId3"/>
+                <a:stretch>
+                  <a:fillRect/>
+                </a:stretch>
+              </a:blipFill>
+            </p:spPr>
+            <p:txBody>
+              <a:bodyPr/>
+              <a:lstStyle/>
+              <a:p>
+                <a:r>
+                  <a:rPr lang="en-US">
+                    <a:noFill/>
+                  </a:rPr>
+                  <a:t> </a:t>
+                </a:r>
+              </a:p>
+            </p:txBody>
+          </p:sp>
+        </mc:Fallback>
+      </mc:AlternateContent>
+      <p:sp>
+        <p:nvSpPr>
+          <p:cNvPr id="7" name="Rectangle 6">
+            <a:extLst>
+              <a:ext uri="{FF2B5EF4-FFF2-40B4-BE49-F238E27FC236}">
+                <a16:creationId xmlns:a16="http://schemas.microsoft.com/office/drawing/2014/main" id="{07B4AFC6-17A5-45A1-9EE1-462ACC2336D0}"/>
+              </a:ext>
+            </a:extLst>
+          </p:cNvPr>
+          <p:cNvSpPr/>
+          <p:nvPr/>
+        </p:nvSpPr>
+        <p:spPr>
+          <a:xfrm>
+            <a:off x="5037584" y="1743442"/>
+            <a:ext cx="1547446" cy="870438"/>
+          </a:xfrm>
+          <a:prstGeom prst="rect">
+            <a:avLst/>
+          </a:prstGeom>
+          <a:noFill/>
+          <a:ln w="28575"/>
+        </p:spPr>
+        <p:style>
+          <a:lnRef idx="2">
+            <a:schemeClr val="accent1">
+              <a:shade val="50000"/>
+            </a:schemeClr>
+          </a:lnRef>
+          <a:fillRef idx="1">
+            <a:schemeClr val="accent1"/>
+          </a:fillRef>
+          <a:effectRef idx="0">
+            <a:schemeClr val="accent1"/>
+          </a:effectRef>
+          <a:fontRef idx="minor">
+            <a:schemeClr val="lt1"/>
+          </a:fontRef>
+        </p:style>
+        <p:txBody>
+          <a:bodyPr rtlCol="0" anchor="ctr"/>
+          <a:lstStyle/>
+          <a:p>
+            <a:pPr algn="ctr"/>
+            <a:endParaRPr lang="en-US"/>
+          </a:p>
+        </p:txBody>
+      </p:sp>
+      <p:sp>
+        <p:nvSpPr>
+          <p:cNvPr id="8" name="Rectangle 7">
+            <a:extLst>
+              <a:ext uri="{FF2B5EF4-FFF2-40B4-BE49-F238E27FC236}">
+                <a16:creationId xmlns:a16="http://schemas.microsoft.com/office/drawing/2014/main" id="{B5AF03EA-1C37-4D8E-A994-051801E7BD86}"/>
+              </a:ext>
+            </a:extLst>
+          </p:cNvPr>
+          <p:cNvSpPr/>
+          <p:nvPr/>
+        </p:nvSpPr>
+        <p:spPr>
+          <a:xfrm>
+            <a:off x="6629423" y="1743442"/>
+            <a:ext cx="1863970" cy="870438"/>
+          </a:xfrm>
+          <a:prstGeom prst="rect">
+            <a:avLst/>
+          </a:prstGeom>
+          <a:noFill/>
+          <a:ln w="28575"/>
+        </p:spPr>
+        <p:style>
+          <a:lnRef idx="2">
+            <a:schemeClr val="accent1">
+              <a:shade val="50000"/>
+            </a:schemeClr>
+          </a:lnRef>
+          <a:fillRef idx="1">
+            <a:schemeClr val="accent1"/>
+          </a:fillRef>
+          <a:effectRef idx="0">
+            <a:schemeClr val="accent1"/>
+          </a:effectRef>
+          <a:fontRef idx="minor">
+            <a:schemeClr val="lt1"/>
+          </a:fontRef>
+        </p:style>
+        <p:txBody>
+          <a:bodyPr rtlCol="0" anchor="ctr"/>
+          <a:lstStyle/>
+          <a:p>
+            <a:pPr algn="ctr"/>
+            <a:endParaRPr lang="en-US"/>
+          </a:p>
+        </p:txBody>
+      </p:sp>
+      <p:cxnSp>
+        <p:nvCxnSpPr>
+          <p:cNvPr id="12" name="Connector: Elbow 11">
+            <a:extLst>
+              <a:ext uri="{FF2B5EF4-FFF2-40B4-BE49-F238E27FC236}">
+                <a16:creationId xmlns:a16="http://schemas.microsoft.com/office/drawing/2014/main" id="{B789C3D3-E18A-499D-A6CF-88DECED7F376}"/>
+              </a:ext>
+            </a:extLst>
+          </p:cNvPr>
+          <p:cNvCxnSpPr>
+            <a:cxnSpLocks/>
+            <a:stCxn id="13" idx="3"/>
+            <a:endCxn id="7" idx="2"/>
+          </p:cNvCxnSpPr>
+          <p:nvPr/>
+        </p:nvCxnSpPr>
+        <p:spPr>
+          <a:xfrm flipV="1">
+            <a:off x="1874873" y="2613880"/>
+            <a:ext cx="3936434" cy="1143613"/>
+          </a:xfrm>
+          <a:prstGeom prst="bentConnector2">
+            <a:avLst/>
+          </a:prstGeom>
+          <a:ln w="28575">
+            <a:tailEnd type="triangle"/>
+          </a:ln>
+        </p:spPr>
+        <p:style>
+          <a:lnRef idx="1">
+            <a:schemeClr val="accent1"/>
+          </a:lnRef>
+          <a:fillRef idx="0">
+            <a:schemeClr val="accent1"/>
+          </a:fillRef>
+          <a:effectRef idx="0">
+            <a:schemeClr val="accent1"/>
+          </a:effectRef>
+          <a:fontRef idx="minor">
+            <a:schemeClr val="tx1"/>
+          </a:fontRef>
+        </p:style>
+      </p:cxnSp>
+      <p:sp>
+        <p:nvSpPr>
+          <p:cNvPr id="13" name="TextBox 12">
+            <a:extLst>
+              <a:ext uri="{FF2B5EF4-FFF2-40B4-BE49-F238E27FC236}">
+                <a16:creationId xmlns:a16="http://schemas.microsoft.com/office/drawing/2014/main" id="{86864D1A-1FA8-440A-99A1-C855D648F2E7}"/>
+              </a:ext>
+            </a:extLst>
+          </p:cNvPr>
+          <p:cNvSpPr txBox="1"/>
+          <p:nvPr/>
+        </p:nvSpPr>
+        <p:spPr>
+          <a:xfrm>
+            <a:off x="76560" y="3465105"/>
+            <a:ext cx="1798313" cy="584775"/>
+          </a:xfrm>
+          <a:prstGeom prst="rect">
+            <a:avLst/>
+          </a:prstGeom>
+          <a:noFill/>
+        </p:spPr>
+        <p:txBody>
+          <a:bodyPr wrap="none" rtlCol="0">
+            <a:spAutoFit/>
+          </a:bodyPr>
+          <a:lstStyle/>
+          <a:p>
+            <a:r>
+              <a:rPr lang="en-US" sz="3200" dirty="0"/>
+              <a:t>Preparing</a:t>
+            </a:r>
+          </a:p>
+        </p:txBody>
+      </p:sp>
+      <p:sp>
+        <p:nvSpPr>
+          <p:cNvPr id="20" name="TextBox 19">
+            <a:extLst>
+              <a:ext uri="{FF2B5EF4-FFF2-40B4-BE49-F238E27FC236}">
+                <a16:creationId xmlns:a16="http://schemas.microsoft.com/office/drawing/2014/main" id="{000CC2CD-5AD3-42FF-88A3-B61454E7C045}"/>
+              </a:ext>
+            </a:extLst>
+          </p:cNvPr>
+          <p:cNvSpPr txBox="1"/>
+          <p:nvPr/>
+        </p:nvSpPr>
+        <p:spPr>
+          <a:xfrm>
+            <a:off x="9917323" y="3465104"/>
+            <a:ext cx="2091791" cy="584775"/>
+          </a:xfrm>
+          <a:prstGeom prst="rect">
+            <a:avLst/>
+          </a:prstGeom>
+          <a:noFill/>
+        </p:spPr>
+        <p:txBody>
+          <a:bodyPr wrap="none" rtlCol="0">
+            <a:spAutoFit/>
+          </a:bodyPr>
+          <a:lstStyle/>
+          <a:p>
+            <a:r>
+              <a:rPr lang="en-US" sz="3200" dirty="0"/>
+              <a:t>Intervening</a:t>
+            </a:r>
+          </a:p>
+        </p:txBody>
+      </p:sp>
+      <p:cxnSp>
+        <p:nvCxnSpPr>
+          <p:cNvPr id="22" name="Connector: Elbow 21">
+            <a:extLst>
+              <a:ext uri="{FF2B5EF4-FFF2-40B4-BE49-F238E27FC236}">
+                <a16:creationId xmlns:a16="http://schemas.microsoft.com/office/drawing/2014/main" id="{DEADE9C3-8A16-41BA-A0EF-D9CC3177812F}"/>
+              </a:ext>
+            </a:extLst>
+          </p:cNvPr>
+          <p:cNvCxnSpPr>
+            <a:cxnSpLocks/>
+            <a:stCxn id="20" idx="1"/>
+            <a:endCxn id="8" idx="2"/>
+          </p:cNvCxnSpPr>
+          <p:nvPr/>
+        </p:nvCxnSpPr>
+        <p:spPr>
+          <a:xfrm rot="10800000">
+            <a:off x="7561409" y="2613880"/>
+            <a:ext cx="2355915" cy="1143612"/>
+          </a:xfrm>
+          <a:prstGeom prst="bentConnector2">
+            <a:avLst/>
+          </a:prstGeom>
+          <a:ln w="28575">
+            <a:tailEnd type="triangle"/>
+          </a:ln>
+        </p:spPr>
+        <p:style>
+          <a:lnRef idx="1">
+            <a:schemeClr val="accent1"/>
+          </a:lnRef>
+          <a:fillRef idx="0">
+            <a:schemeClr val="accent1"/>
+          </a:fillRef>
+          <a:effectRef idx="0">
+            <a:schemeClr val="accent1"/>
+          </a:effectRef>
+          <a:fontRef idx="minor">
+            <a:schemeClr val="tx1"/>
+          </a:fontRef>
+        </p:style>
+      </p:cxnSp>
+      <p:sp>
+        <p:nvSpPr>
+          <p:cNvPr id="5" name="Rectangle 4">
+            <a:extLst>
+              <a:ext uri="{FF2B5EF4-FFF2-40B4-BE49-F238E27FC236}">
+                <a16:creationId xmlns:a16="http://schemas.microsoft.com/office/drawing/2014/main" id="{3ACAF4BA-3BAD-4500-8FDD-45CBE705170B}"/>
+              </a:ext>
+            </a:extLst>
+          </p:cNvPr>
+          <p:cNvSpPr/>
+          <p:nvPr/>
+        </p:nvSpPr>
+        <p:spPr>
+          <a:xfrm>
+            <a:off x="74792" y="4129624"/>
+            <a:ext cx="5734748" cy="1938992"/>
+          </a:xfrm>
+          <a:prstGeom prst="rect">
+            <a:avLst/>
+          </a:prstGeom>
+        </p:spPr>
+        <p:txBody>
+          <a:bodyPr wrap="square">
+            <a:spAutoFit/>
+          </a:bodyPr>
+          <a:lstStyle/>
+          <a:p>
+            <a:pPr marL="285750" indent="-285750">
+              <a:buFont typeface="Arial" panose="020B0604020202020204" pitchFamily="34" charset="0"/>
+              <a:buChar char="•"/>
+            </a:pPr>
+            <a:r>
+              <a:rPr lang="en-US" sz="2400" dirty="0"/>
+              <a:t>Taking actions that mitigate the impact of some future event or allow us to best benefit from that event.</a:t>
+            </a:r>
+          </a:p>
+          <a:p>
+            <a:pPr marL="742950" lvl="1" indent="-285750">
+              <a:buFont typeface="Arial" panose="020B0604020202020204" pitchFamily="34" charset="0"/>
+              <a:buChar char="•"/>
+            </a:pPr>
+            <a:r>
+              <a:rPr lang="en-US" sz="2400" dirty="0"/>
+              <a:t>E.g., wearing your raincoat, making an investment</a:t>
+            </a:r>
+          </a:p>
+        </p:txBody>
+      </p:sp>
+      <p:sp>
+        <p:nvSpPr>
+          <p:cNvPr id="14" name="Rectangle 13">
+            <a:extLst>
+              <a:ext uri="{FF2B5EF4-FFF2-40B4-BE49-F238E27FC236}">
+                <a16:creationId xmlns:a16="http://schemas.microsoft.com/office/drawing/2014/main" id="{05296FCA-FAD7-43B8-9A03-2AED154A9B5C}"/>
+              </a:ext>
+            </a:extLst>
+          </p:cNvPr>
+          <p:cNvSpPr/>
+          <p:nvPr/>
+        </p:nvSpPr>
+        <p:spPr>
+          <a:xfrm>
+            <a:off x="7162171" y="4049879"/>
+            <a:ext cx="5337187" cy="1938992"/>
+          </a:xfrm>
+          <a:prstGeom prst="rect">
+            <a:avLst/>
+          </a:prstGeom>
+        </p:spPr>
+        <p:txBody>
+          <a:bodyPr wrap="square">
+            <a:spAutoFit/>
+          </a:bodyPr>
+          <a:lstStyle/>
+          <a:p>
+            <a:pPr marL="285750" indent="-285750">
+              <a:buFont typeface="Arial" panose="020B0604020202020204" pitchFamily="34" charset="0"/>
+              <a:buChar char="•"/>
+            </a:pPr>
+            <a:r>
+              <a:rPr lang="en-US" sz="2400" dirty="0"/>
+              <a:t>Intervening: Taking actions that prevent or lower the probability of some forecast future event	</a:t>
+            </a:r>
+          </a:p>
+          <a:p>
+            <a:pPr marL="742950" lvl="1" indent="-285750">
+              <a:buFont typeface="Arial" panose="020B0604020202020204" pitchFamily="34" charset="0"/>
+              <a:buChar char="•"/>
+            </a:pPr>
+            <a:r>
+              <a:rPr lang="en-US" sz="2400" dirty="0"/>
+              <a:t>E.g., lockdowns, reducing carbon emissions</a:t>
+            </a:r>
+          </a:p>
+        </p:txBody>
+      </p:sp>
+    </p:spTree>
+    <p:extLst>
+      <p:ext uri="{BB962C8B-B14F-4D97-AF65-F5344CB8AC3E}">
+        <p14:creationId xmlns:p14="http://schemas.microsoft.com/office/powerpoint/2010/main" val="3396045734"/>
+      </p:ext>
+    </p:extLst>
+  </p:cSld>
+  <p:clrMapOvr>
+    <a:masterClrMapping/>
+  </p:clrMapOvr>
+  <mc:AlternateContent xmlns:mc="http://schemas.openxmlformats.org/markup-compatibility/2006" xmlns:p14="http://schemas.microsoft.com/office/powerpoint/2010/main">
+    <mc:Choice Requires="p14">
+      <p:transition spd="med" p14:dur="700">
+        <p:fade/>
+      </p:transition>
+    </mc:Choice>
+    <mc:Fallback xmlns="">
+      <p:transition spd="med">
+        <p:fade/>
+      </p:transition>
+    </mc:Fallback>
+  </mc:AlternateContent>
+</p:sld>
+</file>
+
+<file path=ppt/slides/slide13.xml><?xml version="1.0" encoding="utf-8"?>
 <p:sld xmlns:a="http://schemas.openxmlformats.org/drawingml/2006/main" xmlns:r="http://schemas.openxmlformats.org/officeDocument/2006/relationships" xmlns:p="http://schemas.openxmlformats.org/presentationml/2006/main">
   <p:cSld>
     <p:spTree>
@@ -6627,7 +8556,7 @@
 </p:sld>
 </file>
 
-<file path=ppt/slides/slide11.xml><?xml version="1.0" encoding="utf-8"?>
+<file path=ppt/slides/slide14.xml><?xml version="1.0" encoding="utf-8"?>
 <p:sld xmlns:a="http://schemas.openxmlformats.org/drawingml/2006/main" xmlns:r="http://schemas.openxmlformats.org/officeDocument/2006/relationships" xmlns:p="http://schemas.openxmlformats.org/presentationml/2006/main">
   <p:cSld>
     <p:spTree>
@@ -6667,7 +8596,7 @@
           <a:p>
             <a:r>
               <a:rPr lang="en-US" dirty="0"/>
-              <a:t>Differing ways to respond</a:t>
+              <a:t>Differing consumers</a:t>
             </a:r>
           </a:p>
         </p:txBody>
@@ -7311,7 +9240,7 @@
             <p:spPr>
               <a:xfrm>
                 <a:off x="6910576" y="1712920"/>
-                <a:ext cx="3279809" cy="523220"/>
+                <a:ext cx="3306161" cy="523477"/>
               </a:xfrm>
               <a:prstGeom prst="rect">
                 <a:avLst/>
@@ -7330,14 +9259,14 @@
                 </a:r>
                 <a14:m>
                   <m:oMath xmlns:m="http://schemas.openxmlformats.org/officeDocument/2006/math">
-                    <m:sSub>
-                      <m:sSubPr>
+                    <m:sSubSup>
+                      <m:sSubSupPr>
                         <m:ctrlPr>
-                          <a:rPr lang="en-US" sz="2800" b="0" i="1" smtClean="0">
+                          <a:rPr lang="en-US" sz="2800" b="1" i="1" smtClean="0">
                             <a:latin typeface="Cambria Math" panose="02040503050406030204" pitchFamily="18" charset="0"/>
                           </a:rPr>
                         </m:ctrlPr>
-                      </m:sSubPr>
+                      </m:sSubSupPr>
                       <m:e>
                         <m:r>
                           <a:rPr lang="en-US" sz="2800" b="1" i="1" smtClean="0">
@@ -7354,7 +9283,15 @@
                           <m:t>𝑖</m:t>
                         </m:r>
                       </m:sub>
-                    </m:sSub>
+                      <m:sup>
+                        <m:r>
+                          <a:rPr lang="en-US" sz="2800" b="1" i="1" smtClean="0">
+                            <a:latin typeface="Cambria Math" panose="02040503050406030204" pitchFamily="18" charset="0"/>
+                          </a:rPr>
+                          <m:t>∗</m:t>
+                        </m:r>
+                      </m:sup>
+                    </m:sSubSup>
                   </m:oMath>
                 </a14:m>
                 <a:endParaRPr lang="en-US" sz="2800" dirty="0"/>
@@ -7380,7 +9317,7 @@
             <p:spPr>
               <a:xfrm>
                 <a:off x="6910576" y="1712920"/>
-                <a:ext cx="3279809" cy="523220"/>
+                <a:ext cx="3306161" cy="523477"/>
               </a:xfrm>
               <a:prstGeom prst="rect">
                 <a:avLst/>
@@ -7388,7 +9325,7 @@
               <a:blipFill>
                 <a:blip r:embed="rId9"/>
                 <a:stretch>
-                  <a:fillRect l="-3903" t="-12791" b="-31395"/>
+                  <a:fillRect l="-3875" t="-12791" b="-31395"/>
                 </a:stretch>
               </a:blipFill>
             </p:spPr>
@@ -7432,870 +9369,7 @@
 </p:sld>
 </file>
 
-<file path=ppt/slides/slide12.xml><?xml version="1.0" encoding="utf-8"?>
-<p:sld xmlns:a="http://schemas.openxmlformats.org/drawingml/2006/main" xmlns:r="http://schemas.openxmlformats.org/officeDocument/2006/relationships" xmlns:p="http://schemas.openxmlformats.org/presentationml/2006/main">
-  <p:cSld>
-    <p:spTree>
-      <p:nvGrpSpPr>
-        <p:cNvPr id="1" name=""/>
-        <p:cNvGrpSpPr/>
-        <p:nvPr/>
-      </p:nvGrpSpPr>
-      <p:grpSpPr>
-        <a:xfrm>
-          <a:off x="0" y="0"/>
-          <a:ext cx="0" cy="0"/>
-          <a:chOff x="0" y="0"/>
-          <a:chExt cx="0" cy="0"/>
-        </a:xfrm>
-      </p:grpSpPr>
-      <p:sp>
-        <p:nvSpPr>
-          <p:cNvPr id="3" name="Text Placeholder 2">
-            <a:extLst>
-              <a:ext uri="{FF2B5EF4-FFF2-40B4-BE49-F238E27FC236}">
-                <a16:creationId xmlns:a16="http://schemas.microsoft.com/office/drawing/2014/main" id="{876564EC-C101-3C2E-B1FA-FA1ECD8FF48A}"/>
-              </a:ext>
-            </a:extLst>
-          </p:cNvPr>
-          <p:cNvSpPr>
-            <a:spLocks noGrp="1"/>
-          </p:cNvSpPr>
-          <p:nvPr>
-            <p:ph type="body" sz="quarter" idx="16"/>
-          </p:nvPr>
-        </p:nvSpPr>
-        <p:spPr/>
-        <p:txBody>
-          <a:bodyPr/>
-          <a:lstStyle/>
-          <a:p>
-            <a:r>
-              <a:rPr lang="en-US" dirty="0"/>
-              <a:t>The tension of simultaneous responses</a:t>
-            </a:r>
-          </a:p>
-        </p:txBody>
-      </p:sp>
-      <mc:AlternateContent xmlns:mc="http://schemas.openxmlformats.org/markup-compatibility/2006">
-        <mc:Choice xmlns:a14="http://schemas.microsoft.com/office/drawing/2010/main" Requires="a14">
-          <p:sp>
-            <p:nvSpPr>
-              <p:cNvPr id="6" name="TextBox 5">
-                <a:extLst>
-                  <a:ext uri="{FF2B5EF4-FFF2-40B4-BE49-F238E27FC236}">
-                    <a16:creationId xmlns:a16="http://schemas.microsoft.com/office/drawing/2014/main" id="{1FB5A588-908E-485A-8CD0-A382E1CEE96A}"/>
-                  </a:ext>
-                </a:extLst>
-              </p:cNvPr>
-              <p:cNvSpPr txBox="1"/>
-              <p:nvPr/>
-            </p:nvSpPr>
-            <p:spPr>
-              <a:xfrm>
-                <a:off x="2816209" y="2447537"/>
-                <a:ext cx="5450466" cy="830997"/>
-              </a:xfrm>
-              <a:prstGeom prst="rect">
-                <a:avLst/>
-              </a:prstGeom>
-              <a:noFill/>
-            </p:spPr>
-            <p:txBody>
-              <a:bodyPr wrap="none" lIns="0" tIns="0" rIns="0" bIns="0" rtlCol="0">
-                <a:spAutoFit/>
-              </a:bodyPr>
-              <a:lstStyle/>
-              <a:p>
-                <a:pPr/>
-                <a14:m>
-                  <m:oMathPara xmlns:m="http://schemas.openxmlformats.org/officeDocument/2006/math">
-                    <m:oMathParaPr>
-                      <m:jc m:val="centerGroup"/>
-                    </m:oMathParaPr>
-                    <m:oMath xmlns:m="http://schemas.openxmlformats.org/officeDocument/2006/math">
-                      <m:r>
-                        <a:rPr lang="en-US" sz="5400" b="0" i="1" smtClean="0">
-                          <a:latin typeface="Cambria Math" panose="02040503050406030204" pitchFamily="18" charset="0"/>
-                        </a:rPr>
-                        <m:t>𝑈</m:t>
-                      </m:r>
-                      <m:r>
-                        <a:rPr lang="en-US" sz="5400" b="0" i="1" smtClean="0">
-                          <a:latin typeface="Cambria Math" panose="02040503050406030204" pitchFamily="18" charset="0"/>
-                        </a:rPr>
-                        <m:t>=∑</m:t>
-                      </m:r>
-                      <m:r>
-                        <a:rPr lang="en-US" sz="5400" b="0" i="1" smtClean="0">
-                          <a:latin typeface="Cambria Math" panose="02040503050406030204" pitchFamily="18" charset="0"/>
-                        </a:rPr>
-                        <m:t>𝑢</m:t>
-                      </m:r>
-                      <m:d>
-                        <m:dPr>
-                          <m:ctrlPr>
-                            <a:rPr lang="en-US" sz="5400" b="0" i="1" smtClean="0">
-                              <a:latin typeface="Cambria Math" panose="02040503050406030204" pitchFamily="18" charset="0"/>
-                            </a:rPr>
-                          </m:ctrlPr>
-                        </m:dPr>
-                        <m:e>
-                          <m:sSub>
-                            <m:sSubPr>
-                              <m:ctrlPr>
-                                <a:rPr lang="en-US" sz="5400" b="0" i="1" smtClean="0">
-                                  <a:latin typeface="Cambria Math" panose="02040503050406030204" pitchFamily="18" charset="0"/>
-                                </a:rPr>
-                              </m:ctrlPr>
-                            </m:sSubPr>
-                            <m:e>
-                              <m:r>
-                                <a:rPr lang="en-US" sz="5400" b="0" i="1" smtClean="0">
-                                  <a:latin typeface="Cambria Math" panose="02040503050406030204" pitchFamily="18" charset="0"/>
-                                </a:rPr>
-                                <m:t>𝑦</m:t>
-                              </m:r>
-                            </m:e>
-                            <m:sub>
-                              <m:r>
-                                <a:rPr lang="en-US" sz="5400" b="0" i="1" smtClean="0">
-                                  <a:latin typeface="Cambria Math" panose="02040503050406030204" pitchFamily="18" charset="0"/>
-                                </a:rPr>
-                                <m:t>𝑖</m:t>
-                              </m:r>
-                            </m:sub>
-                          </m:sSub>
-                        </m:e>
-                      </m:d>
-                      <m:r>
-                        <m:rPr>
-                          <m:sty m:val="p"/>
-                        </m:rPr>
-                        <a:rPr lang="en-US" sz="5400" b="0" i="0" smtClean="0">
-                          <a:latin typeface="Cambria Math" panose="02040503050406030204" pitchFamily="18" charset="0"/>
-                        </a:rPr>
-                        <m:t>Pr</m:t>
-                      </m:r>
-                      <m:r>
-                        <a:rPr lang="en-US" sz="5400" b="0" i="1" smtClean="0">
-                          <a:latin typeface="Cambria Math" panose="02040503050406030204" pitchFamily="18" charset="0"/>
-                        </a:rPr>
-                        <m:t>⁡(</m:t>
-                      </m:r>
-                      <m:sSub>
-                        <m:sSubPr>
-                          <m:ctrlPr>
-                            <a:rPr lang="en-US" sz="5400" b="0" i="1" smtClean="0">
-                              <a:latin typeface="Cambria Math" panose="02040503050406030204" pitchFamily="18" charset="0"/>
-                            </a:rPr>
-                          </m:ctrlPr>
-                        </m:sSubPr>
-                        <m:e>
-                          <m:r>
-                            <a:rPr lang="en-US" sz="5400" b="0" i="1" smtClean="0">
-                              <a:latin typeface="Cambria Math" panose="02040503050406030204" pitchFamily="18" charset="0"/>
-                            </a:rPr>
-                            <m:t>𝑦</m:t>
-                          </m:r>
-                        </m:e>
-                        <m:sub>
-                          <m:r>
-                            <a:rPr lang="en-US" sz="5400" b="0" i="1" smtClean="0">
-                              <a:latin typeface="Cambria Math" panose="02040503050406030204" pitchFamily="18" charset="0"/>
-                            </a:rPr>
-                            <m:t>𝑖</m:t>
-                          </m:r>
-                        </m:sub>
-                      </m:sSub>
-                      <m:r>
-                        <a:rPr lang="en-US" sz="5400" b="0" i="1" smtClean="0">
-                          <a:latin typeface="Cambria Math" panose="02040503050406030204" pitchFamily="18" charset="0"/>
-                        </a:rPr>
-                        <m:t>)</m:t>
-                      </m:r>
-                    </m:oMath>
-                  </m:oMathPara>
-                </a14:m>
-                <a:endParaRPr lang="en-US" sz="5400" dirty="0"/>
-              </a:p>
-            </p:txBody>
-          </p:sp>
-        </mc:Choice>
-        <mc:Fallback>
-          <p:sp>
-            <p:nvSpPr>
-              <p:cNvPr id="6" name="TextBox 5">
-                <a:extLst>
-                  <a:ext uri="{FF2B5EF4-FFF2-40B4-BE49-F238E27FC236}">
-                    <a16:creationId xmlns:a16="http://schemas.microsoft.com/office/drawing/2014/main" id="{1FB5A588-908E-485A-8CD0-A382E1CEE96A}"/>
-                  </a:ext>
-                </a:extLst>
-              </p:cNvPr>
-              <p:cNvSpPr txBox="1">
-                <a:spLocks noRot="1" noChangeAspect="1" noMove="1" noResize="1" noEditPoints="1" noAdjustHandles="1" noChangeArrowheads="1" noChangeShapeType="1" noTextEdit="1"/>
-              </p:cNvSpPr>
-              <p:nvPr/>
-            </p:nvSpPr>
-            <p:spPr>
-              <a:xfrm>
-                <a:off x="2816209" y="2447537"/>
-                <a:ext cx="5450466" cy="830997"/>
-              </a:xfrm>
-              <a:prstGeom prst="rect">
-                <a:avLst/>
-              </a:prstGeom>
-              <a:blipFill>
-                <a:blip r:embed="rId3"/>
-                <a:stretch>
-                  <a:fillRect/>
-                </a:stretch>
-              </a:blipFill>
-            </p:spPr>
-            <p:txBody>
-              <a:bodyPr/>
-              <a:lstStyle/>
-              <a:p>
-                <a:r>
-                  <a:rPr lang="en-US">
-                    <a:noFill/>
-                  </a:rPr>
-                  <a:t> </a:t>
-                </a:r>
-              </a:p>
-            </p:txBody>
-          </p:sp>
-        </mc:Fallback>
-      </mc:AlternateContent>
-      <p:sp>
-        <p:nvSpPr>
-          <p:cNvPr id="7" name="Rectangle 6">
-            <a:extLst>
-              <a:ext uri="{FF2B5EF4-FFF2-40B4-BE49-F238E27FC236}">
-                <a16:creationId xmlns:a16="http://schemas.microsoft.com/office/drawing/2014/main" id="{07B4AFC6-17A5-45A1-9EE1-462ACC2336D0}"/>
-              </a:ext>
-            </a:extLst>
-          </p:cNvPr>
-          <p:cNvSpPr/>
-          <p:nvPr/>
-        </p:nvSpPr>
-        <p:spPr>
-          <a:xfrm>
-            <a:off x="4772500" y="2500291"/>
-            <a:ext cx="1547446" cy="870438"/>
-          </a:xfrm>
-          <a:prstGeom prst="rect">
-            <a:avLst/>
-          </a:prstGeom>
-          <a:noFill/>
-          <a:ln w="28575"/>
-        </p:spPr>
-        <p:style>
-          <a:lnRef idx="2">
-            <a:schemeClr val="accent1">
-              <a:shade val="50000"/>
-            </a:schemeClr>
-          </a:lnRef>
-          <a:fillRef idx="1">
-            <a:schemeClr val="accent1"/>
-          </a:fillRef>
-          <a:effectRef idx="0">
-            <a:schemeClr val="accent1"/>
-          </a:effectRef>
-          <a:fontRef idx="minor">
-            <a:schemeClr val="lt1"/>
-          </a:fontRef>
-        </p:style>
-        <p:txBody>
-          <a:bodyPr rtlCol="0" anchor="ctr"/>
-          <a:lstStyle/>
-          <a:p>
-            <a:pPr algn="ctr"/>
-            <a:endParaRPr lang="en-US"/>
-          </a:p>
-        </p:txBody>
-      </p:sp>
-      <p:sp>
-        <p:nvSpPr>
-          <p:cNvPr id="8" name="Rectangle 7">
-            <a:extLst>
-              <a:ext uri="{FF2B5EF4-FFF2-40B4-BE49-F238E27FC236}">
-                <a16:creationId xmlns:a16="http://schemas.microsoft.com/office/drawing/2014/main" id="{B5AF03EA-1C37-4D8E-A994-051801E7BD86}"/>
-              </a:ext>
-            </a:extLst>
-          </p:cNvPr>
-          <p:cNvSpPr/>
-          <p:nvPr/>
-        </p:nvSpPr>
-        <p:spPr>
-          <a:xfrm>
-            <a:off x="6364339" y="2500291"/>
-            <a:ext cx="1863970" cy="870438"/>
-          </a:xfrm>
-          <a:prstGeom prst="rect">
-            <a:avLst/>
-          </a:prstGeom>
-          <a:noFill/>
-          <a:ln w="28575"/>
-        </p:spPr>
-        <p:style>
-          <a:lnRef idx="2">
-            <a:schemeClr val="accent1">
-              <a:shade val="50000"/>
-            </a:schemeClr>
-          </a:lnRef>
-          <a:fillRef idx="1">
-            <a:schemeClr val="accent1"/>
-          </a:fillRef>
-          <a:effectRef idx="0">
-            <a:schemeClr val="accent1"/>
-          </a:effectRef>
-          <a:fontRef idx="minor">
-            <a:schemeClr val="lt1"/>
-          </a:fontRef>
-        </p:style>
-        <p:txBody>
-          <a:bodyPr rtlCol="0" anchor="ctr"/>
-          <a:lstStyle/>
-          <a:p>
-            <a:pPr algn="ctr"/>
-            <a:endParaRPr lang="en-US"/>
-          </a:p>
-        </p:txBody>
-      </p:sp>
-      <p:cxnSp>
-        <p:nvCxnSpPr>
-          <p:cNvPr id="12" name="Connector: Elbow 11">
-            <a:extLst>
-              <a:ext uri="{FF2B5EF4-FFF2-40B4-BE49-F238E27FC236}">
-                <a16:creationId xmlns:a16="http://schemas.microsoft.com/office/drawing/2014/main" id="{B789C3D3-E18A-499D-A6CF-88DECED7F376}"/>
-              </a:ext>
-            </a:extLst>
-          </p:cNvPr>
-          <p:cNvCxnSpPr>
-            <a:cxnSpLocks/>
-            <a:stCxn id="13" idx="3"/>
-            <a:endCxn id="7" idx="2"/>
-          </p:cNvCxnSpPr>
-          <p:nvPr/>
-        </p:nvCxnSpPr>
-        <p:spPr>
-          <a:xfrm flipV="1">
-            <a:off x="3943635" y="3370729"/>
-            <a:ext cx="1602588" cy="1063869"/>
-          </a:xfrm>
-          <a:prstGeom prst="bentConnector2">
-            <a:avLst/>
-          </a:prstGeom>
-          <a:ln w="28575">
-            <a:tailEnd type="triangle"/>
-          </a:ln>
-        </p:spPr>
-        <p:style>
-          <a:lnRef idx="1">
-            <a:schemeClr val="accent1"/>
-          </a:lnRef>
-          <a:fillRef idx="0">
-            <a:schemeClr val="accent1"/>
-          </a:fillRef>
-          <a:effectRef idx="0">
-            <a:schemeClr val="accent1"/>
-          </a:effectRef>
-          <a:fontRef idx="minor">
-            <a:schemeClr val="tx1"/>
-          </a:fontRef>
-        </p:style>
-      </p:cxnSp>
-      <p:sp>
-        <p:nvSpPr>
-          <p:cNvPr id="13" name="TextBox 12">
-            <a:extLst>
-              <a:ext uri="{FF2B5EF4-FFF2-40B4-BE49-F238E27FC236}">
-                <a16:creationId xmlns:a16="http://schemas.microsoft.com/office/drawing/2014/main" id="{86864D1A-1FA8-440A-99A1-C855D648F2E7}"/>
-              </a:ext>
-            </a:extLst>
-          </p:cNvPr>
-          <p:cNvSpPr txBox="1"/>
-          <p:nvPr/>
-        </p:nvSpPr>
-        <p:spPr>
-          <a:xfrm>
-            <a:off x="2145322" y="4142210"/>
-            <a:ext cx="1798313" cy="584775"/>
-          </a:xfrm>
-          <a:prstGeom prst="rect">
-            <a:avLst/>
-          </a:prstGeom>
-          <a:noFill/>
-        </p:spPr>
-        <p:txBody>
-          <a:bodyPr wrap="none" rtlCol="0">
-            <a:spAutoFit/>
-          </a:bodyPr>
-          <a:lstStyle/>
-          <a:p>
-            <a:r>
-              <a:rPr lang="en-US" sz="3200" dirty="0"/>
-              <a:t>Preparing</a:t>
-            </a:r>
-          </a:p>
-        </p:txBody>
-      </p:sp>
-      <p:sp>
-        <p:nvSpPr>
-          <p:cNvPr id="20" name="TextBox 19">
-            <a:extLst>
-              <a:ext uri="{FF2B5EF4-FFF2-40B4-BE49-F238E27FC236}">
-                <a16:creationId xmlns:a16="http://schemas.microsoft.com/office/drawing/2014/main" id="{000CC2CD-5AD3-42FF-88A3-B61454E7C045}"/>
-              </a:ext>
-            </a:extLst>
-          </p:cNvPr>
-          <p:cNvSpPr txBox="1"/>
-          <p:nvPr/>
-        </p:nvSpPr>
-        <p:spPr>
-          <a:xfrm>
-            <a:off x="8039099" y="4142209"/>
-            <a:ext cx="2091791" cy="584775"/>
-          </a:xfrm>
-          <a:prstGeom prst="rect">
-            <a:avLst/>
-          </a:prstGeom>
-          <a:noFill/>
-        </p:spPr>
-        <p:txBody>
-          <a:bodyPr wrap="none" rtlCol="0">
-            <a:spAutoFit/>
-          </a:bodyPr>
-          <a:lstStyle/>
-          <a:p>
-            <a:r>
-              <a:rPr lang="en-US" sz="3200" dirty="0"/>
-              <a:t>Intervening</a:t>
-            </a:r>
-          </a:p>
-        </p:txBody>
-      </p:sp>
-      <p:cxnSp>
-        <p:nvCxnSpPr>
-          <p:cNvPr id="22" name="Connector: Elbow 21">
-            <a:extLst>
-              <a:ext uri="{FF2B5EF4-FFF2-40B4-BE49-F238E27FC236}">
-                <a16:creationId xmlns:a16="http://schemas.microsoft.com/office/drawing/2014/main" id="{DEADE9C3-8A16-41BA-A0EF-D9CC3177812F}"/>
-              </a:ext>
-            </a:extLst>
-          </p:cNvPr>
-          <p:cNvCxnSpPr>
-            <a:stCxn id="20" idx="1"/>
-            <a:endCxn id="8" idx="2"/>
-          </p:cNvCxnSpPr>
-          <p:nvPr/>
-        </p:nvCxnSpPr>
-        <p:spPr>
-          <a:xfrm rot="10800000">
-            <a:off x="7296325" y="3370729"/>
-            <a:ext cx="742775" cy="1063868"/>
-          </a:xfrm>
-          <a:prstGeom prst="bentConnector2">
-            <a:avLst/>
-          </a:prstGeom>
-          <a:ln w="28575">
-            <a:tailEnd type="triangle"/>
-          </a:ln>
-        </p:spPr>
-        <p:style>
-          <a:lnRef idx="1">
-            <a:schemeClr val="accent1"/>
-          </a:lnRef>
-          <a:fillRef idx="0">
-            <a:schemeClr val="accent1"/>
-          </a:fillRef>
-          <a:effectRef idx="0">
-            <a:schemeClr val="accent1"/>
-          </a:effectRef>
-          <a:fontRef idx="minor">
-            <a:schemeClr val="tx1"/>
-          </a:fontRef>
-        </p:style>
-      </p:cxnSp>
-    </p:spTree>
-    <p:extLst>
-      <p:ext uri="{BB962C8B-B14F-4D97-AF65-F5344CB8AC3E}">
-        <p14:creationId xmlns:p14="http://schemas.microsoft.com/office/powerpoint/2010/main" val="1321346388"/>
-      </p:ext>
-    </p:extLst>
-  </p:cSld>
-  <p:clrMapOvr>
-    <a:masterClrMapping/>
-  </p:clrMapOvr>
-  <mc:AlternateContent xmlns:mc="http://schemas.openxmlformats.org/markup-compatibility/2006" xmlns:p14="http://schemas.microsoft.com/office/powerpoint/2010/main">
-    <mc:Choice Requires="p14">
-      <p:transition spd="med" p14:dur="700">
-        <p:fade/>
-      </p:transition>
-    </mc:Choice>
-    <mc:Fallback xmlns="">
-      <p:transition spd="med">
-        <p:fade/>
-      </p:transition>
-    </mc:Fallback>
-  </mc:AlternateContent>
-</p:sld>
-</file>
-
-<file path=ppt/slides/slide13.xml><?xml version="1.0" encoding="utf-8"?>
-<p:sld xmlns:a="http://schemas.openxmlformats.org/drawingml/2006/main" xmlns:r="http://schemas.openxmlformats.org/officeDocument/2006/relationships" xmlns:p="http://schemas.openxmlformats.org/presentationml/2006/main">
-  <p:cSld>
-    <p:spTree>
-      <p:nvGrpSpPr>
-        <p:cNvPr id="1" name=""/>
-        <p:cNvGrpSpPr/>
-        <p:nvPr/>
-      </p:nvGrpSpPr>
-      <p:grpSpPr>
-        <a:xfrm>
-          <a:off x="0" y="0"/>
-          <a:ext cx="0" cy="0"/>
-          <a:chOff x="0" y="0"/>
-          <a:chExt cx="0" cy="0"/>
-        </a:xfrm>
-      </p:grpSpPr>
-      <p:pic>
-        <p:nvPicPr>
-          <p:cNvPr id="2050" name="Picture 2" descr="The figure shows the estimated impact of intervention on number of Ebola cases and daily number of beds in use in Liberia and Sierra Leone combined during 2014, with and without correction for underreporting, according to the EbolaResponse modeling tool. The EbolaResponse modeling tool was used to construct a scenario to illustrate how control and prevention interventions. The interventions affect the cumulative numbers of cases of Ebola and daily beds in use.">
-            <a:extLst>
-              <a:ext uri="{FF2B5EF4-FFF2-40B4-BE49-F238E27FC236}">
-                <a16:creationId xmlns:a16="http://schemas.microsoft.com/office/drawing/2014/main" id="{073158CA-AB7A-4E9F-BABD-E084C93B2154}"/>
-              </a:ext>
-            </a:extLst>
-          </p:cNvPr>
-          <p:cNvPicPr>
-            <a:picLocks noGrp="1" noChangeAspect="1" noChangeArrowheads="1"/>
-          </p:cNvPicPr>
-          <p:nvPr>
-            <p:ph idx="1"/>
-          </p:nvPr>
-        </p:nvPicPr>
-        <p:blipFill>
-          <a:blip r:embed="rId2">
-            <a:extLst>
-              <a:ext uri="{28A0092B-C50C-407E-A947-70E740481C1C}">
-                <a14:useLocalDpi xmlns:a14="http://schemas.microsoft.com/office/drawing/2010/main" val="0"/>
-              </a:ext>
-            </a:extLst>
-          </a:blip>
-          <a:srcRect/>
-          <a:stretch>
-            <a:fillRect/>
-          </a:stretch>
-        </p:blipFill>
-        <p:spPr bwMode="auto">
-          <a:xfrm>
-            <a:off x="2374492" y="3216484"/>
-            <a:ext cx="9669685" cy="3169444"/>
-          </a:xfrm>
-          <a:prstGeom prst="rect">
-            <a:avLst/>
-          </a:prstGeom>
-          <a:noFill/>
-          <a:extLst>
-            <a:ext uri="{909E8E84-426E-40DD-AFC4-6F175D3DCCD1}">
-              <a14:hiddenFill xmlns:a14="http://schemas.microsoft.com/office/drawing/2010/main">
-                <a:solidFill>
-                  <a:srgbClr val="FFFFFF"/>
-                </a:solidFill>
-              </a14:hiddenFill>
-            </a:ext>
-          </a:extLst>
-        </p:spPr>
-      </p:pic>
-      <p:pic>
-        <p:nvPicPr>
-          <p:cNvPr id="2052" name="Picture 4" descr="The figure shows the estimated number of Ebola cases and daily number of beds in use Liberia and Sierra Leone combined during 2014, with and without correction for underreporting, according to the EbolaResponse modeling tool.">
-            <a:extLst>
-              <a:ext uri="{FF2B5EF4-FFF2-40B4-BE49-F238E27FC236}">
-                <a16:creationId xmlns:a16="http://schemas.microsoft.com/office/drawing/2014/main" id="{1752E12F-9A04-47A1-887A-91093485728A}"/>
-              </a:ext>
-            </a:extLst>
-          </p:cNvPr>
-          <p:cNvPicPr>
-            <a:picLocks noChangeAspect="1" noChangeArrowheads="1"/>
-          </p:cNvPicPr>
-          <p:nvPr/>
-        </p:nvPicPr>
-        <p:blipFill>
-          <a:blip r:embed="rId3">
-            <a:extLst>
-              <a:ext uri="{28A0092B-C50C-407E-A947-70E740481C1C}">
-                <a14:useLocalDpi xmlns:a14="http://schemas.microsoft.com/office/drawing/2010/main" val="0"/>
-              </a:ext>
-            </a:extLst>
-          </a:blip>
-          <a:srcRect/>
-          <a:stretch>
-            <a:fillRect/>
-          </a:stretch>
-        </p:blipFill>
-        <p:spPr bwMode="auto">
-          <a:xfrm>
-            <a:off x="2374492" y="58565"/>
-            <a:ext cx="9612059" cy="3157919"/>
-          </a:xfrm>
-          <a:prstGeom prst="rect">
-            <a:avLst/>
-          </a:prstGeom>
-          <a:noFill/>
-          <a:extLst>
-            <a:ext uri="{909E8E84-426E-40DD-AFC4-6F175D3DCCD1}">
-              <a14:hiddenFill xmlns:a14="http://schemas.microsoft.com/office/drawing/2010/main">
-                <a:solidFill>
-                  <a:srgbClr val="FFFFFF"/>
-                </a:solidFill>
-              </a14:hiddenFill>
-            </a:ext>
-          </a:extLst>
-        </p:spPr>
-      </p:pic>
-      <p:sp>
-        <p:nvSpPr>
-          <p:cNvPr id="5" name="TextBox 4">
-            <a:extLst>
-              <a:ext uri="{FF2B5EF4-FFF2-40B4-BE49-F238E27FC236}">
-                <a16:creationId xmlns:a16="http://schemas.microsoft.com/office/drawing/2014/main" id="{563CF580-8CBD-466C-AF04-4FA92151C525}"/>
-              </a:ext>
-            </a:extLst>
-          </p:cNvPr>
-          <p:cNvSpPr txBox="1"/>
-          <p:nvPr/>
-        </p:nvSpPr>
-        <p:spPr>
-          <a:xfrm>
-            <a:off x="0" y="2800985"/>
-            <a:ext cx="1780953" cy="830997"/>
-          </a:xfrm>
-          <a:prstGeom prst="rect">
-            <a:avLst/>
-          </a:prstGeom>
-          <a:noFill/>
-        </p:spPr>
-        <p:txBody>
-          <a:bodyPr wrap="square" rtlCol="0">
-            <a:spAutoFit/>
-          </a:bodyPr>
-          <a:lstStyle/>
-          <a:p>
-            <a:pPr algn="ctr"/>
-            <a:r>
-              <a:rPr lang="en-US" sz="2400" dirty="0"/>
-              <a:t>Intervention</a:t>
-            </a:r>
-          </a:p>
-          <a:p>
-            <a:pPr algn="ctr"/>
-            <a:r>
-              <a:rPr lang="en-US" sz="2400" dirty="0"/>
-              <a:t>axis</a:t>
-            </a:r>
-          </a:p>
-        </p:txBody>
-      </p:sp>
-      <p:sp>
-        <p:nvSpPr>
-          <p:cNvPr id="6" name="Left Brace 5">
-            <a:extLst>
-              <a:ext uri="{FF2B5EF4-FFF2-40B4-BE49-F238E27FC236}">
-                <a16:creationId xmlns:a16="http://schemas.microsoft.com/office/drawing/2014/main" id="{FADF9DC5-CECD-4377-8CED-B2794DCB24ED}"/>
-              </a:ext>
-            </a:extLst>
-          </p:cNvPr>
-          <p:cNvSpPr/>
-          <p:nvPr/>
-        </p:nvSpPr>
-        <p:spPr>
-          <a:xfrm>
-            <a:off x="1935983" y="1164400"/>
-            <a:ext cx="324293" cy="4210493"/>
-          </a:xfrm>
-          <a:prstGeom prst="leftBrace">
-            <a:avLst/>
-          </a:prstGeom>
-          <a:ln w="38100">
-            <a:solidFill>
-              <a:srgbClr val="C00000"/>
-            </a:solidFill>
-          </a:ln>
-        </p:spPr>
-        <p:style>
-          <a:lnRef idx="1">
-            <a:schemeClr val="accent1"/>
-          </a:lnRef>
-          <a:fillRef idx="0">
-            <a:schemeClr val="accent1"/>
-          </a:fillRef>
-          <a:effectRef idx="0">
-            <a:schemeClr val="accent1"/>
-          </a:effectRef>
-          <a:fontRef idx="minor">
-            <a:schemeClr val="tx1"/>
-          </a:fontRef>
-        </p:style>
-        <p:txBody>
-          <a:bodyPr rtlCol="0" anchor="ctr"/>
-          <a:lstStyle/>
-          <a:p>
-            <a:pPr algn="ctr"/>
-            <a:endParaRPr lang="en-US"/>
-          </a:p>
-        </p:txBody>
-      </p:sp>
-      <p:sp>
-        <p:nvSpPr>
-          <p:cNvPr id="9" name="Left Brace 8">
-            <a:extLst>
-              <a:ext uri="{FF2B5EF4-FFF2-40B4-BE49-F238E27FC236}">
-                <a16:creationId xmlns:a16="http://schemas.microsoft.com/office/drawing/2014/main" id="{906BCB75-AB3C-4827-B92F-005C134282D3}"/>
-              </a:ext>
-            </a:extLst>
-          </p:cNvPr>
-          <p:cNvSpPr/>
-          <p:nvPr/>
-        </p:nvSpPr>
-        <p:spPr>
-          <a:xfrm rot="16200000">
-            <a:off x="9655361" y="4054684"/>
-            <a:ext cx="324293" cy="4210493"/>
-          </a:xfrm>
-          <a:prstGeom prst="leftBrace">
-            <a:avLst/>
-          </a:prstGeom>
-          <a:ln w="38100">
-            <a:solidFill>
-              <a:srgbClr val="C00000"/>
-            </a:solidFill>
-          </a:ln>
-        </p:spPr>
-        <p:style>
-          <a:lnRef idx="1">
-            <a:schemeClr val="accent1"/>
-          </a:lnRef>
-          <a:fillRef idx="0">
-            <a:schemeClr val="accent1"/>
-          </a:fillRef>
-          <a:effectRef idx="0">
-            <a:schemeClr val="accent1"/>
-          </a:effectRef>
-          <a:fontRef idx="minor">
-            <a:schemeClr val="tx1"/>
-          </a:fontRef>
-        </p:style>
-        <p:txBody>
-          <a:bodyPr rtlCol="0" anchor="ctr"/>
-          <a:lstStyle/>
-          <a:p>
-            <a:pPr algn="ctr"/>
-            <a:endParaRPr lang="en-US"/>
-          </a:p>
-        </p:txBody>
-      </p:sp>
-      <p:sp>
-        <p:nvSpPr>
-          <p:cNvPr id="7" name="TextBox 6">
-            <a:extLst>
-              <a:ext uri="{FF2B5EF4-FFF2-40B4-BE49-F238E27FC236}">
-                <a16:creationId xmlns:a16="http://schemas.microsoft.com/office/drawing/2014/main" id="{EF9B8FF9-1CE1-4F24-A62C-46F7345374A6}"/>
-              </a:ext>
-            </a:extLst>
-          </p:cNvPr>
-          <p:cNvSpPr txBox="1"/>
-          <p:nvPr/>
-        </p:nvSpPr>
-        <p:spPr>
-          <a:xfrm>
-            <a:off x="8720925" y="6396335"/>
-            <a:ext cx="2193164" cy="461665"/>
-          </a:xfrm>
-          <a:prstGeom prst="rect">
-            <a:avLst/>
-          </a:prstGeom>
-          <a:noFill/>
-        </p:spPr>
-        <p:txBody>
-          <a:bodyPr wrap="none" rtlCol="0">
-            <a:spAutoFit/>
-          </a:bodyPr>
-          <a:lstStyle/>
-          <a:p>
-            <a:r>
-              <a:rPr lang="en-US" sz="2400" dirty="0"/>
-              <a:t>preparation axis</a:t>
-            </a:r>
-          </a:p>
-        </p:txBody>
-      </p:sp>
-      <p:sp>
-        <p:nvSpPr>
-          <p:cNvPr id="13" name="TextBox 12">
-            <a:extLst>
-              <a:ext uri="{FF2B5EF4-FFF2-40B4-BE49-F238E27FC236}">
-                <a16:creationId xmlns:a16="http://schemas.microsoft.com/office/drawing/2014/main" id="{74B92BF0-C063-4881-9482-481C86C315EC}"/>
-              </a:ext>
-            </a:extLst>
-          </p:cNvPr>
-          <p:cNvSpPr txBox="1"/>
-          <p:nvPr/>
-        </p:nvSpPr>
-        <p:spPr>
-          <a:xfrm>
-            <a:off x="0" y="6550223"/>
-            <a:ext cx="2762295" cy="307777"/>
-          </a:xfrm>
-          <a:prstGeom prst="rect">
-            <a:avLst/>
-          </a:prstGeom>
-          <a:noFill/>
-        </p:spPr>
-        <p:txBody>
-          <a:bodyPr wrap="none" rtlCol="0">
-            <a:spAutoFit/>
-          </a:bodyPr>
-          <a:lstStyle/>
-          <a:p>
-            <a:r>
-              <a:rPr lang="en-US" sz="1400" dirty="0">
-                <a:latin typeface="Courier New" panose="02070309020205020404" pitchFamily="49" charset="0"/>
-                <a:cs typeface="Courier New" panose="02070309020205020404" pitchFamily="49" charset="0"/>
-              </a:rPr>
-              <a:t>Meltzer et al. MMWR 2014</a:t>
-            </a:r>
-          </a:p>
-        </p:txBody>
-      </p:sp>
-    </p:spTree>
-    <p:extLst>
-      <p:ext uri="{BB962C8B-B14F-4D97-AF65-F5344CB8AC3E}">
-        <p14:creationId xmlns:p14="http://schemas.microsoft.com/office/powerpoint/2010/main" val="2842939248"/>
-      </p:ext>
-    </p:extLst>
-  </p:cSld>
-  <p:clrMapOvr>
-    <a:masterClrMapping/>
-  </p:clrMapOvr>
-  <mc:AlternateContent xmlns:mc="http://schemas.openxmlformats.org/markup-compatibility/2006" xmlns:p14="http://schemas.microsoft.com/office/powerpoint/2010/main">
-    <mc:Choice Requires="p14">
-      <p:transition spd="med" p14:dur="700">
-        <p:fade/>
-      </p:transition>
-    </mc:Choice>
-    <mc:Fallback xmlns="">
-      <p:transition spd="med">
-        <p:fade/>
-      </p:transition>
-    </mc:Fallback>
-  </mc:AlternateContent>
-</p:sld>
-</file>
-
-<file path=ppt/slides/slide14.xml><?xml version="1.0" encoding="utf-8"?>
+<file path=ppt/slides/slide15.xml><?xml version="1.0" encoding="utf-8"?>
 <p:sld xmlns:a="http://schemas.openxmlformats.org/drawingml/2006/main" xmlns:r="http://schemas.openxmlformats.org/officeDocument/2006/relationships" xmlns:p="http://schemas.openxmlformats.org/presentationml/2006/main">
   <p:cSld>
     <p:spTree>
@@ -8335,7 +9409,7 @@
           <a:p>
             <a:r>
               <a:rPr lang="en-US" dirty="0"/>
-              <a:t>Further barriers to universal evaluation</a:t>
+              <a:t>Differing consumers</a:t>
             </a:r>
           </a:p>
         </p:txBody>
@@ -9022,7 +10096,1098 @@
 </p:sld>
 </file>
 
-<file path=ppt/slides/slide15.xml><?xml version="1.0" encoding="utf-8"?>
+<file path=ppt/slides/slide16.xml><?xml version="1.0" encoding="utf-8"?>
+<p:sld xmlns:a="http://schemas.openxmlformats.org/drawingml/2006/main" xmlns:r="http://schemas.openxmlformats.org/officeDocument/2006/relationships" xmlns:p="http://schemas.openxmlformats.org/presentationml/2006/main">
+  <p:cSld>
+    <p:spTree>
+      <p:nvGrpSpPr>
+        <p:cNvPr id="1" name=""/>
+        <p:cNvGrpSpPr/>
+        <p:nvPr/>
+      </p:nvGrpSpPr>
+      <p:grpSpPr>
+        <a:xfrm>
+          <a:off x="0" y="0"/>
+          <a:ext cx="0" cy="0"/>
+          <a:chOff x="0" y="0"/>
+          <a:chExt cx="0" cy="0"/>
+        </a:xfrm>
+      </p:grpSpPr>
+      <p:sp>
+        <p:nvSpPr>
+          <p:cNvPr id="2" name="Title 1">
+            <a:extLst>
+              <a:ext uri="{FF2B5EF4-FFF2-40B4-BE49-F238E27FC236}">
+                <a16:creationId xmlns:a16="http://schemas.microsoft.com/office/drawing/2014/main" id="{074F691B-EFA4-437F-B14F-D6015C14A46C}"/>
+              </a:ext>
+            </a:extLst>
+          </p:cNvPr>
+          <p:cNvSpPr>
+            <a:spLocks noGrp="1"/>
+          </p:cNvSpPr>
+          <p:nvPr>
+            <p:ph type="title"/>
+          </p:nvPr>
+        </p:nvSpPr>
+        <p:spPr>
+          <a:xfrm>
+            <a:off x="761999" y="2443565"/>
+            <a:ext cx="10811435" cy="1868486"/>
+          </a:xfrm>
+        </p:spPr>
+        <p:txBody>
+          <a:bodyPr>
+            <a:normAutofit fontScale="90000"/>
+          </a:bodyPr>
+          <a:lstStyle/>
+          <a:p>
+            <a:pPr algn="ctr"/>
+            <a:r>
+              <a:rPr lang="en-US" b="1" dirty="0">
+                <a:solidFill>
+                  <a:srgbClr val="8D372D"/>
+                </a:solidFill>
+                <a:latin typeface="+mn-lt"/>
+              </a:rPr>
+              <a:t>Argument: </a:t>
+            </a:r>
+            <a:r>
+              <a:rPr lang="en-US" b="1" dirty="0">
+                <a:solidFill>
+                  <a:srgbClr val="1B284F"/>
+                </a:solidFill>
+                <a:latin typeface="+mn-lt"/>
+              </a:rPr>
+              <a:t>Regardless of the complications the full set of scenarios should be evaluated in the context of decision theory and value of information</a:t>
+            </a:r>
+            <a:r>
+              <a:rPr lang="en-US" b="1" dirty="0">
+                <a:solidFill>
+                  <a:srgbClr val="1B284F"/>
+                </a:solidFill>
+              </a:rPr>
+              <a:t>.</a:t>
+            </a:r>
+            <a:endParaRPr lang="en-US" b="1" dirty="0">
+              <a:solidFill>
+                <a:srgbClr val="1B284F"/>
+              </a:solidFill>
+              <a:latin typeface="+mn-lt"/>
+            </a:endParaRPr>
+          </a:p>
+        </p:txBody>
+      </p:sp>
+    </p:spTree>
+    <p:extLst>
+      <p:ext uri="{BB962C8B-B14F-4D97-AF65-F5344CB8AC3E}">
+        <p14:creationId xmlns:p14="http://schemas.microsoft.com/office/powerpoint/2010/main" val="3835059470"/>
+      </p:ext>
+    </p:extLst>
+  </p:cSld>
+  <p:clrMapOvr>
+    <a:masterClrMapping/>
+  </p:clrMapOvr>
+  <mc:AlternateContent xmlns:mc="http://schemas.openxmlformats.org/markup-compatibility/2006" xmlns:p14="http://schemas.microsoft.com/office/powerpoint/2010/main">
+    <mc:Choice Requires="p14">
+      <p:transition spd="med" p14:dur="700">
+        <p:fade/>
+      </p:transition>
+    </mc:Choice>
+    <mc:Fallback xmlns="">
+      <p:transition spd="med">
+        <p:fade/>
+      </p:transition>
+    </mc:Fallback>
+  </mc:AlternateContent>
+</p:sld>
+</file>
+
+<file path=ppt/slides/slide17.xml><?xml version="1.0" encoding="utf-8"?>
+<p:sld xmlns:a="http://schemas.openxmlformats.org/drawingml/2006/main" xmlns:r="http://schemas.openxmlformats.org/officeDocument/2006/relationships" xmlns:p="http://schemas.openxmlformats.org/presentationml/2006/main">
+  <p:cSld>
+    <p:spTree>
+      <p:nvGrpSpPr>
+        <p:cNvPr id="1" name=""/>
+        <p:cNvGrpSpPr/>
+        <p:nvPr/>
+      </p:nvGrpSpPr>
+      <p:grpSpPr>
+        <a:xfrm>
+          <a:off x="0" y="0"/>
+          <a:ext cx="0" cy="0"/>
+          <a:chOff x="0" y="0"/>
+          <a:chExt cx="0" cy="0"/>
+        </a:xfrm>
+      </p:grpSpPr>
+      <p:pic>
+        <p:nvPicPr>
+          <p:cNvPr id="5" name="Graphic 4">
+            <a:extLst>
+              <a:ext uri="{FF2B5EF4-FFF2-40B4-BE49-F238E27FC236}">
+                <a16:creationId xmlns:a16="http://schemas.microsoft.com/office/drawing/2014/main" id="{8595C874-FEFE-1857-D7B1-C38CE61B4A7D}"/>
+              </a:ext>
+            </a:extLst>
+          </p:cNvPr>
+          <p:cNvPicPr>
+            <a:picLocks noChangeAspect="1"/>
+          </p:cNvPicPr>
+          <p:nvPr/>
+        </p:nvPicPr>
+        <p:blipFill>
+          <a:blip r:embed="rId2">
+            <a:extLst>
+              <a:ext uri="{96DAC541-7B7A-43D3-8B79-37D633B846F1}">
+                <asvg:svgBlip xmlns:asvg="http://schemas.microsoft.com/office/drawing/2016/SVG/main" r:embed="rId3"/>
+              </a:ext>
+            </a:extLst>
+          </a:blip>
+          <a:stretch>
+            <a:fillRect/>
+          </a:stretch>
+        </p:blipFill>
+        <p:spPr>
+          <a:xfrm>
+            <a:off x="1115676" y="185915"/>
+            <a:ext cx="9669703" cy="3255559"/>
+          </a:xfrm>
+          <a:prstGeom prst="rect">
+            <a:avLst/>
+          </a:prstGeom>
+        </p:spPr>
+      </p:pic>
+    </p:spTree>
+    <p:extLst>
+      <p:ext uri="{BB962C8B-B14F-4D97-AF65-F5344CB8AC3E}">
+        <p14:creationId xmlns:p14="http://schemas.microsoft.com/office/powerpoint/2010/main" val="3674352469"/>
+      </p:ext>
+    </p:extLst>
+  </p:cSld>
+  <p:clrMapOvr>
+    <a:masterClrMapping/>
+  </p:clrMapOvr>
+</p:sld>
+</file>
+
+<file path=ppt/slides/slide18.xml><?xml version="1.0" encoding="utf-8"?>
+<p:sld xmlns:a="http://schemas.openxmlformats.org/drawingml/2006/main" xmlns:r="http://schemas.openxmlformats.org/officeDocument/2006/relationships" xmlns:p="http://schemas.openxmlformats.org/presentationml/2006/main">
+  <p:cSld>
+    <p:spTree>
+      <p:nvGrpSpPr>
+        <p:cNvPr id="1" name=""/>
+        <p:cNvGrpSpPr/>
+        <p:nvPr/>
+      </p:nvGrpSpPr>
+      <p:grpSpPr>
+        <a:xfrm>
+          <a:off x="0" y="0"/>
+          <a:ext cx="0" cy="0"/>
+          <a:chOff x="0" y="0"/>
+          <a:chExt cx="0" cy="0"/>
+        </a:xfrm>
+      </p:grpSpPr>
+      <p:pic>
+        <p:nvPicPr>
+          <p:cNvPr id="5" name="Graphic 4">
+            <a:extLst>
+              <a:ext uri="{FF2B5EF4-FFF2-40B4-BE49-F238E27FC236}">
+                <a16:creationId xmlns:a16="http://schemas.microsoft.com/office/drawing/2014/main" id="{8595C874-FEFE-1857-D7B1-C38CE61B4A7D}"/>
+              </a:ext>
+            </a:extLst>
+          </p:cNvPr>
+          <p:cNvPicPr>
+            <a:picLocks noChangeAspect="1"/>
+          </p:cNvPicPr>
+          <p:nvPr/>
+        </p:nvPicPr>
+        <p:blipFill>
+          <a:blip r:embed="rId2">
+            <a:extLst>
+              <a:ext uri="{96DAC541-7B7A-43D3-8B79-37D633B846F1}">
+                <asvg:svgBlip xmlns:asvg="http://schemas.microsoft.com/office/drawing/2016/SVG/main" r:embed="rId3"/>
+              </a:ext>
+            </a:extLst>
+          </a:blip>
+          <a:stretch>
+            <a:fillRect/>
+          </a:stretch>
+        </p:blipFill>
+        <p:spPr>
+          <a:xfrm>
+            <a:off x="1115676" y="185915"/>
+            <a:ext cx="9669703" cy="3255559"/>
+          </a:xfrm>
+          <a:prstGeom prst="rect">
+            <a:avLst/>
+          </a:prstGeom>
+        </p:spPr>
+      </p:pic>
+      <p:pic>
+        <p:nvPicPr>
+          <p:cNvPr id="3" name="Graphic 2">
+            <a:extLst>
+              <a:ext uri="{FF2B5EF4-FFF2-40B4-BE49-F238E27FC236}">
+                <a16:creationId xmlns:a16="http://schemas.microsoft.com/office/drawing/2014/main" id="{B4C44462-7E12-8E03-3618-BFF803F37445}"/>
+              </a:ext>
+            </a:extLst>
+          </p:cNvPr>
+          <p:cNvPicPr>
+            <a:picLocks noChangeAspect="1"/>
+          </p:cNvPicPr>
+          <p:nvPr/>
+        </p:nvPicPr>
+        <p:blipFill>
+          <a:blip r:embed="rId4">
+            <a:extLst>
+              <a:ext uri="{96DAC541-7B7A-43D3-8B79-37D633B846F1}">
+                <asvg:svgBlip xmlns:asvg="http://schemas.microsoft.com/office/drawing/2016/SVG/main" r:embed="rId5"/>
+              </a:ext>
+            </a:extLst>
+          </a:blip>
+          <a:stretch>
+            <a:fillRect/>
+          </a:stretch>
+        </p:blipFill>
+        <p:spPr>
+          <a:xfrm>
+            <a:off x="1354512" y="4809642"/>
+            <a:ext cx="9482976" cy="1798977"/>
+          </a:xfrm>
+          <a:prstGeom prst="rect">
+            <a:avLst/>
+          </a:prstGeom>
+        </p:spPr>
+      </p:pic>
+    </p:spTree>
+    <p:extLst>
+      <p:ext uri="{BB962C8B-B14F-4D97-AF65-F5344CB8AC3E}">
+        <p14:creationId xmlns:p14="http://schemas.microsoft.com/office/powerpoint/2010/main" val="2089286049"/>
+      </p:ext>
+    </p:extLst>
+  </p:cSld>
+  <p:clrMapOvr>
+    <a:masterClrMapping/>
+  </p:clrMapOvr>
+</p:sld>
+</file>
+
+<file path=ppt/slides/slide19.xml><?xml version="1.0" encoding="utf-8"?>
+<p:sld xmlns:a="http://schemas.openxmlformats.org/drawingml/2006/main" xmlns:r="http://schemas.openxmlformats.org/officeDocument/2006/relationships" xmlns:p="http://schemas.openxmlformats.org/presentationml/2006/main">
+  <p:cSld>
+    <p:spTree>
+      <p:nvGrpSpPr>
+        <p:cNvPr id="1" name=""/>
+        <p:cNvGrpSpPr/>
+        <p:nvPr/>
+      </p:nvGrpSpPr>
+      <p:grpSpPr>
+        <a:xfrm>
+          <a:off x="0" y="0"/>
+          <a:ext cx="0" cy="0"/>
+          <a:chOff x="0" y="0"/>
+          <a:chExt cx="0" cy="0"/>
+        </a:xfrm>
+      </p:grpSpPr>
+      <p:pic>
+        <p:nvPicPr>
+          <p:cNvPr id="4" name="Graphic 3">
+            <a:extLst>
+              <a:ext uri="{FF2B5EF4-FFF2-40B4-BE49-F238E27FC236}">
+                <a16:creationId xmlns:a16="http://schemas.microsoft.com/office/drawing/2014/main" id="{C6F661F3-9EB4-DA75-D39B-AC2F167A11EB}"/>
+              </a:ext>
+            </a:extLst>
+          </p:cNvPr>
+          <p:cNvPicPr>
+            <a:picLocks noChangeAspect="1"/>
+          </p:cNvPicPr>
+          <p:nvPr/>
+        </p:nvPicPr>
+        <p:blipFill>
+          <a:blip r:embed="rId2">
+            <a:extLst>
+              <a:ext uri="{96DAC541-7B7A-43D3-8B79-37D633B846F1}">
+                <asvg:svgBlip xmlns:asvg="http://schemas.microsoft.com/office/drawing/2016/SVG/main" r:embed="rId3"/>
+              </a:ext>
+            </a:extLst>
+          </a:blip>
+          <a:stretch>
+            <a:fillRect/>
+          </a:stretch>
+        </p:blipFill>
+        <p:spPr>
+          <a:xfrm>
+            <a:off x="1115676" y="185915"/>
+            <a:ext cx="9733997" cy="3277205"/>
+          </a:xfrm>
+          <a:prstGeom prst="rect">
+            <a:avLst/>
+          </a:prstGeom>
+        </p:spPr>
+      </p:pic>
+      <p:pic>
+        <p:nvPicPr>
+          <p:cNvPr id="6" name="Content Placeholder 19">
+            <a:extLst>
+              <a:ext uri="{FF2B5EF4-FFF2-40B4-BE49-F238E27FC236}">
+                <a16:creationId xmlns:a16="http://schemas.microsoft.com/office/drawing/2014/main" id="{47F1F28F-E4CB-B08A-86B9-FF7DF76411D3}"/>
+              </a:ext>
+            </a:extLst>
+          </p:cNvPr>
+          <p:cNvPicPr>
+            <a:picLocks noChangeAspect="1"/>
+          </p:cNvPicPr>
+          <p:nvPr/>
+        </p:nvPicPr>
+        <p:blipFill>
+          <a:blip r:embed="rId4"/>
+          <a:stretch>
+            <a:fillRect/>
+          </a:stretch>
+        </p:blipFill>
+        <p:spPr>
+          <a:xfrm>
+            <a:off x="10405100" y="5097824"/>
+            <a:ext cx="1648532" cy="1648532"/>
+          </a:xfrm>
+          <a:prstGeom prst="rect">
+            <a:avLst/>
+          </a:prstGeom>
+          <a:ln>
+            <a:noFill/>
+          </a:ln>
+          <a:effectLst>
+            <a:softEdge rad="112500"/>
+          </a:effectLst>
+        </p:spPr>
+      </p:pic>
+      <p:sp>
+        <p:nvSpPr>
+          <p:cNvPr id="7" name="Title 1">
+            <a:extLst>
+              <a:ext uri="{FF2B5EF4-FFF2-40B4-BE49-F238E27FC236}">
+                <a16:creationId xmlns:a16="http://schemas.microsoft.com/office/drawing/2014/main" id="{A9BF39B1-AF34-4CBD-C8CF-E4BEC4D9B781}"/>
+              </a:ext>
+            </a:extLst>
+          </p:cNvPr>
+          <p:cNvSpPr>
+            <a:spLocks noGrp="1"/>
+          </p:cNvSpPr>
+          <p:nvPr>
+            <p:ph type="title"/>
+          </p:nvPr>
+        </p:nvSpPr>
+        <p:spPr>
+          <a:xfrm>
+            <a:off x="616527" y="4579936"/>
+            <a:ext cx="9788574" cy="1868486"/>
+          </a:xfrm>
+        </p:spPr>
+        <p:txBody>
+          <a:bodyPr>
+            <a:normAutofit fontScale="90000"/>
+          </a:bodyPr>
+          <a:lstStyle/>
+          <a:p>
+            <a:pPr algn="ctr"/>
+            <a:r>
+              <a:rPr lang="en-US" b="1" dirty="0">
+                <a:solidFill>
+                  <a:srgbClr val="8D372D"/>
+                </a:solidFill>
+                <a:latin typeface="+mn-lt"/>
+              </a:rPr>
+              <a:t>Argument: </a:t>
+            </a:r>
+            <a:r>
+              <a:rPr lang="en-US" b="1" dirty="0">
+                <a:solidFill>
+                  <a:srgbClr val="1B284F"/>
+                </a:solidFill>
+                <a:latin typeface="+mn-lt"/>
+              </a:rPr>
+              <a:t>Wrong projections of the counterfactual scenarios can lead to wrong decisions.</a:t>
+            </a:r>
+          </a:p>
+        </p:txBody>
+      </p:sp>
+    </p:spTree>
+    <p:extLst>
+      <p:ext uri="{BB962C8B-B14F-4D97-AF65-F5344CB8AC3E}">
+        <p14:creationId xmlns:p14="http://schemas.microsoft.com/office/powerpoint/2010/main" val="2937590893"/>
+      </p:ext>
+    </p:extLst>
+  </p:cSld>
+  <p:clrMapOvr>
+    <a:masterClrMapping/>
+  </p:clrMapOvr>
+</p:sld>
+</file>
+
+<file path=ppt/slides/slide2.xml><?xml version="1.0" encoding="utf-8"?>
+<p:sld xmlns:a="http://schemas.openxmlformats.org/drawingml/2006/main" xmlns:r="http://schemas.openxmlformats.org/officeDocument/2006/relationships" xmlns:p="http://schemas.openxmlformats.org/presentationml/2006/main">
+  <p:cSld>
+    <p:spTree>
+      <p:nvGrpSpPr>
+        <p:cNvPr id="1" name=""/>
+        <p:cNvGrpSpPr/>
+        <p:nvPr/>
+      </p:nvGrpSpPr>
+      <p:grpSpPr>
+        <a:xfrm>
+          <a:off x="0" y="0"/>
+          <a:ext cx="0" cy="0"/>
+          <a:chOff x="0" y="0"/>
+          <a:chExt cx="0" cy="0"/>
+        </a:xfrm>
+      </p:grpSpPr>
+      <p:sp>
+        <p:nvSpPr>
+          <p:cNvPr id="2" name="Title 1">
+            <a:extLst>
+              <a:ext uri="{FF2B5EF4-FFF2-40B4-BE49-F238E27FC236}">
+                <a16:creationId xmlns:a16="http://schemas.microsoft.com/office/drawing/2014/main" id="{074F691B-EFA4-437F-B14F-D6015C14A46C}"/>
+              </a:ext>
+            </a:extLst>
+          </p:cNvPr>
+          <p:cNvSpPr>
+            <a:spLocks noGrp="1"/>
+          </p:cNvSpPr>
+          <p:nvPr>
+            <p:ph type="title"/>
+          </p:nvPr>
+        </p:nvSpPr>
+        <p:spPr>
+          <a:xfrm>
+            <a:off x="838199" y="2448047"/>
+            <a:ext cx="10791306" cy="1868486"/>
+          </a:xfrm>
+        </p:spPr>
+        <p:txBody>
+          <a:bodyPr>
+            <a:normAutofit/>
+          </a:bodyPr>
+          <a:lstStyle/>
+          <a:p>
+            <a:pPr algn="ctr"/>
+            <a:r>
+              <a:rPr lang="en-US" b="1" dirty="0">
+                <a:solidFill>
+                  <a:srgbClr val="8D372D"/>
+                </a:solidFill>
+                <a:latin typeface="+mn-lt"/>
+              </a:rPr>
+              <a:t>Clarification: </a:t>
+            </a:r>
+            <a:r>
+              <a:rPr lang="en-US" b="1" dirty="0">
+                <a:solidFill>
+                  <a:srgbClr val="1B284F"/>
+                </a:solidFill>
+              </a:rPr>
+              <a:t>What is a planning scenario?</a:t>
+            </a:r>
+            <a:endParaRPr lang="en-US" b="1" dirty="0">
+              <a:solidFill>
+                <a:srgbClr val="1B284F"/>
+              </a:solidFill>
+              <a:latin typeface="+mn-lt"/>
+            </a:endParaRPr>
+          </a:p>
+        </p:txBody>
+      </p:sp>
+    </p:spTree>
+    <p:extLst>
+      <p:ext uri="{BB962C8B-B14F-4D97-AF65-F5344CB8AC3E}">
+        <p14:creationId xmlns:p14="http://schemas.microsoft.com/office/powerpoint/2010/main" val="3581070981"/>
+      </p:ext>
+    </p:extLst>
+  </p:cSld>
+  <p:clrMapOvr>
+    <a:masterClrMapping/>
+  </p:clrMapOvr>
+  <mc:AlternateContent xmlns:mc="http://schemas.openxmlformats.org/markup-compatibility/2006" xmlns:p14="http://schemas.microsoft.com/office/powerpoint/2010/main">
+    <mc:Choice Requires="p14">
+      <p:transition spd="med" p14:dur="700">
+        <p:fade/>
+      </p:transition>
+    </mc:Choice>
+    <mc:Fallback xmlns="">
+      <p:transition spd="med">
+        <p:fade/>
+      </p:transition>
+    </mc:Fallback>
+  </mc:AlternateContent>
+</p:sld>
+</file>
+
+<file path=ppt/slides/slide20.xml><?xml version="1.0" encoding="utf-8"?>
+<p:sld xmlns:a="http://schemas.openxmlformats.org/drawingml/2006/main" xmlns:r="http://schemas.openxmlformats.org/officeDocument/2006/relationships" xmlns:p="http://schemas.openxmlformats.org/presentationml/2006/main">
+  <p:cSld>
+    <p:spTree>
+      <p:nvGrpSpPr>
+        <p:cNvPr id="1" name=""/>
+        <p:cNvGrpSpPr/>
+        <p:nvPr/>
+      </p:nvGrpSpPr>
+      <p:grpSpPr>
+        <a:xfrm>
+          <a:off x="0" y="0"/>
+          <a:ext cx="0" cy="0"/>
+          <a:chOff x="0" y="0"/>
+          <a:chExt cx="0" cy="0"/>
+        </a:xfrm>
+      </p:grpSpPr>
+      <p:pic>
+        <p:nvPicPr>
+          <p:cNvPr id="5" name="Graphic 4">
+            <a:extLst>
+              <a:ext uri="{FF2B5EF4-FFF2-40B4-BE49-F238E27FC236}">
+                <a16:creationId xmlns:a16="http://schemas.microsoft.com/office/drawing/2014/main" id="{667524F2-CBBB-DE42-8F56-7F64EBC8A1AE}"/>
+              </a:ext>
+            </a:extLst>
+          </p:cNvPr>
+          <p:cNvPicPr>
+            <a:picLocks noChangeAspect="1"/>
+          </p:cNvPicPr>
+          <p:nvPr/>
+        </p:nvPicPr>
+        <p:blipFill>
+          <a:blip r:embed="rId2">
+            <a:extLst>
+              <a:ext uri="{96DAC541-7B7A-43D3-8B79-37D633B846F1}">
+                <asvg:svgBlip xmlns:asvg="http://schemas.microsoft.com/office/drawing/2016/SVG/main" r:embed="rId3"/>
+              </a:ext>
+            </a:extLst>
+          </a:blip>
+          <a:stretch>
+            <a:fillRect/>
+          </a:stretch>
+        </p:blipFill>
+        <p:spPr>
+          <a:xfrm>
+            <a:off x="1585548" y="394188"/>
+            <a:ext cx="9020904" cy="6069622"/>
+          </a:xfrm>
+          <a:prstGeom prst="rect">
+            <a:avLst/>
+          </a:prstGeom>
+        </p:spPr>
+      </p:pic>
+    </p:spTree>
+    <p:extLst>
+      <p:ext uri="{BB962C8B-B14F-4D97-AF65-F5344CB8AC3E}">
+        <p14:creationId xmlns:p14="http://schemas.microsoft.com/office/powerpoint/2010/main" val="3846147405"/>
+      </p:ext>
+    </p:extLst>
+  </p:cSld>
+  <p:clrMapOvr>
+    <a:masterClrMapping/>
+  </p:clrMapOvr>
+</p:sld>
+</file>
+
+<file path=ppt/slides/slide21.xml><?xml version="1.0" encoding="utf-8"?>
+<p:sld xmlns:a="http://schemas.openxmlformats.org/drawingml/2006/main" xmlns:r="http://schemas.openxmlformats.org/officeDocument/2006/relationships" xmlns:p="http://schemas.openxmlformats.org/presentationml/2006/main">
+  <p:cSld>
+    <p:spTree>
+      <p:nvGrpSpPr>
+        <p:cNvPr id="1" name=""/>
+        <p:cNvGrpSpPr/>
+        <p:nvPr/>
+      </p:nvGrpSpPr>
+      <p:grpSpPr>
+        <a:xfrm>
+          <a:off x="0" y="0"/>
+          <a:ext cx="0" cy="0"/>
+          <a:chOff x="0" y="0"/>
+          <a:chExt cx="0" cy="0"/>
+        </a:xfrm>
+      </p:grpSpPr>
+      <p:pic>
+        <p:nvPicPr>
+          <p:cNvPr id="7" name="Graphic 6">
+            <a:extLst>
+              <a:ext uri="{FF2B5EF4-FFF2-40B4-BE49-F238E27FC236}">
+                <a16:creationId xmlns:a16="http://schemas.microsoft.com/office/drawing/2014/main" id="{4D19F865-8B32-04B2-1CED-FE1A5D467FF4}"/>
+              </a:ext>
+            </a:extLst>
+          </p:cNvPr>
+          <p:cNvPicPr>
+            <a:picLocks noChangeAspect="1"/>
+          </p:cNvPicPr>
+          <p:nvPr/>
+        </p:nvPicPr>
+        <p:blipFill>
+          <a:blip r:embed="rId2">
+            <a:extLst>
+              <a:ext uri="{96DAC541-7B7A-43D3-8B79-37D633B846F1}">
+                <asvg:svgBlip xmlns:asvg="http://schemas.microsoft.com/office/drawing/2016/SVG/main" r:embed="rId3"/>
+              </a:ext>
+            </a:extLst>
+          </a:blip>
+          <a:stretch>
+            <a:fillRect/>
+          </a:stretch>
+        </p:blipFill>
+        <p:spPr>
+          <a:xfrm>
+            <a:off x="485355" y="965379"/>
+            <a:ext cx="11221289" cy="4927242"/>
+          </a:xfrm>
+          <a:prstGeom prst="rect">
+            <a:avLst/>
+          </a:prstGeom>
+        </p:spPr>
+      </p:pic>
+    </p:spTree>
+    <p:extLst>
+      <p:ext uri="{BB962C8B-B14F-4D97-AF65-F5344CB8AC3E}">
+        <p14:creationId xmlns:p14="http://schemas.microsoft.com/office/powerpoint/2010/main" val="1551883793"/>
+      </p:ext>
+    </p:extLst>
+  </p:cSld>
+  <p:clrMapOvr>
+    <a:masterClrMapping/>
+  </p:clrMapOvr>
+</p:sld>
+</file>
+
+<file path=ppt/slides/slide22.xml><?xml version="1.0" encoding="utf-8"?>
+<p:sld xmlns:a="http://schemas.openxmlformats.org/drawingml/2006/main" xmlns:r="http://schemas.openxmlformats.org/officeDocument/2006/relationships" xmlns:p="http://schemas.openxmlformats.org/presentationml/2006/main">
+  <p:cSld>
+    <p:spTree>
+      <p:nvGrpSpPr>
+        <p:cNvPr id="1" name=""/>
+        <p:cNvGrpSpPr/>
+        <p:nvPr/>
+      </p:nvGrpSpPr>
+      <p:grpSpPr>
+        <a:xfrm>
+          <a:off x="0" y="0"/>
+          <a:ext cx="0" cy="0"/>
+          <a:chOff x="0" y="0"/>
+          <a:chExt cx="0" cy="0"/>
+        </a:xfrm>
+      </p:grpSpPr>
+      <p:pic>
+        <p:nvPicPr>
+          <p:cNvPr id="5" name="Graphic 4">
+            <a:extLst>
+              <a:ext uri="{FF2B5EF4-FFF2-40B4-BE49-F238E27FC236}">
+                <a16:creationId xmlns:a16="http://schemas.microsoft.com/office/drawing/2014/main" id="{92E6AA40-58FF-D69D-95D5-0A4489D1C108}"/>
+              </a:ext>
+            </a:extLst>
+          </p:cNvPr>
+          <p:cNvPicPr>
+            <a:picLocks noChangeAspect="1"/>
+          </p:cNvPicPr>
+          <p:nvPr/>
+        </p:nvPicPr>
+        <p:blipFill>
+          <a:blip r:embed="rId2">
+            <a:extLst>
+              <a:ext uri="{96DAC541-7B7A-43D3-8B79-37D633B846F1}">
+                <asvg:svgBlip xmlns:asvg="http://schemas.microsoft.com/office/drawing/2016/SVG/main" r:embed="rId3"/>
+              </a:ext>
+            </a:extLst>
+          </a:blip>
+          <a:stretch>
+            <a:fillRect/>
+          </a:stretch>
+        </p:blipFill>
+        <p:spPr>
+          <a:xfrm>
+            <a:off x="485355" y="762889"/>
+            <a:ext cx="11221289" cy="5332223"/>
+          </a:xfrm>
+          <a:prstGeom prst="rect">
+            <a:avLst/>
+          </a:prstGeom>
+        </p:spPr>
+      </p:pic>
+    </p:spTree>
+    <p:extLst>
+      <p:ext uri="{BB962C8B-B14F-4D97-AF65-F5344CB8AC3E}">
+        <p14:creationId xmlns:p14="http://schemas.microsoft.com/office/powerpoint/2010/main" val="334342523"/>
+      </p:ext>
+    </p:extLst>
+  </p:cSld>
+  <p:clrMapOvr>
+    <a:masterClrMapping/>
+  </p:clrMapOvr>
+</p:sld>
+</file>
+
+<file path=ppt/slides/slide23.xml><?xml version="1.0" encoding="utf-8"?>
+<p:sld xmlns:a="http://schemas.openxmlformats.org/drawingml/2006/main" xmlns:r="http://schemas.openxmlformats.org/officeDocument/2006/relationships" xmlns:p="http://schemas.openxmlformats.org/presentationml/2006/main">
+  <p:cSld>
+    <p:spTree>
+      <p:nvGrpSpPr>
+        <p:cNvPr id="1" name=""/>
+        <p:cNvGrpSpPr/>
+        <p:nvPr/>
+      </p:nvGrpSpPr>
+      <p:grpSpPr>
+        <a:xfrm>
+          <a:off x="0" y="0"/>
+          <a:ext cx="0" cy="0"/>
+          <a:chOff x="0" y="0"/>
+          <a:chExt cx="0" cy="0"/>
+        </a:xfrm>
+      </p:grpSpPr>
+      <p:pic>
+        <p:nvPicPr>
+          <p:cNvPr id="5" name="Graphic 4">
+            <a:extLst>
+              <a:ext uri="{FF2B5EF4-FFF2-40B4-BE49-F238E27FC236}">
+                <a16:creationId xmlns:a16="http://schemas.microsoft.com/office/drawing/2014/main" id="{22D04C1E-7E45-9BC9-AFDA-93CD08FA94EC}"/>
+              </a:ext>
+            </a:extLst>
+          </p:cNvPr>
+          <p:cNvPicPr>
+            <a:picLocks noChangeAspect="1"/>
+          </p:cNvPicPr>
+          <p:nvPr/>
+        </p:nvPicPr>
+        <p:blipFill>
+          <a:blip r:embed="rId2">
+            <a:extLst>
+              <a:ext uri="{96DAC541-7B7A-43D3-8B79-37D633B846F1}">
+                <asvg:svgBlip xmlns:asvg="http://schemas.microsoft.com/office/drawing/2016/SVG/main" r:embed="rId3"/>
+              </a:ext>
+            </a:extLst>
+          </a:blip>
+          <a:stretch>
+            <a:fillRect/>
+          </a:stretch>
+        </p:blipFill>
+        <p:spPr>
+          <a:xfrm>
+            <a:off x="485355" y="897882"/>
+            <a:ext cx="11221289" cy="5062236"/>
+          </a:xfrm>
+          <a:prstGeom prst="rect">
+            <a:avLst/>
+          </a:prstGeom>
+        </p:spPr>
+      </p:pic>
+    </p:spTree>
+    <p:extLst>
+      <p:ext uri="{BB962C8B-B14F-4D97-AF65-F5344CB8AC3E}">
+        <p14:creationId xmlns:p14="http://schemas.microsoft.com/office/powerpoint/2010/main" val="3720662456"/>
+      </p:ext>
+    </p:extLst>
+  </p:cSld>
+  <p:clrMapOvr>
+    <a:masterClrMapping/>
+  </p:clrMapOvr>
+</p:sld>
+</file>
+
+<file path=ppt/slides/slide24.xml><?xml version="1.0" encoding="utf-8"?>
+<p:sld xmlns:a="http://schemas.openxmlformats.org/drawingml/2006/main" xmlns:r="http://schemas.openxmlformats.org/officeDocument/2006/relationships" xmlns:p="http://schemas.openxmlformats.org/presentationml/2006/main">
+  <p:cSld>
+    <p:spTree>
+      <p:nvGrpSpPr>
+        <p:cNvPr id="1" name=""/>
+        <p:cNvGrpSpPr/>
+        <p:nvPr/>
+      </p:nvGrpSpPr>
+      <p:grpSpPr>
+        <a:xfrm>
+          <a:off x="0" y="0"/>
+          <a:ext cx="0" cy="0"/>
+          <a:chOff x="0" y="0"/>
+          <a:chExt cx="0" cy="0"/>
+        </a:xfrm>
+      </p:grpSpPr>
+      <p:pic>
+        <p:nvPicPr>
+          <p:cNvPr id="7" name="Graphic 6">
+            <a:extLst>
+              <a:ext uri="{FF2B5EF4-FFF2-40B4-BE49-F238E27FC236}">
+                <a16:creationId xmlns:a16="http://schemas.microsoft.com/office/drawing/2014/main" id="{E9C4F005-FB5D-0E70-9C0E-1B8FE1F7C726}"/>
+              </a:ext>
+            </a:extLst>
+          </p:cNvPr>
+          <p:cNvPicPr>
+            <a:picLocks noChangeAspect="1"/>
+          </p:cNvPicPr>
+          <p:nvPr/>
+        </p:nvPicPr>
+        <p:blipFill>
+          <a:blip r:embed="rId2">
+            <a:extLst>
+              <a:ext uri="{96DAC541-7B7A-43D3-8B79-37D633B846F1}">
+                <asvg:svgBlip xmlns:asvg="http://schemas.microsoft.com/office/drawing/2016/SVG/main" r:embed="rId3"/>
+              </a:ext>
+            </a:extLst>
+          </a:blip>
+          <a:stretch>
+            <a:fillRect/>
+          </a:stretch>
+        </p:blipFill>
+        <p:spPr>
+          <a:xfrm>
+            <a:off x="620347" y="838822"/>
+            <a:ext cx="10951305" cy="5180355"/>
+          </a:xfrm>
+          <a:prstGeom prst="rect">
+            <a:avLst/>
+          </a:prstGeom>
+        </p:spPr>
+      </p:pic>
+      <mc:AlternateContent xmlns:mc="http://schemas.openxmlformats.org/markup-compatibility/2006">
+        <mc:Choice xmlns:a14="http://schemas.microsoft.com/office/drawing/2010/main" Requires="a14">
+          <p:sp>
+            <p:nvSpPr>
+              <p:cNvPr id="11" name="TextBox 10">
+                <a:extLst>
+                  <a:ext uri="{FF2B5EF4-FFF2-40B4-BE49-F238E27FC236}">
+                    <a16:creationId xmlns:a16="http://schemas.microsoft.com/office/drawing/2014/main" id="{5ED25199-E4EF-6D6A-8D2B-FB606496B252}"/>
+                  </a:ext>
+                </a:extLst>
+              </p:cNvPr>
+              <p:cNvSpPr txBox="1"/>
+              <p:nvPr/>
+            </p:nvSpPr>
+            <p:spPr>
+              <a:xfrm>
+                <a:off x="4856018" y="957171"/>
+                <a:ext cx="6096000" cy="461665"/>
+              </a:xfrm>
+              <a:prstGeom prst="rect">
+                <a:avLst/>
+              </a:prstGeom>
+              <a:noFill/>
+            </p:spPr>
+            <p:txBody>
+              <a:bodyPr wrap="square">
+                <a:spAutoFit/>
+              </a:bodyPr>
+              <a:lstStyle/>
+              <a:p>
+                <a:pPr/>
+                <a14:m>
+                  <m:oMathPara xmlns:m="http://schemas.openxmlformats.org/officeDocument/2006/math">
+                    <m:oMathParaPr>
+                      <m:jc m:val="centerGroup"/>
+                    </m:oMathParaPr>
+                    <m:oMath xmlns:m="http://schemas.openxmlformats.org/officeDocument/2006/math">
+                      <m:r>
+                        <a:rPr lang="en-US" sz="2400" b="0" i="1" smtClean="0">
+                          <a:latin typeface="Cambria Math" panose="02040503050406030204" pitchFamily="18" charset="0"/>
+                        </a:rPr>
+                        <m:t>𝑐</m:t>
+                      </m:r>
+                      <m:d>
+                        <m:dPr>
+                          <m:ctrlPr>
+                            <a:rPr lang="en-US" sz="2400" b="0" i="1" smtClean="0">
+                              <a:latin typeface="Cambria Math" panose="02040503050406030204" pitchFamily="18" charset="0"/>
+                            </a:rPr>
+                          </m:ctrlPr>
+                        </m:dPr>
+                        <m:e>
+                          <m:sSub>
+                            <m:sSubPr>
+                              <m:ctrlPr>
+                                <a:rPr lang="en-US" sz="2400" b="0" i="1" smtClean="0">
+                                  <a:latin typeface="Cambria Math" panose="02040503050406030204" pitchFamily="18" charset="0"/>
+                                </a:rPr>
+                              </m:ctrlPr>
+                            </m:sSubPr>
+                            <m:e>
+                              <m:r>
+                                <a:rPr lang="en-US" sz="2400" b="1" i="1" smtClean="0">
+                                  <a:latin typeface="Cambria Math" panose="02040503050406030204" pitchFamily="18" charset="0"/>
+                                </a:rPr>
+                                <m:t>𝑿</m:t>
+                              </m:r>
+                            </m:e>
+                            <m:sub>
+                              <m:r>
+                                <a:rPr lang="en-US" sz="2400" b="0" i="1" smtClean="0">
+                                  <a:latin typeface="Cambria Math" panose="02040503050406030204" pitchFamily="18" charset="0"/>
+                                </a:rPr>
+                                <m:t>1</m:t>
+                              </m:r>
+                            </m:sub>
+                          </m:sSub>
+                        </m:e>
+                      </m:d>
+                    </m:oMath>
+                  </m:oMathPara>
+                </a14:m>
+                <a:endParaRPr lang="en-US" sz="2400" dirty="0"/>
+              </a:p>
+            </p:txBody>
+          </p:sp>
+        </mc:Choice>
+        <mc:Fallback>
+          <p:sp>
+            <p:nvSpPr>
+              <p:cNvPr id="11" name="TextBox 10">
+                <a:extLst>
+                  <a:ext uri="{FF2B5EF4-FFF2-40B4-BE49-F238E27FC236}">
+                    <a16:creationId xmlns:a16="http://schemas.microsoft.com/office/drawing/2014/main" id="{5ED25199-E4EF-6D6A-8D2B-FB606496B252}"/>
+                  </a:ext>
+                </a:extLst>
+              </p:cNvPr>
+              <p:cNvSpPr txBox="1">
+                <a:spLocks noRot="1" noChangeAspect="1" noMove="1" noResize="1" noEditPoints="1" noAdjustHandles="1" noChangeArrowheads="1" noChangeShapeType="1" noTextEdit="1"/>
+              </p:cNvSpPr>
+              <p:nvPr/>
+            </p:nvSpPr>
+            <p:spPr>
+              <a:xfrm>
+                <a:off x="4856018" y="957171"/>
+                <a:ext cx="6096000" cy="461665"/>
+              </a:xfrm>
+              <a:prstGeom prst="rect">
+                <a:avLst/>
+              </a:prstGeom>
+              <a:blipFill>
+                <a:blip r:embed="rId4"/>
+                <a:stretch>
+                  <a:fillRect/>
+                </a:stretch>
+              </a:blipFill>
+            </p:spPr>
+            <p:txBody>
+              <a:bodyPr/>
+              <a:lstStyle/>
+              <a:p>
+                <a:r>
+                  <a:rPr lang="en-US">
+                    <a:noFill/>
+                  </a:rPr>
+                  <a:t> </a:t>
+                </a:r>
+              </a:p>
+            </p:txBody>
+          </p:sp>
+        </mc:Fallback>
+      </mc:AlternateContent>
+    </p:spTree>
+    <p:extLst>
+      <p:ext uri="{BB962C8B-B14F-4D97-AF65-F5344CB8AC3E}">
+        <p14:creationId xmlns:p14="http://schemas.microsoft.com/office/powerpoint/2010/main" val="3218979884"/>
+      </p:ext>
+    </p:extLst>
+  </p:cSld>
+  <p:clrMapOvr>
+    <a:masterClrMapping/>
+  </p:clrMapOvr>
+</p:sld>
+</file>
+
+<file path=ppt/slides/slide25.xml><?xml version="1.0" encoding="utf-8"?>
+<p:sld xmlns:a="http://schemas.openxmlformats.org/drawingml/2006/main" xmlns:r="http://schemas.openxmlformats.org/officeDocument/2006/relationships" xmlns:p="http://schemas.openxmlformats.org/presentationml/2006/main">
+  <p:cSld>
+    <p:spTree>
+      <p:nvGrpSpPr>
+        <p:cNvPr id="1" name=""/>
+        <p:cNvGrpSpPr/>
+        <p:nvPr/>
+      </p:nvGrpSpPr>
+      <p:grpSpPr>
+        <a:xfrm>
+          <a:off x="0" y="0"/>
+          <a:ext cx="0" cy="0"/>
+          <a:chOff x="0" y="0"/>
+          <a:chExt cx="0" cy="0"/>
+        </a:xfrm>
+      </p:grpSpPr>
+      <p:sp>
+        <p:nvSpPr>
+          <p:cNvPr id="2" name="Title 1">
+            <a:extLst>
+              <a:ext uri="{FF2B5EF4-FFF2-40B4-BE49-F238E27FC236}">
+                <a16:creationId xmlns:a16="http://schemas.microsoft.com/office/drawing/2014/main" id="{074F691B-EFA4-437F-B14F-D6015C14A46C}"/>
+              </a:ext>
+            </a:extLst>
+          </p:cNvPr>
+          <p:cNvSpPr>
+            <a:spLocks noGrp="1"/>
+          </p:cNvSpPr>
+          <p:nvPr>
+            <p:ph type="title"/>
+          </p:nvPr>
+        </p:nvSpPr>
+        <p:spPr>
+          <a:xfrm>
+            <a:off x="761999" y="2443565"/>
+            <a:ext cx="10811435" cy="1868486"/>
+          </a:xfrm>
+        </p:spPr>
+        <p:txBody>
+          <a:bodyPr>
+            <a:normAutofit/>
+          </a:bodyPr>
+          <a:lstStyle/>
+          <a:p>
+            <a:pPr algn="ctr"/>
+            <a:r>
+              <a:rPr lang="en-US" b="1" dirty="0">
+                <a:solidFill>
+                  <a:srgbClr val="8D372D"/>
+                </a:solidFill>
+                <a:latin typeface="+mn-lt"/>
+              </a:rPr>
+              <a:t>Caution: </a:t>
+            </a:r>
+            <a:r>
+              <a:rPr lang="en-US" b="1" dirty="0">
+                <a:solidFill>
+                  <a:srgbClr val="1B284F"/>
+                </a:solidFill>
+                <a:latin typeface="+mn-lt"/>
+              </a:rPr>
+              <a:t>Being optimal isn’t everything</a:t>
+            </a:r>
+            <a:r>
+              <a:rPr lang="en-US" b="1" dirty="0">
+                <a:solidFill>
+                  <a:srgbClr val="1B284F"/>
+                </a:solidFill>
+              </a:rPr>
+              <a:t>.</a:t>
+            </a:r>
+            <a:endParaRPr lang="en-US" b="1" dirty="0">
+              <a:solidFill>
+                <a:srgbClr val="1B284F"/>
+              </a:solidFill>
+              <a:latin typeface="+mn-lt"/>
+            </a:endParaRPr>
+          </a:p>
+        </p:txBody>
+      </p:sp>
+    </p:spTree>
+    <p:extLst>
+      <p:ext uri="{BB962C8B-B14F-4D97-AF65-F5344CB8AC3E}">
+        <p14:creationId xmlns:p14="http://schemas.microsoft.com/office/powerpoint/2010/main" val="3813632906"/>
+      </p:ext>
+    </p:extLst>
+  </p:cSld>
+  <p:clrMapOvr>
+    <a:masterClrMapping/>
+  </p:clrMapOvr>
+  <mc:AlternateContent xmlns:mc="http://schemas.openxmlformats.org/markup-compatibility/2006" xmlns:p14="http://schemas.microsoft.com/office/powerpoint/2010/main">
+    <mc:Choice Requires="p14">
+      <p:transition spd="med" p14:dur="700">
+        <p:fade/>
+      </p:transition>
+    </mc:Choice>
+    <mc:Fallback xmlns="">
+      <p:transition spd="med">
+        <p:fade/>
+      </p:transition>
+    </mc:Fallback>
+  </mc:AlternateContent>
+</p:sld>
+</file>
+
+<file path=ppt/slides/slide26.xml><?xml version="1.0" encoding="utf-8"?>
 <p:sld xmlns:a="http://schemas.openxmlformats.org/drawingml/2006/main" xmlns:r="http://schemas.openxmlformats.org/officeDocument/2006/relationships" xmlns:p="http://schemas.openxmlformats.org/presentationml/2006/main">
   <p:cSld>
     <p:spTree>
@@ -10140,7 +12305,7 @@
 </p:sld>
 </file>
 
-<file path=ppt/slides/slide16.xml><?xml version="1.0" encoding="utf-8"?>
+<file path=ppt/slides/slide27.xml><?xml version="1.0" encoding="utf-8"?>
 <p:sld xmlns:a="http://schemas.openxmlformats.org/drawingml/2006/main" xmlns:r="http://schemas.openxmlformats.org/officeDocument/2006/relationships" xmlns:p="http://schemas.openxmlformats.org/presentationml/2006/main">
   <p:cSld>
     <p:spTree>
@@ -11469,7 +13634,7 @@
 </p:sld>
 </file>
 
-<file path=ppt/slides/slide17.xml><?xml version="1.0" encoding="utf-8"?>
+<file path=ppt/slides/slide28.xml><?xml version="1.0" encoding="utf-8"?>
 <p:sld xmlns:a="http://schemas.openxmlformats.org/drawingml/2006/main" xmlns:r="http://schemas.openxmlformats.org/officeDocument/2006/relationships" xmlns:p="http://schemas.openxmlformats.org/presentationml/2006/main">
   <p:cSld>
     <p:spTree>
@@ -12679,7 +14844,7 @@
 </p:sld>
 </file>
 
-<file path=ppt/slides/slide18.xml><?xml version="1.0" encoding="utf-8"?>
+<file path=ppt/slides/slide29.xml><?xml version="1.0" encoding="utf-8"?>
 <p:sld xmlns:a="http://schemas.openxmlformats.org/drawingml/2006/main" xmlns:r="http://schemas.openxmlformats.org/officeDocument/2006/relationships" xmlns:p="http://schemas.openxmlformats.org/presentationml/2006/main">
   <p:cSld>
     <p:spTree>
@@ -13895,113 +16060,7 @@
 </p:sld>
 </file>
 
-<file path=ppt/slides/slide19.xml><?xml version="1.0" encoding="utf-8"?>
-<p:sld xmlns:a="http://schemas.openxmlformats.org/drawingml/2006/main" xmlns:r="http://schemas.openxmlformats.org/officeDocument/2006/relationships" xmlns:p="http://schemas.openxmlformats.org/presentationml/2006/main">
-  <p:cSld>
-    <p:spTree>
-      <p:nvGrpSpPr>
-        <p:cNvPr id="1" name=""/>
-        <p:cNvGrpSpPr/>
-        <p:nvPr/>
-      </p:nvGrpSpPr>
-      <p:grpSpPr>
-        <a:xfrm>
-          <a:off x="0" y="0"/>
-          <a:ext cx="0" cy="0"/>
-          <a:chOff x="0" y="0"/>
-          <a:chExt cx="0" cy="0"/>
-        </a:xfrm>
-      </p:grpSpPr>
-      <p:sp>
-        <p:nvSpPr>
-          <p:cNvPr id="2" name="Title 1">
-            <a:extLst>
-              <a:ext uri="{FF2B5EF4-FFF2-40B4-BE49-F238E27FC236}">
-                <a16:creationId xmlns:a16="http://schemas.microsoft.com/office/drawing/2014/main" id="{074F691B-EFA4-437F-B14F-D6015C14A46C}"/>
-              </a:ext>
-            </a:extLst>
-          </p:cNvPr>
-          <p:cNvSpPr>
-            <a:spLocks noGrp="1"/>
-          </p:cNvSpPr>
-          <p:nvPr>
-            <p:ph type="title"/>
-          </p:nvPr>
-        </p:nvSpPr>
-        <p:spPr>
-          <a:xfrm>
-            <a:off x="761999" y="2443565"/>
-            <a:ext cx="10811435" cy="1868486"/>
-          </a:xfrm>
-        </p:spPr>
-        <p:txBody>
-          <a:bodyPr>
-            <a:normAutofit fontScale="90000"/>
-          </a:bodyPr>
-          <a:lstStyle/>
-          <a:p>
-            <a:pPr algn="ctr"/>
-            <a:r>
-              <a:rPr lang="en-US" b="1" dirty="0">
-                <a:solidFill>
-                  <a:srgbClr val="8D372D"/>
-                </a:solidFill>
-                <a:latin typeface="+mn-lt"/>
-              </a:rPr>
-              <a:t>Conclusion: </a:t>
-            </a:r>
-            <a:r>
-              <a:rPr lang="en-US" b="1" dirty="0">
-                <a:solidFill>
-                  <a:srgbClr val="1B284F"/>
-                </a:solidFill>
-                <a:latin typeface="+mn-lt"/>
-              </a:rPr>
-              <a:t>There is no one correct </a:t>
-            </a:r>
-            <a:r>
-              <a:rPr lang="en-US" b="1" dirty="0">
-                <a:solidFill>
-                  <a:srgbClr val="1B284F"/>
-                </a:solidFill>
-              </a:rPr>
-              <a:t>evaluation of a set of planning scenarios, but rather they should be evaluated in relation to particular use cases.</a:t>
-            </a:r>
-            <a:endParaRPr lang="en-US" b="1" dirty="0">
-              <a:solidFill>
-                <a:srgbClr val="1B284F"/>
-              </a:solidFill>
-              <a:latin typeface="+mn-lt"/>
-            </a:endParaRPr>
-          </a:p>
-        </p:txBody>
-      </p:sp>
-    </p:spTree>
-    <p:extLst>
-      <p:ext uri="{BB962C8B-B14F-4D97-AF65-F5344CB8AC3E}">
-        <p14:creationId xmlns:p14="http://schemas.microsoft.com/office/powerpoint/2010/main" val="3294389037"/>
-      </p:ext>
-    </p:extLst>
-  </p:cSld>
-  <p:clrMapOvr>
-    <a:masterClrMapping/>
-  </p:clrMapOvr>
-  <mc:AlternateContent xmlns:mc="http://schemas.openxmlformats.org/markup-compatibility/2006" xmlns:p14="http://schemas.microsoft.com/office/powerpoint/2010/main">
-    <mc:Choice Requires="p14">
-      <p:transition spd="med" p14:dur="700">
-        <p:fade/>
-      </p:transition>
-    </mc:Choice>
-    <mc:Fallback xmlns="">
-      <p:transition spd="med">
-        <p:fade/>
-      </p:transition>
-    </mc:Fallback>
-  </mc:AlternateContent>
-</p:sld>
-</file>
-
-<file path=ppt/slides/slide2.xml><?xml version="1.0" encoding="utf-8"?>
+<file path=ppt/slides/slide3.xml><?xml version="1.0" encoding="utf-8"?>
 <p:sld xmlns:a="http://schemas.openxmlformats.org/drawingml/2006/main" xmlns:r="http://schemas.openxmlformats.org/officeDocument/2006/relationships" xmlns:p="http://schemas.openxmlformats.org/presentationml/2006/main">
   <p:cSld>
     <p:spTree>
@@ -15162,7 +17221,7 @@
 </p:sld>
 </file>
 
-<file path=ppt/slides/slide20.xml><?xml version="1.0" encoding="utf-8"?>
+<file path=ppt/slides/slide30.xml><?xml version="1.0" encoding="utf-8"?>
 <p:sld xmlns:a="http://schemas.openxmlformats.org/drawingml/2006/main" xmlns:r="http://schemas.openxmlformats.org/officeDocument/2006/relationships" xmlns:p="http://schemas.openxmlformats.org/presentationml/2006/main">
   <p:cSld>
     <p:spTree>
@@ -15203,7 +17262,7 @@
         </p:spPr>
         <p:txBody>
           <a:bodyPr>
-            <a:normAutofit fontScale="90000"/>
+            <a:normAutofit/>
           </a:bodyPr>
           <a:lstStyle/>
           <a:p>
@@ -15215,24 +17274,21 @@
                 </a:solidFill>
                 <a:latin typeface="+mn-lt"/>
               </a:rPr>
-              <a:t>For Discussion: </a:t>
+              <a:t>What next? </a:t>
             </a:r>
-            <a:r>
-              <a:rPr lang="en-US" b="1" dirty="0">
-                <a:solidFill>
-                  <a:srgbClr val="1B284F"/>
-                </a:solidFill>
-                <a:latin typeface="+mn-lt"/>
-              </a:rPr>
-              <a:t>Given that all scenarios are fundamentally counterfactual and should be evaluated in relation to how they inform action across multiple partners.</a:t>
-            </a:r>
+            <a:endParaRPr lang="en-US" b="1" dirty="0">
+              <a:solidFill>
+                <a:srgbClr val="1B284F"/>
+              </a:solidFill>
+              <a:latin typeface="+mn-lt"/>
+            </a:endParaRPr>
           </a:p>
         </p:txBody>
       </p:sp>
     </p:spTree>
     <p:extLst>
       <p:ext uri="{BB962C8B-B14F-4D97-AF65-F5344CB8AC3E}">
-        <p14:creationId xmlns:p14="http://schemas.microsoft.com/office/powerpoint/2010/main" val="722832683"/>
+        <p14:creationId xmlns:p14="http://schemas.microsoft.com/office/powerpoint/2010/main" val="3294389037"/>
       </p:ext>
     </p:extLst>
   </p:cSld>
@@ -15254,7 +17310,7 @@
 </p:sld>
 </file>
 
-<file path=ppt/slides/slide21.xml><?xml version="1.0" encoding="utf-8"?>
+<file path=ppt/slides/slide31.xml><?xml version="1.0" encoding="utf-8"?>
 <p:sld xmlns:a="http://schemas.openxmlformats.org/drawingml/2006/main" xmlns:r="http://schemas.openxmlformats.org/officeDocument/2006/relationships" xmlns:p="http://schemas.openxmlformats.org/presentationml/2006/main">
   <p:cSld>
     <p:spTree>
@@ -15271,46 +17327,100 @@
           <a:chExt cx="0" cy="0"/>
         </a:xfrm>
       </p:grpSpPr>
-      <p:pic>
-        <p:nvPicPr>
-          <p:cNvPr id="5" name="Graphic 4">
+      <p:sp>
+        <p:nvSpPr>
+          <p:cNvPr id="2" name="Title 1">
             <a:extLst>
               <a:ext uri="{FF2B5EF4-FFF2-40B4-BE49-F238E27FC236}">
-                <a16:creationId xmlns:a16="http://schemas.microsoft.com/office/drawing/2014/main" id="{8595C874-FEFE-1857-D7B1-C38CE61B4A7D}"/>
+                <a16:creationId xmlns:a16="http://schemas.microsoft.com/office/drawing/2014/main" id="{3B6D71E2-8A1D-AD36-028F-78174C2DF462}"/>
               </a:ext>
             </a:extLst>
           </p:cNvPr>
-          <p:cNvPicPr>
-            <a:picLocks noChangeAspect="1"/>
-          </p:cNvPicPr>
-          <p:nvPr/>
-        </p:nvPicPr>
-        <p:blipFill>
-          <a:blip r:embed="rId2">
+          <p:cNvSpPr>
+            <a:spLocks noGrp="1"/>
+          </p:cNvSpPr>
+          <p:nvPr>
+            <p:ph type="title"/>
+          </p:nvPr>
+        </p:nvSpPr>
+        <p:spPr/>
+        <p:txBody>
+          <a:bodyPr/>
+          <a:lstStyle/>
+          <a:p>
+            <a:r>
+              <a:rPr lang="en-US" dirty="0"/>
+              <a:t>Some directions…</a:t>
+            </a:r>
+          </a:p>
+        </p:txBody>
+      </p:sp>
+      <p:sp>
+        <p:nvSpPr>
+          <p:cNvPr id="3" name="Content Placeholder 2">
             <a:extLst>
-              <a:ext uri="{96DAC541-7B7A-43D3-8B79-37D633B846F1}">
-                <asvg:svgBlip xmlns:asvg="http://schemas.microsoft.com/office/drawing/2016/SVG/main" r:embed="rId3"/>
+              <a:ext uri="{FF2B5EF4-FFF2-40B4-BE49-F238E27FC236}">
+                <a16:creationId xmlns:a16="http://schemas.microsoft.com/office/drawing/2014/main" id="{F6E0ACEC-8385-CAD1-35BE-5DCC86CE07A9}"/>
               </a:ext>
             </a:extLst>
-          </a:blip>
-          <a:stretch>
-            <a:fillRect/>
-          </a:stretch>
-        </p:blipFill>
-        <p:spPr>
-          <a:xfrm>
-            <a:off x="1115676" y="356321"/>
-            <a:ext cx="9669703" cy="3255559"/>
-          </a:xfrm>
-          <a:prstGeom prst="rect">
-            <a:avLst/>
-          </a:prstGeom>
-        </p:spPr>
-      </p:pic>
+          </p:cNvPr>
+          <p:cNvSpPr>
+            <a:spLocks noGrp="1"/>
+          </p:cNvSpPr>
+          <p:nvPr>
+            <p:ph idx="1"/>
+          </p:nvPr>
+        </p:nvSpPr>
+        <p:spPr/>
+        <p:txBody>
+          <a:bodyPr>
+            <a:normAutofit fontScale="92500"/>
+          </a:bodyPr>
+          <a:lstStyle/>
+          <a:p>
+            <a:r>
+              <a:rPr lang="en-US" dirty="0"/>
+              <a:t>Think about aspects of utility functions we need to know, maybe come up with some canonical or reference utility functions. </a:t>
+            </a:r>
+          </a:p>
+          <a:p>
+            <a:r>
+              <a:rPr lang="en-US" dirty="0"/>
+              <a:t>Focus on working out the math and making some tools for “idealized” situations. </a:t>
+            </a:r>
+          </a:p>
+          <a:p>
+            <a:pPr lvl="1"/>
+            <a:r>
+              <a:rPr lang="en-US" dirty="0"/>
+              <a:t>Optimal decision based on modeled scenarios</a:t>
+            </a:r>
+          </a:p>
+          <a:p>
+            <a:pPr lvl="1"/>
+            <a:r>
+              <a:rPr lang="en-US" dirty="0"/>
+              <a:t>Assume we want to know how good that decision would have been had we been able to achieve the assumed scenario, given what we actually observed.</a:t>
+            </a:r>
+          </a:p>
+          <a:p>
+            <a:r>
+              <a:rPr lang="en-US" dirty="0"/>
+              <a:t>Do simulations/math to see when this breaks, sends us the wrong direction</a:t>
+            </a:r>
+          </a:p>
+          <a:p>
+            <a:r>
+              <a:rPr lang="en-US" dirty="0"/>
+              <a:t>Tie this to VOI analysis, including the space of scenarios considered.</a:t>
+            </a:r>
+          </a:p>
+        </p:txBody>
+      </p:sp>
     </p:spTree>
     <p:extLst>
       <p:ext uri="{BB962C8B-B14F-4D97-AF65-F5344CB8AC3E}">
-        <p14:creationId xmlns:p14="http://schemas.microsoft.com/office/powerpoint/2010/main" val="3801224079"/>
+        <p14:creationId xmlns:p14="http://schemas.microsoft.com/office/powerpoint/2010/main" val="1911538213"/>
       </p:ext>
     </p:extLst>
   </p:cSld>
@@ -15320,7 +17430,90 @@
 </p:sld>
 </file>
 
-<file path=ppt/slides/slide22.xml><?xml version="1.0" encoding="utf-8"?>
+<file path=ppt/slides/slide32.xml><?xml version="1.0" encoding="utf-8"?>
+<p:sld xmlns:a="http://schemas.openxmlformats.org/drawingml/2006/main" xmlns:r="http://schemas.openxmlformats.org/officeDocument/2006/relationships" xmlns:p="http://schemas.openxmlformats.org/presentationml/2006/main">
+  <p:cSld>
+    <p:spTree>
+      <p:nvGrpSpPr>
+        <p:cNvPr id="1" name=""/>
+        <p:cNvGrpSpPr/>
+        <p:nvPr/>
+      </p:nvGrpSpPr>
+      <p:grpSpPr>
+        <a:xfrm>
+          <a:off x="0" y="0"/>
+          <a:ext cx="0" cy="0"/>
+          <a:chOff x="0" y="0"/>
+          <a:chExt cx="0" cy="0"/>
+        </a:xfrm>
+      </p:grpSpPr>
+      <p:sp>
+        <p:nvSpPr>
+          <p:cNvPr id="4" name="Title 3">
+            <a:extLst>
+              <a:ext uri="{FF2B5EF4-FFF2-40B4-BE49-F238E27FC236}">
+                <a16:creationId xmlns:a16="http://schemas.microsoft.com/office/drawing/2014/main" id="{CC1FF9CA-7404-E468-751E-041E2948E157}"/>
+              </a:ext>
+            </a:extLst>
+          </p:cNvPr>
+          <p:cNvSpPr>
+            <a:spLocks noGrp="1"/>
+          </p:cNvSpPr>
+          <p:nvPr>
+            <p:ph type="title"/>
+          </p:nvPr>
+        </p:nvSpPr>
+        <p:spPr/>
+        <p:txBody>
+          <a:bodyPr/>
+          <a:lstStyle/>
+          <a:p>
+            <a:r>
+              <a:rPr lang="en-US" dirty="0"/>
+              <a:t>Backup</a:t>
+            </a:r>
+          </a:p>
+        </p:txBody>
+      </p:sp>
+      <p:sp>
+        <p:nvSpPr>
+          <p:cNvPr id="5" name="Text Placeholder 4">
+            <a:extLst>
+              <a:ext uri="{FF2B5EF4-FFF2-40B4-BE49-F238E27FC236}">
+                <a16:creationId xmlns:a16="http://schemas.microsoft.com/office/drawing/2014/main" id="{BA96284C-E80D-D3EF-AE79-D0824485849A}"/>
+              </a:ext>
+            </a:extLst>
+          </p:cNvPr>
+          <p:cNvSpPr>
+            <a:spLocks noGrp="1"/>
+          </p:cNvSpPr>
+          <p:nvPr>
+            <p:ph type="body" idx="1"/>
+          </p:nvPr>
+        </p:nvSpPr>
+        <p:spPr/>
+        <p:txBody>
+          <a:bodyPr/>
+          <a:lstStyle/>
+          <a:p>
+            <a:endParaRPr lang="en-US"/>
+          </a:p>
+        </p:txBody>
+      </p:sp>
+    </p:spTree>
+    <p:extLst>
+      <p:ext uri="{BB962C8B-B14F-4D97-AF65-F5344CB8AC3E}">
+        <p14:creationId xmlns:p14="http://schemas.microsoft.com/office/powerpoint/2010/main" val="4200171791"/>
+      </p:ext>
+    </p:extLst>
+  </p:cSld>
+  <p:clrMapOvr>
+    <a:masterClrMapping/>
+  </p:clrMapOvr>
+</p:sld>
+</file>
+
+<file path=ppt/slides/slide33.xml><?xml version="1.0" encoding="utf-8"?>
 <p:sld xmlns:a="http://schemas.openxmlformats.org/drawingml/2006/main" xmlns:r="http://schemas.openxmlformats.org/officeDocument/2006/relationships" xmlns:p="http://schemas.openxmlformats.org/presentationml/2006/main">
   <p:cSld>
     <p:spTree>
@@ -16044,7 +18237,962 @@
 </p:sld>
 </file>
 
-<file path=ppt/slides/slide23.xml><?xml version="1.0" encoding="utf-8"?>
+<file path=ppt/slides/slide34.xml><?xml version="1.0" encoding="utf-8"?>
+<p:sld xmlns:a="http://schemas.openxmlformats.org/drawingml/2006/main" xmlns:r="http://schemas.openxmlformats.org/officeDocument/2006/relationships" xmlns:p="http://schemas.openxmlformats.org/presentationml/2006/main">
+  <p:cSld>
+    <p:spTree>
+      <p:nvGrpSpPr>
+        <p:cNvPr id="1" name=""/>
+        <p:cNvGrpSpPr/>
+        <p:nvPr/>
+      </p:nvGrpSpPr>
+      <p:grpSpPr>
+        <a:xfrm>
+          <a:off x="0" y="0"/>
+          <a:ext cx="0" cy="0"/>
+          <a:chOff x="0" y="0"/>
+          <a:chExt cx="0" cy="0"/>
+        </a:xfrm>
+      </p:grpSpPr>
+      <p:sp>
+        <p:nvSpPr>
+          <p:cNvPr id="3" name="Text Placeholder 2">
+            <a:extLst>
+              <a:ext uri="{FF2B5EF4-FFF2-40B4-BE49-F238E27FC236}">
+                <a16:creationId xmlns:a16="http://schemas.microsoft.com/office/drawing/2014/main" id="{876564EC-C101-3C2E-B1FA-FA1ECD8FF48A}"/>
+              </a:ext>
+            </a:extLst>
+          </p:cNvPr>
+          <p:cNvSpPr>
+            <a:spLocks noGrp="1"/>
+          </p:cNvSpPr>
+          <p:nvPr>
+            <p:ph type="body" sz="quarter" idx="16"/>
+          </p:nvPr>
+        </p:nvSpPr>
+        <p:spPr/>
+        <p:txBody>
+          <a:bodyPr/>
+          <a:lstStyle/>
+          <a:p>
+            <a:r>
+              <a:rPr lang="en-US" dirty="0"/>
+              <a:t>The tension of simultaneous responses</a:t>
+            </a:r>
+          </a:p>
+        </p:txBody>
+      </p:sp>
+      <mc:AlternateContent xmlns:mc="http://schemas.openxmlformats.org/markup-compatibility/2006">
+        <mc:Choice xmlns:a14="http://schemas.microsoft.com/office/drawing/2010/main" Requires="a14">
+          <p:sp>
+            <p:nvSpPr>
+              <p:cNvPr id="6" name="TextBox 5">
+                <a:extLst>
+                  <a:ext uri="{FF2B5EF4-FFF2-40B4-BE49-F238E27FC236}">
+                    <a16:creationId xmlns:a16="http://schemas.microsoft.com/office/drawing/2014/main" id="{1FB5A588-908E-485A-8CD0-A382E1CEE96A}"/>
+                  </a:ext>
+                </a:extLst>
+              </p:cNvPr>
+              <p:cNvSpPr txBox="1"/>
+              <p:nvPr/>
+            </p:nvSpPr>
+            <p:spPr>
+              <a:xfrm>
+                <a:off x="2816209" y="2447537"/>
+                <a:ext cx="5450466" cy="830997"/>
+              </a:xfrm>
+              <a:prstGeom prst="rect">
+                <a:avLst/>
+              </a:prstGeom>
+              <a:noFill/>
+            </p:spPr>
+            <p:txBody>
+              <a:bodyPr wrap="none" lIns="0" tIns="0" rIns="0" bIns="0" rtlCol="0">
+                <a:spAutoFit/>
+              </a:bodyPr>
+              <a:lstStyle/>
+              <a:p>
+                <a:pPr/>
+                <a14:m>
+                  <m:oMathPara xmlns:m="http://schemas.openxmlformats.org/officeDocument/2006/math">
+                    <m:oMathParaPr>
+                      <m:jc m:val="centerGroup"/>
+                    </m:oMathParaPr>
+                    <m:oMath xmlns:m="http://schemas.openxmlformats.org/officeDocument/2006/math">
+                      <m:r>
+                        <a:rPr lang="en-US" sz="5400" b="0" i="1" smtClean="0">
+                          <a:latin typeface="Cambria Math" panose="02040503050406030204" pitchFamily="18" charset="0"/>
+                        </a:rPr>
+                        <m:t>𝑈</m:t>
+                      </m:r>
+                      <m:r>
+                        <a:rPr lang="en-US" sz="5400" b="0" i="1" smtClean="0">
+                          <a:latin typeface="Cambria Math" panose="02040503050406030204" pitchFamily="18" charset="0"/>
+                        </a:rPr>
+                        <m:t>=∑</m:t>
+                      </m:r>
+                      <m:r>
+                        <a:rPr lang="en-US" sz="5400" b="0" i="1" smtClean="0">
+                          <a:latin typeface="Cambria Math" panose="02040503050406030204" pitchFamily="18" charset="0"/>
+                        </a:rPr>
+                        <m:t>𝑢</m:t>
+                      </m:r>
+                      <m:d>
+                        <m:dPr>
+                          <m:ctrlPr>
+                            <a:rPr lang="en-US" sz="5400" b="0" i="1" smtClean="0">
+                              <a:latin typeface="Cambria Math" panose="02040503050406030204" pitchFamily="18" charset="0"/>
+                            </a:rPr>
+                          </m:ctrlPr>
+                        </m:dPr>
+                        <m:e>
+                          <m:sSub>
+                            <m:sSubPr>
+                              <m:ctrlPr>
+                                <a:rPr lang="en-US" sz="5400" b="0" i="1" smtClean="0">
+                                  <a:latin typeface="Cambria Math" panose="02040503050406030204" pitchFamily="18" charset="0"/>
+                                </a:rPr>
+                              </m:ctrlPr>
+                            </m:sSubPr>
+                            <m:e>
+                              <m:r>
+                                <a:rPr lang="en-US" sz="5400" b="0" i="1" smtClean="0">
+                                  <a:latin typeface="Cambria Math" panose="02040503050406030204" pitchFamily="18" charset="0"/>
+                                </a:rPr>
+                                <m:t>𝑦</m:t>
+                              </m:r>
+                            </m:e>
+                            <m:sub>
+                              <m:r>
+                                <a:rPr lang="en-US" sz="5400" b="0" i="1" smtClean="0">
+                                  <a:latin typeface="Cambria Math" panose="02040503050406030204" pitchFamily="18" charset="0"/>
+                                </a:rPr>
+                                <m:t>𝑖</m:t>
+                              </m:r>
+                            </m:sub>
+                          </m:sSub>
+                        </m:e>
+                      </m:d>
+                      <m:r>
+                        <m:rPr>
+                          <m:sty m:val="p"/>
+                        </m:rPr>
+                        <a:rPr lang="en-US" sz="5400" b="0" i="0" smtClean="0">
+                          <a:latin typeface="Cambria Math" panose="02040503050406030204" pitchFamily="18" charset="0"/>
+                        </a:rPr>
+                        <m:t>Pr</m:t>
+                      </m:r>
+                      <m:r>
+                        <a:rPr lang="en-US" sz="5400" b="0" i="1" smtClean="0">
+                          <a:latin typeface="Cambria Math" panose="02040503050406030204" pitchFamily="18" charset="0"/>
+                        </a:rPr>
+                        <m:t>⁡(</m:t>
+                      </m:r>
+                      <m:sSub>
+                        <m:sSubPr>
+                          <m:ctrlPr>
+                            <a:rPr lang="en-US" sz="5400" b="0" i="1" smtClean="0">
+                              <a:latin typeface="Cambria Math" panose="02040503050406030204" pitchFamily="18" charset="0"/>
+                            </a:rPr>
+                          </m:ctrlPr>
+                        </m:sSubPr>
+                        <m:e>
+                          <m:r>
+                            <a:rPr lang="en-US" sz="5400" b="0" i="1" smtClean="0">
+                              <a:latin typeface="Cambria Math" panose="02040503050406030204" pitchFamily="18" charset="0"/>
+                            </a:rPr>
+                            <m:t>𝑦</m:t>
+                          </m:r>
+                        </m:e>
+                        <m:sub>
+                          <m:r>
+                            <a:rPr lang="en-US" sz="5400" b="0" i="1" smtClean="0">
+                              <a:latin typeface="Cambria Math" panose="02040503050406030204" pitchFamily="18" charset="0"/>
+                            </a:rPr>
+                            <m:t>𝑖</m:t>
+                          </m:r>
+                        </m:sub>
+                      </m:sSub>
+                      <m:r>
+                        <a:rPr lang="en-US" sz="5400" b="0" i="1" smtClean="0">
+                          <a:latin typeface="Cambria Math" panose="02040503050406030204" pitchFamily="18" charset="0"/>
+                        </a:rPr>
+                        <m:t>)</m:t>
+                      </m:r>
+                    </m:oMath>
+                  </m:oMathPara>
+                </a14:m>
+                <a:endParaRPr lang="en-US" sz="5400" dirty="0"/>
+              </a:p>
+            </p:txBody>
+          </p:sp>
+        </mc:Choice>
+        <mc:Fallback>
+          <p:sp>
+            <p:nvSpPr>
+              <p:cNvPr id="6" name="TextBox 5">
+                <a:extLst>
+                  <a:ext uri="{FF2B5EF4-FFF2-40B4-BE49-F238E27FC236}">
+                    <a16:creationId xmlns:a16="http://schemas.microsoft.com/office/drawing/2014/main" id="{1FB5A588-908E-485A-8CD0-A382E1CEE96A}"/>
+                  </a:ext>
+                </a:extLst>
+              </p:cNvPr>
+              <p:cNvSpPr txBox="1">
+                <a:spLocks noRot="1" noChangeAspect="1" noMove="1" noResize="1" noEditPoints="1" noAdjustHandles="1" noChangeArrowheads="1" noChangeShapeType="1" noTextEdit="1"/>
+              </p:cNvSpPr>
+              <p:nvPr/>
+            </p:nvSpPr>
+            <p:spPr>
+              <a:xfrm>
+                <a:off x="2816209" y="2447537"/>
+                <a:ext cx="5450466" cy="830997"/>
+              </a:xfrm>
+              <a:prstGeom prst="rect">
+                <a:avLst/>
+              </a:prstGeom>
+              <a:blipFill>
+                <a:blip r:embed="rId3"/>
+                <a:stretch>
+                  <a:fillRect/>
+                </a:stretch>
+              </a:blipFill>
+            </p:spPr>
+            <p:txBody>
+              <a:bodyPr/>
+              <a:lstStyle/>
+              <a:p>
+                <a:r>
+                  <a:rPr lang="en-US">
+                    <a:noFill/>
+                  </a:rPr>
+                  <a:t> </a:t>
+                </a:r>
+              </a:p>
+            </p:txBody>
+          </p:sp>
+        </mc:Fallback>
+      </mc:AlternateContent>
+      <p:sp>
+        <p:nvSpPr>
+          <p:cNvPr id="7" name="Rectangle 6">
+            <a:extLst>
+              <a:ext uri="{FF2B5EF4-FFF2-40B4-BE49-F238E27FC236}">
+                <a16:creationId xmlns:a16="http://schemas.microsoft.com/office/drawing/2014/main" id="{07B4AFC6-17A5-45A1-9EE1-462ACC2336D0}"/>
+              </a:ext>
+            </a:extLst>
+          </p:cNvPr>
+          <p:cNvSpPr/>
+          <p:nvPr/>
+        </p:nvSpPr>
+        <p:spPr>
+          <a:xfrm>
+            <a:off x="4772500" y="2500291"/>
+            <a:ext cx="1547446" cy="870438"/>
+          </a:xfrm>
+          <a:prstGeom prst="rect">
+            <a:avLst/>
+          </a:prstGeom>
+          <a:noFill/>
+          <a:ln w="28575"/>
+        </p:spPr>
+        <p:style>
+          <a:lnRef idx="2">
+            <a:schemeClr val="accent1">
+              <a:shade val="50000"/>
+            </a:schemeClr>
+          </a:lnRef>
+          <a:fillRef idx="1">
+            <a:schemeClr val="accent1"/>
+          </a:fillRef>
+          <a:effectRef idx="0">
+            <a:schemeClr val="accent1"/>
+          </a:effectRef>
+          <a:fontRef idx="minor">
+            <a:schemeClr val="lt1"/>
+          </a:fontRef>
+        </p:style>
+        <p:txBody>
+          <a:bodyPr rtlCol="0" anchor="ctr"/>
+          <a:lstStyle/>
+          <a:p>
+            <a:pPr algn="ctr"/>
+            <a:endParaRPr lang="en-US"/>
+          </a:p>
+        </p:txBody>
+      </p:sp>
+      <p:sp>
+        <p:nvSpPr>
+          <p:cNvPr id="8" name="Rectangle 7">
+            <a:extLst>
+              <a:ext uri="{FF2B5EF4-FFF2-40B4-BE49-F238E27FC236}">
+                <a16:creationId xmlns:a16="http://schemas.microsoft.com/office/drawing/2014/main" id="{B5AF03EA-1C37-4D8E-A994-051801E7BD86}"/>
+              </a:ext>
+            </a:extLst>
+          </p:cNvPr>
+          <p:cNvSpPr/>
+          <p:nvPr/>
+        </p:nvSpPr>
+        <p:spPr>
+          <a:xfrm>
+            <a:off x="6364339" y="2500291"/>
+            <a:ext cx="1863970" cy="870438"/>
+          </a:xfrm>
+          <a:prstGeom prst="rect">
+            <a:avLst/>
+          </a:prstGeom>
+          <a:noFill/>
+          <a:ln w="28575"/>
+        </p:spPr>
+        <p:style>
+          <a:lnRef idx="2">
+            <a:schemeClr val="accent1">
+              <a:shade val="50000"/>
+            </a:schemeClr>
+          </a:lnRef>
+          <a:fillRef idx="1">
+            <a:schemeClr val="accent1"/>
+          </a:fillRef>
+          <a:effectRef idx="0">
+            <a:schemeClr val="accent1"/>
+          </a:effectRef>
+          <a:fontRef idx="minor">
+            <a:schemeClr val="lt1"/>
+          </a:fontRef>
+        </p:style>
+        <p:txBody>
+          <a:bodyPr rtlCol="0" anchor="ctr"/>
+          <a:lstStyle/>
+          <a:p>
+            <a:pPr algn="ctr"/>
+            <a:endParaRPr lang="en-US"/>
+          </a:p>
+        </p:txBody>
+      </p:sp>
+      <p:cxnSp>
+        <p:nvCxnSpPr>
+          <p:cNvPr id="12" name="Connector: Elbow 11">
+            <a:extLst>
+              <a:ext uri="{FF2B5EF4-FFF2-40B4-BE49-F238E27FC236}">
+                <a16:creationId xmlns:a16="http://schemas.microsoft.com/office/drawing/2014/main" id="{B789C3D3-E18A-499D-A6CF-88DECED7F376}"/>
+              </a:ext>
+            </a:extLst>
+          </p:cNvPr>
+          <p:cNvCxnSpPr>
+            <a:cxnSpLocks/>
+            <a:stCxn id="13" idx="3"/>
+            <a:endCxn id="7" idx="2"/>
+          </p:cNvCxnSpPr>
+          <p:nvPr/>
+        </p:nvCxnSpPr>
+        <p:spPr>
+          <a:xfrm flipV="1">
+            <a:off x="3943635" y="3370729"/>
+            <a:ext cx="1602588" cy="1063869"/>
+          </a:xfrm>
+          <a:prstGeom prst="bentConnector2">
+            <a:avLst/>
+          </a:prstGeom>
+          <a:ln w="28575">
+            <a:tailEnd type="triangle"/>
+          </a:ln>
+        </p:spPr>
+        <p:style>
+          <a:lnRef idx="1">
+            <a:schemeClr val="accent1"/>
+          </a:lnRef>
+          <a:fillRef idx="0">
+            <a:schemeClr val="accent1"/>
+          </a:fillRef>
+          <a:effectRef idx="0">
+            <a:schemeClr val="accent1"/>
+          </a:effectRef>
+          <a:fontRef idx="minor">
+            <a:schemeClr val="tx1"/>
+          </a:fontRef>
+        </p:style>
+      </p:cxnSp>
+      <p:sp>
+        <p:nvSpPr>
+          <p:cNvPr id="13" name="TextBox 12">
+            <a:extLst>
+              <a:ext uri="{FF2B5EF4-FFF2-40B4-BE49-F238E27FC236}">
+                <a16:creationId xmlns:a16="http://schemas.microsoft.com/office/drawing/2014/main" id="{86864D1A-1FA8-440A-99A1-C855D648F2E7}"/>
+              </a:ext>
+            </a:extLst>
+          </p:cNvPr>
+          <p:cNvSpPr txBox="1"/>
+          <p:nvPr/>
+        </p:nvSpPr>
+        <p:spPr>
+          <a:xfrm>
+            <a:off x="2145322" y="4142210"/>
+            <a:ext cx="1798313" cy="584775"/>
+          </a:xfrm>
+          <a:prstGeom prst="rect">
+            <a:avLst/>
+          </a:prstGeom>
+          <a:noFill/>
+        </p:spPr>
+        <p:txBody>
+          <a:bodyPr wrap="none" rtlCol="0">
+            <a:spAutoFit/>
+          </a:bodyPr>
+          <a:lstStyle/>
+          <a:p>
+            <a:r>
+              <a:rPr lang="en-US" sz="3200" dirty="0"/>
+              <a:t>Preparing</a:t>
+            </a:r>
+          </a:p>
+        </p:txBody>
+      </p:sp>
+      <p:sp>
+        <p:nvSpPr>
+          <p:cNvPr id="20" name="TextBox 19">
+            <a:extLst>
+              <a:ext uri="{FF2B5EF4-FFF2-40B4-BE49-F238E27FC236}">
+                <a16:creationId xmlns:a16="http://schemas.microsoft.com/office/drawing/2014/main" id="{000CC2CD-5AD3-42FF-88A3-B61454E7C045}"/>
+              </a:ext>
+            </a:extLst>
+          </p:cNvPr>
+          <p:cNvSpPr txBox="1"/>
+          <p:nvPr/>
+        </p:nvSpPr>
+        <p:spPr>
+          <a:xfrm>
+            <a:off x="8039099" y="4142209"/>
+            <a:ext cx="2091791" cy="584775"/>
+          </a:xfrm>
+          <a:prstGeom prst="rect">
+            <a:avLst/>
+          </a:prstGeom>
+          <a:noFill/>
+        </p:spPr>
+        <p:txBody>
+          <a:bodyPr wrap="none" rtlCol="0">
+            <a:spAutoFit/>
+          </a:bodyPr>
+          <a:lstStyle/>
+          <a:p>
+            <a:r>
+              <a:rPr lang="en-US" sz="3200" dirty="0"/>
+              <a:t>Intervening</a:t>
+            </a:r>
+          </a:p>
+        </p:txBody>
+      </p:sp>
+      <p:cxnSp>
+        <p:nvCxnSpPr>
+          <p:cNvPr id="22" name="Connector: Elbow 21">
+            <a:extLst>
+              <a:ext uri="{FF2B5EF4-FFF2-40B4-BE49-F238E27FC236}">
+                <a16:creationId xmlns:a16="http://schemas.microsoft.com/office/drawing/2014/main" id="{DEADE9C3-8A16-41BA-A0EF-D9CC3177812F}"/>
+              </a:ext>
+            </a:extLst>
+          </p:cNvPr>
+          <p:cNvCxnSpPr>
+            <a:stCxn id="20" idx="1"/>
+            <a:endCxn id="8" idx="2"/>
+          </p:cNvCxnSpPr>
+          <p:nvPr/>
+        </p:nvCxnSpPr>
+        <p:spPr>
+          <a:xfrm rot="10800000">
+            <a:off x="7296325" y="3370729"/>
+            <a:ext cx="742775" cy="1063868"/>
+          </a:xfrm>
+          <a:prstGeom prst="bentConnector2">
+            <a:avLst/>
+          </a:prstGeom>
+          <a:ln w="28575">
+            <a:tailEnd type="triangle"/>
+          </a:ln>
+        </p:spPr>
+        <p:style>
+          <a:lnRef idx="1">
+            <a:schemeClr val="accent1"/>
+          </a:lnRef>
+          <a:fillRef idx="0">
+            <a:schemeClr val="accent1"/>
+          </a:fillRef>
+          <a:effectRef idx="0">
+            <a:schemeClr val="accent1"/>
+          </a:effectRef>
+          <a:fontRef idx="minor">
+            <a:schemeClr val="tx1"/>
+          </a:fontRef>
+        </p:style>
+      </p:cxnSp>
+    </p:spTree>
+    <p:extLst>
+      <p:ext uri="{BB962C8B-B14F-4D97-AF65-F5344CB8AC3E}">
+        <p14:creationId xmlns:p14="http://schemas.microsoft.com/office/powerpoint/2010/main" val="1280467599"/>
+      </p:ext>
+    </p:extLst>
+  </p:cSld>
+  <p:clrMapOvr>
+    <a:masterClrMapping/>
+  </p:clrMapOvr>
+  <mc:AlternateContent xmlns:mc="http://schemas.openxmlformats.org/markup-compatibility/2006" xmlns:p14="http://schemas.microsoft.com/office/powerpoint/2010/main">
+    <mc:Choice Requires="p14">
+      <p:transition spd="med" p14:dur="700">
+        <p:fade/>
+      </p:transition>
+    </mc:Choice>
+    <mc:Fallback xmlns="">
+      <p:transition spd="med">
+        <p:fade/>
+      </p:transition>
+    </mc:Fallback>
+  </mc:AlternateContent>
+</p:sld>
+</file>
+
+<file path=ppt/slides/slide35.xml><?xml version="1.0" encoding="utf-8"?>
+<p:sld xmlns:a="http://schemas.openxmlformats.org/drawingml/2006/main" xmlns:r="http://schemas.openxmlformats.org/officeDocument/2006/relationships" xmlns:p="http://schemas.openxmlformats.org/presentationml/2006/main">
+  <p:cSld>
+    <p:spTree>
+      <p:nvGrpSpPr>
+        <p:cNvPr id="1" name=""/>
+        <p:cNvGrpSpPr/>
+        <p:nvPr/>
+      </p:nvGrpSpPr>
+      <p:grpSpPr>
+        <a:xfrm>
+          <a:off x="0" y="0"/>
+          <a:ext cx="0" cy="0"/>
+          <a:chOff x="0" y="0"/>
+          <a:chExt cx="0" cy="0"/>
+        </a:xfrm>
+      </p:grpSpPr>
+      <p:pic>
+        <p:nvPicPr>
+          <p:cNvPr id="2050" name="Picture 2" descr="The figure shows the estimated impact of intervention on number of Ebola cases and daily number of beds in use in Liberia and Sierra Leone combined during 2014, with and without correction for underreporting, according to the EbolaResponse modeling tool. The EbolaResponse modeling tool was used to construct a scenario to illustrate how control and prevention interventions. The interventions affect the cumulative numbers of cases of Ebola and daily beds in use.">
+            <a:extLst>
+              <a:ext uri="{FF2B5EF4-FFF2-40B4-BE49-F238E27FC236}">
+                <a16:creationId xmlns:a16="http://schemas.microsoft.com/office/drawing/2014/main" id="{073158CA-AB7A-4E9F-BABD-E084C93B2154}"/>
+              </a:ext>
+            </a:extLst>
+          </p:cNvPr>
+          <p:cNvPicPr>
+            <a:picLocks noGrp="1" noChangeAspect="1" noChangeArrowheads="1"/>
+          </p:cNvPicPr>
+          <p:nvPr>
+            <p:ph idx="1"/>
+          </p:nvPr>
+        </p:nvPicPr>
+        <p:blipFill>
+          <a:blip r:embed="rId2">
+            <a:extLst>
+              <a:ext uri="{28A0092B-C50C-407E-A947-70E740481C1C}">
+                <a14:useLocalDpi xmlns:a14="http://schemas.microsoft.com/office/drawing/2010/main" val="0"/>
+              </a:ext>
+            </a:extLst>
+          </a:blip>
+          <a:srcRect/>
+          <a:stretch>
+            <a:fillRect/>
+          </a:stretch>
+        </p:blipFill>
+        <p:spPr bwMode="auto">
+          <a:xfrm>
+            <a:off x="2374492" y="3216484"/>
+            <a:ext cx="9669685" cy="3169444"/>
+          </a:xfrm>
+          <a:prstGeom prst="rect">
+            <a:avLst/>
+          </a:prstGeom>
+          <a:noFill/>
+          <a:extLst>
+            <a:ext uri="{909E8E84-426E-40DD-AFC4-6F175D3DCCD1}">
+              <a14:hiddenFill xmlns:a14="http://schemas.microsoft.com/office/drawing/2010/main">
+                <a:solidFill>
+                  <a:srgbClr val="FFFFFF"/>
+                </a:solidFill>
+              </a14:hiddenFill>
+            </a:ext>
+          </a:extLst>
+        </p:spPr>
+      </p:pic>
+      <p:pic>
+        <p:nvPicPr>
+          <p:cNvPr id="2052" name="Picture 4" descr="The figure shows the estimated number of Ebola cases and daily number of beds in use Liberia and Sierra Leone combined during 2014, with and without correction for underreporting, according to the EbolaResponse modeling tool.">
+            <a:extLst>
+              <a:ext uri="{FF2B5EF4-FFF2-40B4-BE49-F238E27FC236}">
+                <a16:creationId xmlns:a16="http://schemas.microsoft.com/office/drawing/2014/main" id="{1752E12F-9A04-47A1-887A-91093485728A}"/>
+              </a:ext>
+            </a:extLst>
+          </p:cNvPr>
+          <p:cNvPicPr>
+            <a:picLocks noChangeAspect="1" noChangeArrowheads="1"/>
+          </p:cNvPicPr>
+          <p:nvPr/>
+        </p:nvPicPr>
+        <p:blipFill>
+          <a:blip r:embed="rId3">
+            <a:extLst>
+              <a:ext uri="{28A0092B-C50C-407E-A947-70E740481C1C}">
+                <a14:useLocalDpi xmlns:a14="http://schemas.microsoft.com/office/drawing/2010/main" val="0"/>
+              </a:ext>
+            </a:extLst>
+          </a:blip>
+          <a:srcRect/>
+          <a:stretch>
+            <a:fillRect/>
+          </a:stretch>
+        </p:blipFill>
+        <p:spPr bwMode="auto">
+          <a:xfrm>
+            <a:off x="2374492" y="58565"/>
+            <a:ext cx="9612059" cy="3157919"/>
+          </a:xfrm>
+          <a:prstGeom prst="rect">
+            <a:avLst/>
+          </a:prstGeom>
+          <a:noFill/>
+          <a:extLst>
+            <a:ext uri="{909E8E84-426E-40DD-AFC4-6F175D3DCCD1}">
+              <a14:hiddenFill xmlns:a14="http://schemas.microsoft.com/office/drawing/2010/main">
+                <a:solidFill>
+                  <a:srgbClr val="FFFFFF"/>
+                </a:solidFill>
+              </a14:hiddenFill>
+            </a:ext>
+          </a:extLst>
+        </p:spPr>
+      </p:pic>
+      <p:sp>
+        <p:nvSpPr>
+          <p:cNvPr id="5" name="TextBox 4">
+            <a:extLst>
+              <a:ext uri="{FF2B5EF4-FFF2-40B4-BE49-F238E27FC236}">
+                <a16:creationId xmlns:a16="http://schemas.microsoft.com/office/drawing/2014/main" id="{563CF580-8CBD-466C-AF04-4FA92151C525}"/>
+              </a:ext>
+            </a:extLst>
+          </p:cNvPr>
+          <p:cNvSpPr txBox="1"/>
+          <p:nvPr/>
+        </p:nvSpPr>
+        <p:spPr>
+          <a:xfrm>
+            <a:off x="0" y="2800985"/>
+            <a:ext cx="1780953" cy="830997"/>
+          </a:xfrm>
+          <a:prstGeom prst="rect">
+            <a:avLst/>
+          </a:prstGeom>
+          <a:noFill/>
+        </p:spPr>
+        <p:txBody>
+          <a:bodyPr wrap="square" rtlCol="0">
+            <a:spAutoFit/>
+          </a:bodyPr>
+          <a:lstStyle/>
+          <a:p>
+            <a:pPr algn="ctr"/>
+            <a:r>
+              <a:rPr lang="en-US" sz="2400" dirty="0"/>
+              <a:t>Intervention</a:t>
+            </a:r>
+          </a:p>
+          <a:p>
+            <a:pPr algn="ctr"/>
+            <a:r>
+              <a:rPr lang="en-US" sz="2400" dirty="0"/>
+              <a:t>axis</a:t>
+            </a:r>
+          </a:p>
+        </p:txBody>
+      </p:sp>
+      <p:sp>
+        <p:nvSpPr>
+          <p:cNvPr id="6" name="Left Brace 5">
+            <a:extLst>
+              <a:ext uri="{FF2B5EF4-FFF2-40B4-BE49-F238E27FC236}">
+                <a16:creationId xmlns:a16="http://schemas.microsoft.com/office/drawing/2014/main" id="{FADF9DC5-CECD-4377-8CED-B2794DCB24ED}"/>
+              </a:ext>
+            </a:extLst>
+          </p:cNvPr>
+          <p:cNvSpPr/>
+          <p:nvPr/>
+        </p:nvSpPr>
+        <p:spPr>
+          <a:xfrm>
+            <a:off x="1935983" y="1164400"/>
+            <a:ext cx="324293" cy="4210493"/>
+          </a:xfrm>
+          <a:prstGeom prst="leftBrace">
+            <a:avLst/>
+          </a:prstGeom>
+          <a:ln w="38100">
+            <a:solidFill>
+              <a:srgbClr val="C00000"/>
+            </a:solidFill>
+          </a:ln>
+        </p:spPr>
+        <p:style>
+          <a:lnRef idx="1">
+            <a:schemeClr val="accent1"/>
+          </a:lnRef>
+          <a:fillRef idx="0">
+            <a:schemeClr val="accent1"/>
+          </a:fillRef>
+          <a:effectRef idx="0">
+            <a:schemeClr val="accent1"/>
+          </a:effectRef>
+          <a:fontRef idx="minor">
+            <a:schemeClr val="tx1"/>
+          </a:fontRef>
+        </p:style>
+        <p:txBody>
+          <a:bodyPr rtlCol="0" anchor="ctr"/>
+          <a:lstStyle/>
+          <a:p>
+            <a:pPr algn="ctr"/>
+            <a:endParaRPr lang="en-US"/>
+          </a:p>
+        </p:txBody>
+      </p:sp>
+      <p:sp>
+        <p:nvSpPr>
+          <p:cNvPr id="9" name="Left Brace 8">
+            <a:extLst>
+              <a:ext uri="{FF2B5EF4-FFF2-40B4-BE49-F238E27FC236}">
+                <a16:creationId xmlns:a16="http://schemas.microsoft.com/office/drawing/2014/main" id="{906BCB75-AB3C-4827-B92F-005C134282D3}"/>
+              </a:ext>
+            </a:extLst>
+          </p:cNvPr>
+          <p:cNvSpPr/>
+          <p:nvPr/>
+        </p:nvSpPr>
+        <p:spPr>
+          <a:xfrm rot="16200000">
+            <a:off x="9655361" y="4054684"/>
+            <a:ext cx="324293" cy="4210493"/>
+          </a:xfrm>
+          <a:prstGeom prst="leftBrace">
+            <a:avLst/>
+          </a:prstGeom>
+          <a:ln w="38100">
+            <a:solidFill>
+              <a:srgbClr val="C00000"/>
+            </a:solidFill>
+          </a:ln>
+        </p:spPr>
+        <p:style>
+          <a:lnRef idx="1">
+            <a:schemeClr val="accent1"/>
+          </a:lnRef>
+          <a:fillRef idx="0">
+            <a:schemeClr val="accent1"/>
+          </a:fillRef>
+          <a:effectRef idx="0">
+            <a:schemeClr val="accent1"/>
+          </a:effectRef>
+          <a:fontRef idx="minor">
+            <a:schemeClr val="tx1"/>
+          </a:fontRef>
+        </p:style>
+        <p:txBody>
+          <a:bodyPr rtlCol="0" anchor="ctr"/>
+          <a:lstStyle/>
+          <a:p>
+            <a:pPr algn="ctr"/>
+            <a:endParaRPr lang="en-US"/>
+          </a:p>
+        </p:txBody>
+      </p:sp>
+      <p:sp>
+        <p:nvSpPr>
+          <p:cNvPr id="7" name="TextBox 6">
+            <a:extLst>
+              <a:ext uri="{FF2B5EF4-FFF2-40B4-BE49-F238E27FC236}">
+                <a16:creationId xmlns:a16="http://schemas.microsoft.com/office/drawing/2014/main" id="{EF9B8FF9-1CE1-4F24-A62C-46F7345374A6}"/>
+              </a:ext>
+            </a:extLst>
+          </p:cNvPr>
+          <p:cNvSpPr txBox="1"/>
+          <p:nvPr/>
+        </p:nvSpPr>
+        <p:spPr>
+          <a:xfrm>
+            <a:off x="8720925" y="6396335"/>
+            <a:ext cx="2193164" cy="461665"/>
+          </a:xfrm>
+          <a:prstGeom prst="rect">
+            <a:avLst/>
+          </a:prstGeom>
+          <a:noFill/>
+        </p:spPr>
+        <p:txBody>
+          <a:bodyPr wrap="none" rtlCol="0">
+            <a:spAutoFit/>
+          </a:bodyPr>
+          <a:lstStyle/>
+          <a:p>
+            <a:r>
+              <a:rPr lang="en-US" sz="2400" dirty="0"/>
+              <a:t>preparation axis</a:t>
+            </a:r>
+          </a:p>
+        </p:txBody>
+      </p:sp>
+      <p:sp>
+        <p:nvSpPr>
+          <p:cNvPr id="13" name="TextBox 12">
+            <a:extLst>
+              <a:ext uri="{FF2B5EF4-FFF2-40B4-BE49-F238E27FC236}">
+                <a16:creationId xmlns:a16="http://schemas.microsoft.com/office/drawing/2014/main" id="{74B92BF0-C063-4881-9482-481C86C315EC}"/>
+              </a:ext>
+            </a:extLst>
+          </p:cNvPr>
+          <p:cNvSpPr txBox="1"/>
+          <p:nvPr/>
+        </p:nvSpPr>
+        <p:spPr>
+          <a:xfrm>
+            <a:off x="0" y="6550223"/>
+            <a:ext cx="2762295" cy="307777"/>
+          </a:xfrm>
+          <a:prstGeom prst="rect">
+            <a:avLst/>
+          </a:prstGeom>
+          <a:noFill/>
+        </p:spPr>
+        <p:txBody>
+          <a:bodyPr wrap="none" rtlCol="0">
+            <a:spAutoFit/>
+          </a:bodyPr>
+          <a:lstStyle/>
+          <a:p>
+            <a:r>
+              <a:rPr lang="en-US" sz="1400" dirty="0">
+                <a:latin typeface="Courier New" panose="02070309020205020404" pitchFamily="49" charset="0"/>
+                <a:cs typeface="Courier New" panose="02070309020205020404" pitchFamily="49" charset="0"/>
+              </a:rPr>
+              <a:t>Meltzer et al. MMWR 2014</a:t>
+            </a:r>
+          </a:p>
+        </p:txBody>
+      </p:sp>
+    </p:spTree>
+    <p:extLst>
+      <p:ext uri="{BB962C8B-B14F-4D97-AF65-F5344CB8AC3E}">
+        <p14:creationId xmlns:p14="http://schemas.microsoft.com/office/powerpoint/2010/main" val="2343905180"/>
+      </p:ext>
+    </p:extLst>
+  </p:cSld>
+  <p:clrMapOvr>
+    <a:masterClrMapping/>
+  </p:clrMapOvr>
+  <mc:AlternateContent xmlns:mc="http://schemas.openxmlformats.org/markup-compatibility/2006" xmlns:p14="http://schemas.microsoft.com/office/powerpoint/2010/main">
+    <mc:Choice Requires="p14">
+      <p:transition spd="med" p14:dur="700">
+        <p:fade/>
+      </p:transition>
+    </mc:Choice>
+    <mc:Fallback xmlns="">
+      <p:transition spd="med">
+        <p:fade/>
+      </p:transition>
+    </mc:Fallback>
+  </mc:AlternateContent>
+</p:sld>
+</file>
+
+<file path=ppt/slides/slide36.xml><?xml version="1.0" encoding="utf-8"?>
+<p:sld xmlns:a="http://schemas.openxmlformats.org/drawingml/2006/main" xmlns:r="http://schemas.openxmlformats.org/officeDocument/2006/relationships" xmlns:p="http://schemas.openxmlformats.org/presentationml/2006/main">
+  <p:cSld>
+    <p:spTree>
+      <p:nvGrpSpPr>
+        <p:cNvPr id="1" name=""/>
+        <p:cNvGrpSpPr/>
+        <p:nvPr/>
+      </p:nvGrpSpPr>
+      <p:grpSpPr>
+        <a:xfrm>
+          <a:off x="0" y="0"/>
+          <a:ext cx="0" cy="0"/>
+          <a:chOff x="0" y="0"/>
+          <a:chExt cx="0" cy="0"/>
+        </a:xfrm>
+      </p:grpSpPr>
+      <p:sp>
+        <p:nvSpPr>
+          <p:cNvPr id="2" name="Title 1">
+            <a:extLst>
+              <a:ext uri="{FF2B5EF4-FFF2-40B4-BE49-F238E27FC236}">
+                <a16:creationId xmlns:a16="http://schemas.microsoft.com/office/drawing/2014/main" id="{074F691B-EFA4-437F-B14F-D6015C14A46C}"/>
+              </a:ext>
+            </a:extLst>
+          </p:cNvPr>
+          <p:cNvSpPr>
+            <a:spLocks noGrp="1"/>
+          </p:cNvSpPr>
+          <p:nvPr>
+            <p:ph type="title"/>
+          </p:nvPr>
+        </p:nvSpPr>
+        <p:spPr>
+          <a:xfrm>
+            <a:off x="761999" y="2443565"/>
+            <a:ext cx="10811435" cy="1868486"/>
+          </a:xfrm>
+        </p:spPr>
+        <p:txBody>
+          <a:bodyPr>
+            <a:normAutofit fontScale="90000"/>
+          </a:bodyPr>
+          <a:lstStyle/>
+          <a:p>
+            <a:pPr algn="ctr"/>
+            <a:r>
+              <a:rPr lang="en-US" b="1" dirty="0">
+                <a:solidFill>
+                  <a:srgbClr val="8D372D"/>
+                </a:solidFill>
+                <a:latin typeface="+mn-lt"/>
+              </a:rPr>
+              <a:t>For Discussion: </a:t>
+            </a:r>
+            <a:r>
+              <a:rPr lang="en-US" b="1" dirty="0">
+                <a:solidFill>
+                  <a:srgbClr val="1B284F"/>
+                </a:solidFill>
+                <a:latin typeface="+mn-lt"/>
+              </a:rPr>
+              <a:t>Given that all scenarios are fundamentally counterfactual and should be evaluated in relation to how they inform action across multiple partners.</a:t>
+            </a:r>
+          </a:p>
+        </p:txBody>
+      </p:sp>
+    </p:spTree>
+    <p:extLst>
+      <p:ext uri="{BB962C8B-B14F-4D97-AF65-F5344CB8AC3E}">
+        <p14:creationId xmlns:p14="http://schemas.microsoft.com/office/powerpoint/2010/main" val="3164871708"/>
+      </p:ext>
+    </p:extLst>
+  </p:cSld>
+  <p:clrMapOvr>
+    <a:masterClrMapping/>
+  </p:clrMapOvr>
+  <mc:AlternateContent xmlns:mc="http://schemas.openxmlformats.org/markup-compatibility/2006" xmlns:p14="http://schemas.microsoft.com/office/powerpoint/2010/main">
+    <mc:Choice Requires="p14">
+      <p:transition spd="med" p14:dur="700">
+        <p:fade/>
+      </p:transition>
+    </mc:Choice>
+    <mc:Fallback xmlns="">
+      <p:transition spd="med">
+        <p:fade/>
+      </p:transition>
+    </mc:Fallback>
+  </mc:AlternateContent>
+</p:sld>
+</file>
+
+<file path=ppt/slides/slide37.xml><?xml version="1.0" encoding="utf-8"?>
 <p:sld xmlns:a="http://schemas.openxmlformats.org/drawingml/2006/main" xmlns:r="http://schemas.openxmlformats.org/officeDocument/2006/relationships" xmlns:p="http://schemas.openxmlformats.org/presentationml/2006/main">
   <p:cSld>
     <p:spTree>
@@ -16458,6 +19606,348 @@
           </p:sp>
         </mc:Fallback>
       </mc:AlternateContent>
+      <mc:AlternateContent xmlns:mc="http://schemas.openxmlformats.org/markup-compatibility/2006">
+        <mc:Choice xmlns:a14="http://schemas.microsoft.com/office/drawing/2010/main" Requires="a14">
+          <p:sp>
+            <p:nvSpPr>
+              <p:cNvPr id="8" name="TextBox 7">
+                <a:extLst>
+                  <a:ext uri="{FF2B5EF4-FFF2-40B4-BE49-F238E27FC236}">
+                    <a16:creationId xmlns:a16="http://schemas.microsoft.com/office/drawing/2014/main" id="{5B4B891F-C513-A733-1E12-D9B043505158}"/>
+                  </a:ext>
+                </a:extLst>
+              </p:cNvPr>
+              <p:cNvSpPr txBox="1"/>
+              <p:nvPr/>
+            </p:nvSpPr>
+            <p:spPr>
+              <a:xfrm>
+                <a:off x="3497580" y="2788920"/>
+                <a:ext cx="292772" cy="276999"/>
+              </a:xfrm>
+              <a:prstGeom prst="rect">
+                <a:avLst/>
+              </a:prstGeom>
+              <a:noFill/>
+            </p:spPr>
+            <p:txBody>
+              <a:bodyPr wrap="none" lIns="0" tIns="0" rIns="0" bIns="0" rtlCol="0">
+                <a:spAutoFit/>
+              </a:bodyPr>
+              <a:lstStyle/>
+              <a:p>
+                <a14:m>
+                  <m:oMathPara xmlns:m="http://schemas.openxmlformats.org/officeDocument/2006/math">
+                    <m:oMathParaPr>
+                      <m:jc m:val="centerGroup"/>
+                    </m:oMathParaPr>
+                    <m:oMath xmlns:m="http://schemas.openxmlformats.org/officeDocument/2006/math">
+                      <m:sSub>
+                        <m:sSubPr>
+                          <m:ctrlPr>
+                            <a:rPr lang="en-US" b="0" i="1" smtClean="0">
+                              <a:latin typeface="Cambria Math" panose="02040503050406030204" pitchFamily="18" charset="0"/>
+                            </a:rPr>
+                          </m:ctrlPr>
+                        </m:sSubPr>
+                        <m:e>
+                          <m:r>
+                            <a:rPr lang="en-US" b="0" i="1" smtClean="0">
+                              <a:latin typeface="Cambria Math" panose="02040503050406030204" pitchFamily="18" charset="0"/>
+                            </a:rPr>
+                            <m:t>𝑋</m:t>
+                          </m:r>
+                        </m:e>
+                        <m:sub>
+                          <m:r>
+                            <a:rPr lang="en-US" b="0" i="1" smtClean="0">
+                              <a:latin typeface="Cambria Math" panose="02040503050406030204" pitchFamily="18" charset="0"/>
+                            </a:rPr>
+                            <m:t>2</m:t>
+                          </m:r>
+                        </m:sub>
+                      </m:sSub>
+                    </m:oMath>
+                  </m:oMathPara>
+                </a14:m>
+                <a:endParaRPr lang="en-US" dirty="0"/>
+              </a:p>
+            </p:txBody>
+          </p:sp>
+        </mc:Choice>
+        <mc:Fallback>
+          <p:sp>
+            <p:nvSpPr>
+              <p:cNvPr id="8" name="TextBox 7">
+                <a:extLst>
+                  <a:ext uri="{FF2B5EF4-FFF2-40B4-BE49-F238E27FC236}">
+                    <a16:creationId xmlns:a16="http://schemas.microsoft.com/office/drawing/2014/main" id="{5B4B891F-C513-A733-1E12-D9B043505158}"/>
+                  </a:ext>
+                </a:extLst>
+              </p:cNvPr>
+              <p:cNvSpPr txBox="1">
+                <a:spLocks noRot="1" noChangeAspect="1" noMove="1" noResize="1" noEditPoints="1" noAdjustHandles="1" noChangeArrowheads="1" noChangeShapeType="1" noTextEdit="1"/>
+              </p:cNvSpPr>
+              <p:nvPr/>
+            </p:nvSpPr>
+            <p:spPr>
+              <a:xfrm>
+                <a:off x="3497580" y="2788920"/>
+                <a:ext cx="292772" cy="276999"/>
+              </a:xfrm>
+              <a:prstGeom prst="rect">
+                <a:avLst/>
+              </a:prstGeom>
+              <a:blipFill>
+                <a:blip r:embed="rId5"/>
+                <a:stretch>
+                  <a:fillRect l="-20833" r="-8333" b="-15556"/>
+                </a:stretch>
+              </a:blipFill>
+            </p:spPr>
+            <p:txBody>
+              <a:bodyPr/>
+              <a:lstStyle/>
+              <a:p>
+                <a:r>
+                  <a:rPr lang="en-US">
+                    <a:noFill/>
+                  </a:rPr>
+                  <a:t> </a:t>
+                </a:r>
+              </a:p>
+            </p:txBody>
+          </p:sp>
+        </mc:Fallback>
+      </mc:AlternateContent>
+      <mc:AlternateContent xmlns:mc="http://schemas.openxmlformats.org/markup-compatibility/2006">
+        <mc:Choice xmlns:a14="http://schemas.microsoft.com/office/drawing/2010/main" Requires="a14">
+          <p:sp>
+            <p:nvSpPr>
+              <p:cNvPr id="9" name="TextBox 8">
+                <a:extLst>
+                  <a:ext uri="{FF2B5EF4-FFF2-40B4-BE49-F238E27FC236}">
+                    <a16:creationId xmlns:a16="http://schemas.microsoft.com/office/drawing/2014/main" id="{65D8183B-F7EA-F9F8-89C1-7C4924D2B8DD}"/>
+                  </a:ext>
+                </a:extLst>
+              </p:cNvPr>
+              <p:cNvSpPr txBox="1"/>
+              <p:nvPr/>
+            </p:nvSpPr>
+            <p:spPr>
+              <a:xfrm>
+                <a:off x="2677391" y="2583873"/>
+                <a:ext cx="287451" cy="276999"/>
+              </a:xfrm>
+              <a:prstGeom prst="rect">
+                <a:avLst/>
+              </a:prstGeom>
+              <a:noFill/>
+            </p:spPr>
+            <p:txBody>
+              <a:bodyPr wrap="none" lIns="0" tIns="0" rIns="0" bIns="0" rtlCol="0">
+                <a:spAutoFit/>
+              </a:bodyPr>
+              <a:lstStyle/>
+              <a:p>
+                <a14:m>
+                  <m:oMathPara xmlns:m="http://schemas.openxmlformats.org/officeDocument/2006/math">
+                    <m:oMathParaPr>
+                      <m:jc m:val="centerGroup"/>
+                    </m:oMathParaPr>
+                    <m:oMath xmlns:m="http://schemas.openxmlformats.org/officeDocument/2006/math">
+                      <m:sSub>
+                        <m:sSubPr>
+                          <m:ctrlPr>
+                            <a:rPr lang="en-US" b="0" i="1" smtClean="0">
+                              <a:latin typeface="Cambria Math" panose="02040503050406030204" pitchFamily="18" charset="0"/>
+                            </a:rPr>
+                          </m:ctrlPr>
+                        </m:sSubPr>
+                        <m:e>
+                          <m:r>
+                            <a:rPr lang="en-US" b="0" i="1" smtClean="0">
+                              <a:latin typeface="Cambria Math" panose="02040503050406030204" pitchFamily="18" charset="0"/>
+                            </a:rPr>
+                            <m:t>𝑋</m:t>
+                          </m:r>
+                        </m:e>
+                        <m:sub>
+                          <m:r>
+                            <a:rPr lang="en-US" b="0" i="1" smtClean="0">
+                              <a:latin typeface="Cambria Math" panose="02040503050406030204" pitchFamily="18" charset="0"/>
+                            </a:rPr>
+                            <m:t>1</m:t>
+                          </m:r>
+                        </m:sub>
+                      </m:sSub>
+                    </m:oMath>
+                  </m:oMathPara>
+                </a14:m>
+                <a:endParaRPr lang="en-US" dirty="0"/>
+              </a:p>
+            </p:txBody>
+          </p:sp>
+        </mc:Choice>
+        <mc:Fallback>
+          <p:sp>
+            <p:nvSpPr>
+              <p:cNvPr id="9" name="TextBox 8">
+                <a:extLst>
+                  <a:ext uri="{FF2B5EF4-FFF2-40B4-BE49-F238E27FC236}">
+                    <a16:creationId xmlns:a16="http://schemas.microsoft.com/office/drawing/2014/main" id="{65D8183B-F7EA-F9F8-89C1-7C4924D2B8DD}"/>
+                  </a:ext>
+                </a:extLst>
+              </p:cNvPr>
+              <p:cNvSpPr txBox="1">
+                <a:spLocks noRot="1" noChangeAspect="1" noMove="1" noResize="1" noEditPoints="1" noAdjustHandles="1" noChangeArrowheads="1" noChangeShapeType="1" noTextEdit="1"/>
+              </p:cNvSpPr>
+              <p:nvPr/>
+            </p:nvSpPr>
+            <p:spPr>
+              <a:xfrm>
+                <a:off x="2677391" y="2583873"/>
+                <a:ext cx="287451" cy="276999"/>
+              </a:xfrm>
+              <a:prstGeom prst="rect">
+                <a:avLst/>
+              </a:prstGeom>
+              <a:blipFill>
+                <a:blip r:embed="rId6"/>
+                <a:stretch>
+                  <a:fillRect l="-19149" r="-10638" b="-15556"/>
+                </a:stretch>
+              </a:blipFill>
+            </p:spPr>
+            <p:txBody>
+              <a:bodyPr/>
+              <a:lstStyle/>
+              <a:p>
+                <a:r>
+                  <a:rPr lang="en-US">
+                    <a:noFill/>
+                  </a:rPr>
+                  <a:t> </a:t>
+                </a:r>
+              </a:p>
+            </p:txBody>
+          </p:sp>
+        </mc:Fallback>
+      </mc:AlternateContent>
+      <mc:AlternateContent xmlns:mc="http://schemas.openxmlformats.org/markup-compatibility/2006">
+        <mc:Choice xmlns:a14="http://schemas.microsoft.com/office/drawing/2010/main" Requires="a14">
+          <p:sp>
+            <p:nvSpPr>
+              <p:cNvPr id="10" name="TextBox 9">
+                <a:extLst>
+                  <a:ext uri="{FF2B5EF4-FFF2-40B4-BE49-F238E27FC236}">
+                    <a16:creationId xmlns:a16="http://schemas.microsoft.com/office/drawing/2014/main" id="{451AD6D5-55FA-A5A3-3A2D-17D802F9C4D2}"/>
+                  </a:ext>
+                </a:extLst>
+              </p:cNvPr>
+              <p:cNvSpPr txBox="1"/>
+              <p:nvPr/>
+            </p:nvSpPr>
+            <p:spPr>
+              <a:xfrm>
+                <a:off x="3004358" y="4024746"/>
+                <a:ext cx="287451" cy="276999"/>
+              </a:xfrm>
+              <a:prstGeom prst="rect">
+                <a:avLst/>
+              </a:prstGeom>
+              <a:noFill/>
+            </p:spPr>
+            <p:txBody>
+              <a:bodyPr wrap="none" lIns="0" tIns="0" rIns="0" bIns="0" rtlCol="0">
+                <a:spAutoFit/>
+              </a:bodyPr>
+              <a:lstStyle/>
+              <a:p>
+                <a14:m>
+                  <m:oMathPara xmlns:m="http://schemas.openxmlformats.org/officeDocument/2006/math">
+                    <m:oMathParaPr>
+                      <m:jc m:val="centerGroup"/>
+                    </m:oMathParaPr>
+                    <m:oMath xmlns:m="http://schemas.openxmlformats.org/officeDocument/2006/math">
+                      <m:sSub>
+                        <m:sSubPr>
+                          <m:ctrlPr>
+                            <a:rPr lang="en-US" b="0" i="1" smtClean="0">
+                              <a:latin typeface="Cambria Math" panose="02040503050406030204" pitchFamily="18" charset="0"/>
+                            </a:rPr>
+                          </m:ctrlPr>
+                        </m:sSubPr>
+                        <m:e>
+                          <m:r>
+                            <a:rPr lang="en-US" b="0" i="1" smtClean="0">
+                              <a:latin typeface="Cambria Math" panose="02040503050406030204" pitchFamily="18" charset="0"/>
+                            </a:rPr>
+                            <m:t>𝑋</m:t>
+                          </m:r>
+                        </m:e>
+                        <m:sub>
+                          <m:r>
+                            <a:rPr lang="en-US" b="0" i="1" smtClean="0">
+                              <a:latin typeface="Cambria Math" panose="02040503050406030204" pitchFamily="18" charset="0"/>
+                            </a:rPr>
+                            <m:t>1</m:t>
+                          </m:r>
+                        </m:sub>
+                      </m:sSub>
+                    </m:oMath>
+                  </m:oMathPara>
+                </a14:m>
+                <a:endParaRPr lang="en-US" dirty="0"/>
+              </a:p>
+            </p:txBody>
+          </p:sp>
+        </mc:Choice>
+        <mc:Fallback>
+          <p:sp>
+            <p:nvSpPr>
+              <p:cNvPr id="10" name="TextBox 9">
+                <a:extLst>
+                  <a:ext uri="{FF2B5EF4-FFF2-40B4-BE49-F238E27FC236}">
+                    <a16:creationId xmlns:a16="http://schemas.microsoft.com/office/drawing/2014/main" id="{451AD6D5-55FA-A5A3-3A2D-17D802F9C4D2}"/>
+                  </a:ext>
+                </a:extLst>
+              </p:cNvPr>
+              <p:cNvSpPr txBox="1">
+                <a:spLocks noRot="1" noChangeAspect="1" noMove="1" noResize="1" noEditPoints="1" noAdjustHandles="1" noChangeArrowheads="1" noChangeShapeType="1" noTextEdit="1"/>
+              </p:cNvSpPr>
+              <p:nvPr/>
+            </p:nvSpPr>
+            <p:spPr>
+              <a:xfrm>
+                <a:off x="3004358" y="4024746"/>
+                <a:ext cx="287451" cy="276999"/>
+              </a:xfrm>
+              <a:prstGeom prst="rect">
+                <a:avLst/>
+              </a:prstGeom>
+              <a:blipFill>
+                <a:blip r:embed="rId7"/>
+                <a:stretch>
+                  <a:fillRect l="-21277" r="-8511" b="-15217"/>
+                </a:stretch>
+              </a:blipFill>
+            </p:spPr>
+            <p:txBody>
+              <a:bodyPr/>
+              <a:lstStyle/>
+              <a:p>
+                <a:r>
+                  <a:rPr lang="en-US">
+                    <a:noFill/>
+                  </a:rPr>
+                  <a:t> </a:t>
+                </a:r>
+              </a:p>
+            </p:txBody>
+          </p:sp>
+        </mc:Fallback>
+      </mc:AlternateContent>
     </p:spTree>
     <p:extLst>
       <p:ext uri="{BB962C8B-B14F-4D97-AF65-F5344CB8AC3E}">
@@ -16471,7 +19961,7 @@
 </p:sld>
 </file>
 
-<file path=ppt/slides/slide3.xml><?xml version="1.0" encoding="utf-8"?>
+<file path=ppt/slides/slide4.xml><?xml version="1.0" encoding="utf-8"?>
 <p:sld xmlns:a="http://schemas.openxmlformats.org/drawingml/2006/main" xmlns:r="http://schemas.openxmlformats.org/officeDocument/2006/relationships" xmlns:p="http://schemas.openxmlformats.org/presentationml/2006/main">
   <p:cSld>
     <p:spTree>
@@ -16660,7 +20150,7 @@
 </p:sld>
 </file>
 
-<file path=ppt/slides/slide4.xml><?xml version="1.0" encoding="utf-8"?>
+<file path=ppt/slides/slide5.xml><?xml version="1.0" encoding="utf-8"?>
 <p:sld xmlns:a="http://schemas.openxmlformats.org/drawingml/2006/main" xmlns:r="http://schemas.openxmlformats.org/officeDocument/2006/relationships" xmlns:p="http://schemas.openxmlformats.org/presentationml/2006/main">
   <p:cSld>
     <p:spTree>
@@ -17000,7 +20490,7 @@
               </a:p>
               <a:p>
                 <a:r>
-                  <a:rPr lang="en-US" i="1" dirty="0"/>
+                  <a:rPr lang="en-US" dirty="0"/>
                   <a:t>The various </a:t>
                 </a:r>
                 <a14:m>
@@ -17008,32 +20498,35 @@
                     <m:sSub>
                       <m:sSubPr>
                         <m:ctrlPr>
-                          <a:rPr lang="en-US" b="0" i="1" smtClean="0">
+                          <a:rPr lang="en-US" b="0" smtClean="0">
                             <a:latin typeface="Cambria Math" panose="02040503050406030204" pitchFamily="18" charset="0"/>
                           </a:rPr>
                         </m:ctrlPr>
                       </m:sSubPr>
                       <m:e>
                         <m:r>
-                          <a:rPr lang="en-US" b="1" i="1" smtClean="0">
+                          <a:rPr lang="en-US" b="1" i="0" smtClean="0">
                             <a:latin typeface="Cambria Math" panose="02040503050406030204" pitchFamily="18" charset="0"/>
                           </a:rPr>
-                          <m:t>𝑿</m:t>
+                          <m:t>𝐗</m:t>
                         </m:r>
                       </m:e>
                       <m:sub>
                         <m:r>
-                          <a:rPr lang="en-US" b="0" i="1" smtClean="0">
+                          <m:rPr>
+                            <m:sty m:val="p"/>
+                          </m:rPr>
+                          <a:rPr lang="en-US" b="0" i="0" smtClean="0">
                             <a:latin typeface="Cambria Math" panose="02040503050406030204" pitchFamily="18" charset="0"/>
                           </a:rPr>
-                          <m:t>𝑖</m:t>
+                          <m:t>i</m:t>
                         </m:r>
                       </m:sub>
                     </m:sSub>
                   </m:oMath>
                 </a14:m>
                 <a:r>
-                  <a:rPr lang="en-US" i="1" dirty="0"/>
+                  <a:rPr lang="en-US" dirty="0"/>
                   <a:t> represent distinct hypotheses about the world that we wish to evaluate.</a:t>
                 </a:r>
               </a:p>
@@ -17547,7 +21040,932 @@
 </p:sld>
 </file>
 
-<file path=ppt/slides/slide5.xml><?xml version="1.0" encoding="utf-8"?>
+<file path=ppt/slides/slide6.xml><?xml version="1.0" encoding="utf-8"?>
+<p:sld xmlns:a="http://schemas.openxmlformats.org/drawingml/2006/main" xmlns:r="http://schemas.openxmlformats.org/officeDocument/2006/relationships" xmlns:p="http://schemas.openxmlformats.org/presentationml/2006/main">
+  <p:cSld>
+    <p:spTree>
+      <p:nvGrpSpPr>
+        <p:cNvPr id="1" name=""/>
+        <p:cNvGrpSpPr/>
+        <p:nvPr/>
+      </p:nvGrpSpPr>
+      <p:grpSpPr>
+        <a:xfrm>
+          <a:off x="0" y="0"/>
+          <a:ext cx="0" cy="0"/>
+          <a:chOff x="0" y="0"/>
+          <a:chExt cx="0" cy="0"/>
+        </a:xfrm>
+      </p:grpSpPr>
+      <p:sp>
+        <p:nvSpPr>
+          <p:cNvPr id="2" name="Title 1">
+            <a:extLst>
+              <a:ext uri="{FF2B5EF4-FFF2-40B4-BE49-F238E27FC236}">
+                <a16:creationId xmlns:a16="http://schemas.microsoft.com/office/drawing/2014/main" id="{C9C1E511-1C38-418B-9851-80B478C1987A}"/>
+              </a:ext>
+            </a:extLst>
+          </p:cNvPr>
+          <p:cNvSpPr>
+            <a:spLocks noGrp="1"/>
+          </p:cNvSpPr>
+          <p:nvPr>
+            <p:ph type="title"/>
+          </p:nvPr>
+        </p:nvSpPr>
+        <p:spPr/>
+        <p:txBody>
+          <a:bodyPr/>
+          <a:lstStyle/>
+          <a:p>
+            <a:pPr algn="ctr"/>
+            <a:r>
+              <a:rPr lang="en-US" dirty="0"/>
+              <a:t>Why would we want to do this?</a:t>
+            </a:r>
+          </a:p>
+        </p:txBody>
+      </p:sp>
+      <mc:AlternateContent xmlns:mc="http://schemas.openxmlformats.org/markup-compatibility/2006">
+        <mc:Choice xmlns:a14="http://schemas.microsoft.com/office/drawing/2010/main" Requires="a14">
+          <p:sp>
+            <p:nvSpPr>
+              <p:cNvPr id="3" name="Content Placeholder 2">
+                <a:extLst>
+                  <a:ext uri="{FF2B5EF4-FFF2-40B4-BE49-F238E27FC236}">
+                    <a16:creationId xmlns:a16="http://schemas.microsoft.com/office/drawing/2014/main" id="{93E3A38F-9F38-4D15-9593-5BF0A2645392}"/>
+                  </a:ext>
+                </a:extLst>
+              </p:cNvPr>
+              <p:cNvSpPr>
+                <a:spLocks noGrp="1"/>
+              </p:cNvSpPr>
+              <p:nvPr>
+                <p:ph idx="1"/>
+              </p:nvPr>
+            </p:nvSpPr>
+            <p:spPr>
+              <a:xfrm>
+                <a:off x="838200" y="1825625"/>
+                <a:ext cx="9061938" cy="4351338"/>
+              </a:xfrm>
+            </p:spPr>
+            <p:txBody>
+              <a:bodyPr>
+                <a:normAutofit/>
+              </a:bodyPr>
+              <a:lstStyle/>
+              <a:p>
+                <a14:m>
+                  <m:oMath xmlns:m="http://schemas.openxmlformats.org/officeDocument/2006/math">
+                    <m:r>
+                      <a:rPr lang="en-US" b="1" i="0" smtClean="0">
+                        <a:solidFill>
+                          <a:schemeClr val="accent2">
+                            <a:lumMod val="75000"/>
+                          </a:schemeClr>
+                        </a:solidFill>
+                        <a:latin typeface="Cambria Math" panose="02040503050406030204" pitchFamily="18" charset="0"/>
+                      </a:rPr>
+                      <m:t>𝐏𝐫</m:t>
+                    </m:r>
+                    <m:d>
+                      <m:dPr>
+                        <m:ctrlPr>
+                          <a:rPr lang="en-US" b="1" i="1" smtClean="0">
+                            <a:solidFill>
+                              <a:schemeClr val="accent2">
+                                <a:lumMod val="75000"/>
+                              </a:schemeClr>
+                            </a:solidFill>
+                            <a:latin typeface="Cambria Math" panose="02040503050406030204" pitchFamily="18" charset="0"/>
+                          </a:rPr>
+                        </m:ctrlPr>
+                      </m:dPr>
+                      <m:e>
+                        <m:sSub>
+                          <m:sSubPr>
+                            <m:ctrlPr>
+                              <a:rPr lang="en-US" b="1" i="1" smtClean="0">
+                                <a:solidFill>
+                                  <a:schemeClr val="accent2">
+                                    <a:lumMod val="75000"/>
+                                  </a:schemeClr>
+                                </a:solidFill>
+                                <a:latin typeface="Cambria Math" panose="02040503050406030204" pitchFamily="18" charset="0"/>
+                              </a:rPr>
+                            </m:ctrlPr>
+                          </m:sSubPr>
+                          <m:e>
+                            <m:r>
+                              <a:rPr lang="en-US" b="1" i="1" smtClean="0">
+                                <a:solidFill>
+                                  <a:schemeClr val="accent2">
+                                    <a:lumMod val="75000"/>
+                                  </a:schemeClr>
+                                </a:solidFill>
+                                <a:latin typeface="Cambria Math" panose="02040503050406030204" pitchFamily="18" charset="0"/>
+                              </a:rPr>
+                              <m:t>𝑿</m:t>
+                            </m:r>
+                          </m:e>
+                          <m:sub>
+                            <m:r>
+                              <a:rPr lang="en-US" b="1" i="1" smtClean="0">
+                                <a:solidFill>
+                                  <a:schemeClr val="accent2">
+                                    <a:lumMod val="75000"/>
+                                  </a:schemeClr>
+                                </a:solidFill>
+                                <a:latin typeface="Cambria Math" panose="02040503050406030204" pitchFamily="18" charset="0"/>
+                              </a:rPr>
+                              <m:t>𝒊</m:t>
+                            </m:r>
+                          </m:sub>
+                        </m:sSub>
+                      </m:e>
+                    </m:d>
+                  </m:oMath>
+                </a14:m>
+                <a:r>
+                  <a:rPr lang="en-US" b="1" dirty="0">
+                    <a:solidFill>
+                      <a:schemeClr val="accent2">
+                        <a:lumMod val="75000"/>
+                      </a:schemeClr>
+                    </a:solidFill>
+                  </a:rPr>
+                  <a:t> is modifiable</a:t>
+                </a:r>
+                <a:endParaRPr lang="en-US" b="1" i="1" dirty="0">
+                  <a:solidFill>
+                    <a:schemeClr val="accent2">
+                      <a:lumMod val="75000"/>
+                    </a:schemeClr>
+                  </a:solidFill>
+                  <a:latin typeface="Cambria Math" panose="02040503050406030204" pitchFamily="18" charset="0"/>
+                </a:endParaRPr>
+              </a:p>
+              <a:p>
+                <a14:m>
+                  <m:oMath xmlns:m="http://schemas.openxmlformats.org/officeDocument/2006/math">
+                    <m:r>
+                      <a:rPr lang="en-US" b="1" i="0" smtClean="0">
+                        <a:latin typeface="Cambria Math" panose="02040503050406030204" pitchFamily="18" charset="0"/>
+                      </a:rPr>
+                      <m:t>𝐏𝐫</m:t>
+                    </m:r>
+                    <m:d>
+                      <m:dPr>
+                        <m:ctrlPr>
+                          <a:rPr lang="en-US" b="1" i="1" smtClean="0">
+                            <a:latin typeface="Cambria Math" panose="02040503050406030204" pitchFamily="18" charset="0"/>
+                          </a:rPr>
+                        </m:ctrlPr>
+                      </m:dPr>
+                      <m:e>
+                        <m:sSub>
+                          <m:sSubPr>
+                            <m:ctrlPr>
+                              <a:rPr lang="en-US" b="1" i="1" smtClean="0">
+                                <a:latin typeface="Cambria Math" panose="02040503050406030204" pitchFamily="18" charset="0"/>
+                              </a:rPr>
+                            </m:ctrlPr>
+                          </m:sSubPr>
+                          <m:e>
+                            <m:r>
+                              <a:rPr lang="en-US" b="1" i="1" smtClean="0">
+                                <a:latin typeface="Cambria Math" panose="02040503050406030204" pitchFamily="18" charset="0"/>
+                              </a:rPr>
+                              <m:t>𝑿</m:t>
+                            </m:r>
+                          </m:e>
+                          <m:sub>
+                            <m:r>
+                              <a:rPr lang="en-US" b="1" i="1" smtClean="0">
+                                <a:latin typeface="Cambria Math" panose="02040503050406030204" pitchFamily="18" charset="0"/>
+                              </a:rPr>
+                              <m:t>𝒊</m:t>
+                            </m:r>
+                          </m:sub>
+                        </m:sSub>
+                      </m:e>
+                    </m:d>
+                  </m:oMath>
+                </a14:m>
+                <a:r>
+                  <a:rPr lang="en-US" b="1" dirty="0"/>
+                  <a:t> is so uncertain as not to be meaningfully </a:t>
+                </a:r>
+                <a:r>
+                  <a:rPr lang="en-US" dirty="0"/>
+                  <a:t>estimable at the timescales we need to plan  (hence </a:t>
+                </a:r>
+                <a14:m>
+                  <m:oMath xmlns:m="http://schemas.openxmlformats.org/officeDocument/2006/math">
+                    <m:func>
+                      <m:funcPr>
+                        <m:ctrlPr>
+                          <a:rPr lang="en-US" b="0" i="1" smtClean="0">
+                            <a:latin typeface="Cambria Math" panose="02040503050406030204" pitchFamily="18" charset="0"/>
+                          </a:rPr>
+                        </m:ctrlPr>
+                      </m:funcPr>
+                      <m:fName>
+                        <m:r>
+                          <m:rPr>
+                            <m:sty m:val="p"/>
+                          </m:rPr>
+                          <a:rPr lang="en-US" b="0" i="0" smtClean="0">
+                            <a:latin typeface="Cambria Math" panose="02040503050406030204" pitchFamily="18" charset="0"/>
+                          </a:rPr>
+                          <m:t>Pr</m:t>
+                        </m:r>
+                      </m:fName>
+                      <m:e>
+                        <m:d>
+                          <m:dPr>
+                            <m:ctrlPr>
+                              <a:rPr lang="en-US" b="0" i="1" smtClean="0">
+                                <a:latin typeface="Cambria Math" panose="02040503050406030204" pitchFamily="18" charset="0"/>
+                              </a:rPr>
+                            </m:ctrlPr>
+                          </m:dPr>
+                          <m:e>
+                            <m:sSub>
+                              <m:sSubPr>
+                                <m:ctrlPr>
+                                  <a:rPr lang="en-US" b="0" i="1" smtClean="0">
+                                    <a:latin typeface="Cambria Math" panose="02040503050406030204" pitchFamily="18" charset="0"/>
+                                  </a:rPr>
+                                </m:ctrlPr>
+                              </m:sSubPr>
+                              <m:e>
+                                <m:r>
+                                  <a:rPr lang="en-US" b="1" i="1" smtClean="0">
+                                    <a:latin typeface="Cambria Math" panose="02040503050406030204" pitchFamily="18" charset="0"/>
+                                  </a:rPr>
+                                  <m:t>𝑿</m:t>
+                                </m:r>
+                              </m:e>
+                              <m:sub>
+                                <m:r>
+                                  <a:rPr lang="en-US" b="0" i="1" smtClean="0">
+                                    <a:latin typeface="Cambria Math" panose="02040503050406030204" pitchFamily="18" charset="0"/>
+                                  </a:rPr>
+                                  <m:t>𝑖</m:t>
+                                </m:r>
+                              </m:sub>
+                            </m:sSub>
+                          </m:e>
+                        </m:d>
+                      </m:e>
+                    </m:func>
+                  </m:oMath>
+                </a14:m>
+                <a:r>
+                  <a:rPr lang="en-US" dirty="0"/>
+                  <a:t> becomes so uncertain to not be meaningful).</a:t>
+                </a:r>
+              </a:p>
+              <a:p>
+                <a:pPr lvl="1"/>
+                <a:r>
+                  <a:rPr lang="en-US" dirty="0"/>
+                  <a:t>Or the space of </a:t>
+                </a:r>
+                <a14:m>
+                  <m:oMath xmlns:m="http://schemas.openxmlformats.org/officeDocument/2006/math">
+                    <m:r>
+                      <a:rPr lang="en-US" b="1" i="1">
+                        <a:latin typeface="Cambria Math" panose="02040503050406030204" pitchFamily="18" charset="0"/>
+                        <a:ea typeface="Cambria Math" panose="02040503050406030204" pitchFamily="18" charset="0"/>
+                      </a:rPr>
+                      <m:t>𝓧</m:t>
+                    </m:r>
+                  </m:oMath>
+                </a14:m>
+                <a:r>
+                  <a:rPr lang="en-US" dirty="0"/>
+                  <a:t> is so expansive to have the same effect.</a:t>
+                </a:r>
+              </a:p>
+              <a:p>
+                <a14:m>
+                  <m:oMath xmlns:m="http://schemas.openxmlformats.org/officeDocument/2006/math">
+                    <m:r>
+                      <a:rPr lang="en-US" b="1" i="0" smtClean="0">
+                        <a:latin typeface="Cambria Math" panose="02040503050406030204" pitchFamily="18" charset="0"/>
+                      </a:rPr>
+                      <m:t>𝐏𝐫</m:t>
+                    </m:r>
+                    <m:d>
+                      <m:dPr>
+                        <m:ctrlPr>
+                          <a:rPr lang="en-US" b="1" i="1" smtClean="0">
+                            <a:latin typeface="Cambria Math" panose="02040503050406030204" pitchFamily="18" charset="0"/>
+                          </a:rPr>
+                        </m:ctrlPr>
+                      </m:dPr>
+                      <m:e>
+                        <m:sSub>
+                          <m:sSubPr>
+                            <m:ctrlPr>
+                              <a:rPr lang="en-US" b="1" i="1" smtClean="0">
+                                <a:latin typeface="Cambria Math" panose="02040503050406030204" pitchFamily="18" charset="0"/>
+                              </a:rPr>
+                            </m:ctrlPr>
+                          </m:sSubPr>
+                          <m:e>
+                            <m:r>
+                              <a:rPr lang="en-US" b="1" i="1" smtClean="0">
+                                <a:latin typeface="Cambria Math" panose="02040503050406030204" pitchFamily="18" charset="0"/>
+                              </a:rPr>
+                              <m:t>𝑿</m:t>
+                            </m:r>
+                          </m:e>
+                          <m:sub>
+                            <m:r>
+                              <a:rPr lang="en-US" b="1" i="1" smtClean="0">
+                                <a:latin typeface="Cambria Math" panose="02040503050406030204" pitchFamily="18" charset="0"/>
+                              </a:rPr>
+                              <m:t>𝒊</m:t>
+                            </m:r>
+                          </m:sub>
+                        </m:sSub>
+                      </m:e>
+                    </m:d>
+                  </m:oMath>
+                </a14:m>
+                <a:r>
+                  <a:rPr lang="en-US" b="1" dirty="0"/>
+                  <a:t> will be informed by future events</a:t>
+                </a:r>
+                <a:r>
+                  <a:rPr lang="en-US" dirty="0"/>
+                  <a:t>.</a:t>
+                </a:r>
+              </a:p>
+              <a:p>
+                <a:pPr lvl="1"/>
+                <a:r>
+                  <a:rPr lang="en-US" dirty="0"/>
+                  <a:t>E.g., we are in a situation where we want to develop conditional response plans.</a:t>
+                </a:r>
+              </a:p>
+              <a:p>
+                <a:r>
+                  <a:rPr lang="en-US" dirty="0"/>
+                  <a:t>The various </a:t>
+                </a:r>
+                <a14:m>
+                  <m:oMath xmlns:m="http://schemas.openxmlformats.org/officeDocument/2006/math">
+                    <m:sSub>
+                      <m:sSubPr>
+                        <m:ctrlPr>
+                          <a:rPr lang="en-US" b="0" smtClean="0">
+                            <a:latin typeface="Cambria Math" panose="02040503050406030204" pitchFamily="18" charset="0"/>
+                          </a:rPr>
+                        </m:ctrlPr>
+                      </m:sSubPr>
+                      <m:e>
+                        <m:r>
+                          <a:rPr lang="en-US" b="1" i="0" smtClean="0">
+                            <a:latin typeface="Cambria Math" panose="02040503050406030204" pitchFamily="18" charset="0"/>
+                          </a:rPr>
+                          <m:t>𝐗</m:t>
+                        </m:r>
+                      </m:e>
+                      <m:sub>
+                        <m:r>
+                          <m:rPr>
+                            <m:sty m:val="p"/>
+                          </m:rPr>
+                          <a:rPr lang="en-US" b="0" i="0" smtClean="0">
+                            <a:latin typeface="Cambria Math" panose="02040503050406030204" pitchFamily="18" charset="0"/>
+                          </a:rPr>
+                          <m:t>i</m:t>
+                        </m:r>
+                      </m:sub>
+                    </m:sSub>
+                  </m:oMath>
+                </a14:m>
+                <a:r>
+                  <a:rPr lang="en-US" dirty="0"/>
+                  <a:t> represent distinct hypotheses about the world that we wish to evaluate.</a:t>
+                </a:r>
+              </a:p>
+            </p:txBody>
+          </p:sp>
+        </mc:Choice>
+        <mc:Fallback>
+          <p:sp>
+            <p:nvSpPr>
+              <p:cNvPr id="3" name="Content Placeholder 2">
+                <a:extLst>
+                  <a:ext uri="{FF2B5EF4-FFF2-40B4-BE49-F238E27FC236}">
+                    <a16:creationId xmlns:a16="http://schemas.microsoft.com/office/drawing/2014/main" id="{93E3A38F-9F38-4D15-9593-5BF0A2645392}"/>
+                  </a:ext>
+                </a:extLst>
+              </p:cNvPr>
+              <p:cNvSpPr>
+                <a:spLocks noGrp="1" noRot="1" noChangeAspect="1" noMove="1" noResize="1" noEditPoints="1" noAdjustHandles="1" noChangeArrowheads="1" noChangeShapeType="1" noTextEdit="1"/>
+              </p:cNvSpPr>
+              <p:nvPr>
+                <p:ph idx="1"/>
+              </p:nvPr>
+            </p:nvSpPr>
+            <p:spPr>
+              <a:xfrm>
+                <a:off x="838200" y="1825625"/>
+                <a:ext cx="9061938" cy="4351338"/>
+              </a:xfrm>
+              <a:blipFill>
+                <a:blip r:embed="rId2"/>
+                <a:stretch>
+                  <a:fillRect l="-1211" t="-2381" b="-2241"/>
+                </a:stretch>
+              </a:blipFill>
+            </p:spPr>
+            <p:txBody>
+              <a:bodyPr/>
+              <a:lstStyle/>
+              <a:p>
+                <a:r>
+                  <a:rPr lang="en-US">
+                    <a:noFill/>
+                  </a:rPr>
+                  <a:t> </a:t>
+                </a:r>
+              </a:p>
+            </p:txBody>
+          </p:sp>
+        </mc:Fallback>
+      </mc:AlternateContent>
+      <mc:AlternateContent xmlns:mc="http://schemas.openxmlformats.org/markup-compatibility/2006">
+        <mc:Choice xmlns:a14="http://schemas.microsoft.com/office/drawing/2010/main" Requires="a14">
+          <p:sp>
+            <p:nvSpPr>
+              <p:cNvPr id="4" name="TextBox 3">
+                <a:extLst>
+                  <a:ext uri="{FF2B5EF4-FFF2-40B4-BE49-F238E27FC236}">
+                    <a16:creationId xmlns:a16="http://schemas.microsoft.com/office/drawing/2014/main" id="{C857439C-E82E-42CB-A9C3-7C39AC68E795}"/>
+                  </a:ext>
+                </a:extLst>
+              </p:cNvPr>
+              <p:cNvSpPr txBox="1"/>
+              <p:nvPr/>
+            </p:nvSpPr>
+            <p:spPr>
+              <a:xfrm>
+                <a:off x="10106758" y="2197893"/>
+                <a:ext cx="1805173" cy="2462213"/>
+              </a:xfrm>
+              <a:prstGeom prst="rect">
+                <a:avLst/>
+              </a:prstGeom>
+              <a:noFill/>
+            </p:spPr>
+            <p:txBody>
+              <a:bodyPr wrap="none" lIns="0" tIns="0" rIns="0" bIns="0" rtlCol="0">
+                <a:spAutoFit/>
+              </a:bodyPr>
+              <a:lstStyle/>
+              <a:p>
+                <a:pPr/>
+                <a14:m>
+                  <m:oMathPara xmlns:m="http://schemas.openxmlformats.org/officeDocument/2006/math">
+                    <m:oMathParaPr>
+                      <m:jc m:val="centerGroup"/>
+                    </m:oMathParaPr>
+                    <m:oMath xmlns:m="http://schemas.openxmlformats.org/officeDocument/2006/math">
+                      <m:func>
+                        <m:funcPr>
+                          <m:ctrlPr>
+                            <a:rPr lang="en-US" sz="3200" b="0" i="1" smtClean="0">
+                              <a:latin typeface="Cambria Math" panose="02040503050406030204" pitchFamily="18" charset="0"/>
+                            </a:rPr>
+                          </m:ctrlPr>
+                        </m:funcPr>
+                        <m:fName>
+                          <m:r>
+                            <m:rPr>
+                              <m:sty m:val="p"/>
+                            </m:rPr>
+                            <a:rPr lang="en-US" sz="3200" b="0" i="0" smtClean="0">
+                              <a:latin typeface="Cambria Math" panose="02040503050406030204" pitchFamily="18" charset="0"/>
+                            </a:rPr>
+                            <m:t>Pr</m:t>
+                          </m:r>
+                        </m:fName>
+                        <m:e>
+                          <m:d>
+                            <m:dPr>
+                              <m:ctrlPr>
+                                <a:rPr lang="en-US" sz="3200" b="0" i="1" smtClean="0">
+                                  <a:latin typeface="Cambria Math" panose="02040503050406030204" pitchFamily="18" charset="0"/>
+                                </a:rPr>
+                              </m:ctrlPr>
+                            </m:dPr>
+                            <m:e>
+                              <m:sSub>
+                                <m:sSubPr>
+                                  <m:ctrlPr>
+                                    <a:rPr lang="en-US" sz="3200" b="0" i="1" smtClean="0">
+                                      <a:latin typeface="Cambria Math" panose="02040503050406030204" pitchFamily="18" charset="0"/>
+                                    </a:rPr>
+                                  </m:ctrlPr>
+                                </m:sSubPr>
+                                <m:e>
+                                  <m:r>
+                                    <a:rPr lang="en-US" sz="3200" b="0" i="1" smtClean="0">
+                                      <a:latin typeface="Cambria Math" panose="02040503050406030204" pitchFamily="18" charset="0"/>
+                                    </a:rPr>
+                                    <m:t>𝑦</m:t>
+                                  </m:r>
+                                </m:e>
+                                <m:sub>
+                                  <m:r>
+                                    <a:rPr lang="en-US" sz="3200" b="0" i="1" smtClean="0">
+                                      <a:latin typeface="Cambria Math" panose="02040503050406030204" pitchFamily="18" charset="0"/>
+                                    </a:rPr>
+                                    <m:t>𝑖</m:t>
+                                  </m:r>
+                                </m:sub>
+                              </m:sSub>
+                              <m:r>
+                                <a:rPr lang="en-US" sz="3200" b="0" i="1" smtClean="0">
+                                  <a:latin typeface="Cambria Math" panose="02040503050406030204" pitchFamily="18" charset="0"/>
+                                </a:rPr>
+                                <m:t>|</m:t>
+                              </m:r>
+                              <m:sSub>
+                                <m:sSubPr>
+                                  <m:ctrlPr>
+                                    <a:rPr lang="en-US" sz="3200" b="0" i="1" smtClean="0">
+                                      <a:latin typeface="Cambria Math" panose="02040503050406030204" pitchFamily="18" charset="0"/>
+                                    </a:rPr>
+                                  </m:ctrlPr>
+                                </m:sSubPr>
+                                <m:e>
+                                  <m:r>
+                                    <a:rPr lang="en-US" sz="3200" b="1" i="1" smtClean="0">
+                                      <a:latin typeface="Cambria Math" panose="02040503050406030204" pitchFamily="18" charset="0"/>
+                                    </a:rPr>
+                                    <m:t>𝑿</m:t>
+                                  </m:r>
+                                </m:e>
+                                <m:sub>
+                                  <m:r>
+                                    <a:rPr lang="en-US" sz="3200" b="0" i="1" smtClean="0">
+                                      <a:latin typeface="Cambria Math" panose="02040503050406030204" pitchFamily="18" charset="0"/>
+                                    </a:rPr>
+                                    <m:t>1</m:t>
+                                  </m:r>
+                                </m:sub>
+                              </m:sSub>
+                            </m:e>
+                          </m:d>
+                        </m:e>
+                      </m:func>
+                    </m:oMath>
+                    <m:oMath xmlns:m="http://schemas.openxmlformats.org/officeDocument/2006/math">
+                      <m:func>
+                        <m:funcPr>
+                          <m:ctrlPr>
+                            <a:rPr lang="en-US" sz="3200" b="0" i="1" smtClean="0">
+                              <a:latin typeface="Cambria Math" panose="02040503050406030204" pitchFamily="18" charset="0"/>
+                            </a:rPr>
+                          </m:ctrlPr>
+                        </m:funcPr>
+                        <m:fName>
+                          <m:r>
+                            <m:rPr>
+                              <m:sty m:val="p"/>
+                            </m:rPr>
+                            <a:rPr lang="en-US" sz="3200" b="0" i="0" smtClean="0">
+                              <a:latin typeface="Cambria Math" panose="02040503050406030204" pitchFamily="18" charset="0"/>
+                            </a:rPr>
+                            <m:t>Pr</m:t>
+                          </m:r>
+                        </m:fName>
+                        <m:e>
+                          <m:r>
+                            <a:rPr lang="en-US" sz="3200" b="0" i="1" smtClean="0">
+                              <a:latin typeface="Cambria Math" panose="02040503050406030204" pitchFamily="18" charset="0"/>
+                            </a:rPr>
+                            <m:t>(</m:t>
+                          </m:r>
+                          <m:sSub>
+                            <m:sSubPr>
+                              <m:ctrlPr>
+                                <a:rPr lang="en-US" sz="3200" b="0" i="1" smtClean="0">
+                                  <a:latin typeface="Cambria Math" panose="02040503050406030204" pitchFamily="18" charset="0"/>
+                                </a:rPr>
+                              </m:ctrlPr>
+                            </m:sSubPr>
+                            <m:e>
+                              <m:r>
+                                <a:rPr lang="en-US" sz="3200" b="0" i="1" smtClean="0">
+                                  <a:latin typeface="Cambria Math" panose="02040503050406030204" pitchFamily="18" charset="0"/>
+                                </a:rPr>
+                                <m:t>𝑦</m:t>
+                              </m:r>
+                            </m:e>
+                            <m:sub>
+                              <m:r>
+                                <a:rPr lang="en-US" sz="3200" b="0" i="1" smtClean="0">
+                                  <a:latin typeface="Cambria Math" panose="02040503050406030204" pitchFamily="18" charset="0"/>
+                                </a:rPr>
+                                <m:t>𝑖</m:t>
+                              </m:r>
+                            </m:sub>
+                          </m:sSub>
+                          <m:r>
+                            <a:rPr lang="en-US" sz="3200" b="0" i="1" smtClean="0">
+                              <a:latin typeface="Cambria Math" panose="02040503050406030204" pitchFamily="18" charset="0"/>
+                            </a:rPr>
+                            <m:t>|</m:t>
+                          </m:r>
+                          <m:sSub>
+                            <m:sSubPr>
+                              <m:ctrlPr>
+                                <a:rPr lang="en-US" sz="3200" b="0" i="1" smtClean="0">
+                                  <a:latin typeface="Cambria Math" panose="02040503050406030204" pitchFamily="18" charset="0"/>
+                                </a:rPr>
+                              </m:ctrlPr>
+                            </m:sSubPr>
+                            <m:e>
+                              <m:r>
+                                <a:rPr lang="en-US" sz="3200" b="1" i="1" smtClean="0">
+                                  <a:latin typeface="Cambria Math" panose="02040503050406030204" pitchFamily="18" charset="0"/>
+                                </a:rPr>
+                                <m:t>𝑿</m:t>
+                              </m:r>
+                            </m:e>
+                            <m:sub>
+                              <m:r>
+                                <a:rPr lang="en-US" sz="3200" b="0" i="1" smtClean="0">
+                                  <a:latin typeface="Cambria Math" panose="02040503050406030204" pitchFamily="18" charset="0"/>
+                                </a:rPr>
+                                <m:t>2</m:t>
+                              </m:r>
+                            </m:sub>
+                          </m:sSub>
+                        </m:e>
+                      </m:func>
+                      <m:r>
+                        <a:rPr lang="en-US" sz="3200" b="0" i="1" smtClean="0">
+                          <a:latin typeface="Cambria Math" panose="02040503050406030204" pitchFamily="18" charset="0"/>
+                        </a:rPr>
+                        <m:t>)</m:t>
+                      </m:r>
+                    </m:oMath>
+                    <m:oMath xmlns:m="http://schemas.openxmlformats.org/officeDocument/2006/math">
+                      <m:func>
+                        <m:funcPr>
+                          <m:ctrlPr>
+                            <a:rPr lang="en-US" sz="3200" b="0" i="1" smtClean="0">
+                              <a:latin typeface="Cambria Math" panose="02040503050406030204" pitchFamily="18" charset="0"/>
+                            </a:rPr>
+                          </m:ctrlPr>
+                        </m:funcPr>
+                        <m:fName>
+                          <m:r>
+                            <m:rPr>
+                              <m:sty m:val="p"/>
+                            </m:rPr>
+                            <a:rPr lang="en-US" sz="3200" b="0" i="0" smtClean="0">
+                              <a:latin typeface="Cambria Math" panose="02040503050406030204" pitchFamily="18" charset="0"/>
+                            </a:rPr>
+                            <m:t>Pr</m:t>
+                          </m:r>
+                        </m:fName>
+                        <m:e>
+                          <m:r>
+                            <a:rPr lang="en-US" sz="3200" b="0" i="1" smtClean="0">
+                              <a:latin typeface="Cambria Math" panose="02040503050406030204" pitchFamily="18" charset="0"/>
+                            </a:rPr>
+                            <m:t>(</m:t>
+                          </m:r>
+                          <m:sSub>
+                            <m:sSubPr>
+                              <m:ctrlPr>
+                                <a:rPr lang="en-US" sz="3200" b="0" i="1" smtClean="0">
+                                  <a:latin typeface="Cambria Math" panose="02040503050406030204" pitchFamily="18" charset="0"/>
+                                </a:rPr>
+                              </m:ctrlPr>
+                            </m:sSubPr>
+                            <m:e>
+                              <m:r>
+                                <a:rPr lang="en-US" sz="3200" b="0" i="1" smtClean="0">
+                                  <a:latin typeface="Cambria Math" panose="02040503050406030204" pitchFamily="18" charset="0"/>
+                                </a:rPr>
+                                <m:t>𝑦</m:t>
+                              </m:r>
+                            </m:e>
+                            <m:sub>
+                              <m:r>
+                                <a:rPr lang="en-US" sz="3200" b="0" i="1" smtClean="0">
+                                  <a:latin typeface="Cambria Math" panose="02040503050406030204" pitchFamily="18" charset="0"/>
+                                </a:rPr>
+                                <m:t>𝑖</m:t>
+                              </m:r>
+                            </m:sub>
+                          </m:sSub>
+                          <m:r>
+                            <a:rPr lang="en-US" sz="3200" b="0" i="1" smtClean="0">
+                              <a:latin typeface="Cambria Math" panose="02040503050406030204" pitchFamily="18" charset="0"/>
+                            </a:rPr>
+                            <m:t>|</m:t>
+                          </m:r>
+                          <m:sSub>
+                            <m:sSubPr>
+                              <m:ctrlPr>
+                                <a:rPr lang="en-US" sz="3200" b="0" i="1" smtClean="0">
+                                  <a:latin typeface="Cambria Math" panose="02040503050406030204" pitchFamily="18" charset="0"/>
+                                </a:rPr>
+                              </m:ctrlPr>
+                            </m:sSubPr>
+                            <m:e>
+                              <m:r>
+                                <a:rPr lang="en-US" sz="3200" b="1" i="1" smtClean="0">
+                                  <a:latin typeface="Cambria Math" panose="02040503050406030204" pitchFamily="18" charset="0"/>
+                                </a:rPr>
+                                <m:t>𝑿</m:t>
+                              </m:r>
+                            </m:e>
+                            <m:sub>
+                              <m:r>
+                                <a:rPr lang="en-US" sz="3200" b="0" i="1" smtClean="0">
+                                  <a:latin typeface="Cambria Math" panose="02040503050406030204" pitchFamily="18" charset="0"/>
+                                </a:rPr>
+                                <m:t>3</m:t>
+                              </m:r>
+                            </m:sub>
+                          </m:sSub>
+                        </m:e>
+                      </m:func>
+                      <m:r>
+                        <a:rPr lang="en-US" sz="3200" b="0" i="1" smtClean="0">
+                          <a:latin typeface="Cambria Math" panose="02040503050406030204" pitchFamily="18" charset="0"/>
+                        </a:rPr>
+                        <m:t>)</m:t>
+                      </m:r>
+                    </m:oMath>
+                    <m:oMath xmlns:m="http://schemas.openxmlformats.org/officeDocument/2006/math">
+                      <m:r>
+                        <a:rPr lang="en-US" sz="3200" b="0" i="1" smtClean="0">
+                          <a:latin typeface="Cambria Math" panose="02040503050406030204" pitchFamily="18" charset="0"/>
+                        </a:rPr>
+                        <m:t>…</m:t>
+                      </m:r>
+                    </m:oMath>
+                    <m:oMath xmlns:m="http://schemas.openxmlformats.org/officeDocument/2006/math">
+                      <m:r>
+                        <m:rPr>
+                          <m:sty m:val="p"/>
+                        </m:rPr>
+                        <a:rPr lang="en-US" sz="3200" b="0" i="0" smtClean="0">
+                          <a:latin typeface="Cambria Math" panose="02040503050406030204" pitchFamily="18" charset="0"/>
+                        </a:rPr>
+                        <m:t>Pr</m:t>
+                      </m:r>
+                      <m:r>
+                        <a:rPr lang="en-US" sz="3200" b="0" i="1" smtClean="0">
+                          <a:latin typeface="Cambria Math" panose="02040503050406030204" pitchFamily="18" charset="0"/>
+                        </a:rPr>
+                        <m:t>⁡(</m:t>
+                      </m:r>
+                      <m:sSub>
+                        <m:sSubPr>
+                          <m:ctrlPr>
+                            <a:rPr lang="en-US" sz="3200" b="0" i="1" smtClean="0">
+                              <a:latin typeface="Cambria Math" panose="02040503050406030204" pitchFamily="18" charset="0"/>
+                            </a:rPr>
+                          </m:ctrlPr>
+                        </m:sSubPr>
+                        <m:e>
+                          <m:r>
+                            <a:rPr lang="en-US" sz="3200" b="0" i="1" smtClean="0">
+                              <a:latin typeface="Cambria Math" panose="02040503050406030204" pitchFamily="18" charset="0"/>
+                            </a:rPr>
+                            <m:t>𝑦</m:t>
+                          </m:r>
+                        </m:e>
+                        <m:sub>
+                          <m:r>
+                            <a:rPr lang="en-US" sz="3200" b="0" i="1" smtClean="0">
+                              <a:latin typeface="Cambria Math" panose="02040503050406030204" pitchFamily="18" charset="0"/>
+                            </a:rPr>
+                            <m:t>𝑖</m:t>
+                          </m:r>
+                        </m:sub>
+                      </m:sSub>
+                      <m:r>
+                        <a:rPr lang="en-US" sz="3200" b="0" i="1" smtClean="0">
+                          <a:latin typeface="Cambria Math" panose="02040503050406030204" pitchFamily="18" charset="0"/>
+                        </a:rPr>
+                        <m:t>|</m:t>
+                      </m:r>
+                      <m:sSub>
+                        <m:sSubPr>
+                          <m:ctrlPr>
+                            <a:rPr lang="en-US" sz="3200" b="0" i="1" smtClean="0">
+                              <a:latin typeface="Cambria Math" panose="02040503050406030204" pitchFamily="18" charset="0"/>
+                            </a:rPr>
+                          </m:ctrlPr>
+                        </m:sSubPr>
+                        <m:e>
+                          <m:r>
+                            <a:rPr lang="en-US" sz="3200" b="1" i="1" smtClean="0">
+                              <a:latin typeface="Cambria Math" panose="02040503050406030204" pitchFamily="18" charset="0"/>
+                            </a:rPr>
+                            <m:t>𝑿</m:t>
+                          </m:r>
+                        </m:e>
+                        <m:sub>
+                          <m:r>
+                            <a:rPr lang="en-US" sz="3200" b="0" i="1" smtClean="0">
+                              <a:latin typeface="Cambria Math" panose="02040503050406030204" pitchFamily="18" charset="0"/>
+                            </a:rPr>
+                            <m:t>𝑛</m:t>
+                          </m:r>
+                        </m:sub>
+                      </m:sSub>
+                      <m:r>
+                        <a:rPr lang="en-US" sz="3200" b="0" i="1" smtClean="0">
+                          <a:latin typeface="Cambria Math" panose="02040503050406030204" pitchFamily="18" charset="0"/>
+                        </a:rPr>
+                        <m:t>)</m:t>
+                      </m:r>
+                    </m:oMath>
+                  </m:oMathPara>
+                </a14:m>
+                <a:endParaRPr lang="en-US" sz="3200" dirty="0"/>
+              </a:p>
+            </p:txBody>
+          </p:sp>
+        </mc:Choice>
+        <mc:Fallback>
+          <p:sp>
+            <p:nvSpPr>
+              <p:cNvPr id="4" name="TextBox 3">
+                <a:extLst>
+                  <a:ext uri="{FF2B5EF4-FFF2-40B4-BE49-F238E27FC236}">
+                    <a16:creationId xmlns:a16="http://schemas.microsoft.com/office/drawing/2014/main" id="{C857439C-E82E-42CB-A9C3-7C39AC68E795}"/>
+                  </a:ext>
+                </a:extLst>
+              </p:cNvPr>
+              <p:cNvSpPr txBox="1">
+                <a:spLocks noRot="1" noChangeAspect="1" noMove="1" noResize="1" noEditPoints="1" noAdjustHandles="1" noChangeArrowheads="1" noChangeShapeType="1" noTextEdit="1"/>
+              </p:cNvSpPr>
+              <p:nvPr/>
+            </p:nvSpPr>
+            <p:spPr>
+              <a:xfrm>
+                <a:off x="10106758" y="2197893"/>
+                <a:ext cx="1805173" cy="2462213"/>
+              </a:xfrm>
+              <a:prstGeom prst="rect">
+                <a:avLst/>
+              </a:prstGeom>
+              <a:blipFill>
+                <a:blip r:embed="rId3"/>
+                <a:stretch>
+                  <a:fillRect/>
+                </a:stretch>
+              </a:blipFill>
+            </p:spPr>
+            <p:txBody>
+              <a:bodyPr/>
+              <a:lstStyle/>
+              <a:p>
+                <a:r>
+                  <a:rPr lang="en-US">
+                    <a:noFill/>
+                  </a:rPr>
+                  <a:t> </a:t>
+                </a:r>
+              </a:p>
+            </p:txBody>
+          </p:sp>
+        </mc:Fallback>
+      </mc:AlternateContent>
+    </p:spTree>
+    <p:extLst>
+      <p:ext uri="{BB962C8B-B14F-4D97-AF65-F5344CB8AC3E}">
+        <p14:creationId xmlns:p14="http://schemas.microsoft.com/office/powerpoint/2010/main" val="3869344102"/>
+      </p:ext>
+    </p:extLst>
+  </p:cSld>
+  <p:clrMapOvr>
+    <a:masterClrMapping/>
+  </p:clrMapOvr>
+</p:sld>
+</file>
+
+<file path=ppt/slides/slide7.xml><?xml version="1.0" encoding="utf-8"?>
 <p:sld xmlns:a="http://schemas.openxmlformats.org/drawingml/2006/main" xmlns:r="http://schemas.openxmlformats.org/officeDocument/2006/relationships" xmlns:p="http://schemas.openxmlformats.org/presentationml/2006/main">
   <p:cSld>
     <p:spTree>
@@ -17583,7 +22001,7 @@
         <p:spPr>
           <a:xfrm>
             <a:off x="838199" y="2448047"/>
-            <a:ext cx="10753165" cy="1868486"/>
+            <a:ext cx="10791306" cy="1868486"/>
           </a:xfrm>
         </p:spPr>
         <p:txBody>
@@ -17600,7 +22018,16 @@
                 </a:solidFill>
                 <a:latin typeface="+mn-lt"/>
               </a:rPr>
-              <a:t>Conjecture: </a:t>
+              <a:t>Challenge: </a:t>
+            </a:r>
+            <a:r>
+              <a:rPr lang="en-US" b="1" dirty="0">
+                <a:solidFill>
+                  <a:srgbClr val="1B284F"/>
+                </a:solidFill>
+                <a:latin typeface="+mn-lt"/>
+              </a:rPr>
+              <a:t>Planning scenarios are inherently counterfactual, so how do we evaluate them (i.e., hold ourselves accountable)</a:t>
             </a:r>
             <a:r>
               <a:rPr lang="en-US" b="1" dirty="0">
@@ -17608,7 +22035,7 @@
                   <a:srgbClr val="1B284F"/>
                 </a:solidFill>
               </a:rPr>
-              <a:t>The full set of planning scenarios should be evaluated in relation to how useful it is.</a:t>
+              <a:t>.</a:t>
             </a:r>
             <a:endParaRPr lang="en-US" b="1" dirty="0">
               <a:solidFill>
@@ -17619,10 +22046,46 @@
           </a:p>
         </p:txBody>
       </p:sp>
+      <p:pic>
+        <p:nvPicPr>
+          <p:cNvPr id="3" name="Content Placeholder 19">
+            <a:extLst>
+              <a:ext uri="{FF2B5EF4-FFF2-40B4-BE49-F238E27FC236}">
+                <a16:creationId xmlns:a16="http://schemas.microsoft.com/office/drawing/2014/main" id="{AD077A70-C44F-36C5-C27A-889759FA5562}"/>
+              </a:ext>
+            </a:extLst>
+          </p:cNvPr>
+          <p:cNvPicPr>
+            <a:picLocks noChangeAspect="1"/>
+          </p:cNvPicPr>
+          <p:nvPr/>
+        </p:nvPicPr>
+        <p:blipFill>
+          <a:blip r:embed="rId2"/>
+          <a:stretch>
+            <a:fillRect/>
+          </a:stretch>
+        </p:blipFill>
+        <p:spPr>
+          <a:xfrm>
+            <a:off x="9754023" y="4721067"/>
+            <a:ext cx="1994724" cy="1994724"/>
+          </a:xfrm>
+          <a:prstGeom prst="rect">
+            <a:avLst/>
+          </a:prstGeom>
+          <a:ln>
+            <a:noFill/>
+          </a:ln>
+          <a:effectLst>
+            <a:softEdge rad="112500"/>
+          </a:effectLst>
+        </p:spPr>
+      </p:pic>
     </p:spTree>
     <p:extLst>
       <p:ext uri="{BB962C8B-B14F-4D97-AF65-F5344CB8AC3E}">
-        <p14:creationId xmlns:p14="http://schemas.microsoft.com/office/powerpoint/2010/main" val="3373185555"/>
+        <p14:creationId xmlns:p14="http://schemas.microsoft.com/office/powerpoint/2010/main" val="2649241982"/>
       </p:ext>
     </p:extLst>
   </p:cSld>
@@ -17644,7 +22107,7 @@
 </p:sld>
 </file>
 
-<file path=ppt/slides/slide6.xml><?xml version="1.0" encoding="utf-8"?>
+<file path=ppt/slides/slide8.xml><?xml version="1.0" encoding="utf-8"?>
 <p:sld xmlns:a="http://schemas.openxmlformats.org/drawingml/2006/main" xmlns:r="http://schemas.openxmlformats.org/officeDocument/2006/relationships" xmlns:p="http://schemas.openxmlformats.org/presentationml/2006/main">
   <p:cSld>
     <p:spTree>
@@ -17783,7 +22246,7 @@
 </p:sld>
 </file>
 
-<file path=ppt/slides/slide7.xml><?xml version="1.0" encoding="utf-8"?>
+<file path=ppt/slides/slide9.xml><?xml version="1.0" encoding="utf-8"?>
 <p:sld xmlns:a="http://schemas.openxmlformats.org/drawingml/2006/main" xmlns:r="http://schemas.openxmlformats.org/officeDocument/2006/relationships" xmlns:p="http://schemas.openxmlformats.org/presentationml/2006/main">
   <p:cSld>
     <p:spTree>
@@ -17818,8 +22281,8 @@
         </p:nvSpPr>
         <p:spPr>
           <a:xfrm>
-            <a:off x="838200" y="2448047"/>
-            <a:ext cx="10515600" cy="1868486"/>
+            <a:off x="838199" y="2448047"/>
+            <a:ext cx="10791306" cy="1868486"/>
           </a:xfrm>
         </p:spPr>
         <p:txBody>
@@ -17844,7 +22307,7 @@
                   <a:srgbClr val="1B284F"/>
                 </a:solidFill>
               </a:rPr>
-              <a:t>A predictive model is only useful if it helps use respond to future events.</a:t>
+              <a:t>A full set of planning scenarios should be evaluated in relation to how useful it is.</a:t>
             </a:r>
             <a:endParaRPr lang="en-US" b="1" dirty="0">
               <a:solidFill>
@@ -17855,1023 +22318,10 @@
           </a:p>
         </p:txBody>
       </p:sp>
-      <p:sp>
-        <p:nvSpPr>
-          <p:cNvPr id="4" name="Title 1">
-            <a:extLst>
-              <a:ext uri="{FF2B5EF4-FFF2-40B4-BE49-F238E27FC236}">
-                <a16:creationId xmlns:a16="http://schemas.microsoft.com/office/drawing/2014/main" id="{0A6415E4-D1E5-DA3D-A969-A23F8FFDA9B5}"/>
-              </a:ext>
-            </a:extLst>
-          </p:cNvPr>
-          <p:cNvSpPr txBox="1">
-            <a:spLocks/>
-          </p:cNvSpPr>
-          <p:nvPr/>
-        </p:nvSpPr>
-        <p:spPr>
-          <a:xfrm>
-            <a:off x="891988" y="3586058"/>
-            <a:ext cx="10515600" cy="2145650"/>
-          </a:xfrm>
-          <a:prstGeom prst="rect">
-            <a:avLst/>
-          </a:prstGeom>
-        </p:spPr>
-        <p:txBody>
-          <a:bodyPr vert="horz" lIns="91440" tIns="45720" rIns="91440" bIns="45720" rtlCol="0" anchor="ctr">
-            <a:normAutofit/>
-          </a:bodyPr>
-          <a:lstStyle>
-            <a:lvl1pPr algn="l" defTabSz="914400" rtl="0" eaLnBrk="1" latinLnBrk="0" hangingPunct="1">
-              <a:lnSpc>
-                <a:spcPct val="90000"/>
-              </a:lnSpc>
-              <a:spcBef>
-                <a:spcPct val="0"/>
-              </a:spcBef>
-              <a:buNone/>
-              <a:defRPr sz="4400" kern="1200">
-                <a:solidFill>
-                  <a:schemeClr val="tx1"/>
-                </a:solidFill>
-                <a:latin typeface="+mj-lt"/>
-                <a:ea typeface="+mj-ea"/>
-                <a:cs typeface="+mj-cs"/>
-              </a:defRPr>
-            </a:lvl1pPr>
-          </a:lstStyle>
-          <a:p>
-            <a:pPr algn="ctr"/>
-            <a:r>
-              <a:rPr lang="en-US" sz="3200" b="1" i="1" dirty="0">
-                <a:latin typeface="+mn-lt"/>
-              </a:rPr>
-              <a:t>So what does it mean to respond?</a:t>
-            </a:r>
-          </a:p>
-        </p:txBody>
-      </p:sp>
     </p:spTree>
     <p:extLst>
       <p:ext uri="{BB962C8B-B14F-4D97-AF65-F5344CB8AC3E}">
-        <p14:creationId xmlns:p14="http://schemas.microsoft.com/office/powerpoint/2010/main" val="1778234901"/>
-      </p:ext>
-    </p:extLst>
-  </p:cSld>
-  <p:clrMapOvr>
-    <a:masterClrMapping/>
-  </p:clrMapOvr>
-  <mc:AlternateContent xmlns:mc="http://schemas.openxmlformats.org/markup-compatibility/2006" xmlns:p14="http://schemas.microsoft.com/office/powerpoint/2010/main">
-    <mc:Choice Requires="p14">
-      <p:transition spd="med" p14:dur="700">
-        <p:fade/>
-      </p:transition>
-    </mc:Choice>
-    <mc:Fallback xmlns="">
-      <p:transition spd="med">
-        <p:fade/>
-      </p:transition>
-    </mc:Fallback>
-  </mc:AlternateContent>
-  <p:timing>
-    <p:tnLst>
-      <p:par>
-        <p:cTn id="1" dur="indefinite" restart="never" nodeType="tmRoot">
-          <p:childTnLst>
-            <p:seq concurrent="1" nextAc="seek">
-              <p:cTn id="2" dur="indefinite" nodeType="mainSeq">
-                <p:childTnLst>
-                  <p:par>
-                    <p:cTn id="3" fill="hold">
-                      <p:stCondLst>
-                        <p:cond delay="indefinite"/>
-                      </p:stCondLst>
-                      <p:childTnLst>
-                        <p:par>
-                          <p:cTn id="4" fill="hold">
-                            <p:stCondLst>
-                              <p:cond delay="0"/>
-                            </p:stCondLst>
-                            <p:childTnLst>
-                              <p:par>
-                                <p:cTn id="5" presetID="10" presetClass="entr" presetSubtype="0" fill="hold" grpId="0" nodeType="clickEffect">
-                                  <p:stCondLst>
-                                    <p:cond delay="0"/>
-                                  </p:stCondLst>
-                                  <p:childTnLst>
-                                    <p:set>
-                                      <p:cBhvr>
-                                        <p:cTn id="6" dur="1" fill="hold">
-                                          <p:stCondLst>
-                                            <p:cond delay="0"/>
-                                          </p:stCondLst>
-                                        </p:cTn>
-                                        <p:tgtEl>
-                                          <p:spTgt spid="4"/>
-                                        </p:tgtEl>
-                                        <p:attrNameLst>
-                                          <p:attrName>style.visibility</p:attrName>
-                                        </p:attrNameLst>
-                                      </p:cBhvr>
-                                      <p:to>
-                                        <p:strVal val="visible"/>
-                                      </p:to>
-                                    </p:set>
-                                    <p:animEffect transition="in" filter="fade">
-                                      <p:cBhvr>
-                                        <p:cTn id="7" dur="500"/>
-                                        <p:tgtEl>
-                                          <p:spTgt spid="4"/>
-                                        </p:tgtEl>
-                                      </p:cBhvr>
-                                    </p:animEffect>
-                                  </p:childTnLst>
-                                </p:cTn>
-                              </p:par>
-                            </p:childTnLst>
-                          </p:cTn>
-                        </p:par>
-                      </p:childTnLst>
-                    </p:cTn>
-                  </p:par>
-                </p:childTnLst>
-              </p:cTn>
-              <p:prevCondLst>
-                <p:cond evt="onPrev" delay="0">
-                  <p:tgtEl>
-                    <p:sldTgt/>
-                  </p:tgtEl>
-                </p:cond>
-              </p:prevCondLst>
-              <p:nextCondLst>
-                <p:cond evt="onNext" delay="0">
-                  <p:tgtEl>
-                    <p:sldTgt/>
-                  </p:tgtEl>
-                </p:cond>
-              </p:nextCondLst>
-            </p:seq>
-          </p:childTnLst>
-        </p:cTn>
-      </p:par>
-    </p:tnLst>
-    <p:bldLst>
-      <p:bldP spid="4" grpId="0"/>
-    </p:bldLst>
-  </p:timing>
-</p:sld>
-</file>
-
-<file path=ppt/slides/slide8.xml><?xml version="1.0" encoding="utf-8"?>
-<p:sld xmlns:a="http://schemas.openxmlformats.org/drawingml/2006/main" xmlns:r="http://schemas.openxmlformats.org/officeDocument/2006/relationships" xmlns:p="http://schemas.openxmlformats.org/presentationml/2006/main">
-  <p:cSld>
-    <p:spTree>
-      <p:nvGrpSpPr>
-        <p:cNvPr id="1" name=""/>
-        <p:cNvGrpSpPr/>
-        <p:nvPr/>
-      </p:nvGrpSpPr>
-      <p:grpSpPr>
-        <a:xfrm>
-          <a:off x="0" y="0"/>
-          <a:ext cx="0" cy="0"/>
-          <a:chOff x="0" y="0"/>
-          <a:chExt cx="0" cy="0"/>
-        </a:xfrm>
-      </p:grpSpPr>
-      <p:sp>
-        <p:nvSpPr>
-          <p:cNvPr id="2" name="Title 1">
-            <a:extLst>
-              <a:ext uri="{FF2B5EF4-FFF2-40B4-BE49-F238E27FC236}">
-                <a16:creationId xmlns:a16="http://schemas.microsoft.com/office/drawing/2014/main" id="{A93B1189-FD8F-4542-B7A9-90983E22582B}"/>
-              </a:ext>
-            </a:extLst>
-          </p:cNvPr>
-          <p:cNvSpPr>
-            <a:spLocks noGrp="1"/>
-          </p:cNvSpPr>
-          <p:nvPr>
-            <p:ph type="title"/>
-          </p:nvPr>
-        </p:nvSpPr>
-        <p:spPr/>
-        <p:txBody>
-          <a:bodyPr/>
-          <a:lstStyle/>
-          <a:p>
-            <a:pPr algn="ctr"/>
-            <a:r>
-              <a:rPr lang="en-US" dirty="0"/>
-              <a:t>Response is about modifying a utility function.</a:t>
-            </a:r>
-          </a:p>
-        </p:txBody>
-      </p:sp>
-      <mc:AlternateContent xmlns:mc="http://schemas.openxmlformats.org/markup-compatibility/2006">
-        <mc:Choice xmlns:a14="http://schemas.microsoft.com/office/drawing/2010/main" Requires="a14">
-          <p:sp>
-            <p:nvSpPr>
-              <p:cNvPr id="6" name="TextBox 5">
-                <a:extLst>
-                  <a:ext uri="{FF2B5EF4-FFF2-40B4-BE49-F238E27FC236}">
-                    <a16:creationId xmlns:a16="http://schemas.microsoft.com/office/drawing/2014/main" id="{1FB5A588-908E-485A-8CD0-A382E1CEE96A}"/>
-                  </a:ext>
-                </a:extLst>
-              </p:cNvPr>
-              <p:cNvSpPr txBox="1"/>
-              <p:nvPr/>
-            </p:nvSpPr>
-            <p:spPr>
-              <a:xfrm>
-                <a:off x="3181679" y="2922225"/>
-                <a:ext cx="5456494" cy="830997"/>
-              </a:xfrm>
-              <a:prstGeom prst="rect">
-                <a:avLst/>
-              </a:prstGeom>
-              <a:noFill/>
-            </p:spPr>
-            <p:txBody>
-              <a:bodyPr wrap="none" lIns="0" tIns="0" rIns="0" bIns="0" rtlCol="0">
-                <a:spAutoFit/>
-              </a:bodyPr>
-              <a:lstStyle/>
-              <a:p>
-                <a:pPr/>
-                <a14:m>
-                  <m:oMathPara xmlns:m="http://schemas.openxmlformats.org/officeDocument/2006/math">
-                    <m:oMathParaPr>
-                      <m:jc m:val="centerGroup"/>
-                    </m:oMathParaPr>
-                    <m:oMath xmlns:m="http://schemas.openxmlformats.org/officeDocument/2006/math">
-                      <m:r>
-                        <a:rPr lang="en-US" sz="5400" b="0" i="1" smtClean="0">
-                          <a:latin typeface="Cambria Math" panose="02040503050406030204" pitchFamily="18" charset="0"/>
-                        </a:rPr>
-                        <m:t>𝑈</m:t>
-                      </m:r>
-                      <m:r>
-                        <a:rPr lang="en-US" sz="5400" b="0" i="1" smtClean="0">
-                          <a:latin typeface="Cambria Math" panose="02040503050406030204" pitchFamily="18" charset="0"/>
-                        </a:rPr>
-                        <m:t>=∑</m:t>
-                      </m:r>
-                      <m:r>
-                        <a:rPr lang="en-US" sz="5400" b="0" i="1" smtClean="0">
-                          <a:latin typeface="Cambria Math" panose="02040503050406030204" pitchFamily="18" charset="0"/>
-                        </a:rPr>
-                        <m:t>𝑢</m:t>
-                      </m:r>
-                      <m:d>
-                        <m:dPr>
-                          <m:ctrlPr>
-                            <a:rPr lang="en-US" sz="5400" b="0" i="1" smtClean="0">
-                              <a:latin typeface="Cambria Math" panose="02040503050406030204" pitchFamily="18" charset="0"/>
-                            </a:rPr>
-                          </m:ctrlPr>
-                        </m:dPr>
-                        <m:e>
-                          <m:sSub>
-                            <m:sSubPr>
-                              <m:ctrlPr>
-                                <a:rPr lang="en-US" sz="5400" b="0" i="1" smtClean="0">
-                                  <a:latin typeface="Cambria Math" panose="02040503050406030204" pitchFamily="18" charset="0"/>
-                                </a:rPr>
-                              </m:ctrlPr>
-                            </m:sSubPr>
-                            <m:e>
-                              <m:r>
-                                <a:rPr lang="en-US" sz="5400" b="0" i="1" smtClean="0">
-                                  <a:latin typeface="Cambria Math" panose="02040503050406030204" pitchFamily="18" charset="0"/>
-                                </a:rPr>
-                                <m:t>𝑦</m:t>
-                              </m:r>
-                            </m:e>
-                            <m:sub>
-                              <m:r>
-                                <a:rPr lang="en-US" sz="5400" b="0" i="1" smtClean="0">
-                                  <a:latin typeface="Cambria Math" panose="02040503050406030204" pitchFamily="18" charset="0"/>
-                                </a:rPr>
-                                <m:t>𝑖</m:t>
-                              </m:r>
-                            </m:sub>
-                          </m:sSub>
-                        </m:e>
-                      </m:d>
-                      <m:r>
-                        <m:rPr>
-                          <m:sty m:val="p"/>
-                        </m:rPr>
-                        <a:rPr lang="en-US" sz="5400" b="0" i="0" smtClean="0">
-                          <a:latin typeface="Cambria Math" panose="02040503050406030204" pitchFamily="18" charset="0"/>
-                        </a:rPr>
-                        <m:t>Pr</m:t>
-                      </m:r>
-                      <m:r>
-                        <a:rPr lang="en-US" sz="5400" b="0" i="1" smtClean="0">
-                          <a:latin typeface="Cambria Math" panose="02040503050406030204" pitchFamily="18" charset="0"/>
-                        </a:rPr>
-                        <m:t>⁡(</m:t>
-                      </m:r>
-                      <m:sSub>
-                        <m:sSubPr>
-                          <m:ctrlPr>
-                            <a:rPr lang="en-US" sz="5400" b="0" i="1" smtClean="0">
-                              <a:latin typeface="Cambria Math" panose="02040503050406030204" pitchFamily="18" charset="0"/>
-                            </a:rPr>
-                          </m:ctrlPr>
-                        </m:sSubPr>
-                        <m:e>
-                          <m:r>
-                            <a:rPr lang="en-US" sz="5400" b="0" i="1" smtClean="0">
-                              <a:latin typeface="Cambria Math" panose="02040503050406030204" pitchFamily="18" charset="0"/>
-                            </a:rPr>
-                            <m:t>𝑦</m:t>
-                          </m:r>
-                        </m:e>
-                        <m:sub>
-                          <m:r>
-                            <a:rPr lang="en-US" sz="5400" b="0" i="1" smtClean="0">
-                              <a:latin typeface="Cambria Math" panose="02040503050406030204" pitchFamily="18" charset="0"/>
-                            </a:rPr>
-                            <m:t>𝑖</m:t>
-                          </m:r>
-                        </m:sub>
-                      </m:sSub>
-                      <m:r>
-                        <a:rPr lang="en-US" sz="5400" b="0" i="1" smtClean="0">
-                          <a:latin typeface="Cambria Math" panose="02040503050406030204" pitchFamily="18" charset="0"/>
-                        </a:rPr>
-                        <m:t>)</m:t>
-                      </m:r>
-                    </m:oMath>
-                  </m:oMathPara>
-                </a14:m>
-                <a:endParaRPr lang="en-US" sz="5400" dirty="0"/>
-              </a:p>
-            </p:txBody>
-          </p:sp>
-        </mc:Choice>
-        <mc:Fallback>
-          <p:sp>
-            <p:nvSpPr>
-              <p:cNvPr id="6" name="TextBox 5">
-                <a:extLst>
-                  <a:ext uri="{FF2B5EF4-FFF2-40B4-BE49-F238E27FC236}">
-                    <a16:creationId xmlns:a16="http://schemas.microsoft.com/office/drawing/2014/main" id="{1FB5A588-908E-485A-8CD0-A382E1CEE96A}"/>
-                  </a:ext>
-                </a:extLst>
-              </p:cNvPr>
-              <p:cNvSpPr txBox="1">
-                <a:spLocks noRot="1" noChangeAspect="1" noMove="1" noResize="1" noEditPoints="1" noAdjustHandles="1" noChangeArrowheads="1" noChangeShapeType="1" noTextEdit="1"/>
-              </p:cNvSpPr>
-              <p:nvPr/>
-            </p:nvSpPr>
-            <p:spPr>
-              <a:xfrm>
-                <a:off x="3181679" y="2922225"/>
-                <a:ext cx="5456494" cy="830997"/>
-              </a:xfrm>
-              <a:prstGeom prst="rect">
-                <a:avLst/>
-              </a:prstGeom>
-              <a:blipFill>
-                <a:blip r:embed="rId3"/>
-                <a:stretch>
-                  <a:fillRect/>
-                </a:stretch>
-              </a:blipFill>
-            </p:spPr>
-            <p:txBody>
-              <a:bodyPr/>
-              <a:lstStyle/>
-              <a:p>
-                <a:r>
-                  <a:rPr lang="en-US">
-                    <a:noFill/>
-                  </a:rPr>
-                  <a:t> </a:t>
-                </a:r>
-              </a:p>
-            </p:txBody>
-          </p:sp>
-        </mc:Fallback>
-      </mc:AlternateContent>
-    </p:spTree>
-    <p:extLst>
-      <p:ext uri="{BB962C8B-B14F-4D97-AF65-F5344CB8AC3E}">
-        <p14:creationId xmlns:p14="http://schemas.microsoft.com/office/powerpoint/2010/main" val="2566997130"/>
-      </p:ext>
-    </p:extLst>
-  </p:cSld>
-  <p:clrMapOvr>
-    <a:masterClrMapping/>
-  </p:clrMapOvr>
-  <mc:AlternateContent xmlns:mc="http://schemas.openxmlformats.org/markup-compatibility/2006" xmlns:p14="http://schemas.microsoft.com/office/powerpoint/2010/main">
-    <mc:Choice Requires="p14">
-      <p:transition spd="med" p14:dur="700">
-        <p:fade/>
-      </p:transition>
-    </mc:Choice>
-    <mc:Fallback xmlns="">
-      <p:transition spd="med">
-        <p:fade/>
-      </p:transition>
-    </mc:Fallback>
-  </mc:AlternateContent>
-</p:sld>
-</file>
-
-<file path=ppt/slides/slide9.xml><?xml version="1.0" encoding="utf-8"?>
-<p:sld xmlns:a="http://schemas.openxmlformats.org/drawingml/2006/main" xmlns:r="http://schemas.openxmlformats.org/officeDocument/2006/relationships" xmlns:p="http://schemas.openxmlformats.org/presentationml/2006/main">
-  <p:cSld>
-    <p:spTree>
-      <p:nvGrpSpPr>
-        <p:cNvPr id="1" name=""/>
-        <p:cNvGrpSpPr/>
-        <p:nvPr/>
-      </p:nvGrpSpPr>
-      <p:grpSpPr>
-        <a:xfrm>
-          <a:off x="0" y="0"/>
-          <a:ext cx="0" cy="0"/>
-          <a:chOff x="0" y="0"/>
-          <a:chExt cx="0" cy="0"/>
-        </a:xfrm>
-      </p:grpSpPr>
-      <p:sp>
-        <p:nvSpPr>
-          <p:cNvPr id="2" name="Title 1">
-            <a:extLst>
-              <a:ext uri="{FF2B5EF4-FFF2-40B4-BE49-F238E27FC236}">
-                <a16:creationId xmlns:a16="http://schemas.microsoft.com/office/drawing/2014/main" id="{A93B1189-FD8F-4542-B7A9-90983E22582B}"/>
-              </a:ext>
-            </a:extLst>
-          </p:cNvPr>
-          <p:cNvSpPr>
-            <a:spLocks noGrp="1"/>
-          </p:cNvSpPr>
-          <p:nvPr>
-            <p:ph type="title"/>
-          </p:nvPr>
-        </p:nvSpPr>
-        <p:spPr/>
-        <p:txBody>
-          <a:bodyPr/>
-          <a:lstStyle/>
-          <a:p>
-            <a:pPr algn="ctr"/>
-            <a:r>
-              <a:rPr lang="en-US" dirty="0"/>
-              <a:t>Two types of response</a:t>
-            </a:r>
-          </a:p>
-        </p:txBody>
-      </p:sp>
-      <mc:AlternateContent xmlns:mc="http://schemas.openxmlformats.org/markup-compatibility/2006">
-        <mc:Choice xmlns:a14="http://schemas.microsoft.com/office/drawing/2010/main" Requires="a14">
-          <p:sp>
-            <p:nvSpPr>
-              <p:cNvPr id="6" name="TextBox 5">
-                <a:extLst>
-                  <a:ext uri="{FF2B5EF4-FFF2-40B4-BE49-F238E27FC236}">
-                    <a16:creationId xmlns:a16="http://schemas.microsoft.com/office/drawing/2014/main" id="{1FB5A588-908E-485A-8CD0-A382E1CEE96A}"/>
-                  </a:ext>
-                </a:extLst>
-              </p:cNvPr>
-              <p:cNvSpPr txBox="1"/>
-              <p:nvPr/>
-            </p:nvSpPr>
-            <p:spPr>
-              <a:xfrm>
-                <a:off x="3081293" y="1690688"/>
-                <a:ext cx="5450466" cy="830997"/>
-              </a:xfrm>
-              <a:prstGeom prst="rect">
-                <a:avLst/>
-              </a:prstGeom>
-              <a:noFill/>
-            </p:spPr>
-            <p:txBody>
-              <a:bodyPr wrap="none" lIns="0" tIns="0" rIns="0" bIns="0" rtlCol="0">
-                <a:spAutoFit/>
-              </a:bodyPr>
-              <a:lstStyle/>
-              <a:p>
-                <a:pPr/>
-                <a14:m>
-                  <m:oMathPara xmlns:m="http://schemas.openxmlformats.org/officeDocument/2006/math">
-                    <m:oMathParaPr>
-                      <m:jc m:val="centerGroup"/>
-                    </m:oMathParaPr>
-                    <m:oMath xmlns:m="http://schemas.openxmlformats.org/officeDocument/2006/math">
-                      <m:r>
-                        <a:rPr lang="en-US" sz="5400" b="0" i="1" smtClean="0">
-                          <a:latin typeface="Cambria Math" panose="02040503050406030204" pitchFamily="18" charset="0"/>
-                        </a:rPr>
-                        <m:t>𝑈</m:t>
-                      </m:r>
-                      <m:r>
-                        <a:rPr lang="en-US" sz="5400" b="0" i="1" smtClean="0">
-                          <a:latin typeface="Cambria Math" panose="02040503050406030204" pitchFamily="18" charset="0"/>
-                        </a:rPr>
-                        <m:t>=∑</m:t>
-                      </m:r>
-                      <m:r>
-                        <a:rPr lang="en-US" sz="5400" b="0" i="1" smtClean="0">
-                          <a:latin typeface="Cambria Math" panose="02040503050406030204" pitchFamily="18" charset="0"/>
-                        </a:rPr>
-                        <m:t>𝑢</m:t>
-                      </m:r>
-                      <m:d>
-                        <m:dPr>
-                          <m:ctrlPr>
-                            <a:rPr lang="en-US" sz="5400" b="0" i="1" smtClean="0">
-                              <a:latin typeface="Cambria Math" panose="02040503050406030204" pitchFamily="18" charset="0"/>
-                            </a:rPr>
-                          </m:ctrlPr>
-                        </m:dPr>
-                        <m:e>
-                          <m:sSub>
-                            <m:sSubPr>
-                              <m:ctrlPr>
-                                <a:rPr lang="en-US" sz="5400" b="0" i="1" smtClean="0">
-                                  <a:latin typeface="Cambria Math" panose="02040503050406030204" pitchFamily="18" charset="0"/>
-                                </a:rPr>
-                              </m:ctrlPr>
-                            </m:sSubPr>
-                            <m:e>
-                              <m:r>
-                                <a:rPr lang="en-US" sz="5400" b="0" i="1" smtClean="0">
-                                  <a:latin typeface="Cambria Math" panose="02040503050406030204" pitchFamily="18" charset="0"/>
-                                </a:rPr>
-                                <m:t>𝑦</m:t>
-                              </m:r>
-                            </m:e>
-                            <m:sub>
-                              <m:r>
-                                <a:rPr lang="en-US" sz="5400" b="0" i="1" smtClean="0">
-                                  <a:latin typeface="Cambria Math" panose="02040503050406030204" pitchFamily="18" charset="0"/>
-                                </a:rPr>
-                                <m:t>𝑖</m:t>
-                              </m:r>
-                            </m:sub>
-                          </m:sSub>
-                        </m:e>
-                      </m:d>
-                      <m:r>
-                        <m:rPr>
-                          <m:sty m:val="p"/>
-                        </m:rPr>
-                        <a:rPr lang="en-US" sz="5400" b="0" i="0" smtClean="0">
-                          <a:latin typeface="Cambria Math" panose="02040503050406030204" pitchFamily="18" charset="0"/>
-                        </a:rPr>
-                        <m:t>Pr</m:t>
-                      </m:r>
-                      <m:r>
-                        <a:rPr lang="en-US" sz="5400" b="0" i="1" smtClean="0">
-                          <a:latin typeface="Cambria Math" panose="02040503050406030204" pitchFamily="18" charset="0"/>
-                        </a:rPr>
-                        <m:t>⁡(</m:t>
-                      </m:r>
-                      <m:sSub>
-                        <m:sSubPr>
-                          <m:ctrlPr>
-                            <a:rPr lang="en-US" sz="5400" b="0" i="1" smtClean="0">
-                              <a:latin typeface="Cambria Math" panose="02040503050406030204" pitchFamily="18" charset="0"/>
-                            </a:rPr>
-                          </m:ctrlPr>
-                        </m:sSubPr>
-                        <m:e>
-                          <m:r>
-                            <a:rPr lang="en-US" sz="5400" b="0" i="1" smtClean="0">
-                              <a:latin typeface="Cambria Math" panose="02040503050406030204" pitchFamily="18" charset="0"/>
-                            </a:rPr>
-                            <m:t>𝑦</m:t>
-                          </m:r>
-                        </m:e>
-                        <m:sub>
-                          <m:r>
-                            <a:rPr lang="en-US" sz="5400" b="0" i="1" smtClean="0">
-                              <a:latin typeface="Cambria Math" panose="02040503050406030204" pitchFamily="18" charset="0"/>
-                            </a:rPr>
-                            <m:t>𝑖</m:t>
-                          </m:r>
-                        </m:sub>
-                      </m:sSub>
-                      <m:r>
-                        <a:rPr lang="en-US" sz="5400" b="0" i="1" smtClean="0">
-                          <a:latin typeface="Cambria Math" panose="02040503050406030204" pitchFamily="18" charset="0"/>
-                        </a:rPr>
-                        <m:t>)</m:t>
-                      </m:r>
-                    </m:oMath>
-                  </m:oMathPara>
-                </a14:m>
-                <a:endParaRPr lang="en-US" sz="5400" dirty="0"/>
-              </a:p>
-            </p:txBody>
-          </p:sp>
-        </mc:Choice>
-        <mc:Fallback>
-          <p:sp>
-            <p:nvSpPr>
-              <p:cNvPr id="6" name="TextBox 5">
-                <a:extLst>
-                  <a:ext uri="{FF2B5EF4-FFF2-40B4-BE49-F238E27FC236}">
-                    <a16:creationId xmlns:a16="http://schemas.microsoft.com/office/drawing/2014/main" id="{1FB5A588-908E-485A-8CD0-A382E1CEE96A}"/>
-                  </a:ext>
-                </a:extLst>
-              </p:cNvPr>
-              <p:cNvSpPr txBox="1">
-                <a:spLocks noRot="1" noChangeAspect="1" noMove="1" noResize="1" noEditPoints="1" noAdjustHandles="1" noChangeArrowheads="1" noChangeShapeType="1" noTextEdit="1"/>
-              </p:cNvSpPr>
-              <p:nvPr/>
-            </p:nvSpPr>
-            <p:spPr>
-              <a:xfrm>
-                <a:off x="3081293" y="1690688"/>
-                <a:ext cx="5450466" cy="830997"/>
-              </a:xfrm>
-              <a:prstGeom prst="rect">
-                <a:avLst/>
-              </a:prstGeom>
-              <a:blipFill>
-                <a:blip r:embed="rId3"/>
-                <a:stretch>
-                  <a:fillRect/>
-                </a:stretch>
-              </a:blipFill>
-            </p:spPr>
-            <p:txBody>
-              <a:bodyPr/>
-              <a:lstStyle/>
-              <a:p>
-                <a:r>
-                  <a:rPr lang="en-US">
-                    <a:noFill/>
-                  </a:rPr>
-                  <a:t> </a:t>
-                </a:r>
-              </a:p>
-            </p:txBody>
-          </p:sp>
-        </mc:Fallback>
-      </mc:AlternateContent>
-      <p:sp>
-        <p:nvSpPr>
-          <p:cNvPr id="7" name="Rectangle 6">
-            <a:extLst>
-              <a:ext uri="{FF2B5EF4-FFF2-40B4-BE49-F238E27FC236}">
-                <a16:creationId xmlns:a16="http://schemas.microsoft.com/office/drawing/2014/main" id="{07B4AFC6-17A5-45A1-9EE1-462ACC2336D0}"/>
-              </a:ext>
-            </a:extLst>
-          </p:cNvPr>
-          <p:cNvSpPr/>
-          <p:nvPr/>
-        </p:nvSpPr>
-        <p:spPr>
-          <a:xfrm>
-            <a:off x="5037584" y="1743442"/>
-            <a:ext cx="1547446" cy="870438"/>
-          </a:xfrm>
-          <a:prstGeom prst="rect">
-            <a:avLst/>
-          </a:prstGeom>
-          <a:noFill/>
-          <a:ln w="28575"/>
-        </p:spPr>
-        <p:style>
-          <a:lnRef idx="2">
-            <a:schemeClr val="accent1">
-              <a:shade val="50000"/>
-            </a:schemeClr>
-          </a:lnRef>
-          <a:fillRef idx="1">
-            <a:schemeClr val="accent1"/>
-          </a:fillRef>
-          <a:effectRef idx="0">
-            <a:schemeClr val="accent1"/>
-          </a:effectRef>
-          <a:fontRef idx="minor">
-            <a:schemeClr val="lt1"/>
-          </a:fontRef>
-        </p:style>
-        <p:txBody>
-          <a:bodyPr rtlCol="0" anchor="ctr"/>
-          <a:lstStyle/>
-          <a:p>
-            <a:pPr algn="ctr"/>
-            <a:endParaRPr lang="en-US"/>
-          </a:p>
-        </p:txBody>
-      </p:sp>
-      <p:sp>
-        <p:nvSpPr>
-          <p:cNvPr id="8" name="Rectangle 7">
-            <a:extLst>
-              <a:ext uri="{FF2B5EF4-FFF2-40B4-BE49-F238E27FC236}">
-                <a16:creationId xmlns:a16="http://schemas.microsoft.com/office/drawing/2014/main" id="{B5AF03EA-1C37-4D8E-A994-051801E7BD86}"/>
-              </a:ext>
-            </a:extLst>
-          </p:cNvPr>
-          <p:cNvSpPr/>
-          <p:nvPr/>
-        </p:nvSpPr>
-        <p:spPr>
-          <a:xfrm>
-            <a:off x="6629423" y="1743442"/>
-            <a:ext cx="1863970" cy="870438"/>
-          </a:xfrm>
-          <a:prstGeom prst="rect">
-            <a:avLst/>
-          </a:prstGeom>
-          <a:noFill/>
-          <a:ln w="28575"/>
-        </p:spPr>
-        <p:style>
-          <a:lnRef idx="2">
-            <a:schemeClr val="accent1">
-              <a:shade val="50000"/>
-            </a:schemeClr>
-          </a:lnRef>
-          <a:fillRef idx="1">
-            <a:schemeClr val="accent1"/>
-          </a:fillRef>
-          <a:effectRef idx="0">
-            <a:schemeClr val="accent1"/>
-          </a:effectRef>
-          <a:fontRef idx="minor">
-            <a:schemeClr val="lt1"/>
-          </a:fontRef>
-        </p:style>
-        <p:txBody>
-          <a:bodyPr rtlCol="0" anchor="ctr"/>
-          <a:lstStyle/>
-          <a:p>
-            <a:pPr algn="ctr"/>
-            <a:endParaRPr lang="en-US"/>
-          </a:p>
-        </p:txBody>
-      </p:sp>
-      <p:cxnSp>
-        <p:nvCxnSpPr>
-          <p:cNvPr id="12" name="Connector: Elbow 11">
-            <a:extLst>
-              <a:ext uri="{FF2B5EF4-FFF2-40B4-BE49-F238E27FC236}">
-                <a16:creationId xmlns:a16="http://schemas.microsoft.com/office/drawing/2014/main" id="{B789C3D3-E18A-499D-A6CF-88DECED7F376}"/>
-              </a:ext>
-            </a:extLst>
-          </p:cNvPr>
-          <p:cNvCxnSpPr>
-            <a:cxnSpLocks/>
-            <a:stCxn id="13" idx="3"/>
-            <a:endCxn id="7" idx="2"/>
-          </p:cNvCxnSpPr>
-          <p:nvPr/>
-        </p:nvCxnSpPr>
-        <p:spPr>
-          <a:xfrm flipV="1">
-            <a:off x="1874873" y="2613880"/>
-            <a:ext cx="3936434" cy="1143613"/>
-          </a:xfrm>
-          <a:prstGeom prst="bentConnector2">
-            <a:avLst/>
-          </a:prstGeom>
-          <a:ln w="28575">
-            <a:tailEnd type="triangle"/>
-          </a:ln>
-        </p:spPr>
-        <p:style>
-          <a:lnRef idx="1">
-            <a:schemeClr val="accent1"/>
-          </a:lnRef>
-          <a:fillRef idx="0">
-            <a:schemeClr val="accent1"/>
-          </a:fillRef>
-          <a:effectRef idx="0">
-            <a:schemeClr val="accent1"/>
-          </a:effectRef>
-          <a:fontRef idx="minor">
-            <a:schemeClr val="tx1"/>
-          </a:fontRef>
-        </p:style>
-      </p:cxnSp>
-      <p:sp>
-        <p:nvSpPr>
-          <p:cNvPr id="13" name="TextBox 12">
-            <a:extLst>
-              <a:ext uri="{FF2B5EF4-FFF2-40B4-BE49-F238E27FC236}">
-                <a16:creationId xmlns:a16="http://schemas.microsoft.com/office/drawing/2014/main" id="{86864D1A-1FA8-440A-99A1-C855D648F2E7}"/>
-              </a:ext>
-            </a:extLst>
-          </p:cNvPr>
-          <p:cNvSpPr txBox="1"/>
-          <p:nvPr/>
-        </p:nvSpPr>
-        <p:spPr>
-          <a:xfrm>
-            <a:off x="76560" y="3465105"/>
-            <a:ext cx="1798313" cy="584775"/>
-          </a:xfrm>
-          <a:prstGeom prst="rect">
-            <a:avLst/>
-          </a:prstGeom>
-          <a:noFill/>
-        </p:spPr>
-        <p:txBody>
-          <a:bodyPr wrap="none" rtlCol="0">
-            <a:spAutoFit/>
-          </a:bodyPr>
-          <a:lstStyle/>
-          <a:p>
-            <a:r>
-              <a:rPr lang="en-US" sz="3200" dirty="0"/>
-              <a:t>Preparing</a:t>
-            </a:r>
-          </a:p>
-        </p:txBody>
-      </p:sp>
-      <p:sp>
-        <p:nvSpPr>
-          <p:cNvPr id="20" name="TextBox 19">
-            <a:extLst>
-              <a:ext uri="{FF2B5EF4-FFF2-40B4-BE49-F238E27FC236}">
-                <a16:creationId xmlns:a16="http://schemas.microsoft.com/office/drawing/2014/main" id="{000CC2CD-5AD3-42FF-88A3-B61454E7C045}"/>
-              </a:ext>
-            </a:extLst>
-          </p:cNvPr>
-          <p:cNvSpPr txBox="1"/>
-          <p:nvPr/>
-        </p:nvSpPr>
-        <p:spPr>
-          <a:xfrm>
-            <a:off x="9917323" y="3465104"/>
-            <a:ext cx="2091791" cy="584775"/>
-          </a:xfrm>
-          <a:prstGeom prst="rect">
-            <a:avLst/>
-          </a:prstGeom>
-          <a:noFill/>
-        </p:spPr>
-        <p:txBody>
-          <a:bodyPr wrap="none" rtlCol="0">
-            <a:spAutoFit/>
-          </a:bodyPr>
-          <a:lstStyle/>
-          <a:p>
-            <a:r>
-              <a:rPr lang="en-US" sz="3200" dirty="0"/>
-              <a:t>Intervening</a:t>
-            </a:r>
-          </a:p>
-        </p:txBody>
-      </p:sp>
-      <p:cxnSp>
-        <p:nvCxnSpPr>
-          <p:cNvPr id="22" name="Connector: Elbow 21">
-            <a:extLst>
-              <a:ext uri="{FF2B5EF4-FFF2-40B4-BE49-F238E27FC236}">
-                <a16:creationId xmlns:a16="http://schemas.microsoft.com/office/drawing/2014/main" id="{DEADE9C3-8A16-41BA-A0EF-D9CC3177812F}"/>
-              </a:ext>
-            </a:extLst>
-          </p:cNvPr>
-          <p:cNvCxnSpPr>
-            <a:cxnSpLocks/>
-            <a:stCxn id="20" idx="1"/>
-            <a:endCxn id="8" idx="2"/>
-          </p:cNvCxnSpPr>
-          <p:nvPr/>
-        </p:nvCxnSpPr>
-        <p:spPr>
-          <a:xfrm rot="10800000">
-            <a:off x="7561409" y="2613880"/>
-            <a:ext cx="2355915" cy="1143612"/>
-          </a:xfrm>
-          <a:prstGeom prst="bentConnector2">
-            <a:avLst/>
-          </a:prstGeom>
-          <a:ln w="28575">
-            <a:tailEnd type="triangle"/>
-          </a:ln>
-        </p:spPr>
-        <p:style>
-          <a:lnRef idx="1">
-            <a:schemeClr val="accent1"/>
-          </a:lnRef>
-          <a:fillRef idx="0">
-            <a:schemeClr val="accent1"/>
-          </a:fillRef>
-          <a:effectRef idx="0">
-            <a:schemeClr val="accent1"/>
-          </a:effectRef>
-          <a:fontRef idx="minor">
-            <a:schemeClr val="tx1"/>
-          </a:fontRef>
-        </p:style>
-      </p:cxnSp>
-      <p:sp>
-        <p:nvSpPr>
-          <p:cNvPr id="5" name="Rectangle 4">
-            <a:extLst>
-              <a:ext uri="{FF2B5EF4-FFF2-40B4-BE49-F238E27FC236}">
-                <a16:creationId xmlns:a16="http://schemas.microsoft.com/office/drawing/2014/main" id="{3ACAF4BA-3BAD-4500-8FDD-45CBE705170B}"/>
-              </a:ext>
-            </a:extLst>
-          </p:cNvPr>
-          <p:cNvSpPr/>
-          <p:nvPr/>
-        </p:nvSpPr>
-        <p:spPr>
-          <a:xfrm>
-            <a:off x="74792" y="4129624"/>
-            <a:ext cx="5734748" cy="1938992"/>
-          </a:xfrm>
-          <a:prstGeom prst="rect">
-            <a:avLst/>
-          </a:prstGeom>
-        </p:spPr>
-        <p:txBody>
-          <a:bodyPr wrap="square">
-            <a:spAutoFit/>
-          </a:bodyPr>
-          <a:lstStyle/>
-          <a:p>
-            <a:pPr marL="285750" indent="-285750">
-              <a:buFont typeface="Arial" panose="020B0604020202020204" pitchFamily="34" charset="0"/>
-              <a:buChar char="•"/>
-            </a:pPr>
-            <a:r>
-              <a:rPr lang="en-US" sz="2400" dirty="0"/>
-              <a:t>Taking actions that mitigate the impact of some future event or allow us to best benefit from that event.</a:t>
-            </a:r>
-          </a:p>
-          <a:p>
-            <a:pPr marL="742950" lvl="1" indent="-285750">
-              <a:buFont typeface="Arial" panose="020B0604020202020204" pitchFamily="34" charset="0"/>
-              <a:buChar char="•"/>
-            </a:pPr>
-            <a:r>
-              <a:rPr lang="en-US" sz="2400" dirty="0"/>
-              <a:t>E.g., wearing your raincoat, making an investment</a:t>
-            </a:r>
-          </a:p>
-        </p:txBody>
-      </p:sp>
-      <p:sp>
-        <p:nvSpPr>
-          <p:cNvPr id="14" name="Rectangle 13">
-            <a:extLst>
-              <a:ext uri="{FF2B5EF4-FFF2-40B4-BE49-F238E27FC236}">
-                <a16:creationId xmlns:a16="http://schemas.microsoft.com/office/drawing/2014/main" id="{05296FCA-FAD7-43B8-9A03-2AED154A9B5C}"/>
-              </a:ext>
-            </a:extLst>
-          </p:cNvPr>
-          <p:cNvSpPr/>
-          <p:nvPr/>
-        </p:nvSpPr>
-        <p:spPr>
-          <a:xfrm>
-            <a:off x="7162171" y="4049879"/>
-            <a:ext cx="5337187" cy="1938992"/>
-          </a:xfrm>
-          <a:prstGeom prst="rect">
-            <a:avLst/>
-          </a:prstGeom>
-        </p:spPr>
-        <p:txBody>
-          <a:bodyPr wrap="square">
-            <a:spAutoFit/>
-          </a:bodyPr>
-          <a:lstStyle/>
-          <a:p>
-            <a:pPr marL="285750" indent="-285750">
-              <a:buFont typeface="Arial" panose="020B0604020202020204" pitchFamily="34" charset="0"/>
-              <a:buChar char="•"/>
-            </a:pPr>
-            <a:r>
-              <a:rPr lang="en-US" sz="2400" dirty="0"/>
-              <a:t>Intervening: Taking actions that prevent or lower the probability of some forecast future event	</a:t>
-            </a:r>
-          </a:p>
-          <a:p>
-            <a:pPr marL="742950" lvl="1" indent="-285750">
-              <a:buFont typeface="Arial" panose="020B0604020202020204" pitchFamily="34" charset="0"/>
-              <a:buChar char="•"/>
-            </a:pPr>
-            <a:r>
-              <a:rPr lang="en-US" sz="2400" dirty="0"/>
-              <a:t>E.g., lockdowns, reducing carbon emissions</a:t>
-            </a:r>
-          </a:p>
-        </p:txBody>
-      </p:sp>
-    </p:spTree>
-    <p:extLst>
-      <p:ext uri="{BB962C8B-B14F-4D97-AF65-F5344CB8AC3E}">
-        <p14:creationId xmlns:p14="http://schemas.microsoft.com/office/powerpoint/2010/main" val="3396045734"/>
+        <p14:creationId xmlns:p14="http://schemas.microsoft.com/office/powerpoint/2010/main" val="3373185555"/>
       </p:ext>
     </p:extLst>
   </p:cSld>

--- a/presentations/INIPresentation_JL.pptx
+++ b/presentations/INIPresentation_JL.pptx
@@ -5,7 +5,7 @@
     <p:sldMasterId id="2147483648" r:id="rId1"/>
   </p:sldMasterIdLst>
   <p:notesMasterIdLst>
-    <p:notesMasterId r:id="rId39"/>
+    <p:notesMasterId r:id="rId38"/>
   </p:notesMasterIdLst>
   <p:sldIdLst>
     <p:sldId id="2188" r:id="rId2"/>
@@ -39,12 +39,11 @@
     <p:sldId id="2318" r:id="rId30"/>
     <p:sldId id="2338" r:id="rId31"/>
     <p:sldId id="2370" r:id="rId32"/>
-    <p:sldId id="2362" r:id="rId33"/>
-    <p:sldId id="2355" r:id="rId34"/>
-    <p:sldId id="2273" r:id="rId35"/>
-    <p:sldId id="2272" r:id="rId36"/>
-    <p:sldId id="2353" r:id="rId37"/>
-    <p:sldId id="2354" r:id="rId38"/>
+    <p:sldId id="328" r:id="rId33"/>
+    <p:sldId id="2362" r:id="rId34"/>
+    <p:sldId id="2355" r:id="rId35"/>
+    <p:sldId id="2273" r:id="rId36"/>
+    <p:sldId id="2272" r:id="rId37"/>
   </p:sldIdLst>
   <p:sldSz cx="12192000" cy="6858000"/>
   <p:notesSz cx="6858000" cy="9144000"/>
@@ -877,6 +876,93 @@
 </p:notes>
 </file>
 
+<file path=ppt/notesSlides/notesSlide10.xml><?xml version="1.0" encoding="utf-8"?>
+<p:notes xmlns:a="http://schemas.openxmlformats.org/drawingml/2006/main" xmlns:r="http://schemas.openxmlformats.org/officeDocument/2006/relationships" xmlns:p="http://schemas.openxmlformats.org/presentationml/2006/main">
+  <p:cSld>
+    <p:spTree>
+      <p:nvGrpSpPr>
+        <p:cNvPr id="1" name=""/>
+        <p:cNvGrpSpPr/>
+        <p:nvPr/>
+      </p:nvGrpSpPr>
+      <p:grpSpPr>
+        <a:xfrm>
+          <a:off x="0" y="0"/>
+          <a:ext cx="0" cy="0"/>
+          <a:chOff x="0" y="0"/>
+          <a:chExt cx="0" cy="0"/>
+        </a:xfrm>
+      </p:grpSpPr>
+      <p:sp>
+        <p:nvSpPr>
+          <p:cNvPr id="2" name="Slide Image Placeholder 1"/>
+          <p:cNvSpPr>
+            <a:spLocks noGrp="1" noRot="1" noChangeAspect="1"/>
+          </p:cNvSpPr>
+          <p:nvPr>
+            <p:ph type="sldImg"/>
+          </p:nvPr>
+        </p:nvSpPr>
+        <p:spPr/>
+      </p:sp>
+      <p:sp>
+        <p:nvSpPr>
+          <p:cNvPr id="3" name="Notes Placeholder 2"/>
+          <p:cNvSpPr>
+            <a:spLocks noGrp="1"/>
+          </p:cNvSpPr>
+          <p:nvPr>
+            <p:ph type="body" idx="1"/>
+          </p:nvPr>
+        </p:nvSpPr>
+        <p:spPr/>
+        <p:txBody>
+          <a:bodyPr/>
+          <a:lstStyle/>
+          <a:p>
+            <a:r>
+              <a:rPr lang="en-US" dirty="0"/>
+              <a:t>Does this capture different goals and trying to do most of these simultaneously leads to tensions and challenges. </a:t>
+            </a:r>
+          </a:p>
+        </p:txBody>
+      </p:sp>
+      <p:sp>
+        <p:nvSpPr>
+          <p:cNvPr id="4" name="Slide Number Placeholder 3"/>
+          <p:cNvSpPr>
+            <a:spLocks noGrp="1"/>
+          </p:cNvSpPr>
+          <p:nvPr>
+            <p:ph type="sldNum" sz="quarter" idx="5"/>
+          </p:nvPr>
+        </p:nvSpPr>
+        <p:spPr/>
+        <p:txBody>
+          <a:bodyPr/>
+          <a:lstStyle/>
+          <a:p>
+            <a:fld id="{E9958A4D-8FF3-450F-970B-2BB1244E94FF}" type="slidenum">
+              <a:rPr lang="en-US" smtClean="0"/>
+              <a:t>35</a:t>
+            </a:fld>
+            <a:endParaRPr lang="en-US"/>
+          </a:p>
+        </p:txBody>
+      </p:sp>
+    </p:spTree>
+    <p:extLst>
+      <p:ext uri="{BB962C8B-B14F-4D97-AF65-F5344CB8AC3E}">
+        <p14:creationId xmlns:p14="http://schemas.microsoft.com/office/powerpoint/2010/main" val="4196810274"/>
+      </p:ext>
+    </p:extLst>
+  </p:cSld>
+  <p:clrMapOvr>
+    <a:masterClrMapping/>
+  </p:clrMapOvr>
+</p:notes>
+</file>
+
 <file path=ppt/notesSlides/notesSlide2.xml><?xml version="1.0" encoding="utf-8"?>
 <p:notes xmlns:a="http://schemas.openxmlformats.org/drawingml/2006/main" xmlns:r="http://schemas.openxmlformats.org/officeDocument/2006/relationships" xmlns:p="http://schemas.openxmlformats.org/presentationml/2006/main">
   <p:cSld>
@@ -1515,10 +1601,7 @@
           <a:bodyPr/>
           <a:lstStyle/>
           <a:p>
-            <a:r>
-              <a:rPr lang="en-US" dirty="0"/>
-              <a:t>Does this capture different goals and trying to do most of these simultaneously leads to tensions and challenges. </a:t>
-            </a:r>
+            <a:endParaRPr lang="en-US" dirty="0"/>
           </a:p>
         </p:txBody>
       </p:sp>
@@ -1537,9 +1620,9 @@
           <a:bodyPr/>
           <a:lstStyle/>
           <a:p>
-            <a:fld id="{E9958A4D-8FF3-450F-970B-2BB1244E94FF}" type="slidenum">
+            <a:fld id="{4D3DA4A9-580A-764A-8739-4EEBA1CA1B72}" type="slidenum">
               <a:rPr lang="en-US" smtClean="0"/>
-              <a:t>34</a:t>
+              <a:t>32</a:t>
             </a:fld>
             <a:endParaRPr lang="en-US"/>
           </a:p>
@@ -1548,7 +1631,7 @@
     </p:spTree>
     <p:extLst>
       <p:ext uri="{BB962C8B-B14F-4D97-AF65-F5344CB8AC3E}">
-        <p14:creationId xmlns:p14="http://schemas.microsoft.com/office/powerpoint/2010/main" val="4196810274"/>
+        <p14:creationId xmlns:p14="http://schemas.microsoft.com/office/powerpoint/2010/main" val="3911842899"/>
       </p:ext>
     </p:extLst>
   </p:cSld>
@@ -5786,7 +5869,7 @@
         </p:blipFill>
         <p:spPr>
           <a:xfrm>
-            <a:off x="43999" y="91442"/>
+            <a:off x="43999" y="95598"/>
             <a:ext cx="2653335" cy="773219"/>
           </a:xfrm>
           <a:prstGeom prst="rect">
@@ -6858,7 +6941,7 @@
         </p:nvSpPr>
         <p:spPr>
           <a:xfrm>
-            <a:off x="7162171" y="4049879"/>
+            <a:off x="6854813" y="4049879"/>
             <a:ext cx="5337187" cy="1938992"/>
           </a:xfrm>
           <a:prstGeom prst="rect">
@@ -6934,8 +7017,8 @@
           <a:chExt cx="0" cy="0"/>
         </a:xfrm>
       </p:grpSpPr>
-      <mc:AlternateContent xmlns:mc="http://schemas.openxmlformats.org/markup-compatibility/2006" xmlns:a14="http://schemas.microsoft.com/office/drawing/2010/main">
-        <mc:Choice Requires="a14">
+      <mc:AlternateContent xmlns:mc="http://schemas.openxmlformats.org/markup-compatibility/2006">
+        <mc:Choice xmlns:a14="http://schemas.microsoft.com/office/drawing/2010/main" Requires="a14">
           <p:sp>
             <p:nvSpPr>
               <p:cNvPr id="4" name="Rectangle 3">
@@ -6951,7 +7034,7 @@
             <p:spPr>
               <a:xfrm>
                 <a:off x="224378" y="3620419"/>
-                <a:ext cx="3193567" cy="707886"/>
+                <a:ext cx="3186257" cy="707886"/>
               </a:xfrm>
               <a:prstGeom prst="rect">
                 <a:avLst/>
@@ -6971,13 +7054,13 @@
                     </m:oMathParaPr>
                     <m:oMath xmlns:m="http://schemas.openxmlformats.org/officeDocument/2006/math">
                       <m:r>
-                        <a:rPr lang="en-US" sz="4000" i="1">
+                        <a:rPr lang="en-US" sz="4000" i="1" smtClean="0">
                           <a:latin typeface="Cambria Math" panose="02040503050406030204" pitchFamily="18" charset="0"/>
                         </a:rPr>
                         <m:t>∑</m:t>
                       </m:r>
                       <m:r>
-                        <a:rPr lang="en-US" sz="4000" i="1">
+                        <a:rPr lang="en-US" sz="4000" i="1" smtClean="0">
                           <a:latin typeface="Cambria Math" panose="02040503050406030204" pitchFamily="18" charset="0"/>
                         </a:rPr>
                         <m:t>𝑢</m:t>
@@ -7001,10 +7084,10 @@
                             </m:sSubPr>
                             <m:e>
                               <m:r>
-                                <a:rPr lang="en-US" sz="4000" i="1">
+                                <a:rPr lang="en-US" sz="4000" b="0" i="1" smtClean="0">
                                   <a:latin typeface="Cambria Math" panose="02040503050406030204" pitchFamily="18" charset="0"/>
                                 </a:rPr>
-                                <m:t>𝑥</m:t>
+                                <m:t>𝑦</m:t>
                               </m:r>
                             </m:e>
                             <m:sub>
@@ -7072,7 +7155,7 @@
             </p:txBody>
           </p:sp>
         </mc:Choice>
-        <mc:Fallback xmlns="">
+        <mc:Fallback>
           <p:sp>
             <p:nvSpPr>
               <p:cNvPr id="4" name="Rectangle 3">
@@ -7090,7 +7173,7 @@
             <p:spPr>
               <a:xfrm>
                 <a:off x="224378" y="3620419"/>
-                <a:ext cx="3193567" cy="707886"/>
+                <a:ext cx="3186257" cy="707886"/>
               </a:xfrm>
               <a:prstGeom prst="rect">
                 <a:avLst/>
@@ -7134,7 +7217,7 @@
             <p:spPr>
               <a:xfrm>
                 <a:off x="4467965" y="1471794"/>
-                <a:ext cx="5628336" cy="707886"/>
+                <a:ext cx="5880328" cy="707886"/>
               </a:xfrm>
               <a:prstGeom prst="rect">
                 <a:avLst/>
@@ -7178,10 +7261,10 @@
                             </m:sSubPr>
                             <m:e>
                               <m:r>
-                                <a:rPr lang="en-US" sz="4000" b="0" i="1" smtClean="0">
+                                <a:rPr lang="en-US" sz="4000" b="1" i="1" smtClean="0">
                                   <a:latin typeface="Cambria Math" panose="02040503050406030204" pitchFamily="18" charset="0"/>
                                 </a:rPr>
-                                <m:t>𝑧</m:t>
+                                <m:t>𝑿</m:t>
                               </m:r>
                             </m:e>
                             <m:sub>
@@ -7225,17 +7308,17 @@
                           <m:sSub>
                             <m:sSubPr>
                               <m:ctrlPr>
-                                <a:rPr lang="en-US" sz="4000" i="1">
+                                <a:rPr lang="en-US" sz="4000" i="1" smtClean="0">
                                   <a:latin typeface="Cambria Math" panose="02040503050406030204" pitchFamily="18" charset="0"/>
                                 </a:rPr>
                               </m:ctrlPr>
                             </m:sSubPr>
                             <m:e>
                               <m:r>
-                                <a:rPr lang="en-US" sz="4000" i="1">
+                                <a:rPr lang="en-US" sz="4000" b="0" i="1" smtClean="0">
                                   <a:latin typeface="Cambria Math" panose="02040503050406030204" pitchFamily="18" charset="0"/>
                                 </a:rPr>
-                                <m:t>𝑥</m:t>
+                                <m:t>𝑦</m:t>
                               </m:r>
                             </m:e>
                             <m:sub>
@@ -7274,10 +7357,10 @@
                         </m:sSubPr>
                         <m:e>
                           <m:r>
-                            <a:rPr lang="en-US" sz="4000" i="1">
-                              <a:latin typeface="Cambria Math" panose="02040503050406030204" pitchFamily="18" charset="0"/>
-                            </a:rPr>
-                            <m:t>𝑥</m:t>
+                            <a:rPr lang="en-US" sz="4000" b="0" i="1" smtClean="0">
+                              <a:latin typeface="Cambria Math" panose="02040503050406030204" pitchFamily="18" charset="0"/>
+                            </a:rPr>
+                            <m:t>𝑦</m:t>
                           </m:r>
                         </m:e>
                         <m:sub>
@@ -7352,7 +7435,7 @@
             <p:spPr>
               <a:xfrm>
                 <a:off x="4467965" y="1471794"/>
-                <a:ext cx="5628336" cy="707886"/>
+                <a:ext cx="5880328" cy="707886"/>
               </a:xfrm>
               <a:prstGeom prst="rect">
                 <a:avLst/>
@@ -7396,7 +7479,7 @@
             <p:spPr>
               <a:xfrm>
                 <a:off x="4391661" y="2463015"/>
-                <a:ext cx="5720477" cy="707886"/>
+                <a:ext cx="5904052" cy="707886"/>
               </a:xfrm>
               <a:prstGeom prst="rect">
                 <a:avLst/>
@@ -7440,10 +7523,10 @@
                             </m:sSubPr>
                             <m:e>
                               <m:r>
-                                <a:rPr lang="en-US" sz="4000" b="0" i="1" smtClean="0">
+                                <a:rPr lang="en-US" sz="4000" b="1" i="1" smtClean="0">
                                   <a:latin typeface="Cambria Math" panose="02040503050406030204" pitchFamily="18" charset="0"/>
                                 </a:rPr>
-                                <m:t>𝑧</m:t>
+                                <m:t>𝑿</m:t>
                               </m:r>
                             </m:e>
                             <m:sub>
@@ -7494,10 +7577,10 @@
                             </m:sSubPr>
                             <m:e>
                               <m:r>
-                                <a:rPr lang="en-US" sz="4000" i="1">
+                                <a:rPr lang="en-US" sz="4000" b="0" i="1" smtClean="0">
                                   <a:latin typeface="Cambria Math" panose="02040503050406030204" pitchFamily="18" charset="0"/>
                                 </a:rPr>
-                                <m:t>𝑥</m:t>
+                                <m:t>𝑦</m:t>
                               </m:r>
                             </m:e>
                             <m:sub>
@@ -7536,10 +7619,10 @@
                         </m:sSubPr>
                         <m:e>
                           <m:r>
-                            <a:rPr lang="en-US" sz="4000" i="1">
-                              <a:latin typeface="Cambria Math" panose="02040503050406030204" pitchFamily="18" charset="0"/>
-                            </a:rPr>
-                            <m:t>𝑥</m:t>
+                            <a:rPr lang="en-US" sz="4000" b="0" i="1" smtClean="0">
+                              <a:latin typeface="Cambria Math" panose="02040503050406030204" pitchFamily="18" charset="0"/>
+                            </a:rPr>
+                            <m:t>𝑦</m:t>
                           </m:r>
                         </m:e>
                         <m:sub>
@@ -7614,7 +7697,7 @@
             <p:spPr>
               <a:xfrm>
                 <a:off x="4391661" y="2463015"/>
-                <a:ext cx="5720477" cy="707886"/>
+                <a:ext cx="5904052" cy="707886"/>
               </a:xfrm>
               <a:prstGeom prst="rect">
                 <a:avLst/>
@@ -7658,7 +7741,7 @@
             <p:spPr>
               <a:xfrm>
                 <a:off x="4391660" y="3534108"/>
-                <a:ext cx="5720477" cy="707886"/>
+                <a:ext cx="5904052" cy="707886"/>
               </a:xfrm>
               <a:prstGeom prst="rect">
                 <a:avLst/>
@@ -7702,10 +7785,10 @@
                             </m:sSubPr>
                             <m:e>
                               <m:r>
-                                <a:rPr lang="en-US" sz="4000" b="0" i="1" smtClean="0">
+                                <a:rPr lang="en-US" sz="4000" b="1" i="1" smtClean="0">
                                   <a:latin typeface="Cambria Math" panose="02040503050406030204" pitchFamily="18" charset="0"/>
                                 </a:rPr>
-                                <m:t>𝑧</m:t>
+                                <m:t>𝑿</m:t>
                               </m:r>
                             </m:e>
                             <m:sub>
@@ -7756,10 +7839,10 @@
                             </m:sSubPr>
                             <m:e>
                               <m:r>
-                                <a:rPr lang="en-US" sz="4000" i="1">
+                                <a:rPr lang="en-US" sz="4000" b="0" i="1" smtClean="0">
                                   <a:latin typeface="Cambria Math" panose="02040503050406030204" pitchFamily="18" charset="0"/>
                                 </a:rPr>
-                                <m:t>𝑥</m:t>
+                                <m:t>𝑦</m:t>
                               </m:r>
                             </m:e>
                             <m:sub>
@@ -7798,10 +7881,10 @@
                         </m:sSubPr>
                         <m:e>
                           <m:r>
-                            <a:rPr lang="en-US" sz="4000" i="1">
-                              <a:latin typeface="Cambria Math" panose="02040503050406030204" pitchFamily="18" charset="0"/>
-                            </a:rPr>
-                            <m:t>𝑥</m:t>
+                            <a:rPr lang="en-US" sz="4000" b="0" i="1" smtClean="0">
+                              <a:latin typeface="Cambria Math" panose="02040503050406030204" pitchFamily="18" charset="0"/>
+                            </a:rPr>
+                            <m:t>𝑦</m:t>
                           </m:r>
                         </m:e>
                         <m:sub>
@@ -7876,7 +7959,7 @@
             <p:spPr>
               <a:xfrm>
                 <a:off x="4391660" y="3534108"/>
-                <a:ext cx="5720477" cy="707886"/>
+                <a:ext cx="5904052" cy="707886"/>
               </a:xfrm>
               <a:prstGeom prst="rect">
                 <a:avLst/>
@@ -7920,7 +8003,7 @@
             <p:spPr>
               <a:xfrm>
                 <a:off x="4359464" y="4693206"/>
-                <a:ext cx="5815695" cy="707886"/>
+                <a:ext cx="5904052" cy="707886"/>
               </a:xfrm>
               <a:prstGeom prst="rect">
                 <a:avLst/>
@@ -7964,10 +8047,10 @@
                             </m:sSubPr>
                             <m:e>
                               <m:r>
-                                <a:rPr lang="en-US" sz="4000" b="0" i="1" smtClean="0">
+                                <a:rPr lang="en-US" sz="4000" b="1" i="1" smtClean="0">
                                   <a:latin typeface="Cambria Math" panose="02040503050406030204" pitchFamily="18" charset="0"/>
                                 </a:rPr>
-                                <m:t>𝑧</m:t>
+                                <m:t>𝑿</m:t>
                               </m:r>
                             </m:e>
                             <m:sub>
@@ -8018,10 +8101,10 @@
                             </m:sSubPr>
                             <m:e>
                               <m:r>
-                                <a:rPr lang="en-US" sz="4000" i="1">
+                                <a:rPr lang="en-US" sz="4000" b="0" i="1" smtClean="0">
                                   <a:latin typeface="Cambria Math" panose="02040503050406030204" pitchFamily="18" charset="0"/>
                                 </a:rPr>
-                                <m:t>𝑥</m:t>
+                                <m:t>𝑦</m:t>
                               </m:r>
                             </m:e>
                             <m:sub>
@@ -8060,10 +8143,10 @@
                         </m:sSubPr>
                         <m:e>
                           <m:r>
-                            <a:rPr lang="en-US" sz="4000" i="1">
-                              <a:latin typeface="Cambria Math" panose="02040503050406030204" pitchFamily="18" charset="0"/>
-                            </a:rPr>
-                            <m:t>𝑥</m:t>
+                            <a:rPr lang="en-US" sz="4000" b="0" i="1" smtClean="0">
+                              <a:latin typeface="Cambria Math" panose="02040503050406030204" pitchFamily="18" charset="0"/>
+                            </a:rPr>
+                            <m:t>𝑦</m:t>
                           </m:r>
                         </m:e>
                         <m:sub>
@@ -8138,7 +8221,7 @@
             <p:spPr>
               <a:xfrm>
                 <a:off x="4359464" y="4693206"/>
-                <a:ext cx="5815695" cy="707886"/>
+                <a:ext cx="5904052" cy="707886"/>
               </a:xfrm>
               <a:prstGeom prst="rect">
                 <a:avLst/>
@@ -8310,8 +8393,8 @@
         </p:nvCxnSpPr>
         <p:spPr>
           <a:xfrm rot="16200000" flipV="1">
-            <a:off x="10127262" y="1794776"/>
-            <a:ext cx="1122472" cy="1184393"/>
+            <a:off x="10253258" y="1920772"/>
+            <a:ext cx="1122472" cy="932401"/>
           </a:xfrm>
           <a:prstGeom prst="bentConnector2">
             <a:avLst/>
@@ -8352,8 +8435,8 @@
         </p:nvCxnSpPr>
         <p:spPr>
           <a:xfrm rot="5400000">
-            <a:off x="10093956" y="3860410"/>
-            <a:ext cx="1267943" cy="1105535"/>
+            <a:off x="10138134" y="3904588"/>
+            <a:ext cx="1267943" cy="1017178"/>
           </a:xfrm>
           <a:prstGeom prst="bentConnector2">
             <a:avLst/>
@@ -8394,8 +8477,8 @@
         </p:nvCxnSpPr>
         <p:spPr>
           <a:xfrm rot="10800000">
-            <a:off x="10112139" y="2816958"/>
-            <a:ext cx="389977" cy="546750"/>
+            <a:off x="10295713" y="2816958"/>
+            <a:ext cx="206402" cy="546750"/>
           </a:xfrm>
           <a:prstGeom prst="bentConnector3">
             <a:avLst/>
@@ -8436,8 +8519,8 @@
         </p:nvCxnSpPr>
         <p:spPr>
           <a:xfrm rot="10800000" flipV="1">
-            <a:off x="10112137" y="3363707"/>
-            <a:ext cx="389978" cy="524343"/>
+            <a:off x="10295713" y="3363707"/>
+            <a:ext cx="206403" cy="524343"/>
           </a:xfrm>
           <a:prstGeom prst="bentConnector3">
             <a:avLst/>
@@ -17447,6 +17530,1703 @@
           <a:chExt cx="0" cy="0"/>
         </a:xfrm>
       </p:grpSpPr>
+      <p:pic>
+        <p:nvPicPr>
+          <p:cNvPr id="2050" name="Picture 2" descr="National Institute of Allergy and Infectious Diseases (NIAID)">
+            <a:extLst>
+              <a:ext uri="{FF2B5EF4-FFF2-40B4-BE49-F238E27FC236}">
+                <a16:creationId xmlns:a16="http://schemas.microsoft.com/office/drawing/2014/main" id="{2BC84C55-C217-34E3-8730-BDD60140122C}"/>
+              </a:ext>
+            </a:extLst>
+          </p:cNvPr>
+          <p:cNvPicPr>
+            <a:picLocks noChangeAspect="1" noChangeArrowheads="1"/>
+          </p:cNvPicPr>
+          <p:nvPr/>
+        </p:nvPicPr>
+        <p:blipFill>
+          <a:blip r:embed="rId3">
+            <a:extLst>
+              <a:ext uri="{28A0092B-C50C-407E-A947-70E740481C1C}">
+                <a14:useLocalDpi xmlns:a14="http://schemas.microsoft.com/office/drawing/2010/main" val="0"/>
+              </a:ext>
+            </a:extLst>
+          </a:blip>
+          <a:srcRect/>
+          <a:stretch>
+            <a:fillRect/>
+          </a:stretch>
+        </p:blipFill>
+        <p:spPr bwMode="auto">
+          <a:xfrm>
+            <a:off x="427403" y="1235453"/>
+            <a:ext cx="2933700" cy="1571625"/>
+          </a:xfrm>
+          <a:prstGeom prst="rect">
+            <a:avLst/>
+          </a:prstGeom>
+          <a:noFill/>
+          <a:extLst>
+            <a:ext uri="{909E8E84-426E-40DD-AFC4-6F175D3DCCD1}">
+              <a14:hiddenFill xmlns:a14="http://schemas.microsoft.com/office/drawing/2010/main">
+                <a:solidFill>
+                  <a:srgbClr val="FFFFFF"/>
+                </a:solidFill>
+              </a14:hiddenFill>
+            </a:ext>
+          </a:extLst>
+        </p:spPr>
+      </p:pic>
+      <p:sp>
+        <p:nvSpPr>
+          <p:cNvPr id="11" name="Rectangle 10">
+            <a:extLst>
+              <a:ext uri="{FF2B5EF4-FFF2-40B4-BE49-F238E27FC236}">
+                <a16:creationId xmlns:a16="http://schemas.microsoft.com/office/drawing/2014/main" id="{24B8B7D4-03B5-91FF-120A-A2C3068CBB0A}"/>
+              </a:ext>
+            </a:extLst>
+          </p:cNvPr>
+          <p:cNvSpPr/>
+          <p:nvPr/>
+        </p:nvSpPr>
+        <p:spPr>
+          <a:xfrm>
+            <a:off x="648237" y="2412642"/>
+            <a:ext cx="2667000" cy="768440"/>
+          </a:xfrm>
+          <a:prstGeom prst="rect">
+            <a:avLst/>
+          </a:prstGeom>
+          <a:solidFill>
+            <a:schemeClr val="bg2">
+              <a:lumMod val="50000"/>
+            </a:schemeClr>
+          </a:solidFill>
+        </p:spPr>
+        <p:style>
+          <a:lnRef idx="2">
+            <a:schemeClr val="accent1">
+              <a:shade val="15000"/>
+            </a:schemeClr>
+          </a:lnRef>
+          <a:fillRef idx="1">
+            <a:schemeClr val="accent1"/>
+          </a:fillRef>
+          <a:effectRef idx="0">
+            <a:schemeClr val="accent1"/>
+          </a:effectRef>
+          <a:fontRef idx="minor">
+            <a:schemeClr val="lt1"/>
+          </a:fontRef>
+        </p:style>
+        <p:txBody>
+          <a:bodyPr rtlCol="0" anchor="ctr"/>
+          <a:lstStyle/>
+          <a:p>
+            <a:pPr algn="ctr"/>
+            <a:endParaRPr lang="en-US"/>
+          </a:p>
+        </p:txBody>
+      </p:sp>
+      <p:sp>
+        <p:nvSpPr>
+          <p:cNvPr id="8" name="TextBox 7">
+            <a:extLst>
+              <a:ext uri="{FF2B5EF4-FFF2-40B4-BE49-F238E27FC236}">
+                <a16:creationId xmlns:a16="http://schemas.microsoft.com/office/drawing/2014/main" id="{D43A2506-C608-A0F0-5A4C-46D4F462CFD1}"/>
+              </a:ext>
+            </a:extLst>
+          </p:cNvPr>
+          <p:cNvSpPr txBox="1"/>
+          <p:nvPr/>
+        </p:nvSpPr>
+        <p:spPr>
+          <a:xfrm>
+            <a:off x="448041" y="241247"/>
+            <a:ext cx="3606800" cy="923330"/>
+          </a:xfrm>
+          <a:prstGeom prst="rect">
+            <a:avLst/>
+          </a:prstGeom>
+          <a:noFill/>
+        </p:spPr>
+        <p:txBody>
+          <a:bodyPr wrap="square" rtlCol="0">
+            <a:spAutoFit/>
+          </a:bodyPr>
+          <a:lstStyle/>
+          <a:p>
+            <a:r>
+              <a:rPr lang="en-US" sz="5400" b="1" dirty="0">
+                <a:latin typeface="Source Sans Pro" panose="020B0503030403020204" pitchFamily="34" charset="0"/>
+                <a:ea typeface="Source Sans Pro" panose="020B0503030403020204" pitchFamily="34" charset="0"/>
+              </a:rPr>
+              <a:t>Thank you!</a:t>
+            </a:r>
+          </a:p>
+        </p:txBody>
+      </p:sp>
+      <p:sp>
+        <p:nvSpPr>
+          <p:cNvPr id="13" name="Rectangle 12">
+            <a:extLst>
+              <a:ext uri="{FF2B5EF4-FFF2-40B4-BE49-F238E27FC236}">
+                <a16:creationId xmlns:a16="http://schemas.microsoft.com/office/drawing/2014/main" id="{6CF1CDF5-E07C-7132-490B-2F7F47BD15A4}"/>
+              </a:ext>
+            </a:extLst>
+          </p:cNvPr>
+          <p:cNvSpPr/>
+          <p:nvPr/>
+        </p:nvSpPr>
+        <p:spPr>
+          <a:xfrm>
+            <a:off x="4680033" y="977550"/>
+            <a:ext cx="7397365" cy="5816977"/>
+          </a:xfrm>
+          <a:prstGeom prst="rect">
+            <a:avLst/>
+          </a:prstGeom>
+        </p:spPr>
+        <p:txBody>
+          <a:bodyPr wrap="square">
+            <a:spAutoFit/>
+          </a:bodyPr>
+          <a:lstStyle/>
+          <a:p>
+            <a:r>
+              <a:rPr lang="en-US" sz="1400" b="1" dirty="0">
+                <a:solidFill>
+                  <a:srgbClr val="1FAEDB"/>
+                </a:solidFill>
+                <a:latin typeface="Source Sans Pro SemiBold" panose="020B0503030403020204" pitchFamily="34" charset="0"/>
+                <a:ea typeface="Source Sans Pro SemiBold" panose="020B0503030403020204" pitchFamily="34" charset="0"/>
+                <a:cs typeface="Arial Unicode MS" panose="020B0604020202020204" pitchFamily="34" charset="-128"/>
+              </a:rPr>
+              <a:t>Coordination Team</a:t>
+            </a:r>
+            <a:br>
+              <a:rPr lang="en-US" sz="1400" b="1" dirty="0">
+                <a:solidFill>
+                  <a:srgbClr val="1FAEDB"/>
+                </a:solidFill>
+                <a:latin typeface="Garamond" panose="02020404030301010803" pitchFamily="18" charset="0"/>
+                <a:ea typeface="Arial Unicode MS" panose="020B0604020202020204" pitchFamily="34" charset="-128"/>
+                <a:cs typeface="Arial Unicode MS" panose="020B0604020202020204" pitchFamily="34" charset="-128"/>
+              </a:rPr>
+            </a:br>
+            <a:r>
+              <a:rPr lang="en-US" altLang="en-US" sz="1100" dirty="0" err="1">
+                <a:latin typeface="Source Sans Pro" panose="020B0503030403020204" pitchFamily="34" charset="0"/>
+                <a:ea typeface="Source Sans Pro" panose="020B0503030403020204" pitchFamily="34" charset="0"/>
+                <a:cs typeface="Times New Roman" panose="02020603050405020304" pitchFamily="18" charset="0"/>
+              </a:rPr>
+              <a:t>Katriona</a:t>
+            </a:r>
+            <a:r>
+              <a:rPr lang="en-US" altLang="en-US" sz="1100" dirty="0">
+                <a:latin typeface="Source Sans Pro" panose="020B0503030403020204" pitchFamily="34" charset="0"/>
+                <a:ea typeface="Source Sans Pro" panose="020B0503030403020204" pitchFamily="34" charset="0"/>
+                <a:cs typeface="Times New Roman" panose="02020603050405020304" pitchFamily="18" charset="0"/>
+              </a:rPr>
+              <a:t> Shea, Justin Lessler, </a:t>
+            </a:r>
+            <a:r>
+              <a:rPr lang="en-US" sz="1100" dirty="0">
+                <a:latin typeface="Source Sans Pro" panose="020B0503030403020204" pitchFamily="34" charset="0"/>
+                <a:ea typeface="Source Sans Pro" panose="020B0503030403020204" pitchFamily="34" charset="0"/>
+              </a:rPr>
+              <a:t>Cécile Viboud, </a:t>
+            </a:r>
+            <a:r>
+              <a:rPr lang="en-US" altLang="en-US" sz="1100" dirty="0">
+                <a:latin typeface="Source Sans Pro" panose="020B0503030403020204" pitchFamily="34" charset="0"/>
+                <a:ea typeface="Source Sans Pro" panose="020B0503030403020204" pitchFamily="34" charset="0"/>
+                <a:cs typeface="Times New Roman" panose="02020603050405020304" pitchFamily="18" charset="0"/>
+              </a:rPr>
+              <a:t>Rebecca Borchering, Emily Howerton, Shaun Truelove, Claire Smith, Michelle Qin, Nicholas Reich, Michael Runge, Lucie Contamin, John Levander, Jessica Kerr, Harry Hochheiser, Luke Mullany, Sara Loo, Sung-</a:t>
+            </a:r>
+            <a:r>
+              <a:rPr lang="en-US" altLang="en-US" sz="1100" dirty="0" err="1">
+                <a:latin typeface="Source Sans Pro" panose="020B0503030403020204" pitchFamily="34" charset="0"/>
+                <a:ea typeface="Source Sans Pro" panose="020B0503030403020204" pitchFamily="34" charset="0"/>
+                <a:cs typeface="Times New Roman" panose="02020603050405020304" pitchFamily="18" charset="0"/>
+              </a:rPr>
+              <a:t>mok</a:t>
+            </a:r>
+            <a:r>
+              <a:rPr lang="en-US" altLang="en-US" sz="1100" dirty="0">
+                <a:latin typeface="Source Sans Pro" panose="020B0503030403020204" pitchFamily="34" charset="0"/>
+                <a:ea typeface="Source Sans Pro" panose="020B0503030403020204" pitchFamily="34" charset="0"/>
+                <a:cs typeface="Times New Roman" panose="02020603050405020304" pitchFamily="18" charset="0"/>
+              </a:rPr>
+              <a:t> Jung, </a:t>
+            </a:r>
+            <a:r>
+              <a:rPr lang="en-US" altLang="en-US" sz="1100" dirty="0" err="1">
+                <a:latin typeface="Source Sans Pro" panose="020B0503030403020204" pitchFamily="34" charset="0"/>
+                <a:ea typeface="Source Sans Pro" panose="020B0503030403020204" pitchFamily="34" charset="0"/>
+                <a:cs typeface="Times New Roman" panose="02020603050405020304" pitchFamily="18" charset="0"/>
+              </a:rPr>
+              <a:t>Smantha</a:t>
+            </a:r>
+            <a:r>
+              <a:rPr lang="en-US" altLang="en-US" sz="1100" dirty="0">
+                <a:latin typeface="Source Sans Pro" panose="020B0503030403020204" pitchFamily="34" charset="0"/>
+                <a:ea typeface="Source Sans Pro" panose="020B0503030403020204" pitchFamily="34" charset="0"/>
+                <a:cs typeface="Times New Roman" panose="02020603050405020304" pitchFamily="18" charset="0"/>
+              </a:rPr>
+              <a:t> Bents, Katie Yan</a:t>
+            </a:r>
+          </a:p>
+          <a:p>
+            <a:endParaRPr lang="en-US" sz="1100" b="1" dirty="0">
+              <a:solidFill>
+                <a:srgbClr val="00B050"/>
+              </a:solidFill>
+              <a:latin typeface="Source Sans Pro SemiBold" panose="020B0503030403020204" pitchFamily="34" charset="0"/>
+              <a:ea typeface="Source Sans Pro SemiBold" panose="020B0503030403020204" pitchFamily="34" charset="0"/>
+              <a:cs typeface="Arial Unicode MS" panose="020B0604020202020204" pitchFamily="34" charset="-128"/>
+            </a:endParaRPr>
+          </a:p>
+          <a:p>
+            <a:r>
+              <a:rPr lang="en-US" sz="1400" b="1" dirty="0">
+                <a:solidFill>
+                  <a:srgbClr val="1FAEDB"/>
+                </a:solidFill>
+                <a:latin typeface="Source Sans Pro SemiBold" panose="020B0503030403020204" pitchFamily="34" charset="0"/>
+                <a:ea typeface="Source Sans Pro SemiBold" panose="020B0503030403020204" pitchFamily="34" charset="0"/>
+                <a:cs typeface="Arial Unicode MS" panose="020B0604020202020204" pitchFamily="34" charset="-128"/>
+              </a:rPr>
+              <a:t>Modeling Groups Contributing COVID-19 Projections</a:t>
+            </a:r>
+            <a:endParaRPr lang="en-US" sz="1400" dirty="0">
+              <a:solidFill>
+                <a:srgbClr val="1FAEDB"/>
+              </a:solidFill>
+              <a:latin typeface="Source Sans Pro" panose="020B0503030403020204" pitchFamily="34" charset="0"/>
+              <a:ea typeface="Source Sans Pro" panose="020B0503030403020204" pitchFamily="34" charset="0"/>
+            </a:endParaRPr>
+          </a:p>
+          <a:p>
+            <a:r>
+              <a:rPr lang="en-US" sz="1100" i="1" dirty="0">
+                <a:latin typeface="Source Sans Pro" panose="020B0503030403020204" pitchFamily="34" charset="0"/>
+                <a:ea typeface="Source Sans Pro" panose="020B0503030403020204" pitchFamily="34" charset="0"/>
+              </a:rPr>
+              <a:t>Columbia University </a:t>
+            </a:r>
+            <a:r>
+              <a:rPr lang="en-US" sz="1100" dirty="0">
+                <a:latin typeface="Source Sans Pro" panose="020B0503030403020204" pitchFamily="34" charset="0"/>
+                <a:ea typeface="Source Sans Pro" panose="020B0503030403020204" pitchFamily="34" charset="0"/>
+              </a:rPr>
+              <a:t>– Age-Stratified Model: Marta </a:t>
+            </a:r>
+            <a:r>
+              <a:rPr lang="en-US" sz="1100" dirty="0" err="1">
+                <a:latin typeface="Source Sans Pro" panose="020B0503030403020204" pitchFamily="34" charset="0"/>
+                <a:ea typeface="Source Sans Pro" panose="020B0503030403020204" pitchFamily="34" charset="0"/>
+              </a:rPr>
+              <a:t>Galanti</a:t>
+            </a:r>
+            <a:r>
+              <a:rPr lang="en-US" sz="1100" dirty="0">
+                <a:latin typeface="Source Sans Pro" panose="020B0503030403020204" pitchFamily="34" charset="0"/>
+                <a:ea typeface="Source Sans Pro" panose="020B0503030403020204" pitchFamily="34" charset="0"/>
+              </a:rPr>
+              <a:t>, Teresa </a:t>
+            </a:r>
+            <a:r>
+              <a:rPr lang="en-US" sz="1100" dirty="0" err="1">
+                <a:latin typeface="Source Sans Pro" panose="020B0503030403020204" pitchFamily="34" charset="0"/>
+                <a:ea typeface="Source Sans Pro" panose="020B0503030403020204" pitchFamily="34" charset="0"/>
+              </a:rPr>
+              <a:t>Yamana</a:t>
+            </a:r>
+            <a:r>
+              <a:rPr lang="en-US" sz="1100" dirty="0">
+                <a:latin typeface="Source Sans Pro" panose="020B0503030403020204" pitchFamily="34" charset="0"/>
+                <a:ea typeface="Source Sans Pro" panose="020B0503030403020204" pitchFamily="34" charset="0"/>
+              </a:rPr>
+              <a:t>, Sen Pei, Jeffrey Shaman</a:t>
+            </a:r>
+          </a:p>
+          <a:p>
+            <a:r>
+              <a:rPr lang="en-US" sz="1100" i="1" dirty="0">
+                <a:latin typeface="Source Sans Pro" panose="020B0503030403020204" pitchFamily="34" charset="0"/>
+                <a:ea typeface="Source Sans Pro" panose="020B0503030403020204" pitchFamily="34" charset="0"/>
+              </a:rPr>
+              <a:t>Institute for Health Metrics and Evaluation – IHME COVID</a:t>
+            </a:r>
+          </a:p>
+          <a:p>
+            <a:r>
+              <a:rPr lang="en-US" sz="1100" i="1" dirty="0">
+                <a:latin typeface="Source Sans Pro" panose="020B0503030403020204" pitchFamily="34" charset="0"/>
+                <a:ea typeface="Source Sans Pro" panose="020B0503030403020204" pitchFamily="34" charset="0"/>
+              </a:rPr>
+              <a:t>John Hopkins University-APL</a:t>
+            </a:r>
+            <a:r>
+              <a:rPr lang="en-US" sz="1100" dirty="0">
+                <a:latin typeface="Source Sans Pro" panose="020B0503030403020204" pitchFamily="34" charset="0"/>
+                <a:ea typeface="Source Sans Pro" panose="020B0503030403020204" pitchFamily="34" charset="0"/>
+              </a:rPr>
+              <a:t>: Matt Kinsey, Kate </a:t>
+            </a:r>
+            <a:r>
+              <a:rPr lang="en-US" sz="1100" dirty="0" err="1">
+                <a:latin typeface="Source Sans Pro" panose="020B0503030403020204" pitchFamily="34" charset="0"/>
+                <a:ea typeface="Source Sans Pro" panose="020B0503030403020204" pitchFamily="34" charset="0"/>
+              </a:rPr>
+              <a:t>Tallaksen</a:t>
+            </a:r>
+            <a:r>
+              <a:rPr lang="en-US" sz="1100" dirty="0">
+                <a:latin typeface="Source Sans Pro" panose="020B0503030403020204" pitchFamily="34" charset="0"/>
+                <a:ea typeface="Source Sans Pro" panose="020B0503030403020204" pitchFamily="34" charset="0"/>
+              </a:rPr>
+              <a:t>, R.F. </a:t>
+            </a:r>
+            <a:r>
+              <a:rPr lang="en-US" sz="1100" dirty="0" err="1">
+                <a:latin typeface="Source Sans Pro" panose="020B0503030403020204" pitchFamily="34" charset="0"/>
+                <a:ea typeface="Source Sans Pro" panose="020B0503030403020204" pitchFamily="34" charset="0"/>
+              </a:rPr>
+              <a:t>Obrecht</a:t>
+            </a:r>
+            <a:r>
+              <a:rPr lang="en-US" sz="1100" dirty="0">
+                <a:latin typeface="Source Sans Pro" panose="020B0503030403020204" pitchFamily="34" charset="0"/>
+                <a:ea typeface="Source Sans Pro" panose="020B0503030403020204" pitchFamily="34" charset="0"/>
+              </a:rPr>
+              <a:t>, Laura Asher, Cash Costello, Michael </a:t>
+            </a:r>
+            <a:r>
+              <a:rPr lang="en-US" sz="1100" dirty="0" err="1">
+                <a:latin typeface="Source Sans Pro" panose="020B0503030403020204" pitchFamily="34" charset="0"/>
+                <a:ea typeface="Source Sans Pro" panose="020B0503030403020204" pitchFamily="34" charset="0"/>
+              </a:rPr>
+              <a:t>Kelbaugh</a:t>
+            </a:r>
+            <a:r>
+              <a:rPr lang="en-US" sz="1100" dirty="0">
+                <a:latin typeface="Source Sans Pro" panose="020B0503030403020204" pitchFamily="34" charset="0"/>
+                <a:ea typeface="Source Sans Pro" panose="020B0503030403020204" pitchFamily="34" charset="0"/>
+              </a:rPr>
+              <a:t>, Shelby Wilson, Kaitlin Lovett</a:t>
+            </a:r>
+          </a:p>
+          <a:p>
+            <a:r>
+              <a:rPr lang="en-US" sz="1100" i="1" dirty="0">
+                <a:latin typeface="Source Sans Pro" panose="020B0503030403020204" pitchFamily="34" charset="0"/>
+                <a:ea typeface="Source Sans Pro" panose="020B0503030403020204" pitchFamily="34" charset="0"/>
+              </a:rPr>
+              <a:t>John Hopkins University-IDD-COVIDSP</a:t>
+            </a:r>
+            <a:r>
+              <a:rPr lang="en-US" sz="1100" dirty="0">
+                <a:latin typeface="Source Sans Pro" panose="020B0503030403020204" pitchFamily="34" charset="0"/>
+                <a:ea typeface="Source Sans Pro" panose="020B0503030403020204" pitchFamily="34" charset="0"/>
+              </a:rPr>
+              <a:t>: Joseph C. Lemaitre, Juan Dent Hulse,  Kyra H. </a:t>
+            </a:r>
+            <a:r>
+              <a:rPr lang="en-US" sz="1100" dirty="0" err="1">
+                <a:latin typeface="Source Sans Pro" panose="020B0503030403020204" pitchFamily="34" charset="0"/>
+                <a:ea typeface="Source Sans Pro" panose="020B0503030403020204" pitchFamily="34" charset="0"/>
+              </a:rPr>
+              <a:t>Grantz</a:t>
+            </a:r>
+            <a:r>
+              <a:rPr lang="en-US" sz="1100" dirty="0">
+                <a:latin typeface="Source Sans Pro" panose="020B0503030403020204" pitchFamily="34" charset="0"/>
+                <a:ea typeface="Source Sans Pro" panose="020B0503030403020204" pitchFamily="34" charset="0"/>
+              </a:rPr>
+              <a:t>, Joshua Kaminsky, </a:t>
+            </a:r>
+            <a:br>
+              <a:rPr lang="en-US" sz="1100" dirty="0">
+                <a:latin typeface="Source Sans Pro" panose="020B0503030403020204" pitchFamily="34" charset="0"/>
+                <a:ea typeface="Source Sans Pro" panose="020B0503030403020204" pitchFamily="34" charset="0"/>
+              </a:rPr>
+            </a:br>
+            <a:r>
+              <a:rPr lang="en-US" sz="1100" dirty="0">
+                <a:latin typeface="Source Sans Pro" panose="020B0503030403020204" pitchFamily="34" charset="0"/>
+                <a:ea typeface="Source Sans Pro" panose="020B0503030403020204" pitchFamily="34" charset="0"/>
+              </a:rPr>
+              <a:t>Stephen A. Lauer, Elizabeth C. Lee, Justin Lessler, Hannah R. Meredith, Javier Perez-</a:t>
+            </a:r>
+            <a:r>
+              <a:rPr lang="en-US" sz="1100" dirty="0" err="1">
+                <a:latin typeface="Source Sans Pro" panose="020B0503030403020204" pitchFamily="34" charset="0"/>
+                <a:ea typeface="Source Sans Pro" panose="020B0503030403020204" pitchFamily="34" charset="0"/>
+              </a:rPr>
+              <a:t>Saez</a:t>
+            </a:r>
+            <a:r>
+              <a:rPr lang="en-US" sz="1100" dirty="0">
+                <a:latin typeface="Source Sans Pro" panose="020B0503030403020204" pitchFamily="34" charset="0"/>
+                <a:ea typeface="Source Sans Pro" panose="020B0503030403020204" pitchFamily="34" charset="0"/>
+              </a:rPr>
+              <a:t>, Shaun A. Truelove, Claire P. Smith, Lindsay T. Keegan, Kathryn Kaminsky, Sam Shah, Josh Wills, Pierre-Yves </a:t>
+            </a:r>
+            <a:r>
+              <a:rPr lang="en-US" sz="1100" dirty="0" err="1">
+                <a:latin typeface="Source Sans Pro" panose="020B0503030403020204" pitchFamily="34" charset="0"/>
+                <a:ea typeface="Source Sans Pro" panose="020B0503030403020204" pitchFamily="34" charset="0"/>
+              </a:rPr>
+              <a:t>Aquilanti</a:t>
+            </a:r>
+            <a:r>
+              <a:rPr lang="en-US" sz="1100" dirty="0">
+                <a:latin typeface="Source Sans Pro" panose="020B0503030403020204" pitchFamily="34" charset="0"/>
+                <a:ea typeface="Source Sans Pro" panose="020B0503030403020204" pitchFamily="34" charset="0"/>
+              </a:rPr>
+              <a:t>, Karthik Raman,  </a:t>
+            </a:r>
+            <a:br>
+              <a:rPr lang="en-US" sz="1100" dirty="0">
+                <a:latin typeface="Source Sans Pro" panose="020B0503030403020204" pitchFamily="34" charset="0"/>
+                <a:ea typeface="Source Sans Pro" panose="020B0503030403020204" pitchFamily="34" charset="0"/>
+              </a:rPr>
+            </a:br>
+            <a:r>
+              <a:rPr lang="en-US" sz="1100" dirty="0">
+                <a:latin typeface="Source Sans Pro" panose="020B0503030403020204" pitchFamily="34" charset="0"/>
+                <a:ea typeface="Source Sans Pro" panose="020B0503030403020204" pitchFamily="34" charset="0"/>
+              </a:rPr>
+              <a:t>Arun </a:t>
+            </a:r>
+            <a:r>
+              <a:rPr lang="en-US" sz="1100" dirty="0" err="1">
+                <a:latin typeface="Source Sans Pro" panose="020B0503030403020204" pitchFamily="34" charset="0"/>
+                <a:ea typeface="Source Sans Pro" panose="020B0503030403020204" pitchFamily="34" charset="0"/>
+              </a:rPr>
+              <a:t>Subramaniyan</a:t>
+            </a:r>
+            <a:r>
+              <a:rPr lang="en-US" sz="1100" dirty="0">
+                <a:latin typeface="Source Sans Pro" panose="020B0503030403020204" pitchFamily="34" charset="0"/>
+                <a:ea typeface="Source Sans Pro" panose="020B0503030403020204" pitchFamily="34" charset="0"/>
+              </a:rPr>
+              <a:t>, Greg </a:t>
+            </a:r>
+            <a:r>
+              <a:rPr lang="en-US" sz="1100" dirty="0" err="1">
+                <a:latin typeface="Source Sans Pro" panose="020B0503030403020204" pitchFamily="34" charset="0"/>
+                <a:ea typeface="Source Sans Pro" panose="020B0503030403020204" pitchFamily="34" charset="0"/>
+              </a:rPr>
+              <a:t>Thursam</a:t>
+            </a:r>
+            <a:r>
+              <a:rPr lang="en-US" sz="1100" dirty="0">
+                <a:latin typeface="Source Sans Pro" panose="020B0503030403020204" pitchFamily="34" charset="0"/>
+                <a:ea typeface="Source Sans Pro" panose="020B0503030403020204" pitchFamily="34" charset="0"/>
+              </a:rPr>
+              <a:t>, Anh Tran</a:t>
+            </a:r>
+          </a:p>
+          <a:p>
+            <a:r>
+              <a:rPr lang="en-US" sz="1100" i="1" dirty="0">
+                <a:latin typeface="Source Sans Pro" panose="020B0503030403020204" pitchFamily="34" charset="0"/>
+                <a:ea typeface="Source Sans Pro" panose="020B0503030403020204" pitchFamily="34" charset="0"/>
+              </a:rPr>
+              <a:t>North Carolina State University-COVSIM</a:t>
+            </a:r>
+            <a:r>
+              <a:rPr lang="en-US" sz="1100" dirty="0">
+                <a:latin typeface="Source Sans Pro" panose="020B0503030403020204" pitchFamily="34" charset="0"/>
+                <a:ea typeface="Source Sans Pro" panose="020B0503030403020204" pitchFamily="34" charset="0"/>
+              </a:rPr>
+              <a:t>: Erik </a:t>
+            </a:r>
+            <a:r>
+              <a:rPr lang="en-US" sz="1100" dirty="0" err="1">
+                <a:latin typeface="Source Sans Pro" panose="020B0503030403020204" pitchFamily="34" charset="0"/>
+                <a:ea typeface="Source Sans Pro" panose="020B0503030403020204" pitchFamily="34" charset="0"/>
+              </a:rPr>
+              <a:t>Rosenstrom</a:t>
+            </a:r>
+            <a:r>
+              <a:rPr lang="en-US" sz="1100" dirty="0">
+                <a:latin typeface="Source Sans Pro" panose="020B0503030403020204" pitchFamily="34" charset="0"/>
+                <a:ea typeface="Source Sans Pro" panose="020B0503030403020204" pitchFamily="34" charset="0"/>
+              </a:rPr>
+              <a:t>, Jessica Mele, Julie Swann, Julie Ivy, Maria Mayorga</a:t>
+            </a:r>
+          </a:p>
+          <a:p>
+            <a:r>
+              <a:rPr lang="en-US" sz="1100" i="1" dirty="0">
+                <a:latin typeface="Source Sans Pro" panose="020B0503030403020204" pitchFamily="34" charset="0"/>
+                <a:ea typeface="Source Sans Pro" panose="020B0503030403020204" pitchFamily="34" charset="0"/>
+              </a:rPr>
+              <a:t>Northeastern University MOBS GLEAM COVID</a:t>
+            </a:r>
+            <a:r>
+              <a:rPr lang="en-US" sz="1100" dirty="0">
+                <a:latin typeface="Source Sans Pro" panose="020B0503030403020204" pitchFamily="34" charset="0"/>
+                <a:ea typeface="Source Sans Pro" panose="020B0503030403020204" pitchFamily="34" charset="0"/>
+              </a:rPr>
+              <a:t>: Matteo Chinazzi, Jessica T. Davis,  </a:t>
+            </a:r>
+            <a:r>
+              <a:rPr lang="en-US" sz="1100" dirty="0" err="1">
+                <a:latin typeface="Source Sans Pro" panose="020B0503030403020204" pitchFamily="34" charset="0"/>
+                <a:ea typeface="Source Sans Pro" panose="020B0503030403020204" pitchFamily="34" charset="0"/>
+              </a:rPr>
+              <a:t>Kunpeng</a:t>
+            </a:r>
+            <a:r>
+              <a:rPr lang="en-US" sz="1100" dirty="0">
+                <a:latin typeface="Source Sans Pro" panose="020B0503030403020204" pitchFamily="34" charset="0"/>
+                <a:ea typeface="Source Sans Pro" panose="020B0503030403020204" pitchFamily="34" charset="0"/>
+              </a:rPr>
+              <a:t> Mu, </a:t>
+            </a:r>
+            <a:r>
+              <a:rPr lang="en-US" sz="1100" dirty="0" err="1">
+                <a:latin typeface="Source Sans Pro" panose="020B0503030403020204" pitchFamily="34" charset="0"/>
+                <a:ea typeface="Source Sans Pro" panose="020B0503030403020204" pitchFamily="34" charset="0"/>
+              </a:rPr>
+              <a:t>Xinyue</a:t>
+            </a:r>
+            <a:r>
+              <a:rPr lang="en-US" sz="1100" dirty="0">
+                <a:latin typeface="Source Sans Pro" panose="020B0503030403020204" pitchFamily="34" charset="0"/>
+                <a:ea typeface="Source Sans Pro" panose="020B0503030403020204" pitchFamily="34" charset="0"/>
+              </a:rPr>
+              <a:t> </a:t>
+            </a:r>
+            <a:r>
+              <a:rPr lang="en-US" sz="1100" dirty="0" err="1">
+                <a:latin typeface="Source Sans Pro" panose="020B0503030403020204" pitchFamily="34" charset="0"/>
+                <a:ea typeface="Source Sans Pro" panose="020B0503030403020204" pitchFamily="34" charset="0"/>
+              </a:rPr>
+              <a:t>Xiong</a:t>
+            </a:r>
+            <a:r>
+              <a:rPr lang="en-US" sz="1100" dirty="0">
+                <a:latin typeface="Source Sans Pro" panose="020B0503030403020204" pitchFamily="34" charset="0"/>
+                <a:ea typeface="Source Sans Pro" panose="020B0503030403020204" pitchFamily="34" charset="0"/>
+              </a:rPr>
+              <a:t>, </a:t>
+            </a:r>
+            <a:br>
+              <a:rPr lang="en-US" sz="1100" dirty="0">
+                <a:latin typeface="Source Sans Pro" panose="020B0503030403020204" pitchFamily="34" charset="0"/>
+                <a:ea typeface="Source Sans Pro" panose="020B0503030403020204" pitchFamily="34" charset="0"/>
+              </a:rPr>
+            </a:br>
+            <a:r>
+              <a:rPr lang="en-US" sz="1100" dirty="0">
+                <a:latin typeface="Source Sans Pro" panose="020B0503030403020204" pitchFamily="34" charset="0"/>
+                <a:ea typeface="Source Sans Pro" panose="020B0503030403020204" pitchFamily="34" charset="0"/>
+              </a:rPr>
+              <a:t>Ana Pastore y Piontti, Alessandro Vespignani</a:t>
+            </a:r>
+          </a:p>
+          <a:p>
+            <a:r>
+              <a:rPr lang="en-US" sz="1100" i="1" dirty="0">
+                <a:latin typeface="Source Sans Pro" panose="020B0503030403020204" pitchFamily="34" charset="0"/>
+                <a:ea typeface="Source Sans Pro" panose="020B0503030403020204" pitchFamily="34" charset="0"/>
+              </a:rPr>
+              <a:t>University of Florida – ABM</a:t>
+            </a:r>
+            <a:r>
+              <a:rPr lang="en-US" sz="1100" dirty="0">
+                <a:latin typeface="Source Sans Pro" panose="020B0503030403020204" pitchFamily="34" charset="0"/>
+                <a:ea typeface="Source Sans Pro" panose="020B0503030403020204" pitchFamily="34" charset="0"/>
+              </a:rPr>
+              <a:t>: Thomas </a:t>
+            </a:r>
+            <a:r>
+              <a:rPr lang="en-US" sz="1100" dirty="0" err="1">
+                <a:latin typeface="Source Sans Pro" panose="020B0503030403020204" pitchFamily="34" charset="0"/>
+                <a:ea typeface="Source Sans Pro" panose="020B0503030403020204" pitchFamily="34" charset="0"/>
+              </a:rPr>
+              <a:t>Hladish</a:t>
+            </a:r>
+            <a:r>
+              <a:rPr lang="en-US" sz="1100" dirty="0">
+                <a:latin typeface="Source Sans Pro" panose="020B0503030403020204" pitchFamily="34" charset="0"/>
+                <a:ea typeface="Source Sans Pro" panose="020B0503030403020204" pitchFamily="34" charset="0"/>
+              </a:rPr>
+              <a:t>, </a:t>
+            </a:r>
+            <a:r>
+              <a:rPr lang="en-US" sz="1100" dirty="0" err="1">
+                <a:latin typeface="Source Sans Pro" panose="020B0503030403020204" pitchFamily="34" charset="0"/>
+                <a:ea typeface="Source Sans Pro" panose="020B0503030403020204" pitchFamily="34" charset="0"/>
+              </a:rPr>
+              <a:t>Alexandar</a:t>
+            </a:r>
+            <a:r>
+              <a:rPr lang="en-US" sz="1100" dirty="0">
+                <a:latin typeface="Source Sans Pro" panose="020B0503030403020204" pitchFamily="34" charset="0"/>
+                <a:ea typeface="Source Sans Pro" panose="020B0503030403020204" pitchFamily="34" charset="0"/>
+              </a:rPr>
+              <a:t> Pillai, </a:t>
+            </a:r>
+            <a:r>
+              <a:rPr lang="en-US" sz="1100" dirty="0" err="1">
+                <a:latin typeface="Source Sans Pro" panose="020B0503030403020204" pitchFamily="34" charset="0"/>
+                <a:ea typeface="Source Sans Pro" panose="020B0503030403020204" pitchFamily="34" charset="0"/>
+              </a:rPr>
+              <a:t>Kok</a:t>
+            </a:r>
+            <a:r>
+              <a:rPr lang="en-US" sz="1100" dirty="0">
+                <a:latin typeface="Source Sans Pro" panose="020B0503030403020204" pitchFamily="34" charset="0"/>
+                <a:ea typeface="Source Sans Pro" panose="020B0503030403020204" pitchFamily="34" charset="0"/>
+              </a:rPr>
+              <a:t> Ben </a:t>
+            </a:r>
+            <a:r>
+              <a:rPr lang="en-US" sz="1100" dirty="0" err="1">
+                <a:latin typeface="Source Sans Pro" panose="020B0503030403020204" pitchFamily="34" charset="0"/>
+                <a:ea typeface="Source Sans Pro" panose="020B0503030403020204" pitchFamily="34" charset="0"/>
+              </a:rPr>
+              <a:t>Toh</a:t>
+            </a:r>
+            <a:r>
+              <a:rPr lang="en-US" sz="1100" dirty="0">
+                <a:latin typeface="Source Sans Pro" panose="020B0503030403020204" pitchFamily="34" charset="0"/>
+                <a:ea typeface="Source Sans Pro" panose="020B0503030403020204" pitchFamily="34" charset="0"/>
+              </a:rPr>
+              <a:t>, Ira </a:t>
+            </a:r>
+            <a:r>
+              <a:rPr lang="en-US" sz="1100" dirty="0" err="1">
+                <a:latin typeface="Source Sans Pro" panose="020B0503030403020204" pitchFamily="34" charset="0"/>
+                <a:ea typeface="Source Sans Pro" panose="020B0503030403020204" pitchFamily="34" charset="0"/>
+              </a:rPr>
+              <a:t>Longini</a:t>
+            </a:r>
+            <a:r>
+              <a:rPr lang="en-US" sz="1100" dirty="0">
+                <a:latin typeface="Source Sans Pro" panose="020B0503030403020204" pitchFamily="34" charset="0"/>
+                <a:ea typeface="Source Sans Pro" panose="020B0503030403020204" pitchFamily="34" charset="0"/>
+              </a:rPr>
+              <a:t> Jr. </a:t>
+            </a:r>
+          </a:p>
+          <a:p>
+            <a:r>
+              <a:rPr lang="en-US" sz="1100" i="1" dirty="0">
+                <a:latin typeface="Source Sans Pro" panose="020B0503030403020204" pitchFamily="34" charset="0"/>
+                <a:ea typeface="Source Sans Pro" panose="020B0503030403020204" pitchFamily="34" charset="0"/>
+              </a:rPr>
+              <a:t>University of North Carolina at Charlotte – UNCC-</a:t>
+            </a:r>
+            <a:r>
+              <a:rPr lang="en-US" sz="1100" i="1" dirty="0" err="1">
+                <a:latin typeface="Source Sans Pro" panose="020B0503030403020204" pitchFamily="34" charset="0"/>
+                <a:ea typeface="Source Sans Pro" panose="020B0503030403020204" pitchFamily="34" charset="0"/>
+              </a:rPr>
+              <a:t>hierbin</a:t>
+            </a:r>
+            <a:r>
+              <a:rPr lang="en-US" sz="1100" dirty="0">
+                <a:latin typeface="Source Sans Pro" panose="020B0503030403020204" pitchFamily="34" charset="0"/>
+                <a:ea typeface="Source Sans Pro" panose="020B0503030403020204" pitchFamily="34" charset="0"/>
+              </a:rPr>
+              <a:t>: Shi Chen, </a:t>
+            </a:r>
+            <a:r>
+              <a:rPr lang="en-US" sz="1100" dirty="0" err="1">
+                <a:latin typeface="Source Sans Pro" panose="020B0503030403020204" pitchFamily="34" charset="0"/>
+                <a:ea typeface="Source Sans Pro" panose="020B0503030403020204" pitchFamily="34" charset="0"/>
+              </a:rPr>
+              <a:t>Rajib</a:t>
+            </a:r>
+            <a:r>
+              <a:rPr lang="en-US" sz="1100" dirty="0">
+                <a:latin typeface="Source Sans Pro" panose="020B0503030403020204" pitchFamily="34" charset="0"/>
+                <a:ea typeface="Source Sans Pro" panose="020B0503030403020204" pitchFamily="34" charset="0"/>
+              </a:rPr>
+              <a:t> Paul, Daniel </a:t>
+            </a:r>
+            <a:r>
+              <a:rPr lang="en-US" sz="1100" dirty="0" err="1">
+                <a:latin typeface="Source Sans Pro" panose="020B0503030403020204" pitchFamily="34" charset="0"/>
+                <a:ea typeface="Source Sans Pro" panose="020B0503030403020204" pitchFamily="34" charset="0"/>
+              </a:rPr>
+              <a:t>Janies</a:t>
+            </a:r>
+            <a:r>
+              <a:rPr lang="en-US" sz="1100" dirty="0">
+                <a:latin typeface="Source Sans Pro" panose="020B0503030403020204" pitchFamily="34" charset="0"/>
+                <a:ea typeface="Source Sans Pro" panose="020B0503030403020204" pitchFamily="34" charset="0"/>
+              </a:rPr>
+              <a:t>, Jen-Claude Thill</a:t>
+            </a:r>
+          </a:p>
+          <a:p>
+            <a:r>
+              <a:rPr lang="en-US" sz="1100" i="1" dirty="0">
+                <a:latin typeface="Source Sans Pro" panose="020B0503030403020204" pitchFamily="34" charset="0"/>
+                <a:ea typeface="Source Sans Pro" panose="020B0503030403020204" pitchFamily="34" charset="0"/>
+              </a:rPr>
+              <a:t>University of Notre Dame - FRED</a:t>
+            </a:r>
+            <a:r>
+              <a:rPr lang="en-US" sz="1100" dirty="0">
+                <a:latin typeface="Source Sans Pro" panose="020B0503030403020204" pitchFamily="34" charset="0"/>
+                <a:ea typeface="Source Sans Pro" panose="020B0503030403020204" pitchFamily="34" charset="0"/>
+              </a:rPr>
+              <a:t>: Guido </a:t>
+            </a:r>
+            <a:r>
+              <a:rPr lang="en-US" sz="1100" dirty="0" err="1">
+                <a:latin typeface="Source Sans Pro" panose="020B0503030403020204" pitchFamily="34" charset="0"/>
+                <a:ea typeface="Source Sans Pro" panose="020B0503030403020204" pitchFamily="34" charset="0"/>
+              </a:rPr>
+              <a:t>Espana</a:t>
+            </a:r>
+            <a:r>
+              <a:rPr lang="en-US" sz="1100" dirty="0">
+                <a:latin typeface="Source Sans Pro" panose="020B0503030403020204" pitchFamily="34" charset="0"/>
+                <a:ea typeface="Source Sans Pro" panose="020B0503030403020204" pitchFamily="34" charset="0"/>
+              </a:rPr>
+              <a:t>, Sean </a:t>
+            </a:r>
+            <a:r>
+              <a:rPr lang="en-US" sz="1100" dirty="0" err="1">
+                <a:latin typeface="Source Sans Pro" panose="020B0503030403020204" pitchFamily="34" charset="0"/>
+                <a:ea typeface="Source Sans Pro" panose="020B0503030403020204" pitchFamily="34" charset="0"/>
+              </a:rPr>
+              <a:t>Cavany</a:t>
+            </a:r>
+            <a:r>
+              <a:rPr lang="en-US" sz="1100" dirty="0">
+                <a:latin typeface="Source Sans Pro" panose="020B0503030403020204" pitchFamily="34" charset="0"/>
+                <a:ea typeface="Source Sans Pro" panose="020B0503030403020204" pitchFamily="34" charset="0"/>
+              </a:rPr>
+              <a:t>, Sean Moore, Alex Perkins</a:t>
+            </a:r>
+          </a:p>
+          <a:p>
+            <a:r>
+              <a:rPr lang="en-US" sz="1100" i="1" dirty="0">
+                <a:latin typeface="Source Sans Pro" panose="020B0503030403020204" pitchFamily="34" charset="0"/>
+                <a:ea typeface="Source Sans Pro" panose="020B0503030403020204" pitchFamily="34" charset="0"/>
+              </a:rPr>
+              <a:t>University Southern California </a:t>
+            </a:r>
+            <a:r>
+              <a:rPr lang="en-US" sz="1100" i="1" dirty="0" err="1">
+                <a:latin typeface="Source Sans Pro" panose="020B0503030403020204" pitchFamily="34" charset="0"/>
+                <a:ea typeface="Source Sans Pro" panose="020B0503030403020204" pitchFamily="34" charset="0"/>
+              </a:rPr>
+              <a:t>SlkJalpha</a:t>
+            </a:r>
+            <a:r>
+              <a:rPr lang="en-US" sz="1100" dirty="0">
+                <a:latin typeface="Source Sans Pro" panose="020B0503030403020204" pitchFamily="34" charset="0"/>
+                <a:ea typeface="Source Sans Pro" panose="020B0503030403020204" pitchFamily="34" charset="0"/>
+              </a:rPr>
+              <a:t>: </a:t>
+            </a:r>
+            <a:r>
+              <a:rPr lang="fi-FI" sz="1100" dirty="0" err="1">
+                <a:latin typeface="Source Sans Pro" panose="020B0503030403020204" pitchFamily="34" charset="0"/>
+                <a:ea typeface="Source Sans Pro" panose="020B0503030403020204" pitchFamily="34" charset="0"/>
+              </a:rPr>
+              <a:t>Ajitesh</a:t>
+            </a:r>
+            <a:r>
+              <a:rPr lang="fi-FI" sz="1100" dirty="0">
+                <a:latin typeface="Source Sans Pro" panose="020B0503030403020204" pitchFamily="34" charset="0"/>
+                <a:ea typeface="Source Sans Pro" panose="020B0503030403020204" pitchFamily="34" charset="0"/>
+              </a:rPr>
+              <a:t> </a:t>
+            </a:r>
+            <a:r>
+              <a:rPr lang="fi-FI" sz="1100" dirty="0" err="1">
+                <a:latin typeface="Source Sans Pro" panose="020B0503030403020204" pitchFamily="34" charset="0"/>
+                <a:ea typeface="Source Sans Pro" panose="020B0503030403020204" pitchFamily="34" charset="0"/>
+              </a:rPr>
+              <a:t>Srivastava</a:t>
+            </a:r>
+            <a:r>
+              <a:rPr lang="fi-FI" sz="1100" dirty="0">
+                <a:latin typeface="Source Sans Pro" panose="020B0503030403020204" pitchFamily="34" charset="0"/>
+                <a:ea typeface="Source Sans Pro" panose="020B0503030403020204" pitchFamily="34" charset="0"/>
+              </a:rPr>
+              <a:t>, </a:t>
+            </a:r>
+            <a:r>
+              <a:rPr lang="fi-FI" sz="1100" dirty="0" err="1">
+                <a:latin typeface="Source Sans Pro" panose="020B0503030403020204" pitchFamily="34" charset="0"/>
+                <a:ea typeface="Source Sans Pro" panose="020B0503030403020204" pitchFamily="34" charset="0"/>
+              </a:rPr>
+              <a:t>Majd</a:t>
+            </a:r>
+            <a:r>
+              <a:rPr lang="fi-FI" sz="1100" dirty="0">
+                <a:latin typeface="Source Sans Pro" panose="020B0503030403020204" pitchFamily="34" charset="0"/>
+                <a:ea typeface="Source Sans Pro" panose="020B0503030403020204" pitchFamily="34" charset="0"/>
+              </a:rPr>
+              <a:t> </a:t>
+            </a:r>
+            <a:r>
+              <a:rPr lang="fi-FI" sz="1100" dirty="0" err="1">
+                <a:latin typeface="Source Sans Pro" panose="020B0503030403020204" pitchFamily="34" charset="0"/>
+                <a:ea typeface="Source Sans Pro" panose="020B0503030403020204" pitchFamily="34" charset="0"/>
+              </a:rPr>
+              <a:t>Al</a:t>
+            </a:r>
+            <a:r>
+              <a:rPr lang="fi-FI" sz="1100" dirty="0">
+                <a:latin typeface="Source Sans Pro" panose="020B0503030403020204" pitchFamily="34" charset="0"/>
+                <a:ea typeface="Source Sans Pro" panose="020B0503030403020204" pitchFamily="34" charset="0"/>
+              </a:rPr>
+              <a:t> </a:t>
+            </a:r>
+            <a:r>
+              <a:rPr lang="fi-FI" sz="1100" dirty="0" err="1">
+                <a:latin typeface="Source Sans Pro" panose="020B0503030403020204" pitchFamily="34" charset="0"/>
+                <a:ea typeface="Source Sans Pro" panose="020B0503030403020204" pitchFamily="34" charset="0"/>
+              </a:rPr>
+              <a:t>Aawar</a:t>
+            </a:r>
+            <a:endParaRPr lang="fi-FI" sz="1100" dirty="0">
+              <a:latin typeface="Source Sans Pro" panose="020B0503030403020204" pitchFamily="34" charset="0"/>
+              <a:ea typeface="Source Sans Pro" panose="020B0503030403020204" pitchFamily="34" charset="0"/>
+            </a:endParaRPr>
+          </a:p>
+          <a:p>
+            <a:r>
+              <a:rPr lang="fi-FI" sz="1100" i="1" dirty="0" err="1">
+                <a:latin typeface="Source Sans Pro" panose="020B0503030403020204" pitchFamily="34" charset="0"/>
+                <a:ea typeface="Source Sans Pro" panose="020B0503030403020204" pitchFamily="34" charset="0"/>
+              </a:rPr>
+              <a:t>University</a:t>
+            </a:r>
+            <a:r>
+              <a:rPr lang="fi-FI" sz="1100" i="1" dirty="0">
+                <a:latin typeface="Source Sans Pro" panose="020B0503030403020204" pitchFamily="34" charset="0"/>
+                <a:ea typeface="Source Sans Pro" panose="020B0503030403020204" pitchFamily="34" charset="0"/>
+              </a:rPr>
+              <a:t> of Texas at Austin-</a:t>
+            </a:r>
+            <a:r>
+              <a:rPr lang="fi-FI" sz="1100" i="1" dirty="0" err="1">
+                <a:latin typeface="Source Sans Pro" panose="020B0503030403020204" pitchFamily="34" charset="0"/>
+                <a:ea typeface="Source Sans Pro" panose="020B0503030403020204" pitchFamily="34" charset="0"/>
+              </a:rPr>
+              <a:t>ImmunoSEIRS</a:t>
+            </a:r>
+            <a:r>
+              <a:rPr lang="fi-FI" sz="1100" dirty="0">
+                <a:latin typeface="Source Sans Pro" panose="020B0503030403020204" pitchFamily="34" charset="0"/>
+                <a:ea typeface="Source Sans Pro" panose="020B0503030403020204" pitchFamily="34" charset="0"/>
+              </a:rPr>
+              <a:t>: </a:t>
+            </a:r>
+            <a:r>
+              <a:rPr lang="fi-FI" sz="1100" dirty="0" err="1">
+                <a:latin typeface="Source Sans Pro" panose="020B0503030403020204" pitchFamily="34" charset="0"/>
+                <a:ea typeface="Source Sans Pro" panose="020B0503030403020204" pitchFamily="34" charset="0"/>
+              </a:rPr>
+              <a:t>Anass</a:t>
+            </a:r>
+            <a:r>
+              <a:rPr lang="fi-FI" sz="1100" dirty="0">
+                <a:latin typeface="Source Sans Pro" panose="020B0503030403020204" pitchFamily="34" charset="0"/>
+                <a:ea typeface="Source Sans Pro" panose="020B0503030403020204" pitchFamily="34" charset="0"/>
+              </a:rPr>
+              <a:t> </a:t>
+            </a:r>
+            <a:r>
+              <a:rPr lang="fi-FI" sz="1100" dirty="0" err="1">
+                <a:latin typeface="Source Sans Pro" panose="020B0503030403020204" pitchFamily="34" charset="0"/>
+                <a:ea typeface="Source Sans Pro" panose="020B0503030403020204" pitchFamily="34" charset="0"/>
+              </a:rPr>
+              <a:t>Bouchnita</a:t>
+            </a:r>
+            <a:r>
+              <a:rPr lang="fi-FI" sz="1100" dirty="0">
+                <a:latin typeface="Source Sans Pro" panose="020B0503030403020204" pitchFamily="34" charset="0"/>
+                <a:ea typeface="Source Sans Pro" panose="020B0503030403020204" pitchFamily="34" charset="0"/>
+              </a:rPr>
+              <a:t>, Spencer Fox, Michael </a:t>
+            </a:r>
+            <a:r>
+              <a:rPr lang="fi-FI" sz="1100" dirty="0" err="1">
+                <a:latin typeface="Source Sans Pro" panose="020B0503030403020204" pitchFamily="34" charset="0"/>
+                <a:ea typeface="Source Sans Pro" panose="020B0503030403020204" pitchFamily="34" charset="0"/>
+              </a:rPr>
+              <a:t>Lachmann</a:t>
+            </a:r>
+            <a:r>
+              <a:rPr lang="fi-FI" sz="1100" dirty="0">
+                <a:latin typeface="Source Sans Pro" panose="020B0503030403020204" pitchFamily="34" charset="0"/>
+                <a:ea typeface="Source Sans Pro" panose="020B0503030403020204" pitchFamily="34" charset="0"/>
+              </a:rPr>
+              <a:t>, Lauren </a:t>
+            </a:r>
+            <a:r>
+              <a:rPr lang="fi-FI" sz="1100" dirty="0" err="1">
+                <a:latin typeface="Source Sans Pro" panose="020B0503030403020204" pitchFamily="34" charset="0"/>
+                <a:ea typeface="Source Sans Pro" panose="020B0503030403020204" pitchFamily="34" charset="0"/>
+              </a:rPr>
+              <a:t>Ancel</a:t>
+            </a:r>
+            <a:r>
+              <a:rPr lang="fi-FI" sz="1100" dirty="0">
+                <a:latin typeface="Source Sans Pro" panose="020B0503030403020204" pitchFamily="34" charset="0"/>
+                <a:ea typeface="Source Sans Pro" panose="020B0503030403020204" pitchFamily="34" charset="0"/>
+              </a:rPr>
+              <a:t> </a:t>
+            </a:r>
+            <a:r>
+              <a:rPr lang="fi-FI" sz="1100" dirty="0" err="1">
+                <a:latin typeface="Source Sans Pro" panose="020B0503030403020204" pitchFamily="34" charset="0"/>
+                <a:ea typeface="Source Sans Pro" panose="020B0503030403020204" pitchFamily="34" charset="0"/>
+              </a:rPr>
+              <a:t>Meyers</a:t>
+            </a:r>
+            <a:r>
+              <a:rPr lang="fi-FI" sz="1100" dirty="0">
+                <a:latin typeface="Source Sans Pro" panose="020B0503030403020204" pitchFamily="34" charset="0"/>
+                <a:ea typeface="Source Sans Pro" panose="020B0503030403020204" pitchFamily="34" charset="0"/>
+              </a:rPr>
+              <a:t>, </a:t>
+            </a:r>
+            <a:br>
+              <a:rPr lang="fi-FI" sz="1100" dirty="0">
+                <a:latin typeface="Source Sans Pro" panose="020B0503030403020204" pitchFamily="34" charset="0"/>
+                <a:ea typeface="Source Sans Pro" panose="020B0503030403020204" pitchFamily="34" charset="0"/>
+              </a:rPr>
+            </a:br>
+            <a:r>
+              <a:rPr lang="fi-FI" sz="1100" dirty="0">
+                <a:latin typeface="Source Sans Pro" panose="020B0503030403020204" pitchFamily="34" charset="0"/>
+                <a:ea typeface="Source Sans Pro" panose="020B0503030403020204" pitchFamily="34" charset="0"/>
+              </a:rPr>
+              <a:t>UT COVID-19 </a:t>
+            </a:r>
+            <a:r>
+              <a:rPr lang="fi-FI" sz="1100" dirty="0" err="1">
+                <a:latin typeface="Source Sans Pro" panose="020B0503030403020204" pitchFamily="34" charset="0"/>
+                <a:ea typeface="Source Sans Pro" panose="020B0503030403020204" pitchFamily="34" charset="0"/>
+              </a:rPr>
+              <a:t>Modeling</a:t>
+            </a:r>
+            <a:r>
+              <a:rPr lang="fi-FI" sz="1100" dirty="0">
+                <a:latin typeface="Source Sans Pro" panose="020B0503030403020204" pitchFamily="34" charset="0"/>
+                <a:ea typeface="Source Sans Pro" panose="020B0503030403020204" pitchFamily="34" charset="0"/>
+              </a:rPr>
+              <a:t> </a:t>
+            </a:r>
+            <a:r>
+              <a:rPr lang="fi-FI" sz="1100" dirty="0" err="1">
+                <a:latin typeface="Source Sans Pro" panose="020B0503030403020204" pitchFamily="34" charset="0"/>
+                <a:ea typeface="Source Sans Pro" panose="020B0503030403020204" pitchFamily="34" charset="0"/>
+              </a:rPr>
+              <a:t>Consortium</a:t>
+            </a:r>
+            <a:endParaRPr lang="fi-FI" sz="1100" dirty="0">
+              <a:latin typeface="Source Sans Pro" panose="020B0503030403020204" pitchFamily="34" charset="0"/>
+              <a:ea typeface="Source Sans Pro" panose="020B0503030403020204" pitchFamily="34" charset="0"/>
+            </a:endParaRPr>
+          </a:p>
+          <a:p>
+            <a:r>
+              <a:rPr lang="en-US" sz="1100" i="1" dirty="0">
+                <a:latin typeface="Source Sans Pro" panose="020B0503030403020204" pitchFamily="34" charset="0"/>
+                <a:ea typeface="Source Sans Pro" panose="020B0503030403020204" pitchFamily="34" charset="0"/>
+              </a:rPr>
+              <a:t>University of Victoria</a:t>
+            </a:r>
+            <a:r>
+              <a:rPr lang="en-US" sz="1100" dirty="0">
+                <a:latin typeface="Source Sans Pro" panose="020B0503030403020204" pitchFamily="34" charset="0"/>
+                <a:ea typeface="Source Sans Pro" panose="020B0503030403020204" pitchFamily="34" charset="0"/>
+              </a:rPr>
+              <a:t>: </a:t>
+            </a:r>
+            <a:r>
+              <a:rPr lang="fi-FI" sz="1100" dirty="0">
+                <a:latin typeface="Source Sans Pro" panose="020B0503030403020204" pitchFamily="34" charset="0"/>
+                <a:ea typeface="Source Sans Pro" panose="020B0503030403020204" pitchFamily="34" charset="0"/>
+              </a:rPr>
+              <a:t>Dean </a:t>
+            </a:r>
+            <a:r>
+              <a:rPr lang="fi-FI" sz="1100" dirty="0" err="1">
+                <a:latin typeface="Source Sans Pro" panose="020B0503030403020204" pitchFamily="34" charset="0"/>
+                <a:ea typeface="Source Sans Pro" panose="020B0503030403020204" pitchFamily="34" charset="0"/>
+              </a:rPr>
+              <a:t>Karlen</a:t>
+            </a:r>
+            <a:endParaRPr lang="fi-FI" sz="1100" dirty="0">
+              <a:latin typeface="Source Sans Pro" panose="020B0503030403020204" pitchFamily="34" charset="0"/>
+              <a:ea typeface="Source Sans Pro" panose="020B0503030403020204" pitchFamily="34" charset="0"/>
+            </a:endParaRPr>
+          </a:p>
+          <a:p>
+            <a:r>
+              <a:rPr lang="en-US" sz="1100" i="1" dirty="0">
+                <a:latin typeface="Source Sans Pro" panose="020B0503030403020204" pitchFamily="34" charset="0"/>
+                <a:ea typeface="Source Sans Pro" panose="020B0503030403020204" pitchFamily="34" charset="0"/>
+              </a:rPr>
+              <a:t>University of Virginia-adaptive: </a:t>
+            </a:r>
+            <a:r>
+              <a:rPr lang="en-US" sz="1100" dirty="0" err="1">
+                <a:latin typeface="Source Sans Pro" panose="020B0503030403020204" pitchFamily="34" charset="0"/>
+                <a:ea typeface="Source Sans Pro" panose="020B0503030403020204" pitchFamily="34" charset="0"/>
+              </a:rPr>
+              <a:t>Przemyslaw</a:t>
+            </a:r>
+            <a:r>
+              <a:rPr lang="en-US" sz="1100" dirty="0">
+                <a:latin typeface="Source Sans Pro" panose="020B0503030403020204" pitchFamily="34" charset="0"/>
+                <a:ea typeface="Source Sans Pro" panose="020B0503030403020204" pitchFamily="34" charset="0"/>
+              </a:rPr>
+              <a:t> </a:t>
+            </a:r>
+            <a:r>
+              <a:rPr lang="en-US" sz="1100" dirty="0" err="1">
+                <a:latin typeface="Source Sans Pro" panose="020B0503030403020204" pitchFamily="34" charset="0"/>
+                <a:ea typeface="Source Sans Pro" panose="020B0503030403020204" pitchFamily="34" charset="0"/>
+              </a:rPr>
+              <a:t>Porebski</a:t>
+            </a:r>
+            <a:r>
+              <a:rPr lang="en-US" sz="1100" dirty="0">
+                <a:latin typeface="Source Sans Pro" panose="020B0503030403020204" pitchFamily="34" charset="0"/>
+                <a:ea typeface="Source Sans Pro" panose="020B0503030403020204" pitchFamily="34" charset="0"/>
+              </a:rPr>
+              <a:t>, Srini Venkatramanan, </a:t>
+            </a:r>
+            <a:r>
+              <a:rPr lang="en-US" sz="1100" dirty="0" err="1">
+                <a:latin typeface="Source Sans Pro" panose="020B0503030403020204" pitchFamily="34" charset="0"/>
+                <a:ea typeface="Source Sans Pro" panose="020B0503030403020204" pitchFamily="34" charset="0"/>
+              </a:rPr>
+              <a:t>Anniruddha</a:t>
+            </a:r>
+            <a:r>
+              <a:rPr lang="en-US" sz="1100" dirty="0">
+                <a:latin typeface="Source Sans Pro" panose="020B0503030403020204" pitchFamily="34" charset="0"/>
+                <a:ea typeface="Source Sans Pro" panose="020B0503030403020204" pitchFamily="34" charset="0"/>
+              </a:rPr>
+              <a:t> </a:t>
+            </a:r>
+            <a:r>
+              <a:rPr lang="en-US" sz="1100" dirty="0" err="1">
+                <a:latin typeface="Source Sans Pro" panose="020B0503030403020204" pitchFamily="34" charset="0"/>
+                <a:ea typeface="Source Sans Pro" panose="020B0503030403020204" pitchFamily="34" charset="0"/>
+              </a:rPr>
+              <a:t>Adiga</a:t>
+            </a:r>
+            <a:r>
+              <a:rPr lang="en-US" sz="1100" dirty="0">
+                <a:latin typeface="Source Sans Pro" panose="020B0503030403020204" pitchFamily="34" charset="0"/>
+                <a:ea typeface="Source Sans Pro" panose="020B0503030403020204" pitchFamily="34" charset="0"/>
+              </a:rPr>
+              <a:t>, Bryan Lewis, Brian </a:t>
+            </a:r>
+            <a:r>
+              <a:rPr lang="en-US" sz="1100" dirty="0" err="1">
+                <a:latin typeface="Source Sans Pro" panose="020B0503030403020204" pitchFamily="34" charset="0"/>
+                <a:ea typeface="Source Sans Pro" panose="020B0503030403020204" pitchFamily="34" charset="0"/>
+              </a:rPr>
+              <a:t>Klahn</a:t>
+            </a:r>
+            <a:r>
+              <a:rPr lang="en-US" sz="1100" dirty="0">
+                <a:latin typeface="Source Sans Pro" panose="020B0503030403020204" pitchFamily="34" charset="0"/>
+                <a:ea typeface="Source Sans Pro" panose="020B0503030403020204" pitchFamily="34" charset="0"/>
+              </a:rPr>
+              <a:t>, Joseph </a:t>
+            </a:r>
+            <a:r>
+              <a:rPr lang="en-US" sz="1100" dirty="0" err="1">
+                <a:latin typeface="Source Sans Pro" panose="020B0503030403020204" pitchFamily="34" charset="0"/>
+                <a:ea typeface="Source Sans Pro" panose="020B0503030403020204" pitchFamily="34" charset="0"/>
+              </a:rPr>
+              <a:t>Outten</a:t>
+            </a:r>
+            <a:r>
+              <a:rPr lang="en-US" sz="1100" dirty="0">
+                <a:latin typeface="Source Sans Pro" panose="020B0503030403020204" pitchFamily="34" charset="0"/>
+                <a:ea typeface="Source Sans Pro" panose="020B0503030403020204" pitchFamily="34" charset="0"/>
+              </a:rPr>
+              <a:t>, James </a:t>
+            </a:r>
+            <a:r>
+              <a:rPr lang="en-US" sz="1100" dirty="0" err="1">
+                <a:latin typeface="Source Sans Pro" panose="020B0503030403020204" pitchFamily="34" charset="0"/>
+                <a:ea typeface="Source Sans Pro" panose="020B0503030403020204" pitchFamily="34" charset="0"/>
+              </a:rPr>
+              <a:t>Schlitt</a:t>
+            </a:r>
+            <a:r>
+              <a:rPr lang="en-US" sz="1100" dirty="0">
+                <a:latin typeface="Source Sans Pro" panose="020B0503030403020204" pitchFamily="34" charset="0"/>
+                <a:ea typeface="Source Sans Pro" panose="020B0503030403020204" pitchFamily="34" charset="0"/>
+              </a:rPr>
+              <a:t>, </a:t>
+            </a:r>
+            <a:r>
+              <a:rPr lang="en-US" sz="1100" dirty="0" err="1">
+                <a:latin typeface="Source Sans Pro" panose="020B0503030403020204" pitchFamily="34" charset="0"/>
+                <a:ea typeface="Source Sans Pro" panose="020B0503030403020204" pitchFamily="34" charset="0"/>
+              </a:rPr>
+              <a:t>Patric</a:t>
+            </a:r>
+            <a:r>
+              <a:rPr lang="en-US" sz="1100" dirty="0">
+                <a:latin typeface="Source Sans Pro" panose="020B0503030403020204" pitchFamily="34" charset="0"/>
+                <a:ea typeface="Source Sans Pro" panose="020B0503030403020204" pitchFamily="34" charset="0"/>
+              </a:rPr>
+              <a:t> Corbett, </a:t>
+            </a:r>
+            <a:r>
+              <a:rPr lang="en-US" sz="1100" dirty="0" err="1">
+                <a:latin typeface="Source Sans Pro" panose="020B0503030403020204" pitchFamily="34" charset="0"/>
+                <a:ea typeface="Source Sans Pro" panose="020B0503030403020204" pitchFamily="34" charset="0"/>
+              </a:rPr>
+              <a:t>Pyrros</a:t>
+            </a:r>
+            <a:r>
+              <a:rPr lang="en-US" sz="1100" dirty="0">
+                <a:latin typeface="Source Sans Pro" panose="020B0503030403020204" pitchFamily="34" charset="0"/>
+                <a:ea typeface="Source Sans Pro" panose="020B0503030403020204" pitchFamily="34" charset="0"/>
+              </a:rPr>
+              <a:t> Alexander </a:t>
+            </a:r>
+            <a:r>
+              <a:rPr lang="en-US" sz="1100" dirty="0" err="1">
+                <a:latin typeface="Source Sans Pro" panose="020B0503030403020204" pitchFamily="34" charset="0"/>
+                <a:ea typeface="Source Sans Pro" panose="020B0503030403020204" pitchFamily="34" charset="0"/>
+              </a:rPr>
+              <a:t>Telionis</a:t>
+            </a:r>
+            <a:r>
+              <a:rPr lang="en-US" sz="1100" dirty="0">
+                <a:latin typeface="Source Sans Pro" panose="020B0503030403020204" pitchFamily="34" charset="0"/>
+                <a:ea typeface="Source Sans Pro" panose="020B0503030403020204" pitchFamily="34" charset="0"/>
+              </a:rPr>
+              <a:t>, </a:t>
+            </a:r>
+            <a:r>
+              <a:rPr lang="en-US" sz="1100" dirty="0" err="1">
+                <a:latin typeface="Source Sans Pro" panose="020B0503030403020204" pitchFamily="34" charset="0"/>
+                <a:ea typeface="Source Sans Pro" panose="020B0503030403020204" pitchFamily="34" charset="0"/>
+              </a:rPr>
+              <a:t>Lijing</a:t>
+            </a:r>
+            <a:r>
+              <a:rPr lang="en-US" sz="1100" dirty="0">
+                <a:latin typeface="Source Sans Pro" panose="020B0503030403020204" pitchFamily="34" charset="0"/>
+                <a:ea typeface="Source Sans Pro" panose="020B0503030403020204" pitchFamily="34" charset="0"/>
+              </a:rPr>
+              <a:t> Wang, Akhil Sai </a:t>
+            </a:r>
+            <a:r>
+              <a:rPr lang="en-US" sz="1100" dirty="0" err="1">
+                <a:latin typeface="Source Sans Pro" panose="020B0503030403020204" pitchFamily="34" charset="0"/>
+                <a:ea typeface="Source Sans Pro" panose="020B0503030403020204" pitchFamily="34" charset="0"/>
+              </a:rPr>
+              <a:t>Peddireddy</a:t>
+            </a:r>
+            <a:r>
+              <a:rPr lang="en-US" sz="1100" dirty="0">
+                <a:latin typeface="Source Sans Pro" panose="020B0503030403020204" pitchFamily="34" charset="0"/>
+                <a:ea typeface="Source Sans Pro" panose="020B0503030403020204" pitchFamily="34" charset="0"/>
+              </a:rPr>
+              <a:t>, Benjamin Hurt, </a:t>
+            </a:r>
+            <a:r>
+              <a:rPr lang="en-US" sz="1100" dirty="0" err="1">
+                <a:latin typeface="Source Sans Pro" panose="020B0503030403020204" pitchFamily="34" charset="0"/>
+                <a:ea typeface="Source Sans Pro" panose="020B0503030403020204" pitchFamily="34" charset="0"/>
+              </a:rPr>
+              <a:t>Jiangzhou</a:t>
+            </a:r>
+            <a:r>
+              <a:rPr lang="en-US" sz="1100" dirty="0">
+                <a:latin typeface="Source Sans Pro" panose="020B0503030403020204" pitchFamily="34" charset="0"/>
+                <a:ea typeface="Source Sans Pro" panose="020B0503030403020204" pitchFamily="34" charset="0"/>
+              </a:rPr>
+              <a:t> Chen, Anil </a:t>
+            </a:r>
+            <a:r>
+              <a:rPr lang="en-US" sz="1100" dirty="0" err="1">
+                <a:latin typeface="Source Sans Pro" panose="020B0503030403020204" pitchFamily="34" charset="0"/>
+                <a:ea typeface="Source Sans Pro" panose="020B0503030403020204" pitchFamily="34" charset="0"/>
+              </a:rPr>
+              <a:t>Vullikanti</a:t>
+            </a:r>
+            <a:r>
+              <a:rPr lang="en-US" sz="1100" dirty="0">
+                <a:latin typeface="Source Sans Pro" panose="020B0503030403020204" pitchFamily="34" charset="0"/>
+                <a:ea typeface="Source Sans Pro" panose="020B0503030403020204" pitchFamily="34" charset="0"/>
+              </a:rPr>
+              <a:t>, Madhav </a:t>
+            </a:r>
+            <a:r>
+              <a:rPr lang="en-US" sz="1100" dirty="0" err="1">
+                <a:latin typeface="Source Sans Pro" panose="020B0503030403020204" pitchFamily="34" charset="0"/>
+                <a:ea typeface="Source Sans Pro" panose="020B0503030403020204" pitchFamily="34" charset="0"/>
+              </a:rPr>
+              <a:t>Marathe</a:t>
+            </a:r>
+            <a:endParaRPr lang="en-US" sz="1100" dirty="0">
+              <a:latin typeface="Source Sans Pro" panose="020B0503030403020204" pitchFamily="34" charset="0"/>
+              <a:ea typeface="Source Sans Pro" panose="020B0503030403020204" pitchFamily="34" charset="0"/>
+            </a:endParaRPr>
+          </a:p>
+          <a:p>
+            <a:r>
+              <a:rPr lang="en-US" sz="1100" i="1" dirty="0">
+                <a:latin typeface="Source Sans Pro" panose="020B0503030403020204" pitchFamily="34" charset="0"/>
+                <a:ea typeface="Source Sans Pro" panose="020B0503030403020204" pitchFamily="34" charset="0"/>
+              </a:rPr>
+              <a:t>University of Virginia-</a:t>
+            </a:r>
+            <a:r>
+              <a:rPr lang="en-US" sz="1100" i="1" dirty="0" err="1">
+                <a:latin typeface="Source Sans Pro" panose="020B0503030403020204" pitchFamily="34" charset="0"/>
+                <a:ea typeface="Source Sans Pro" panose="020B0503030403020204" pitchFamily="34" charset="0"/>
+              </a:rPr>
+              <a:t>EpiHiper</a:t>
+            </a:r>
+            <a:r>
+              <a:rPr lang="en-US" sz="1100" dirty="0">
+                <a:latin typeface="Source Sans Pro" panose="020B0503030403020204" pitchFamily="34" charset="0"/>
+                <a:ea typeface="Source Sans Pro" panose="020B0503030403020204" pitchFamily="34" charset="0"/>
+              </a:rPr>
+              <a:t>: </a:t>
+            </a:r>
+            <a:r>
+              <a:rPr lang="en-US" sz="1100" dirty="0" err="1">
+                <a:latin typeface="Source Sans Pro" panose="020B0503030403020204" pitchFamily="34" charset="0"/>
+                <a:ea typeface="Source Sans Pro" panose="020B0503030403020204" pitchFamily="34" charset="0"/>
+              </a:rPr>
+              <a:t>Jiangzhuo</a:t>
+            </a:r>
+            <a:r>
+              <a:rPr lang="en-US" sz="1100" dirty="0">
+                <a:latin typeface="Source Sans Pro" panose="020B0503030403020204" pitchFamily="34" charset="0"/>
+                <a:ea typeface="Source Sans Pro" panose="020B0503030403020204" pitchFamily="34" charset="0"/>
+              </a:rPr>
+              <a:t> Chen, Stefan Hoops, </a:t>
+            </a:r>
+            <a:r>
+              <a:rPr lang="en-US" sz="1100" dirty="0" err="1">
+                <a:latin typeface="Source Sans Pro" panose="020B0503030403020204" pitchFamily="34" charset="0"/>
+                <a:ea typeface="Source Sans Pro" panose="020B0503030403020204" pitchFamily="34" charset="0"/>
+              </a:rPr>
+              <a:t>Parantapa</a:t>
+            </a:r>
+            <a:r>
+              <a:rPr lang="en-US" sz="1100" dirty="0">
+                <a:latin typeface="Source Sans Pro" panose="020B0503030403020204" pitchFamily="34" charset="0"/>
+                <a:ea typeface="Source Sans Pro" panose="020B0503030403020204" pitchFamily="34" charset="0"/>
+              </a:rPr>
+              <a:t> Bhattacharya, Dustin Machi, Bryan Lewis, </a:t>
+            </a:r>
+            <a:br>
+              <a:rPr lang="en-US" sz="1100" dirty="0">
+                <a:latin typeface="Source Sans Pro" panose="020B0503030403020204" pitchFamily="34" charset="0"/>
+                <a:ea typeface="Source Sans Pro" panose="020B0503030403020204" pitchFamily="34" charset="0"/>
+              </a:rPr>
+            </a:br>
+            <a:r>
+              <a:rPr lang="en-US" sz="1100" dirty="0">
+                <a:latin typeface="Source Sans Pro" panose="020B0503030403020204" pitchFamily="34" charset="0"/>
+                <a:ea typeface="Source Sans Pro" panose="020B0503030403020204" pitchFamily="34" charset="0"/>
+              </a:rPr>
+              <a:t>Madhav Marathe</a:t>
+            </a:r>
+          </a:p>
+          <a:p>
+            <a:endParaRPr lang="en-US" sz="1100" dirty="0">
+              <a:latin typeface="Source Sans Pro" panose="020B0503030403020204" pitchFamily="34" charset="0"/>
+              <a:ea typeface="Source Sans Pro" panose="020B0503030403020204" pitchFamily="34" charset="0"/>
+            </a:endParaRPr>
+          </a:p>
+          <a:p>
+            <a:r>
+              <a:rPr lang="en-US" sz="1400" b="1" dirty="0">
+                <a:solidFill>
+                  <a:srgbClr val="1FAEDB"/>
+                </a:solidFill>
+                <a:latin typeface="Source Sans Pro SemiBold" panose="020B0503030403020204" pitchFamily="34" charset="0"/>
+                <a:ea typeface="Source Sans Pro SemiBold" panose="020B0503030403020204" pitchFamily="34" charset="0"/>
+                <a:cs typeface="Arial Unicode MS" panose="020B0604020202020204" pitchFamily="34" charset="-128"/>
+              </a:rPr>
+              <a:t>Collaborators</a:t>
+            </a:r>
+            <a:br>
+              <a:rPr lang="en-US" sz="1400" b="1" dirty="0">
+                <a:solidFill>
+                  <a:srgbClr val="00B050"/>
+                </a:solidFill>
+                <a:latin typeface="Source Sans Pro SemiBold" panose="020B0503030403020204" pitchFamily="34" charset="0"/>
+                <a:ea typeface="Source Sans Pro SemiBold" panose="020B0503030403020204" pitchFamily="34" charset="0"/>
+                <a:cs typeface="Arial Unicode MS" panose="020B0604020202020204" pitchFamily="34" charset="-128"/>
+              </a:rPr>
+            </a:br>
+            <a:r>
+              <a:rPr lang="en-US" altLang="en-US" sz="1100" dirty="0">
+                <a:latin typeface="Source Sans Pro" panose="020B0503030403020204" pitchFamily="34" charset="0"/>
+                <a:ea typeface="Source Sans Pro" panose="020B0503030403020204" pitchFamily="34" charset="0"/>
+                <a:cs typeface="Times New Roman" panose="02020603050405020304" pitchFamily="18" charset="0"/>
+              </a:rPr>
+              <a:t>Matthew Biggerstaff, Michael Johansson, Rachel Slayton, Jessica Healey (CDC); </a:t>
+            </a:r>
+            <a:r>
+              <a:rPr lang="en-US" sz="1100" dirty="0">
+                <a:latin typeface="Source Sans Pro" panose="020B0503030403020204" pitchFamily="34" charset="0"/>
+                <a:ea typeface="Source Sans Pro" panose="020B0503030403020204" pitchFamily="34" charset="0"/>
+                <a:cs typeface="Times New Roman" panose="02020603050405020304" pitchFamily="18" charset="0"/>
+              </a:rPr>
+              <a:t>Nicole </a:t>
+            </a:r>
+            <a:r>
+              <a:rPr lang="en-US" sz="1100" dirty="0" err="1">
+                <a:latin typeface="Source Sans Pro" panose="020B0503030403020204" pitchFamily="34" charset="0"/>
+                <a:ea typeface="Source Sans Pro" panose="020B0503030403020204" pitchFamily="34" charset="0"/>
+                <a:cs typeface="Times New Roman" panose="02020603050405020304" pitchFamily="18" charset="0"/>
+              </a:rPr>
+              <a:t>Samay</a:t>
+            </a:r>
+            <a:r>
+              <a:rPr lang="en-US" sz="1100" dirty="0">
+                <a:latin typeface="Source Sans Pro" panose="020B0503030403020204" pitchFamily="34" charset="0"/>
+                <a:ea typeface="Source Sans Pro" panose="020B0503030403020204" pitchFamily="34" charset="0"/>
+                <a:cs typeface="Times New Roman" panose="02020603050405020304" pitchFamily="18" charset="0"/>
+              </a:rPr>
+              <a:t> (Northeastern University)</a:t>
+            </a:r>
+            <a:endParaRPr lang="en-US" sz="1100" dirty="0">
+              <a:latin typeface="Source Sans Pro" panose="020B0503030403020204" pitchFamily="34" charset="0"/>
+              <a:ea typeface="Source Sans Pro" panose="020B0503030403020204" pitchFamily="34" charset="0"/>
+            </a:endParaRPr>
+          </a:p>
+          <a:p>
+            <a:endParaRPr lang="en-US" sz="1100" dirty="0">
+              <a:latin typeface="Source Sans Pro" panose="020B0503030403020204" pitchFamily="34" charset="0"/>
+              <a:ea typeface="Source Sans Pro" panose="020B0503030403020204" pitchFamily="34" charset="0"/>
+            </a:endParaRPr>
+          </a:p>
+        </p:txBody>
+      </p:sp>
+      <p:grpSp>
+        <p:nvGrpSpPr>
+          <p:cNvPr id="38" name="Group 37">
+            <a:extLst>
+              <a:ext uri="{FF2B5EF4-FFF2-40B4-BE49-F238E27FC236}">
+                <a16:creationId xmlns:a16="http://schemas.microsoft.com/office/drawing/2014/main" id="{B2DDB30A-04EC-71CF-014A-0483893C789D}"/>
+              </a:ext>
+            </a:extLst>
+          </p:cNvPr>
+          <p:cNvGrpSpPr/>
+          <p:nvPr/>
+        </p:nvGrpSpPr>
+        <p:grpSpPr>
+          <a:xfrm>
+            <a:off x="807963" y="5713237"/>
+            <a:ext cx="3070729" cy="457200"/>
+            <a:chOff x="1074826" y="4366070"/>
+            <a:chExt cx="3070729" cy="457200"/>
+          </a:xfrm>
+        </p:grpSpPr>
+        <p:pic>
+          <p:nvPicPr>
+            <p:cNvPr id="14" name="Graphic 13" descr="Envelope with solid fill">
+              <a:extLst>
+                <a:ext uri="{FF2B5EF4-FFF2-40B4-BE49-F238E27FC236}">
+                  <a16:creationId xmlns:a16="http://schemas.microsoft.com/office/drawing/2014/main" id="{6C813C2C-5951-B2E7-85A4-D8E9BAA2125D}"/>
+                </a:ext>
+              </a:extLst>
+            </p:cNvPr>
+            <p:cNvPicPr>
+              <a:picLocks noChangeAspect="1"/>
+            </p:cNvPicPr>
+            <p:nvPr/>
+          </p:nvPicPr>
+          <p:blipFill>
+            <a:blip r:embed="rId4">
+              <a:extLst>
+                <a:ext uri="{28A0092B-C50C-407E-A947-70E740481C1C}">
+                  <a14:useLocalDpi xmlns:a14="http://schemas.microsoft.com/office/drawing/2010/main" val="0"/>
+                </a:ext>
+                <a:ext uri="{96DAC541-7B7A-43D3-8B79-37D633B846F1}">
+                  <asvg:svgBlip xmlns:asvg="http://schemas.microsoft.com/office/drawing/2016/SVG/main" r:embed="rId5"/>
+                </a:ext>
+              </a:extLst>
+            </a:blip>
+            <a:stretch>
+              <a:fillRect/>
+            </a:stretch>
+          </p:blipFill>
+          <p:spPr>
+            <a:xfrm>
+              <a:off x="1074826" y="4366070"/>
+              <a:ext cx="457200" cy="457200"/>
+            </a:xfrm>
+            <a:prstGeom prst="rect">
+              <a:avLst/>
+            </a:prstGeom>
+          </p:spPr>
+        </p:pic>
+        <p:sp>
+          <p:nvSpPr>
+            <p:cNvPr id="37" name="TextBox 36">
+              <a:extLst>
+                <a:ext uri="{FF2B5EF4-FFF2-40B4-BE49-F238E27FC236}">
+                  <a16:creationId xmlns:a16="http://schemas.microsoft.com/office/drawing/2014/main" id="{252CD946-866F-7EB7-C2A8-390D11F3D6D6}"/>
+                </a:ext>
+              </a:extLst>
+            </p:cNvPr>
+            <p:cNvSpPr txBox="1"/>
+            <p:nvPr/>
+          </p:nvSpPr>
+          <p:spPr>
+            <a:xfrm>
+              <a:off x="1556375" y="4383679"/>
+              <a:ext cx="2589180" cy="338554"/>
+            </a:xfrm>
+            <a:prstGeom prst="rect">
+              <a:avLst/>
+            </a:prstGeom>
+            <a:noFill/>
+          </p:spPr>
+          <p:txBody>
+            <a:bodyPr wrap="square">
+              <a:spAutoFit/>
+            </a:bodyPr>
+            <a:lstStyle/>
+            <a:p>
+              <a:r>
+                <a:rPr lang="en-US" sz="1600" dirty="0">
+                  <a:latin typeface="Source Sans Pro" panose="020B0503030403020204" pitchFamily="34" charset="0"/>
+                  <a:ea typeface="Source Sans Pro" panose="020B0503030403020204" pitchFamily="34" charset="0"/>
+                </a:rPr>
+                <a:t>jlessler@unc.edu</a:t>
+              </a:r>
+              <a:endParaRPr lang="en-US" sz="1600" dirty="0"/>
+            </a:p>
+          </p:txBody>
+        </p:sp>
+      </p:grpSp>
+      <p:pic>
+        <p:nvPicPr>
+          <p:cNvPr id="3" name="Picture 2" descr="SMH logo">
+            <a:extLst>
+              <a:ext uri="{FF2B5EF4-FFF2-40B4-BE49-F238E27FC236}">
+                <a16:creationId xmlns:a16="http://schemas.microsoft.com/office/drawing/2014/main" id="{A5569F7E-2273-370D-8EEF-F822AA3B1CF3}"/>
+              </a:ext>
+            </a:extLst>
+          </p:cNvPr>
+          <p:cNvPicPr>
+            <a:picLocks noChangeAspect="1" noChangeArrowheads="1"/>
+          </p:cNvPicPr>
+          <p:nvPr/>
+        </p:nvPicPr>
+        <p:blipFill>
+          <a:blip r:embed="rId6">
+            <a:extLst>
+              <a:ext uri="{28A0092B-C50C-407E-A947-70E740481C1C}">
+                <a14:useLocalDpi xmlns:a14="http://schemas.microsoft.com/office/drawing/2010/main" val="0"/>
+              </a:ext>
+            </a:extLst>
+          </a:blip>
+          <a:srcRect/>
+          <a:stretch>
+            <a:fillRect/>
+          </a:stretch>
+        </p:blipFill>
+        <p:spPr bwMode="auto">
+          <a:xfrm>
+            <a:off x="4680033" y="165549"/>
+            <a:ext cx="4470364" cy="799776"/>
+          </a:xfrm>
+          <a:prstGeom prst="rect">
+            <a:avLst/>
+          </a:prstGeom>
+          <a:noFill/>
+          <a:extLst>
+            <a:ext uri="{909E8E84-426E-40DD-AFC4-6F175D3DCCD1}">
+              <a14:hiddenFill xmlns:a14="http://schemas.microsoft.com/office/drawing/2010/main">
+                <a:solidFill>
+                  <a:srgbClr val="FFFFFF"/>
+                </a:solidFill>
+              </a14:hiddenFill>
+            </a:ext>
+          </a:extLst>
+        </p:spPr>
+      </p:pic>
+      <p:sp>
+        <p:nvSpPr>
+          <p:cNvPr id="43" name="TextBox 42">
+            <a:extLst>
+              <a:ext uri="{FF2B5EF4-FFF2-40B4-BE49-F238E27FC236}">
+                <a16:creationId xmlns:a16="http://schemas.microsoft.com/office/drawing/2014/main" id="{BF6A6401-3AC9-EAA9-5619-B56A0A2EFF95}"/>
+              </a:ext>
+            </a:extLst>
+          </p:cNvPr>
+          <p:cNvSpPr txBox="1"/>
+          <p:nvPr/>
+        </p:nvSpPr>
+        <p:spPr>
+          <a:xfrm>
+            <a:off x="552167" y="6211713"/>
+            <a:ext cx="3668682" cy="369332"/>
+          </a:xfrm>
+          <a:prstGeom prst="rect">
+            <a:avLst/>
+          </a:prstGeom>
+          <a:noFill/>
+        </p:spPr>
+        <p:txBody>
+          <a:bodyPr wrap="square">
+            <a:spAutoFit/>
+          </a:bodyPr>
+          <a:lstStyle/>
+          <a:p>
+            <a:r>
+              <a:rPr lang="en-US" dirty="0">
+                <a:solidFill>
+                  <a:srgbClr val="1EAEDB"/>
+                </a:solidFill>
+                <a:latin typeface="Helvetica Light" panose="020B0403020202020204" pitchFamily="34" charset="0"/>
+                <a:ea typeface="Source Sans Pro Light" panose="020B0403030403020204" pitchFamily="34" charset="0"/>
+                <a:hlinkClick r:id="rId7">
+                  <a:extLst>
+                    <a:ext uri="{A12FA001-AC4F-418D-AE19-62706E023703}">
+                      <ahyp:hlinkClr xmlns:ahyp="http://schemas.microsoft.com/office/drawing/2018/hyperlinkcolor" val="tx"/>
+                    </a:ext>
+                  </a:extLst>
+                </a:hlinkClick>
+              </a:rPr>
+              <a:t>https://scenariomodelinghub.org</a:t>
+            </a:r>
+            <a:r>
+              <a:rPr lang="en-US" dirty="0">
+                <a:solidFill>
+                  <a:srgbClr val="1EAEDB"/>
+                </a:solidFill>
+                <a:latin typeface="Helvetica Light" panose="020B0403020202020204" pitchFamily="34" charset="0"/>
+                <a:ea typeface="Source Sans Pro Light" panose="020B0403030403020204" pitchFamily="34" charset="0"/>
+              </a:rPr>
+              <a:t> </a:t>
+            </a:r>
+            <a:endParaRPr lang="en-US" dirty="0">
+              <a:solidFill>
+                <a:srgbClr val="1EAEDB"/>
+              </a:solidFill>
+            </a:endParaRPr>
+          </a:p>
+        </p:txBody>
+      </p:sp>
+      <p:pic>
+        <p:nvPicPr>
+          <p:cNvPr id="10" name="Picture 9">
+            <a:extLst>
+              <a:ext uri="{FF2B5EF4-FFF2-40B4-BE49-F238E27FC236}">
+                <a16:creationId xmlns:a16="http://schemas.microsoft.com/office/drawing/2014/main" id="{CA490C61-D2FC-73E4-C714-7B1C535B167E}"/>
+              </a:ext>
+            </a:extLst>
+          </p:cNvPr>
+          <p:cNvPicPr>
+            <a:picLocks noChangeAspect="1"/>
+          </p:cNvPicPr>
+          <p:nvPr/>
+        </p:nvPicPr>
+        <p:blipFill>
+          <a:blip r:embed="rId8"/>
+          <a:stretch>
+            <a:fillRect/>
+          </a:stretch>
+        </p:blipFill>
+        <p:spPr>
+          <a:xfrm>
+            <a:off x="709257" y="2503988"/>
+            <a:ext cx="2509910" cy="585747"/>
+          </a:xfrm>
+          <a:prstGeom prst="rect">
+            <a:avLst/>
+          </a:prstGeom>
+        </p:spPr>
+      </p:pic>
+      <p:pic>
+        <p:nvPicPr>
+          <p:cNvPr id="12" name="Picture 11">
+            <a:extLst>
+              <a:ext uri="{FF2B5EF4-FFF2-40B4-BE49-F238E27FC236}">
+                <a16:creationId xmlns:a16="http://schemas.microsoft.com/office/drawing/2014/main" id="{C4F1572B-924A-449A-5BC6-B29CCD9F6579}"/>
+              </a:ext>
+            </a:extLst>
+          </p:cNvPr>
+          <p:cNvPicPr>
+            <a:picLocks noChangeAspect="1"/>
+          </p:cNvPicPr>
+          <p:nvPr/>
+        </p:nvPicPr>
+        <p:blipFill>
+          <a:blip r:embed="rId9"/>
+          <a:stretch>
+            <a:fillRect/>
+          </a:stretch>
+        </p:blipFill>
+        <p:spPr>
+          <a:xfrm>
+            <a:off x="620182" y="3298502"/>
+            <a:ext cx="2653335" cy="773219"/>
+          </a:xfrm>
+          <a:prstGeom prst="rect">
+            <a:avLst/>
+          </a:prstGeom>
+        </p:spPr>
+      </p:pic>
+    </p:spTree>
+    <p:extLst>
+      <p:ext uri="{BB962C8B-B14F-4D97-AF65-F5344CB8AC3E}">
+        <p14:creationId xmlns:p14="http://schemas.microsoft.com/office/powerpoint/2010/main" val="3297556265"/>
+      </p:ext>
+    </p:extLst>
+  </p:cSld>
+  <p:clrMapOvr>
+    <a:masterClrMapping/>
+  </p:clrMapOvr>
+</p:sld>
+</file>
+
+<file path=ppt/slides/slide33.xml><?xml version="1.0" encoding="utf-8"?>
+<p:sld xmlns:a="http://schemas.openxmlformats.org/drawingml/2006/main" xmlns:r="http://schemas.openxmlformats.org/officeDocument/2006/relationships" xmlns:p="http://schemas.openxmlformats.org/presentationml/2006/main">
+  <p:cSld>
+    <p:spTree>
+      <p:nvGrpSpPr>
+        <p:cNvPr id="1" name=""/>
+        <p:cNvGrpSpPr/>
+        <p:nvPr/>
+      </p:nvGrpSpPr>
+      <p:grpSpPr>
+        <a:xfrm>
+          <a:off x="0" y="0"/>
+          <a:ext cx="0" cy="0"/>
+          <a:chOff x="0" y="0"/>
+          <a:chExt cx="0" cy="0"/>
+        </a:xfrm>
+      </p:grpSpPr>
       <p:sp>
         <p:nvSpPr>
           <p:cNvPr id="4" name="Title 3">
@@ -17513,7 +19293,7 @@
 </p:sld>
 </file>
 
-<file path=ppt/slides/slide33.xml><?xml version="1.0" encoding="utf-8"?>
+<file path=ppt/slides/slide34.xml><?xml version="1.0" encoding="utf-8"?>
 <p:sld xmlns:a="http://schemas.openxmlformats.org/drawingml/2006/main" xmlns:r="http://schemas.openxmlformats.org/officeDocument/2006/relationships" xmlns:p="http://schemas.openxmlformats.org/presentationml/2006/main">
   <p:cSld>
     <p:spTree>
@@ -18237,7 +20017,7 @@
 </p:sld>
 </file>
 
-<file path=ppt/slides/slide34.xml><?xml version="1.0" encoding="utf-8"?>
+<file path=ppt/slides/slide35.xml><?xml version="1.0" encoding="utf-8"?>
 <p:sld xmlns:a="http://schemas.openxmlformats.org/drawingml/2006/main" xmlns:r="http://schemas.openxmlformats.org/officeDocument/2006/relationships" xmlns:p="http://schemas.openxmlformats.org/presentationml/2006/main">
   <p:cSld>
     <p:spTree>
@@ -18748,7 +20528,7 @@
 </p:sld>
 </file>
 
-<file path=ppt/slides/slide35.xml><?xml version="1.0" encoding="utf-8"?>
+<file path=ppt/slides/slide36.xml><?xml version="1.0" encoding="utf-8"?>
 <p:sld xmlns:a="http://schemas.openxmlformats.org/drawingml/2006/main" xmlns:r="http://schemas.openxmlformats.org/officeDocument/2006/relationships" xmlns:p="http://schemas.openxmlformats.org/presentationml/2006/main">
   <p:cSld>
     <p:spTree>
@@ -19097,867 +20877,6 @@
       </p:transition>
     </mc:Fallback>
   </mc:AlternateContent>
-</p:sld>
-</file>
-
-<file path=ppt/slides/slide36.xml><?xml version="1.0" encoding="utf-8"?>
-<p:sld xmlns:a="http://schemas.openxmlformats.org/drawingml/2006/main" xmlns:r="http://schemas.openxmlformats.org/officeDocument/2006/relationships" xmlns:p="http://schemas.openxmlformats.org/presentationml/2006/main">
-  <p:cSld>
-    <p:spTree>
-      <p:nvGrpSpPr>
-        <p:cNvPr id="1" name=""/>
-        <p:cNvGrpSpPr/>
-        <p:nvPr/>
-      </p:nvGrpSpPr>
-      <p:grpSpPr>
-        <a:xfrm>
-          <a:off x="0" y="0"/>
-          <a:ext cx="0" cy="0"/>
-          <a:chOff x="0" y="0"/>
-          <a:chExt cx="0" cy="0"/>
-        </a:xfrm>
-      </p:grpSpPr>
-      <p:sp>
-        <p:nvSpPr>
-          <p:cNvPr id="2" name="Title 1">
-            <a:extLst>
-              <a:ext uri="{FF2B5EF4-FFF2-40B4-BE49-F238E27FC236}">
-                <a16:creationId xmlns:a16="http://schemas.microsoft.com/office/drawing/2014/main" id="{074F691B-EFA4-437F-B14F-D6015C14A46C}"/>
-              </a:ext>
-            </a:extLst>
-          </p:cNvPr>
-          <p:cNvSpPr>
-            <a:spLocks noGrp="1"/>
-          </p:cNvSpPr>
-          <p:nvPr>
-            <p:ph type="title"/>
-          </p:nvPr>
-        </p:nvSpPr>
-        <p:spPr>
-          <a:xfrm>
-            <a:off x="761999" y="2443565"/>
-            <a:ext cx="10811435" cy="1868486"/>
-          </a:xfrm>
-        </p:spPr>
-        <p:txBody>
-          <a:bodyPr>
-            <a:normAutofit fontScale="90000"/>
-          </a:bodyPr>
-          <a:lstStyle/>
-          <a:p>
-            <a:pPr algn="ctr"/>
-            <a:r>
-              <a:rPr lang="en-US" b="1" dirty="0">
-                <a:solidFill>
-                  <a:srgbClr val="8D372D"/>
-                </a:solidFill>
-                <a:latin typeface="+mn-lt"/>
-              </a:rPr>
-              <a:t>For Discussion: </a:t>
-            </a:r>
-            <a:r>
-              <a:rPr lang="en-US" b="1" dirty="0">
-                <a:solidFill>
-                  <a:srgbClr val="1B284F"/>
-                </a:solidFill>
-                <a:latin typeface="+mn-lt"/>
-              </a:rPr>
-              <a:t>Given that all scenarios are fundamentally counterfactual and should be evaluated in relation to how they inform action across multiple partners.</a:t>
-            </a:r>
-          </a:p>
-        </p:txBody>
-      </p:sp>
-    </p:spTree>
-    <p:extLst>
-      <p:ext uri="{BB962C8B-B14F-4D97-AF65-F5344CB8AC3E}">
-        <p14:creationId xmlns:p14="http://schemas.microsoft.com/office/powerpoint/2010/main" val="3164871708"/>
-      </p:ext>
-    </p:extLst>
-  </p:cSld>
-  <p:clrMapOvr>
-    <a:masterClrMapping/>
-  </p:clrMapOvr>
-  <mc:AlternateContent xmlns:mc="http://schemas.openxmlformats.org/markup-compatibility/2006" xmlns:p14="http://schemas.microsoft.com/office/powerpoint/2010/main">
-    <mc:Choice Requires="p14">
-      <p:transition spd="med" p14:dur="700">
-        <p:fade/>
-      </p:transition>
-    </mc:Choice>
-    <mc:Fallback xmlns="">
-      <p:transition spd="med">
-        <p:fade/>
-      </p:transition>
-    </mc:Fallback>
-  </mc:AlternateContent>
-</p:sld>
-</file>
-
-<file path=ppt/slides/slide37.xml><?xml version="1.0" encoding="utf-8"?>
-<p:sld xmlns:a="http://schemas.openxmlformats.org/drawingml/2006/main" xmlns:r="http://schemas.openxmlformats.org/officeDocument/2006/relationships" xmlns:p="http://schemas.openxmlformats.org/presentationml/2006/main">
-  <p:cSld>
-    <p:spTree>
-      <p:nvGrpSpPr>
-        <p:cNvPr id="1" name=""/>
-        <p:cNvGrpSpPr/>
-        <p:nvPr/>
-      </p:nvGrpSpPr>
-      <p:grpSpPr>
-        <a:xfrm>
-          <a:off x="0" y="0"/>
-          <a:ext cx="0" cy="0"/>
-          <a:chOff x="0" y="0"/>
-          <a:chExt cx="0" cy="0"/>
-        </a:xfrm>
-      </p:grpSpPr>
-      <mc:AlternateContent xmlns:mc="http://schemas.openxmlformats.org/markup-compatibility/2006">
-        <mc:Choice xmlns:a14="http://schemas.microsoft.com/office/drawing/2010/main" Requires="a14">
-          <p:sp>
-            <p:nvSpPr>
-              <p:cNvPr id="5" name="TextBox 4">
-                <a:extLst>
-                  <a:ext uri="{FF2B5EF4-FFF2-40B4-BE49-F238E27FC236}">
-                    <a16:creationId xmlns:a16="http://schemas.microsoft.com/office/drawing/2014/main" id="{04104A4E-AC5A-9FC0-8EE5-4B46D788C0FD}"/>
-                  </a:ext>
-                </a:extLst>
-              </p:cNvPr>
-              <p:cNvSpPr txBox="1"/>
-              <p:nvPr/>
-            </p:nvSpPr>
-            <p:spPr>
-              <a:xfrm>
-                <a:off x="5638107" y="2971800"/>
-                <a:ext cx="297902" cy="281937"/>
-              </a:xfrm>
-              <a:prstGeom prst="rect">
-                <a:avLst/>
-              </a:prstGeom>
-              <a:noFill/>
-            </p:spPr>
-            <p:txBody>
-              <a:bodyPr wrap="none" lIns="0" tIns="0" rIns="0" bIns="0" rtlCol="0">
-                <a:spAutoFit/>
-              </a:bodyPr>
-              <a:lstStyle/>
-              <a:p>
-                <a14:m>
-                  <m:oMathPara xmlns:m="http://schemas.openxmlformats.org/officeDocument/2006/math">
-                    <m:oMathParaPr>
-                      <m:jc m:val="centerGroup"/>
-                    </m:oMathParaPr>
-                    <m:oMath xmlns:m="http://schemas.openxmlformats.org/officeDocument/2006/math">
-                      <m:sSup>
-                        <m:sSupPr>
-                          <m:ctrlPr>
-                            <a:rPr lang="en-US" b="0" i="0" smtClean="0">
-                              <a:latin typeface="Cambria Math" panose="02040503050406030204" pitchFamily="18" charset="0"/>
-                            </a:rPr>
-                          </m:ctrlPr>
-                        </m:sSupPr>
-                        <m:e>
-                          <m:acc>
-                            <m:accPr>
-                              <m:chr m:val="̃"/>
-                              <m:ctrlPr>
-                                <a:rPr lang="en-US" b="0" i="1" smtClean="0">
-                                  <a:latin typeface="Cambria Math" panose="02040503050406030204" pitchFamily="18" charset="0"/>
-                                </a:rPr>
-                              </m:ctrlPr>
-                            </m:accPr>
-                            <m:e>
-                              <m:r>
-                                <a:rPr lang="en-US" b="0" i="1" smtClean="0">
-                                  <a:latin typeface="Cambria Math" panose="02040503050406030204" pitchFamily="18" charset="0"/>
-                                </a:rPr>
-                                <m:t>𝑋</m:t>
-                              </m:r>
-                            </m:e>
-                          </m:acc>
-                        </m:e>
-                        <m:sup>
-                          <m:r>
-                            <a:rPr lang="en-US" b="0" i="0" smtClean="0">
-                              <a:latin typeface="Cambria Math" panose="02040503050406030204" pitchFamily="18" charset="0"/>
-                            </a:rPr>
-                            <m:t>∗</m:t>
-                          </m:r>
-                        </m:sup>
-                      </m:sSup>
-                    </m:oMath>
-                  </m:oMathPara>
-                </a14:m>
-                <a:endParaRPr lang="en-US" b="0" dirty="0"/>
-              </a:p>
-            </p:txBody>
-          </p:sp>
-        </mc:Choice>
-        <mc:Fallback>
-          <p:sp>
-            <p:nvSpPr>
-              <p:cNvPr id="5" name="TextBox 4">
-                <a:extLst>
-                  <a:ext uri="{FF2B5EF4-FFF2-40B4-BE49-F238E27FC236}">
-                    <a16:creationId xmlns:a16="http://schemas.microsoft.com/office/drawing/2014/main" id="{04104A4E-AC5A-9FC0-8EE5-4B46D788C0FD}"/>
-                  </a:ext>
-                </a:extLst>
-              </p:cNvPr>
-              <p:cNvSpPr txBox="1">
-                <a:spLocks noRot="1" noChangeAspect="1" noMove="1" noResize="1" noEditPoints="1" noAdjustHandles="1" noChangeArrowheads="1" noChangeShapeType="1" noTextEdit="1"/>
-              </p:cNvSpPr>
-              <p:nvPr/>
-            </p:nvSpPr>
-            <p:spPr>
-              <a:xfrm>
-                <a:off x="5638107" y="2971800"/>
-                <a:ext cx="297902" cy="281937"/>
-              </a:xfrm>
-              <a:prstGeom prst="rect">
-                <a:avLst/>
-              </a:prstGeom>
-              <a:blipFill>
-                <a:blip r:embed="rId2"/>
-                <a:stretch>
-                  <a:fillRect l="-20408" t="-23913" r="-46939" b="-6522"/>
-                </a:stretch>
-              </a:blipFill>
-            </p:spPr>
-            <p:txBody>
-              <a:bodyPr/>
-              <a:lstStyle/>
-              <a:p>
-                <a:r>
-                  <a:rPr lang="en-US">
-                    <a:noFill/>
-                  </a:rPr>
-                  <a:t> </a:t>
-                </a:r>
-              </a:p>
-            </p:txBody>
-          </p:sp>
-        </mc:Fallback>
-      </mc:AlternateContent>
-      <mc:AlternateContent xmlns:mc="http://schemas.openxmlformats.org/markup-compatibility/2006">
-        <mc:Choice xmlns:a14="http://schemas.microsoft.com/office/drawing/2010/main" Requires="a14">
-          <p:sp>
-            <p:nvSpPr>
-              <p:cNvPr id="6" name="TextBox 5">
-                <a:extLst>
-                  <a:ext uri="{FF2B5EF4-FFF2-40B4-BE49-F238E27FC236}">
-                    <a16:creationId xmlns:a16="http://schemas.microsoft.com/office/drawing/2014/main" id="{FF945670-539F-C861-3476-93B65E49C862}"/>
-                  </a:ext>
-                </a:extLst>
-              </p:cNvPr>
-              <p:cNvSpPr txBox="1"/>
-              <p:nvPr/>
-            </p:nvSpPr>
-            <p:spPr>
-              <a:xfrm>
-                <a:off x="7702435" y="2542310"/>
-                <a:ext cx="297902" cy="276999"/>
-              </a:xfrm>
-              <a:prstGeom prst="rect">
-                <a:avLst/>
-              </a:prstGeom>
-              <a:noFill/>
-            </p:spPr>
-            <p:txBody>
-              <a:bodyPr wrap="square" lIns="0" tIns="0" rIns="0" bIns="0" rtlCol="0">
-                <a:spAutoFit/>
-              </a:bodyPr>
-              <a:lstStyle/>
-              <a:p>
-                <a14:m>
-                  <m:oMathPara xmlns:m="http://schemas.openxmlformats.org/officeDocument/2006/math">
-                    <m:oMathParaPr>
-                      <m:jc m:val="centerGroup"/>
-                    </m:oMathParaPr>
-                    <m:oMath xmlns:m="http://schemas.openxmlformats.org/officeDocument/2006/math">
-                      <m:sSup>
-                        <m:sSupPr>
-                          <m:ctrlPr>
-                            <a:rPr lang="en-US" b="0" i="1" smtClean="0">
-                              <a:latin typeface="Cambria Math" panose="02040503050406030204" pitchFamily="18" charset="0"/>
-                            </a:rPr>
-                          </m:ctrlPr>
-                        </m:sSupPr>
-                        <m:e>
-                          <m:r>
-                            <a:rPr lang="en-US" b="0" i="1" smtClean="0">
-                              <a:latin typeface="Cambria Math" panose="02040503050406030204" pitchFamily="18" charset="0"/>
-                            </a:rPr>
-                            <m:t>𝑦</m:t>
-                          </m:r>
-                        </m:e>
-                        <m:sup>
-                          <m:r>
-                            <a:rPr lang="en-US" b="0" i="1" smtClean="0">
-                              <a:latin typeface="Cambria Math" panose="02040503050406030204" pitchFamily="18" charset="0"/>
-                            </a:rPr>
-                            <m:t>∗</m:t>
-                          </m:r>
-                        </m:sup>
-                      </m:sSup>
-                    </m:oMath>
-                  </m:oMathPara>
-                </a14:m>
-                <a:endParaRPr lang="en-US" b="0" dirty="0"/>
-              </a:p>
-            </p:txBody>
-          </p:sp>
-        </mc:Choice>
-        <mc:Fallback>
-          <p:sp>
-            <p:nvSpPr>
-              <p:cNvPr id="6" name="TextBox 5">
-                <a:extLst>
-                  <a:ext uri="{FF2B5EF4-FFF2-40B4-BE49-F238E27FC236}">
-                    <a16:creationId xmlns:a16="http://schemas.microsoft.com/office/drawing/2014/main" id="{FF945670-539F-C861-3476-93B65E49C862}"/>
-                  </a:ext>
-                </a:extLst>
-              </p:cNvPr>
-              <p:cNvSpPr txBox="1">
-                <a:spLocks noRot="1" noChangeAspect="1" noMove="1" noResize="1" noEditPoints="1" noAdjustHandles="1" noChangeArrowheads="1" noChangeShapeType="1" noTextEdit="1"/>
-              </p:cNvSpPr>
-              <p:nvPr/>
-            </p:nvSpPr>
-            <p:spPr>
-              <a:xfrm>
-                <a:off x="7702435" y="2542310"/>
-                <a:ext cx="297902" cy="276999"/>
-              </a:xfrm>
-              <a:prstGeom prst="rect">
-                <a:avLst/>
-              </a:prstGeom>
-              <a:blipFill>
-                <a:blip r:embed="rId3"/>
-                <a:stretch>
-                  <a:fillRect l="-18750" r="-2083" b="-26667"/>
-                </a:stretch>
-              </a:blipFill>
-            </p:spPr>
-            <p:txBody>
-              <a:bodyPr/>
-              <a:lstStyle/>
-              <a:p>
-                <a:r>
-                  <a:rPr lang="en-US">
-                    <a:noFill/>
-                  </a:rPr>
-                  <a:t> </a:t>
-                </a:r>
-              </a:p>
-            </p:txBody>
-          </p:sp>
-        </mc:Fallback>
-      </mc:AlternateContent>
-      <mc:AlternateContent xmlns:mc="http://schemas.openxmlformats.org/markup-compatibility/2006">
-        <mc:Choice xmlns:a14="http://schemas.microsoft.com/office/drawing/2010/main" Requires="a14">
-          <p:sp>
-            <p:nvSpPr>
-              <p:cNvPr id="7" name="TextBox 6">
-                <a:extLst>
-                  <a:ext uri="{FF2B5EF4-FFF2-40B4-BE49-F238E27FC236}">
-                    <a16:creationId xmlns:a16="http://schemas.microsoft.com/office/drawing/2014/main" id="{45DD6DCB-FB76-9451-61A1-007C4F7BF312}"/>
-                  </a:ext>
-                </a:extLst>
-              </p:cNvPr>
-              <p:cNvSpPr txBox="1"/>
-              <p:nvPr/>
-            </p:nvSpPr>
-            <p:spPr>
-              <a:xfrm>
-                <a:off x="5434445" y="4335087"/>
-                <a:ext cx="779764" cy="281937"/>
-              </a:xfrm>
-              <a:prstGeom prst="rect">
-                <a:avLst/>
-              </a:prstGeom>
-              <a:noFill/>
-            </p:spPr>
-            <p:txBody>
-              <a:bodyPr wrap="none" lIns="0" tIns="0" rIns="0" bIns="0" rtlCol="0">
-                <a:spAutoFit/>
-              </a:bodyPr>
-              <a:lstStyle/>
-              <a:p>
-                <a14:m>
-                  <m:oMathPara xmlns:m="http://schemas.openxmlformats.org/officeDocument/2006/math">
-                    <m:oMathParaPr>
-                      <m:jc m:val="centerGroup"/>
-                    </m:oMathParaPr>
-                    <m:oMath xmlns:m="http://schemas.openxmlformats.org/officeDocument/2006/math">
-                      <m:sSub>
-                        <m:sSubPr>
-                          <m:ctrlPr>
-                            <a:rPr lang="en-US" b="0" i="1" smtClean="0">
-                              <a:latin typeface="Cambria Math" panose="02040503050406030204" pitchFamily="18" charset="0"/>
-                            </a:rPr>
-                          </m:ctrlPr>
-                        </m:sSubPr>
-                        <m:e>
-                          <m:acc>
-                            <m:accPr>
-                              <m:chr m:val="̃"/>
-                              <m:ctrlPr>
-                                <a:rPr lang="en-US" b="0" i="1" smtClean="0">
-                                  <a:latin typeface="Cambria Math" panose="02040503050406030204" pitchFamily="18" charset="0"/>
-                                </a:rPr>
-                              </m:ctrlPr>
-                            </m:accPr>
-                            <m:e>
-                              <m:r>
-                                <a:rPr lang="en-US" b="0" i="1" smtClean="0">
-                                  <a:latin typeface="Cambria Math" panose="02040503050406030204" pitchFamily="18" charset="0"/>
-                                </a:rPr>
-                                <m:t>𝑋</m:t>
-                              </m:r>
-                            </m:e>
-                          </m:acc>
-                        </m:e>
-                        <m:sub>
-                          <m:r>
-                            <a:rPr lang="en-US" b="0" i="1" smtClean="0">
-                              <a:latin typeface="Cambria Math" panose="02040503050406030204" pitchFamily="18" charset="0"/>
-                            </a:rPr>
-                            <m:t>𝑖</m:t>
-                          </m:r>
-                        </m:sub>
-                      </m:sSub>
-                      <m:r>
-                        <a:rPr lang="en-US" b="0" i="1" smtClean="0">
-                          <a:latin typeface="Cambria Math" panose="02040503050406030204" pitchFamily="18" charset="0"/>
-                        </a:rPr>
-                        <m:t>→</m:t>
-                      </m:r>
-                      <m:sSub>
-                        <m:sSubPr>
-                          <m:ctrlPr>
-                            <a:rPr lang="en-US" b="0" i="1" smtClean="0">
-                              <a:latin typeface="Cambria Math" panose="02040503050406030204" pitchFamily="18" charset="0"/>
-                            </a:rPr>
-                          </m:ctrlPr>
-                        </m:sSubPr>
-                        <m:e>
-                          <m:r>
-                            <a:rPr lang="en-US" b="0" i="1" smtClean="0">
-                              <a:latin typeface="Cambria Math" panose="02040503050406030204" pitchFamily="18" charset="0"/>
-                            </a:rPr>
-                            <m:t>𝑦</m:t>
-                          </m:r>
-                        </m:e>
-                        <m:sub>
-                          <m:r>
-                            <a:rPr lang="en-US" b="0" i="1" smtClean="0">
-                              <a:latin typeface="Cambria Math" panose="02040503050406030204" pitchFamily="18" charset="0"/>
-                            </a:rPr>
-                            <m:t>𝑖</m:t>
-                          </m:r>
-                        </m:sub>
-                      </m:sSub>
-                    </m:oMath>
-                  </m:oMathPara>
-                </a14:m>
-                <a:endParaRPr lang="en-US" dirty="0"/>
-              </a:p>
-            </p:txBody>
-          </p:sp>
-        </mc:Choice>
-        <mc:Fallback>
-          <p:sp>
-            <p:nvSpPr>
-              <p:cNvPr id="7" name="TextBox 6">
-                <a:extLst>
-                  <a:ext uri="{FF2B5EF4-FFF2-40B4-BE49-F238E27FC236}">
-                    <a16:creationId xmlns:a16="http://schemas.microsoft.com/office/drawing/2014/main" id="{45DD6DCB-FB76-9451-61A1-007C4F7BF312}"/>
-                  </a:ext>
-                </a:extLst>
-              </p:cNvPr>
-              <p:cNvSpPr txBox="1">
-                <a:spLocks noRot="1" noChangeAspect="1" noMove="1" noResize="1" noEditPoints="1" noAdjustHandles="1" noChangeArrowheads="1" noChangeShapeType="1" noTextEdit="1"/>
-              </p:cNvSpPr>
-              <p:nvPr/>
-            </p:nvSpPr>
-            <p:spPr>
-              <a:xfrm>
-                <a:off x="5434445" y="4335087"/>
-                <a:ext cx="779764" cy="281937"/>
-              </a:xfrm>
-              <a:prstGeom prst="rect">
-                <a:avLst/>
-              </a:prstGeom>
-              <a:blipFill>
-                <a:blip r:embed="rId4"/>
-                <a:stretch>
-                  <a:fillRect l="-7031" t="-21739" r="-3125" b="-26087"/>
-                </a:stretch>
-              </a:blipFill>
-            </p:spPr>
-            <p:txBody>
-              <a:bodyPr/>
-              <a:lstStyle/>
-              <a:p>
-                <a:r>
-                  <a:rPr lang="en-US">
-                    <a:noFill/>
-                  </a:rPr>
-                  <a:t> </a:t>
-                </a:r>
-              </a:p>
-            </p:txBody>
-          </p:sp>
-        </mc:Fallback>
-      </mc:AlternateContent>
-      <mc:AlternateContent xmlns:mc="http://schemas.openxmlformats.org/markup-compatibility/2006">
-        <mc:Choice xmlns:a14="http://schemas.microsoft.com/office/drawing/2010/main" Requires="a14">
-          <p:sp>
-            <p:nvSpPr>
-              <p:cNvPr id="8" name="TextBox 7">
-                <a:extLst>
-                  <a:ext uri="{FF2B5EF4-FFF2-40B4-BE49-F238E27FC236}">
-                    <a16:creationId xmlns:a16="http://schemas.microsoft.com/office/drawing/2014/main" id="{5B4B891F-C513-A733-1E12-D9B043505158}"/>
-                  </a:ext>
-                </a:extLst>
-              </p:cNvPr>
-              <p:cNvSpPr txBox="1"/>
-              <p:nvPr/>
-            </p:nvSpPr>
-            <p:spPr>
-              <a:xfrm>
-                <a:off x="3497580" y="2788920"/>
-                <a:ext cx="292772" cy="276999"/>
-              </a:xfrm>
-              <a:prstGeom prst="rect">
-                <a:avLst/>
-              </a:prstGeom>
-              <a:noFill/>
-            </p:spPr>
-            <p:txBody>
-              <a:bodyPr wrap="none" lIns="0" tIns="0" rIns="0" bIns="0" rtlCol="0">
-                <a:spAutoFit/>
-              </a:bodyPr>
-              <a:lstStyle/>
-              <a:p>
-                <a14:m>
-                  <m:oMathPara xmlns:m="http://schemas.openxmlformats.org/officeDocument/2006/math">
-                    <m:oMathParaPr>
-                      <m:jc m:val="centerGroup"/>
-                    </m:oMathParaPr>
-                    <m:oMath xmlns:m="http://schemas.openxmlformats.org/officeDocument/2006/math">
-                      <m:sSub>
-                        <m:sSubPr>
-                          <m:ctrlPr>
-                            <a:rPr lang="en-US" b="0" i="1" smtClean="0">
-                              <a:latin typeface="Cambria Math" panose="02040503050406030204" pitchFamily="18" charset="0"/>
-                            </a:rPr>
-                          </m:ctrlPr>
-                        </m:sSubPr>
-                        <m:e>
-                          <m:r>
-                            <a:rPr lang="en-US" b="0" i="1" smtClean="0">
-                              <a:latin typeface="Cambria Math" panose="02040503050406030204" pitchFamily="18" charset="0"/>
-                            </a:rPr>
-                            <m:t>𝑋</m:t>
-                          </m:r>
-                        </m:e>
-                        <m:sub>
-                          <m:r>
-                            <a:rPr lang="en-US" b="0" i="1" smtClean="0">
-                              <a:latin typeface="Cambria Math" panose="02040503050406030204" pitchFamily="18" charset="0"/>
-                            </a:rPr>
-                            <m:t>2</m:t>
-                          </m:r>
-                        </m:sub>
-                      </m:sSub>
-                    </m:oMath>
-                  </m:oMathPara>
-                </a14:m>
-                <a:endParaRPr lang="en-US" dirty="0"/>
-              </a:p>
-            </p:txBody>
-          </p:sp>
-        </mc:Choice>
-        <mc:Fallback>
-          <p:sp>
-            <p:nvSpPr>
-              <p:cNvPr id="8" name="TextBox 7">
-                <a:extLst>
-                  <a:ext uri="{FF2B5EF4-FFF2-40B4-BE49-F238E27FC236}">
-                    <a16:creationId xmlns:a16="http://schemas.microsoft.com/office/drawing/2014/main" id="{5B4B891F-C513-A733-1E12-D9B043505158}"/>
-                  </a:ext>
-                </a:extLst>
-              </p:cNvPr>
-              <p:cNvSpPr txBox="1">
-                <a:spLocks noRot="1" noChangeAspect="1" noMove="1" noResize="1" noEditPoints="1" noAdjustHandles="1" noChangeArrowheads="1" noChangeShapeType="1" noTextEdit="1"/>
-              </p:cNvSpPr>
-              <p:nvPr/>
-            </p:nvSpPr>
-            <p:spPr>
-              <a:xfrm>
-                <a:off x="3497580" y="2788920"/>
-                <a:ext cx="292772" cy="276999"/>
-              </a:xfrm>
-              <a:prstGeom prst="rect">
-                <a:avLst/>
-              </a:prstGeom>
-              <a:blipFill>
-                <a:blip r:embed="rId5"/>
-                <a:stretch>
-                  <a:fillRect l="-20833" r="-8333" b="-15556"/>
-                </a:stretch>
-              </a:blipFill>
-            </p:spPr>
-            <p:txBody>
-              <a:bodyPr/>
-              <a:lstStyle/>
-              <a:p>
-                <a:r>
-                  <a:rPr lang="en-US">
-                    <a:noFill/>
-                  </a:rPr>
-                  <a:t> </a:t>
-                </a:r>
-              </a:p>
-            </p:txBody>
-          </p:sp>
-        </mc:Fallback>
-      </mc:AlternateContent>
-      <mc:AlternateContent xmlns:mc="http://schemas.openxmlformats.org/markup-compatibility/2006">
-        <mc:Choice xmlns:a14="http://schemas.microsoft.com/office/drawing/2010/main" Requires="a14">
-          <p:sp>
-            <p:nvSpPr>
-              <p:cNvPr id="9" name="TextBox 8">
-                <a:extLst>
-                  <a:ext uri="{FF2B5EF4-FFF2-40B4-BE49-F238E27FC236}">
-                    <a16:creationId xmlns:a16="http://schemas.microsoft.com/office/drawing/2014/main" id="{65D8183B-F7EA-F9F8-89C1-7C4924D2B8DD}"/>
-                  </a:ext>
-                </a:extLst>
-              </p:cNvPr>
-              <p:cNvSpPr txBox="1"/>
-              <p:nvPr/>
-            </p:nvSpPr>
-            <p:spPr>
-              <a:xfrm>
-                <a:off x="2677391" y="2583873"/>
-                <a:ext cx="287451" cy="276999"/>
-              </a:xfrm>
-              <a:prstGeom prst="rect">
-                <a:avLst/>
-              </a:prstGeom>
-              <a:noFill/>
-            </p:spPr>
-            <p:txBody>
-              <a:bodyPr wrap="none" lIns="0" tIns="0" rIns="0" bIns="0" rtlCol="0">
-                <a:spAutoFit/>
-              </a:bodyPr>
-              <a:lstStyle/>
-              <a:p>
-                <a14:m>
-                  <m:oMathPara xmlns:m="http://schemas.openxmlformats.org/officeDocument/2006/math">
-                    <m:oMathParaPr>
-                      <m:jc m:val="centerGroup"/>
-                    </m:oMathParaPr>
-                    <m:oMath xmlns:m="http://schemas.openxmlformats.org/officeDocument/2006/math">
-                      <m:sSub>
-                        <m:sSubPr>
-                          <m:ctrlPr>
-                            <a:rPr lang="en-US" b="0" i="1" smtClean="0">
-                              <a:latin typeface="Cambria Math" panose="02040503050406030204" pitchFamily="18" charset="0"/>
-                            </a:rPr>
-                          </m:ctrlPr>
-                        </m:sSubPr>
-                        <m:e>
-                          <m:r>
-                            <a:rPr lang="en-US" b="0" i="1" smtClean="0">
-                              <a:latin typeface="Cambria Math" panose="02040503050406030204" pitchFamily="18" charset="0"/>
-                            </a:rPr>
-                            <m:t>𝑋</m:t>
-                          </m:r>
-                        </m:e>
-                        <m:sub>
-                          <m:r>
-                            <a:rPr lang="en-US" b="0" i="1" smtClean="0">
-                              <a:latin typeface="Cambria Math" panose="02040503050406030204" pitchFamily="18" charset="0"/>
-                            </a:rPr>
-                            <m:t>1</m:t>
-                          </m:r>
-                        </m:sub>
-                      </m:sSub>
-                    </m:oMath>
-                  </m:oMathPara>
-                </a14:m>
-                <a:endParaRPr lang="en-US" dirty="0"/>
-              </a:p>
-            </p:txBody>
-          </p:sp>
-        </mc:Choice>
-        <mc:Fallback>
-          <p:sp>
-            <p:nvSpPr>
-              <p:cNvPr id="9" name="TextBox 8">
-                <a:extLst>
-                  <a:ext uri="{FF2B5EF4-FFF2-40B4-BE49-F238E27FC236}">
-                    <a16:creationId xmlns:a16="http://schemas.microsoft.com/office/drawing/2014/main" id="{65D8183B-F7EA-F9F8-89C1-7C4924D2B8DD}"/>
-                  </a:ext>
-                </a:extLst>
-              </p:cNvPr>
-              <p:cNvSpPr txBox="1">
-                <a:spLocks noRot="1" noChangeAspect="1" noMove="1" noResize="1" noEditPoints="1" noAdjustHandles="1" noChangeArrowheads="1" noChangeShapeType="1" noTextEdit="1"/>
-              </p:cNvSpPr>
-              <p:nvPr/>
-            </p:nvSpPr>
-            <p:spPr>
-              <a:xfrm>
-                <a:off x="2677391" y="2583873"/>
-                <a:ext cx="287451" cy="276999"/>
-              </a:xfrm>
-              <a:prstGeom prst="rect">
-                <a:avLst/>
-              </a:prstGeom>
-              <a:blipFill>
-                <a:blip r:embed="rId6"/>
-                <a:stretch>
-                  <a:fillRect l="-19149" r="-10638" b="-15556"/>
-                </a:stretch>
-              </a:blipFill>
-            </p:spPr>
-            <p:txBody>
-              <a:bodyPr/>
-              <a:lstStyle/>
-              <a:p>
-                <a:r>
-                  <a:rPr lang="en-US">
-                    <a:noFill/>
-                  </a:rPr>
-                  <a:t> </a:t>
-                </a:r>
-              </a:p>
-            </p:txBody>
-          </p:sp>
-        </mc:Fallback>
-      </mc:AlternateContent>
-      <mc:AlternateContent xmlns:mc="http://schemas.openxmlformats.org/markup-compatibility/2006">
-        <mc:Choice xmlns:a14="http://schemas.microsoft.com/office/drawing/2010/main" Requires="a14">
-          <p:sp>
-            <p:nvSpPr>
-              <p:cNvPr id="10" name="TextBox 9">
-                <a:extLst>
-                  <a:ext uri="{FF2B5EF4-FFF2-40B4-BE49-F238E27FC236}">
-                    <a16:creationId xmlns:a16="http://schemas.microsoft.com/office/drawing/2014/main" id="{451AD6D5-55FA-A5A3-3A2D-17D802F9C4D2}"/>
-                  </a:ext>
-                </a:extLst>
-              </p:cNvPr>
-              <p:cNvSpPr txBox="1"/>
-              <p:nvPr/>
-            </p:nvSpPr>
-            <p:spPr>
-              <a:xfrm>
-                <a:off x="3004358" y="4024746"/>
-                <a:ext cx="287451" cy="276999"/>
-              </a:xfrm>
-              <a:prstGeom prst="rect">
-                <a:avLst/>
-              </a:prstGeom>
-              <a:noFill/>
-            </p:spPr>
-            <p:txBody>
-              <a:bodyPr wrap="none" lIns="0" tIns="0" rIns="0" bIns="0" rtlCol="0">
-                <a:spAutoFit/>
-              </a:bodyPr>
-              <a:lstStyle/>
-              <a:p>
-                <a14:m>
-                  <m:oMathPara xmlns:m="http://schemas.openxmlformats.org/officeDocument/2006/math">
-                    <m:oMathParaPr>
-                      <m:jc m:val="centerGroup"/>
-                    </m:oMathParaPr>
-                    <m:oMath xmlns:m="http://schemas.openxmlformats.org/officeDocument/2006/math">
-                      <m:sSub>
-                        <m:sSubPr>
-                          <m:ctrlPr>
-                            <a:rPr lang="en-US" b="0" i="1" smtClean="0">
-                              <a:latin typeface="Cambria Math" panose="02040503050406030204" pitchFamily="18" charset="0"/>
-                            </a:rPr>
-                          </m:ctrlPr>
-                        </m:sSubPr>
-                        <m:e>
-                          <m:r>
-                            <a:rPr lang="en-US" b="0" i="1" smtClean="0">
-                              <a:latin typeface="Cambria Math" panose="02040503050406030204" pitchFamily="18" charset="0"/>
-                            </a:rPr>
-                            <m:t>𝑋</m:t>
-                          </m:r>
-                        </m:e>
-                        <m:sub>
-                          <m:r>
-                            <a:rPr lang="en-US" b="0" i="1" smtClean="0">
-                              <a:latin typeface="Cambria Math" panose="02040503050406030204" pitchFamily="18" charset="0"/>
-                            </a:rPr>
-                            <m:t>1</m:t>
-                          </m:r>
-                        </m:sub>
-                      </m:sSub>
-                    </m:oMath>
-                  </m:oMathPara>
-                </a14:m>
-                <a:endParaRPr lang="en-US" dirty="0"/>
-              </a:p>
-            </p:txBody>
-          </p:sp>
-        </mc:Choice>
-        <mc:Fallback>
-          <p:sp>
-            <p:nvSpPr>
-              <p:cNvPr id="10" name="TextBox 9">
-                <a:extLst>
-                  <a:ext uri="{FF2B5EF4-FFF2-40B4-BE49-F238E27FC236}">
-                    <a16:creationId xmlns:a16="http://schemas.microsoft.com/office/drawing/2014/main" id="{451AD6D5-55FA-A5A3-3A2D-17D802F9C4D2}"/>
-                  </a:ext>
-                </a:extLst>
-              </p:cNvPr>
-              <p:cNvSpPr txBox="1">
-                <a:spLocks noRot="1" noChangeAspect="1" noMove="1" noResize="1" noEditPoints="1" noAdjustHandles="1" noChangeArrowheads="1" noChangeShapeType="1" noTextEdit="1"/>
-              </p:cNvSpPr>
-              <p:nvPr/>
-            </p:nvSpPr>
-            <p:spPr>
-              <a:xfrm>
-                <a:off x="3004358" y="4024746"/>
-                <a:ext cx="287451" cy="276999"/>
-              </a:xfrm>
-              <a:prstGeom prst="rect">
-                <a:avLst/>
-              </a:prstGeom>
-              <a:blipFill>
-                <a:blip r:embed="rId7"/>
-                <a:stretch>
-                  <a:fillRect l="-21277" r="-8511" b="-15217"/>
-                </a:stretch>
-              </a:blipFill>
-            </p:spPr>
-            <p:txBody>
-              <a:bodyPr/>
-              <a:lstStyle/>
-              <a:p>
-                <a:r>
-                  <a:rPr lang="en-US">
-                    <a:noFill/>
-                  </a:rPr>
-                  <a:t> </a:t>
-                </a:r>
-              </a:p>
-            </p:txBody>
-          </p:sp>
-        </mc:Fallback>
-      </mc:AlternateContent>
-    </p:spTree>
-    <p:extLst>
-      <p:ext uri="{BB962C8B-B14F-4D97-AF65-F5344CB8AC3E}">
-        <p14:creationId xmlns:p14="http://schemas.microsoft.com/office/powerpoint/2010/main" val="4216720913"/>
-      </p:ext>
-    </p:extLst>
-  </p:cSld>
-  <p:clrMapOvr>
-    <a:masterClrMapping/>
-  </p:clrMapOvr>
 </p:sld>
 </file>
 
@@ -20378,10 +21297,10 @@
                               </m:sSubPr>
                               <m:e>
                                 <m:r>
-                                  <a:rPr lang="en-US" b="1" i="1" smtClean="0">
+                                  <a:rPr lang="en-US" b="0" i="1" smtClean="0">
                                     <a:latin typeface="Cambria Math" panose="02040503050406030204" pitchFamily="18" charset="0"/>
                                   </a:rPr>
-                                  <m:t>𝑿</m:t>
+                                  <m:t>𝑦</m:t>
                                 </m:r>
                               </m:e>
                               <m:sub>
@@ -21302,10 +22221,10 @@
                               </m:sSubPr>
                               <m:e>
                                 <m:r>
-                                  <a:rPr lang="en-US" b="1" i="1" smtClean="0">
+                                  <a:rPr lang="en-US" b="0" i="1" smtClean="0">
                                     <a:latin typeface="Cambria Math" panose="02040503050406030204" pitchFamily="18" charset="0"/>
                                   </a:rPr>
-                                  <m:t>𝑿</m:t>
+                                  <m:t>𝑦</m:t>
                                 </m:r>
                               </m:e>
                               <m:sub>
